--- a/presentation/MediMatch_Conference_Deck.pptx
+++ b/presentation/MediMatch_Conference_Deck.pptx
@@ -16,6 +16,7 @@
     <p:sldId id="264" r:id="rId15"/>
     <p:sldId id="265" r:id="rId16"/>
     <p:sldId id="266" r:id="rId17"/>
+    <p:sldId id="267" r:id="rId18"/>
   </p:sldIdLst>
   <p:sldSz cx="12191695" cy="6858000" type="screen4x3"/>
   <p:notesSz cx="6858000" cy="9144000"/>
@@ -3558,7 +3559,7 @@
                 </a:solidFill>
                 <a:latin typeface="Noto Sans"/>
               </a:rPr>
-              <a:t>09  /  ARCHITECTURE AND SAFEGUARDS</a:t>
+              <a:t>09  /  LIVE COORDINATION INTELLIGENCE</a:t>
             </a:r>
           </a:p>
         </p:txBody>
@@ -3571,8 +3572,8 @@
         </p:nvSpPr>
         <p:spPr>
           <a:xfrm>
-            <a:off x="502920" y="603504"/>
-            <a:ext cx="11155680" cy="960120"/>
+            <a:off x="502920" y="612648"/>
+            <a:ext cx="11155680" cy="594360"/>
           </a:xfrm>
           <a:prstGeom prst="rect">
             <a:avLst/>
@@ -3585,827 +3586,58 @@
           </a:bodyPr>
           <a:lstStyle/>
           <a:p>
-            <a:pPr algn="ctr">
+            <a:pPr algn="l">
               <a:lnSpc>
                 <a:spcPct val="100000"/>
               </a:lnSpc>
             </a:pPr>
             <a:r>
-              <a:rPr sz="2700" b="1">
+              <a:rPr sz="3000" b="1">
                 <a:solidFill>
                   <a:srgbClr val="F8F3E7"/>
                 </a:solidFill>
                 <a:latin typeface="Noto Sans"/>
               </a:rPr>
-              <a:t>A production-minded spatial stack
-with a human decision boundary</a:t>
-            </a:r>
-          </a:p>
-        </p:txBody>
-      </p:sp>
-      <p:sp>
-        <p:nvSpPr>
-          <p:cNvPr id="5" name="Rounded Rectangle 4"/>
+              <a:t>Coordination intelligence, grounded in live state</a:t>
+            </a:r>
+          </a:p>
+        </p:txBody>
+      </p:sp>
+      <p:pic>
+        <p:nvPicPr>
+          <p:cNvPr id="5" name="Picture 4" descr="copilot.png"/>
+          <p:cNvPicPr>
+            <a:picLocks noChangeAspect="1"/>
+          </p:cNvPicPr>
+          <p:nvPr/>
+        </p:nvPicPr>
+        <p:blipFill>
+          <a:blip r:embed="rId2"/>
+          <a:srcRect l="7295" r="7295"/>
+          <a:stretch>
+            <a:fillRect/>
+          </a:stretch>
+        </p:blipFill>
+        <p:spPr>
+          <a:xfrm>
+            <a:off x="4663440" y="1307592"/>
+            <a:ext cx="7022592" cy="5138928"/>
+          </a:xfrm>
+          <a:prstGeom prst="rect">
+            <a:avLst/>
+          </a:prstGeom>
+        </p:spPr>
+      </p:pic>
+      <p:sp>
+        <p:nvSpPr>
+          <p:cNvPr id="6" name="Rounded Rectangle 5"/>
           <p:cNvSpPr/>
           <p:nvPr/>
         </p:nvSpPr>
         <p:spPr>
           <a:xfrm>
-            <a:off x="548640" y="1828800"/>
-            <a:ext cx="2514600" cy="1965960"/>
-          </a:xfrm>
-          <a:prstGeom prst="roundRect">
-            <a:avLst/>
-          </a:prstGeom>
-          <a:solidFill>
-            <a:srgbClr val="121D31"/>
-          </a:solidFill>
-          <a:ln>
-            <a:solidFill>
-              <a:srgbClr val="529BFF"/>
-            </a:solidFill>
-          </a:ln>
-        </p:spPr>
-        <p:style>
-          <a:lnRef idx="1">
-            <a:schemeClr val="accent1"/>
-          </a:lnRef>
-          <a:fillRef idx="3">
-            <a:schemeClr val="accent1"/>
-          </a:fillRef>
-          <a:effectRef idx="2">
-            <a:schemeClr val="accent1"/>
-          </a:effectRef>
-          <a:fontRef idx="minor">
-            <a:schemeClr val="lt1"/>
-          </a:fontRef>
-        </p:style>
-        <p:txBody>
-          <a:bodyPr rtlCol="0" anchor="ctr"/>
-          <a:lstStyle/>
-          <a:p>
-            <a:pPr algn="ctr"/>
-          </a:p>
-        </p:txBody>
-      </p:sp>
-      <p:sp>
-        <p:nvSpPr>
-          <p:cNvPr id="6" name="Rectangle 5"/>
-          <p:cNvSpPr/>
-          <p:nvPr/>
-        </p:nvSpPr>
-        <p:spPr>
-          <a:xfrm>
-            <a:off x="548640" y="1828800"/>
-            <a:ext cx="2514600" cy="73152"/>
-          </a:xfrm>
-          <a:prstGeom prst="rect">
-            <a:avLst/>
-          </a:prstGeom>
-          <a:solidFill>
-            <a:srgbClr val="529BFF"/>
-          </a:solidFill>
-          <a:ln>
-            <a:solidFill>
-              <a:srgbClr val="529BFF"/>
-            </a:solidFill>
-          </a:ln>
-        </p:spPr>
-        <p:style>
-          <a:lnRef idx="1">
-            <a:schemeClr val="accent1"/>
-          </a:lnRef>
-          <a:fillRef idx="3">
-            <a:schemeClr val="accent1"/>
-          </a:fillRef>
-          <a:effectRef idx="2">
-            <a:schemeClr val="accent1"/>
-          </a:effectRef>
-          <a:fontRef idx="minor">
-            <a:schemeClr val="lt1"/>
-          </a:fontRef>
-        </p:style>
-        <p:txBody>
-          <a:bodyPr rtlCol="0" anchor="ctr"/>
-          <a:lstStyle/>
-          <a:p>
-            <a:pPr algn="ctr"/>
-          </a:p>
-        </p:txBody>
-      </p:sp>
-      <p:sp>
-        <p:nvSpPr>
-          <p:cNvPr id="7" name="TextBox 6"/>
-          <p:cNvSpPr txBox="1"/>
-          <p:nvPr/>
-        </p:nvSpPr>
-        <p:spPr>
-          <a:xfrm>
-            <a:off x="749808" y="2176272"/>
-            <a:ext cx="2103120" cy="310896"/>
-          </a:xfrm>
-          <a:prstGeom prst="rect">
-            <a:avLst/>
-          </a:prstGeom>
-          <a:noFill/>
-        </p:spPr>
-        <p:txBody>
-          <a:bodyPr wrap="square" lIns="0" rIns="0" tIns="0" bIns="0" anchor="t">
-            <a:spAutoFit/>
-          </a:bodyPr>
-          <a:lstStyle/>
-          <a:p>
-            <a:pPr algn="ctr">
-              <a:lnSpc>
-                <a:spcPct val="100000"/>
-              </a:lnSpc>
-            </a:pPr>
-            <a:r>
-              <a:rPr sz="1700" b="1">
-                <a:solidFill>
-                  <a:srgbClr val="F8F3E7"/>
-                </a:solidFill>
-                <a:latin typeface="Noto Sans"/>
-              </a:rPr>
-              <a:t>Experience</a:t>
-            </a:r>
-          </a:p>
-        </p:txBody>
-      </p:sp>
-      <p:sp>
-        <p:nvSpPr>
-          <p:cNvPr id="8" name="TextBox 7"/>
-          <p:cNvSpPr txBox="1"/>
-          <p:nvPr/>
-        </p:nvSpPr>
-        <p:spPr>
-          <a:xfrm>
-            <a:off x="749808" y="2724912"/>
-            <a:ext cx="2103120" cy="594360"/>
-          </a:xfrm>
-          <a:prstGeom prst="rect">
-            <a:avLst/>
-          </a:prstGeom>
-          <a:noFill/>
-        </p:spPr>
-        <p:txBody>
-          <a:bodyPr wrap="square" lIns="0" rIns="0" tIns="0" bIns="0" anchor="t">
-            <a:spAutoFit/>
-          </a:bodyPr>
-          <a:lstStyle/>
-          <a:p>
-            <a:pPr algn="ctr">
-              <a:lnSpc>
-                <a:spcPct val="100000"/>
-              </a:lnSpc>
-            </a:pPr>
-            <a:r>
-              <a:rPr sz="1200" b="0">
-                <a:solidFill>
-                  <a:srgbClr val="AEBACC"/>
-                </a:solidFill>
-                <a:latin typeface="Noto Sans"/>
-              </a:rPr>
-              <a:t>React · TypeScript
-MapLibre · three.js</a:t>
-            </a:r>
-          </a:p>
-        </p:txBody>
-      </p:sp>
-      <p:sp>
-        <p:nvSpPr>
-          <p:cNvPr id="9" name="TextBox 8"/>
-          <p:cNvSpPr txBox="1"/>
-          <p:nvPr/>
-        </p:nvSpPr>
-        <p:spPr>
-          <a:xfrm>
-            <a:off x="3099816" y="2514600"/>
-            <a:ext cx="274320" cy="457200"/>
-          </a:xfrm>
-          <a:prstGeom prst="rect">
-            <a:avLst/>
-          </a:prstGeom>
-          <a:noFill/>
-        </p:spPr>
-        <p:txBody>
-          <a:bodyPr wrap="square" lIns="0" rIns="0" tIns="0" bIns="0" anchor="t">
-            <a:spAutoFit/>
-          </a:bodyPr>
-          <a:lstStyle/>
-          <a:p>
-            <a:pPr algn="ctr">
-              <a:lnSpc>
-                <a:spcPct val="100000"/>
-              </a:lnSpc>
-            </a:pPr>
-            <a:r>
-              <a:rPr sz="2200" b="1">
-                <a:solidFill>
-                  <a:srgbClr val="F6BE4C"/>
-                </a:solidFill>
-                <a:latin typeface="Noto Sans"/>
-              </a:rPr>
-              <a:t>→</a:t>
-            </a:r>
-          </a:p>
-        </p:txBody>
-      </p:sp>
-      <p:sp>
-        <p:nvSpPr>
-          <p:cNvPr id="10" name="Rounded Rectangle 9"/>
-          <p:cNvSpPr/>
-          <p:nvPr/>
-        </p:nvSpPr>
-        <p:spPr>
-          <a:xfrm>
-            <a:off x="3401568" y="1828800"/>
-            <a:ext cx="2514600" cy="1965960"/>
-          </a:xfrm>
-          <a:prstGeom prst="roundRect">
-            <a:avLst/>
-          </a:prstGeom>
-          <a:solidFill>
-            <a:srgbClr val="121D31"/>
-          </a:solidFill>
-          <a:ln>
-            <a:solidFill>
-              <a:srgbClr val="FF7744"/>
-            </a:solidFill>
-          </a:ln>
-        </p:spPr>
-        <p:style>
-          <a:lnRef idx="1">
-            <a:schemeClr val="accent1"/>
-          </a:lnRef>
-          <a:fillRef idx="3">
-            <a:schemeClr val="accent1"/>
-          </a:fillRef>
-          <a:effectRef idx="2">
-            <a:schemeClr val="accent1"/>
-          </a:effectRef>
-          <a:fontRef idx="minor">
-            <a:schemeClr val="lt1"/>
-          </a:fontRef>
-        </p:style>
-        <p:txBody>
-          <a:bodyPr rtlCol="0" anchor="ctr"/>
-          <a:lstStyle/>
-          <a:p>
-            <a:pPr algn="ctr"/>
-          </a:p>
-        </p:txBody>
-      </p:sp>
-      <p:sp>
-        <p:nvSpPr>
-          <p:cNvPr id="11" name="Rectangle 10"/>
-          <p:cNvSpPr/>
-          <p:nvPr/>
-        </p:nvSpPr>
-        <p:spPr>
-          <a:xfrm>
-            <a:off x="3401568" y="1828800"/>
-            <a:ext cx="2514600" cy="73152"/>
-          </a:xfrm>
-          <a:prstGeom prst="rect">
-            <a:avLst/>
-          </a:prstGeom>
-          <a:solidFill>
-            <a:srgbClr val="FF7744"/>
-          </a:solidFill>
-          <a:ln>
-            <a:solidFill>
-              <a:srgbClr val="FF7744"/>
-            </a:solidFill>
-          </a:ln>
-        </p:spPr>
-        <p:style>
-          <a:lnRef idx="1">
-            <a:schemeClr val="accent1"/>
-          </a:lnRef>
-          <a:fillRef idx="3">
-            <a:schemeClr val="accent1"/>
-          </a:fillRef>
-          <a:effectRef idx="2">
-            <a:schemeClr val="accent1"/>
-          </a:effectRef>
-          <a:fontRef idx="minor">
-            <a:schemeClr val="lt1"/>
-          </a:fontRef>
-        </p:style>
-        <p:txBody>
-          <a:bodyPr rtlCol="0" anchor="ctr"/>
-          <a:lstStyle/>
-          <a:p>
-            <a:pPr algn="ctr"/>
-          </a:p>
-        </p:txBody>
-      </p:sp>
-      <p:sp>
-        <p:nvSpPr>
-          <p:cNvPr id="12" name="TextBox 11"/>
-          <p:cNvSpPr txBox="1"/>
-          <p:nvPr/>
-        </p:nvSpPr>
-        <p:spPr>
-          <a:xfrm>
-            <a:off x="3602736" y="2176272"/>
-            <a:ext cx="2103120" cy="310896"/>
-          </a:xfrm>
-          <a:prstGeom prst="rect">
-            <a:avLst/>
-          </a:prstGeom>
-          <a:noFill/>
-        </p:spPr>
-        <p:txBody>
-          <a:bodyPr wrap="square" lIns="0" rIns="0" tIns="0" bIns="0" anchor="t">
-            <a:spAutoFit/>
-          </a:bodyPr>
-          <a:lstStyle/>
-          <a:p>
-            <a:pPr algn="ctr">
-              <a:lnSpc>
-                <a:spcPct val="100000"/>
-              </a:lnSpc>
-            </a:pPr>
-            <a:r>
-              <a:rPr sz="1700" b="1">
-                <a:solidFill>
-                  <a:srgbClr val="F8F3E7"/>
-                </a:solidFill>
-                <a:latin typeface="Noto Sans"/>
-              </a:rPr>
-              <a:t>Coordination API</a:t>
-            </a:r>
-          </a:p>
-        </p:txBody>
-      </p:sp>
-      <p:sp>
-        <p:nvSpPr>
-          <p:cNvPr id="13" name="TextBox 12"/>
-          <p:cNvSpPr txBox="1"/>
-          <p:nvPr/>
-        </p:nvSpPr>
-        <p:spPr>
-          <a:xfrm>
-            <a:off x="3602736" y="2724912"/>
-            <a:ext cx="2103120" cy="594360"/>
-          </a:xfrm>
-          <a:prstGeom prst="rect">
-            <a:avLst/>
-          </a:prstGeom>
-          <a:noFill/>
-        </p:spPr>
-        <p:txBody>
-          <a:bodyPr wrap="square" lIns="0" rIns="0" tIns="0" bIns="0" anchor="t">
-            <a:spAutoFit/>
-          </a:bodyPr>
-          <a:lstStyle/>
-          <a:p>
-            <a:pPr algn="ctr">
-              <a:lnSpc>
-                <a:spcPct val="100000"/>
-              </a:lnSpc>
-            </a:pPr>
-            <a:r>
-              <a:rPr sz="1200" b="0">
-                <a:solidFill>
-                  <a:srgbClr val="AEBACC"/>
-                </a:solidFill>
-                <a:latin typeface="Noto Sans"/>
-              </a:rPr>
-              <a:t>Node.js · Express
-matching · auth · messages</a:t>
-            </a:r>
-          </a:p>
-        </p:txBody>
-      </p:sp>
-      <p:sp>
-        <p:nvSpPr>
-          <p:cNvPr id="14" name="TextBox 13"/>
-          <p:cNvSpPr txBox="1"/>
-          <p:nvPr/>
-        </p:nvSpPr>
-        <p:spPr>
-          <a:xfrm>
-            <a:off x="5952744" y="2514600"/>
-            <a:ext cx="274320" cy="457200"/>
-          </a:xfrm>
-          <a:prstGeom prst="rect">
-            <a:avLst/>
-          </a:prstGeom>
-          <a:noFill/>
-        </p:spPr>
-        <p:txBody>
-          <a:bodyPr wrap="square" lIns="0" rIns="0" tIns="0" bIns="0" anchor="t">
-            <a:spAutoFit/>
-          </a:bodyPr>
-          <a:lstStyle/>
-          <a:p>
-            <a:pPr algn="ctr">
-              <a:lnSpc>
-                <a:spcPct val="100000"/>
-              </a:lnSpc>
-            </a:pPr>
-            <a:r>
-              <a:rPr sz="2200" b="1">
-                <a:solidFill>
-                  <a:srgbClr val="F6BE4C"/>
-                </a:solidFill>
-                <a:latin typeface="Noto Sans"/>
-              </a:rPr>
-              <a:t>→</a:t>
-            </a:r>
-          </a:p>
-        </p:txBody>
-      </p:sp>
-      <p:sp>
-        <p:nvSpPr>
-          <p:cNvPr id="15" name="Rounded Rectangle 14"/>
-          <p:cNvSpPr/>
-          <p:nvPr/>
-        </p:nvSpPr>
-        <p:spPr>
-          <a:xfrm>
-            <a:off x="6254496" y="1828800"/>
-            <a:ext cx="2514600" cy="1965960"/>
-          </a:xfrm>
-          <a:prstGeom prst="roundRect">
-            <a:avLst/>
-          </a:prstGeom>
-          <a:solidFill>
-            <a:srgbClr val="121D31"/>
-          </a:solidFill>
-          <a:ln>
-            <a:solidFill>
-              <a:srgbClr val="43D5AE"/>
-            </a:solidFill>
-          </a:ln>
-        </p:spPr>
-        <p:style>
-          <a:lnRef idx="1">
-            <a:schemeClr val="accent1"/>
-          </a:lnRef>
-          <a:fillRef idx="3">
-            <a:schemeClr val="accent1"/>
-          </a:fillRef>
-          <a:effectRef idx="2">
-            <a:schemeClr val="accent1"/>
-          </a:effectRef>
-          <a:fontRef idx="minor">
-            <a:schemeClr val="lt1"/>
-          </a:fontRef>
-        </p:style>
-        <p:txBody>
-          <a:bodyPr rtlCol="0" anchor="ctr"/>
-          <a:lstStyle/>
-          <a:p>
-            <a:pPr algn="ctr"/>
-          </a:p>
-        </p:txBody>
-      </p:sp>
-      <p:sp>
-        <p:nvSpPr>
-          <p:cNvPr id="16" name="Rectangle 15"/>
-          <p:cNvSpPr/>
-          <p:nvPr/>
-        </p:nvSpPr>
-        <p:spPr>
-          <a:xfrm>
-            <a:off x="6254496" y="1828800"/>
-            <a:ext cx="2514600" cy="73152"/>
-          </a:xfrm>
-          <a:prstGeom prst="rect">
-            <a:avLst/>
-          </a:prstGeom>
-          <a:solidFill>
-            <a:srgbClr val="43D5AE"/>
-          </a:solidFill>
-          <a:ln>
-            <a:solidFill>
-              <a:srgbClr val="43D5AE"/>
-            </a:solidFill>
-          </a:ln>
-        </p:spPr>
-        <p:style>
-          <a:lnRef idx="1">
-            <a:schemeClr val="accent1"/>
-          </a:lnRef>
-          <a:fillRef idx="3">
-            <a:schemeClr val="accent1"/>
-          </a:fillRef>
-          <a:effectRef idx="2">
-            <a:schemeClr val="accent1"/>
-          </a:effectRef>
-          <a:fontRef idx="minor">
-            <a:schemeClr val="lt1"/>
-          </a:fontRef>
-        </p:style>
-        <p:txBody>
-          <a:bodyPr rtlCol="0" anchor="ctr"/>
-          <a:lstStyle/>
-          <a:p>
-            <a:pPr algn="ctr"/>
-          </a:p>
-        </p:txBody>
-      </p:sp>
-      <p:sp>
-        <p:nvSpPr>
-          <p:cNvPr id="17" name="TextBox 16"/>
-          <p:cNvSpPr txBox="1"/>
-          <p:nvPr/>
-        </p:nvSpPr>
-        <p:spPr>
-          <a:xfrm>
-            <a:off x="6455664" y="2176272"/>
-            <a:ext cx="2103120" cy="310896"/>
-          </a:xfrm>
-          <a:prstGeom prst="rect">
-            <a:avLst/>
-          </a:prstGeom>
-          <a:noFill/>
-        </p:spPr>
-        <p:txBody>
-          <a:bodyPr wrap="square" lIns="0" rIns="0" tIns="0" bIns="0" anchor="t">
-            <a:spAutoFit/>
-          </a:bodyPr>
-          <a:lstStyle/>
-          <a:p>
-            <a:pPr algn="ctr">
-              <a:lnSpc>
-                <a:spcPct val="100000"/>
-              </a:lnSpc>
-            </a:pPr>
-            <a:r>
-              <a:rPr sz="1700" b="1">
-                <a:solidFill>
-                  <a:srgbClr val="F8F3E7"/>
-                </a:solidFill>
-                <a:latin typeface="Noto Sans"/>
-              </a:rPr>
-              <a:t>Spatial + routing</a:t>
-            </a:r>
-          </a:p>
-        </p:txBody>
-      </p:sp>
-      <p:sp>
-        <p:nvSpPr>
-          <p:cNvPr id="18" name="TextBox 17"/>
-          <p:cNvSpPr txBox="1"/>
-          <p:nvPr/>
-        </p:nvSpPr>
-        <p:spPr>
-          <a:xfrm>
-            <a:off x="6455664" y="2724912"/>
-            <a:ext cx="2103120" cy="594360"/>
-          </a:xfrm>
-          <a:prstGeom prst="rect">
-            <a:avLst/>
-          </a:prstGeom>
-          <a:noFill/>
-        </p:spPr>
-        <p:txBody>
-          <a:bodyPr wrap="square" lIns="0" rIns="0" tIns="0" bIns="0" anchor="t">
-            <a:spAutoFit/>
-          </a:bodyPr>
-          <a:lstStyle/>
-          <a:p>
-            <a:pPr algn="ctr">
-              <a:lnSpc>
-                <a:spcPct val="100000"/>
-              </a:lnSpc>
-            </a:pPr>
-            <a:r>
-              <a:rPr sz="1200" b="0">
-                <a:solidFill>
-                  <a:srgbClr val="AEBACC"/>
-                </a:solidFill>
-                <a:latin typeface="Noto Sans"/>
-              </a:rPr>
-              <a:t>PostgreSQL · PostGIS
-OSRM · Nominatim · CARTO</a:t>
-            </a:r>
-          </a:p>
-        </p:txBody>
-      </p:sp>
-      <p:sp>
-        <p:nvSpPr>
-          <p:cNvPr id="19" name="TextBox 18"/>
-          <p:cNvSpPr txBox="1"/>
-          <p:nvPr/>
-        </p:nvSpPr>
-        <p:spPr>
-          <a:xfrm>
-            <a:off x="8805672" y="2514600"/>
-            <a:ext cx="274320" cy="457200"/>
-          </a:xfrm>
-          <a:prstGeom prst="rect">
-            <a:avLst/>
-          </a:prstGeom>
-          <a:noFill/>
-        </p:spPr>
-        <p:txBody>
-          <a:bodyPr wrap="square" lIns="0" rIns="0" tIns="0" bIns="0" anchor="t">
-            <a:spAutoFit/>
-          </a:bodyPr>
-          <a:lstStyle/>
-          <a:p>
-            <a:pPr algn="ctr">
-              <a:lnSpc>
-                <a:spcPct val="100000"/>
-              </a:lnSpc>
-            </a:pPr>
-            <a:r>
-              <a:rPr sz="2200" b="1">
-                <a:solidFill>
-                  <a:srgbClr val="F6BE4C"/>
-                </a:solidFill>
-                <a:latin typeface="Noto Sans"/>
-              </a:rPr>
-              <a:t>→</a:t>
-            </a:r>
-          </a:p>
-        </p:txBody>
-      </p:sp>
-      <p:sp>
-        <p:nvSpPr>
-          <p:cNvPr id="20" name="Rounded Rectangle 19"/>
-          <p:cNvSpPr/>
-          <p:nvPr/>
-        </p:nvSpPr>
-        <p:spPr>
-          <a:xfrm>
-            <a:off x="9107424" y="1828800"/>
-            <a:ext cx="2514600" cy="1965960"/>
-          </a:xfrm>
-          <a:prstGeom prst="roundRect">
-            <a:avLst/>
-          </a:prstGeom>
-          <a:solidFill>
-            <a:srgbClr val="121D31"/>
-          </a:solidFill>
-          <a:ln>
-            <a:solidFill>
-              <a:srgbClr val="F6BE4C"/>
-            </a:solidFill>
-          </a:ln>
-        </p:spPr>
-        <p:style>
-          <a:lnRef idx="1">
-            <a:schemeClr val="accent1"/>
-          </a:lnRef>
-          <a:fillRef idx="3">
-            <a:schemeClr val="accent1"/>
-          </a:fillRef>
-          <a:effectRef idx="2">
-            <a:schemeClr val="accent1"/>
-          </a:effectRef>
-          <a:fontRef idx="minor">
-            <a:schemeClr val="lt1"/>
-          </a:fontRef>
-        </p:style>
-        <p:txBody>
-          <a:bodyPr rtlCol="0" anchor="ctr"/>
-          <a:lstStyle/>
-          <a:p>
-            <a:pPr algn="ctr"/>
-          </a:p>
-        </p:txBody>
-      </p:sp>
-      <p:sp>
-        <p:nvSpPr>
-          <p:cNvPr id="21" name="Rectangle 20"/>
-          <p:cNvSpPr/>
-          <p:nvPr/>
-        </p:nvSpPr>
-        <p:spPr>
-          <a:xfrm>
-            <a:off x="9107424" y="1828800"/>
-            <a:ext cx="2514600" cy="73152"/>
-          </a:xfrm>
-          <a:prstGeom prst="rect">
-            <a:avLst/>
-          </a:prstGeom>
-          <a:solidFill>
-            <a:srgbClr val="F6BE4C"/>
-          </a:solidFill>
-          <a:ln>
-            <a:solidFill>
-              <a:srgbClr val="F6BE4C"/>
-            </a:solidFill>
-          </a:ln>
-        </p:spPr>
-        <p:style>
-          <a:lnRef idx="1">
-            <a:schemeClr val="accent1"/>
-          </a:lnRef>
-          <a:fillRef idx="3">
-            <a:schemeClr val="accent1"/>
-          </a:fillRef>
-          <a:effectRef idx="2">
-            <a:schemeClr val="accent1"/>
-          </a:effectRef>
-          <a:fontRef idx="minor">
-            <a:schemeClr val="lt1"/>
-          </a:fontRef>
-        </p:style>
-        <p:txBody>
-          <a:bodyPr rtlCol="0" anchor="ctr"/>
-          <a:lstStyle/>
-          <a:p>
-            <a:pPr algn="ctr"/>
-          </a:p>
-        </p:txBody>
-      </p:sp>
-      <p:sp>
-        <p:nvSpPr>
-          <p:cNvPr id="22" name="TextBox 21"/>
-          <p:cNvSpPr txBox="1"/>
-          <p:nvPr/>
-        </p:nvSpPr>
-        <p:spPr>
-          <a:xfrm>
-            <a:off x="9308592" y="2176272"/>
-            <a:ext cx="2103120" cy="310896"/>
-          </a:xfrm>
-          <a:prstGeom prst="rect">
-            <a:avLst/>
-          </a:prstGeom>
-          <a:noFill/>
-        </p:spPr>
-        <p:txBody>
-          <a:bodyPr wrap="square" lIns="0" rIns="0" tIns="0" bIns="0" anchor="t">
-            <a:spAutoFit/>
-          </a:bodyPr>
-          <a:lstStyle/>
-          <a:p>
-            <a:pPr algn="ctr">
-              <a:lnSpc>
-                <a:spcPct val="100000"/>
-              </a:lnSpc>
-            </a:pPr>
-            <a:r>
-              <a:rPr sz="1700" b="1">
-                <a:solidFill>
-                  <a:srgbClr val="F8F3E7"/>
-                </a:solidFill>
-                <a:latin typeface="Noto Sans"/>
-              </a:rPr>
-              <a:t>Intelligence</a:t>
-            </a:r>
-          </a:p>
-        </p:txBody>
-      </p:sp>
-      <p:sp>
-        <p:nvSpPr>
-          <p:cNvPr id="23" name="TextBox 22"/>
-          <p:cNvSpPr txBox="1"/>
-          <p:nvPr/>
-        </p:nvSpPr>
-        <p:spPr>
-          <a:xfrm>
-            <a:off x="9308592" y="2724912"/>
-            <a:ext cx="2103120" cy="594360"/>
-          </a:xfrm>
-          <a:prstGeom prst="rect">
-            <a:avLst/>
-          </a:prstGeom>
-          <a:noFill/>
-        </p:spPr>
-        <p:txBody>
-          <a:bodyPr wrap="square" lIns="0" rIns="0" tIns="0" bIns="0" anchor="t">
-            <a:spAutoFit/>
-          </a:bodyPr>
-          <a:lstStyle/>
-          <a:p>
-            <a:pPr algn="ctr">
-              <a:lnSpc>
-                <a:spcPct val="100000"/>
-              </a:lnSpc>
-            </a:pPr>
-            <a:r>
-              <a:rPr sz="1200" b="0">
-                <a:solidFill>
-                  <a:srgbClr val="AEBACC"/>
-                </a:solidFill>
-                <a:latin typeface="Noto Sans"/>
-              </a:rPr>
-              <a:t>Curated fallback
-optional Claude briefs</a:t>
-            </a:r>
-          </a:p>
-        </p:txBody>
-      </p:sp>
-      <p:sp>
-        <p:nvSpPr>
-          <p:cNvPr id="24" name="Rounded Rectangle 23"/>
-          <p:cNvSpPr/>
-          <p:nvPr/>
-        </p:nvSpPr>
-        <p:spPr>
-          <a:xfrm>
-            <a:off x="548640" y="4251960"/>
-            <a:ext cx="11064240" cy="1280160"/>
+            <a:off x="530352" y="1417320"/>
+            <a:ext cx="3767328" cy="4681728"/>
           </a:xfrm>
           <a:prstGeom prst="roundRect">
             <a:avLst/>
@@ -4443,14 +3675,14 @@
       </p:sp>
       <p:sp>
         <p:nvSpPr>
-          <p:cNvPr id="25" name="TextBox 24"/>
-          <p:cNvSpPr txBox="1"/>
-          <p:nvPr/>
-        </p:nvSpPr>
-        <p:spPr>
-          <a:xfrm>
-            <a:off x="822960" y="4480560"/>
-            <a:ext cx="10515600" cy="329184"/>
+          <p:cNvPr id="7" name="TextBox 6"/>
+          <p:cNvSpPr txBox="1"/>
+          <p:nvPr/>
+        </p:nvSpPr>
+        <p:spPr>
+          <a:xfrm>
+            <a:off x="822960" y="1719072"/>
+            <a:ext cx="3154680" cy="347472"/>
           </a:xfrm>
           <a:prstGeom prst="rect">
             <a:avLst/>
@@ -4463,33 +3695,151 @@
           </a:bodyPr>
           <a:lstStyle/>
           <a:p>
-            <a:pPr algn="ctr">
+            <a:pPr algn="l">
               <a:lnSpc>
                 <a:spcPct val="100000"/>
               </a:lnSpc>
             </a:pPr>
             <a:r>
-              <a:rPr sz="2000" b="1">
+              <a:rPr sz="2100" b="1">
                 <a:solidFill>
                   <a:srgbClr val="F8F3E7"/>
                 </a:solidFill>
                 <a:latin typeface="Noto Sans"/>
               </a:rPr>
-              <a:t>Human verification is the final control</a:t>
-            </a:r>
-          </a:p>
-        </p:txBody>
-      </p:sp>
-      <p:sp>
-        <p:nvSpPr>
-          <p:cNvPr id="26" name="TextBox 25"/>
-          <p:cNvSpPr txBox="1"/>
-          <p:nvPr/>
-        </p:nvSpPr>
-        <p:spPr>
-          <a:xfrm>
-            <a:off x="822960" y="4919472"/>
-            <a:ext cx="10515600" cy="292608"/>
+              <a:t>What the Copilot surfaces</a:t>
+            </a:r>
+          </a:p>
+        </p:txBody>
+      </p:sp>
+      <p:sp>
+        <p:nvSpPr>
+          <p:cNvPr id="8" name="TextBox 7"/>
+          <p:cNvSpPr txBox="1"/>
+          <p:nvPr/>
+        </p:nvSpPr>
+        <p:spPr>
+          <a:xfrm>
+            <a:off x="822960" y="2286000"/>
+            <a:ext cx="3108960" cy="2468880"/>
+          </a:xfrm>
+          <a:prstGeom prst="rect">
+            <a:avLst/>
+          </a:prstGeom>
+          <a:noFill/>
+        </p:spPr>
+        <p:txBody>
+          <a:bodyPr wrap="square" lIns="0" rIns="0" tIns="0" bIns="0">
+            <a:spAutoFit/>
+          </a:bodyPr>
+          <a:lstStyle/>
+          <a:p>
+            <a:pPr>
+              <a:lnSpc>
+                <a:spcPct val="108000"/>
+              </a:lnSpc>
+              <a:spcAft>
+                <a:spcPts val="1000"/>
+              </a:spcAft>
+              <a:defRPr sz="1500">
+                <a:solidFill>
+                  <a:srgbClr val="F8F3E7"/>
+                </a:solidFill>
+                <a:latin typeface="Noto Sans"/>
+              </a:defRPr>
+            </a:pPr>
+            <a:r>
+              <a:t>•  Facilities awaiting urgent approval</a:t>
+            </a:r>
+          </a:p>
+          <a:p>
+            <a:pPr>
+              <a:lnSpc>
+                <a:spcPct val="108000"/>
+              </a:lnSpc>
+              <a:spcAft>
+                <a:spcPts val="1000"/>
+              </a:spcAft>
+              <a:defRPr sz="1500">
+                <a:solidFill>
+                  <a:srgbClr val="F8F3E7"/>
+                </a:solidFill>
+                <a:latin typeface="Noto Sans"/>
+              </a:defRPr>
+            </a:pPr>
+            <a:r>
+              <a:t>•  Transfers currently in transit</a:t>
+            </a:r>
+          </a:p>
+          <a:p>
+            <a:pPr>
+              <a:lnSpc>
+                <a:spcPct val="108000"/>
+              </a:lnSpc>
+              <a:spcAft>
+                <a:spcPts val="1000"/>
+              </a:spcAft>
+              <a:defRPr sz="1500">
+                <a:solidFill>
+                  <a:srgbClr val="F8F3E7"/>
+                </a:solidFill>
+                <a:latin typeface="Noto Sans"/>
+              </a:defRPr>
+            </a:pPr>
+            <a:r>
+              <a:t>•  Shortfalls located by county</a:t>
+            </a:r>
+          </a:p>
+          <a:p>
+            <a:pPr>
+              <a:lnSpc>
+                <a:spcPct val="108000"/>
+              </a:lnSpc>
+              <a:spcAft>
+                <a:spcPts val="1000"/>
+              </a:spcAft>
+              <a:defRPr sz="1500">
+                <a:solidFill>
+                  <a:srgbClr val="F8F3E7"/>
+                </a:solidFill>
+                <a:latin typeface="Noto Sans"/>
+              </a:defRPr>
+            </a:pPr>
+            <a:r>
+              <a:t>•  Hubs holding redistributable surplus</a:t>
+            </a:r>
+          </a:p>
+          <a:p>
+            <a:pPr>
+              <a:lnSpc>
+                <a:spcPct val="108000"/>
+              </a:lnSpc>
+              <a:spcAft>
+                <a:spcPts val="1000"/>
+              </a:spcAft>
+              <a:defRPr sz="1500">
+                <a:solidFill>
+                  <a:srgbClr val="F8F3E7"/>
+                </a:solidFill>
+                <a:latin typeface="Noto Sans"/>
+              </a:defRPr>
+            </a:pPr>
+            <a:r>
+              <a:t>•  A concise national situation summary</a:t>
+            </a:r>
+          </a:p>
+        </p:txBody>
+      </p:sp>
+      <p:sp>
+        <p:nvSpPr>
+          <p:cNvPr id="9" name="TextBox 8"/>
+          <p:cNvSpPr txBox="1"/>
+          <p:nvPr/>
+        </p:nvSpPr>
+        <p:spPr>
+          <a:xfrm>
+            <a:off x="822960" y="5010912"/>
+            <a:ext cx="3063240" cy="777240"/>
           </a:xfrm>
           <a:prstGeom prst="rect">
             <a:avLst/>
@@ -4502,71 +3852,26 @@
           </a:bodyPr>
           <a:lstStyle/>
           <a:p>
-            <a:pPr algn="ctr">
+            <a:pPr algn="l">
               <a:lnSpc>
                 <a:spcPct val="100000"/>
               </a:lnSpc>
             </a:pPr>
             <a:r>
-              <a:rPr sz="1200" b="0">
+              <a:rPr sz="1100" b="0">
                 <a:solidFill>
                   <a:srgbClr val="AEBACC"/>
                 </a:solidFill>
                 <a:latin typeface="Noto Sans"/>
               </a:rPr>
-              <a:t>No diagnosis · no autonomous transfers · synthetic demo inventory · explicit assumptions · coordinator sign-off</a:t>
-            </a:r>
-          </a:p>
-        </p:txBody>
-      </p:sp>
-      <p:sp>
-        <p:nvSpPr>
-          <p:cNvPr id="27" name="Rectangle 26"/>
-          <p:cNvSpPr/>
-          <p:nvPr/>
-        </p:nvSpPr>
-        <p:spPr>
-          <a:xfrm>
-            <a:off x="822960" y="5175504"/>
-            <a:ext cx="10332720" cy="36576"/>
-          </a:xfrm>
-          <a:prstGeom prst="rect">
-            <a:avLst/>
-          </a:prstGeom>
-          <a:solidFill>
-            <a:srgbClr val="F6BE4C"/>
-          </a:solidFill>
-          <a:ln>
-            <a:solidFill>
-              <a:srgbClr val="F6BE4C"/>
-            </a:solidFill>
-          </a:ln>
-        </p:spPr>
-        <p:style>
-          <a:lnRef idx="1">
-            <a:schemeClr val="accent1"/>
-          </a:lnRef>
-          <a:fillRef idx="3">
-            <a:schemeClr val="accent1"/>
-          </a:fillRef>
-          <a:effectRef idx="2">
-            <a:schemeClr val="accent1"/>
-          </a:effectRef>
-          <a:fontRef idx="minor">
-            <a:schemeClr val="lt1"/>
-          </a:fontRef>
-        </p:style>
-        <p:txBody>
-          <a:bodyPr rtlCol="0" anchor="ctr"/>
-          <a:lstStyle/>
-          <a:p>
-            <a:pPr algn="ctr"/>
-          </a:p>
-        </p:txBody>
-      </p:sp>
-      <p:sp>
-        <p:nvSpPr>
-          <p:cNvPr id="28" name="TextBox 27"/>
+              <a:t>Answers are drawn from the live coordination state, not a general model. The demonstration runs without an API key; an Anthropic key enables Claude-written briefs.</a:t>
+            </a:r>
+          </a:p>
+        </p:txBody>
+      </p:sp>
+      <p:sp>
+        <p:nvSpPr>
+          <p:cNvPr id="10" name="TextBox 9"/>
           <p:cNvSpPr txBox="1"/>
           <p:nvPr/>
         </p:nvSpPr>
@@ -4605,7 +3910,7 @@
       </p:sp>
       <p:sp>
         <p:nvSpPr>
-          <p:cNvPr id="29" name="TextBox 28"/>
+          <p:cNvPr id="11" name="TextBox 10"/>
           <p:cNvSpPr txBox="1"/>
           <p:nvPr/>
         </p:nvSpPr>
@@ -4637,7 +3942,7 @@
                 </a:solidFill>
                 <a:latin typeface="Noto Sans"/>
               </a:rPr>
-              <a:t>Production data layer: PostgreSQL 15 + PostGIS 3 · demo mode: in-memory mock DB</a:t>
+              <a:t>Copilot is advisory; coordinator verification remains mandatory</a:t>
             </a:r>
           </a:p>
         </p:txBody>
@@ -4739,7 +4044,7 @@
                 </a:solidFill>
                 <a:latin typeface="Noto Sans"/>
               </a:rPr>
-              <a:t>10  /  CLOSING</a:t>
+              <a:t>10  /  ARCHITECTURE AND SAFEGUARDS</a:t>
             </a:r>
           </a:p>
         </p:txBody>
@@ -4752,8 +4057,8 @@
         </p:nvSpPr>
         <p:spPr>
           <a:xfrm>
-            <a:off x="548640" y="960120"/>
-            <a:ext cx="7315200" cy="1417320"/>
+            <a:off x="502920" y="603504"/>
+            <a:ext cx="11155680" cy="960120"/>
           </a:xfrm>
           <a:prstGeom prst="rect">
             <a:avLst/>
@@ -4766,39 +4071,124 @@
           </a:bodyPr>
           <a:lstStyle/>
           <a:p>
-            <a:pPr algn="l"/>
-            <a:r>
-              <a:rPr sz="3500" b="1">
+            <a:pPr algn="ctr">
+              <a:lnSpc>
+                <a:spcPct val="100000"/>
+              </a:lnSpc>
+            </a:pPr>
+            <a:r>
+              <a:rPr sz="2700" b="1">
                 <a:solidFill>
                   <a:srgbClr val="F8F3E7"/>
                 </a:solidFill>
                 <a:latin typeface="Noto Sans"/>
               </a:rPr>
-              <a:t>Location is not just a field.
-</a:t>
-            </a:r>
-            <a:r>
-              <a:rPr sz="3500" b="1">
-                <a:solidFill>
-                  <a:srgbClr val="43D5AE"/>
-                </a:solidFill>
-                <a:latin typeface="Noto Sans"/>
-              </a:rPr>
-              <a:t>It is a coordination advantage.</a:t>
-            </a:r>
-          </a:p>
-        </p:txBody>
-      </p:sp>
-      <p:sp>
-        <p:nvSpPr>
-          <p:cNvPr id="5" name="TextBox 4"/>
-          <p:cNvSpPr txBox="1"/>
-          <p:nvPr/>
-        </p:nvSpPr>
-        <p:spPr>
-          <a:xfrm>
-            <a:off x="594360" y="2743200"/>
-            <a:ext cx="2011680" cy="365760"/>
+              <a:t>A production-minded spatial stack
+with a human decision boundary</a:t>
+            </a:r>
+          </a:p>
+        </p:txBody>
+      </p:sp>
+      <p:sp>
+        <p:nvSpPr>
+          <p:cNvPr id="5" name="Rounded Rectangle 4"/>
+          <p:cNvSpPr/>
+          <p:nvPr/>
+        </p:nvSpPr>
+        <p:spPr>
+          <a:xfrm>
+            <a:off x="548640" y="1828800"/>
+            <a:ext cx="2514600" cy="1965960"/>
+          </a:xfrm>
+          <a:prstGeom prst="roundRect">
+            <a:avLst/>
+          </a:prstGeom>
+          <a:solidFill>
+            <a:srgbClr val="121D31"/>
+          </a:solidFill>
+          <a:ln>
+            <a:solidFill>
+              <a:srgbClr val="529BFF"/>
+            </a:solidFill>
+          </a:ln>
+        </p:spPr>
+        <p:style>
+          <a:lnRef idx="1">
+            <a:schemeClr val="accent1"/>
+          </a:lnRef>
+          <a:fillRef idx="3">
+            <a:schemeClr val="accent1"/>
+          </a:fillRef>
+          <a:effectRef idx="2">
+            <a:schemeClr val="accent1"/>
+          </a:effectRef>
+          <a:fontRef idx="minor">
+            <a:schemeClr val="lt1"/>
+          </a:fontRef>
+        </p:style>
+        <p:txBody>
+          <a:bodyPr rtlCol="0" anchor="ctr"/>
+          <a:lstStyle/>
+          <a:p>
+            <a:pPr algn="ctr"/>
+          </a:p>
+        </p:txBody>
+      </p:sp>
+      <p:sp>
+        <p:nvSpPr>
+          <p:cNvPr id="6" name="Rectangle 5"/>
+          <p:cNvSpPr/>
+          <p:nvPr/>
+        </p:nvSpPr>
+        <p:spPr>
+          <a:xfrm>
+            <a:off x="548640" y="1828800"/>
+            <a:ext cx="2514600" cy="73152"/>
+          </a:xfrm>
+          <a:prstGeom prst="rect">
+            <a:avLst/>
+          </a:prstGeom>
+          <a:solidFill>
+            <a:srgbClr val="529BFF"/>
+          </a:solidFill>
+          <a:ln>
+            <a:solidFill>
+              <a:srgbClr val="529BFF"/>
+            </a:solidFill>
+          </a:ln>
+        </p:spPr>
+        <p:style>
+          <a:lnRef idx="1">
+            <a:schemeClr val="accent1"/>
+          </a:lnRef>
+          <a:fillRef idx="3">
+            <a:schemeClr val="accent1"/>
+          </a:fillRef>
+          <a:effectRef idx="2">
+            <a:schemeClr val="accent1"/>
+          </a:effectRef>
+          <a:fontRef idx="minor">
+            <a:schemeClr val="lt1"/>
+          </a:fontRef>
+        </p:style>
+        <p:txBody>
+          <a:bodyPr rtlCol="0" anchor="ctr"/>
+          <a:lstStyle/>
+          <a:p>
+            <a:pPr algn="ctr"/>
+          </a:p>
+        </p:txBody>
+      </p:sp>
+      <p:sp>
+        <p:nvSpPr>
+          <p:cNvPr id="7" name="TextBox 6"/>
+          <p:cNvSpPr txBox="1"/>
+          <p:nvPr/>
+        </p:nvSpPr>
+        <p:spPr>
+          <a:xfrm>
+            <a:off x="749808" y="2176272"/>
+            <a:ext cx="2103120" cy="310896"/>
           </a:xfrm>
           <a:prstGeom prst="rect">
             <a:avLst/>
@@ -4811,151 +4201,528 @@
           </a:bodyPr>
           <a:lstStyle/>
           <a:p>
-            <a:pPr algn="l">
+            <a:pPr algn="ctr">
               <a:lnSpc>
                 <a:spcPct val="100000"/>
               </a:lnSpc>
             </a:pPr>
             <a:r>
-              <a:rPr sz="2100" b="1">
+              <a:rPr sz="1700" b="1">
+                <a:solidFill>
+                  <a:srgbClr val="F8F3E7"/>
+                </a:solidFill>
+                <a:latin typeface="Noto Sans"/>
+              </a:rPr>
+              <a:t>Experience</a:t>
+            </a:r>
+          </a:p>
+        </p:txBody>
+      </p:sp>
+      <p:sp>
+        <p:nvSpPr>
+          <p:cNvPr id="8" name="TextBox 7"/>
+          <p:cNvSpPr txBox="1"/>
+          <p:nvPr/>
+        </p:nvSpPr>
+        <p:spPr>
+          <a:xfrm>
+            <a:off x="749808" y="2724912"/>
+            <a:ext cx="2103120" cy="594360"/>
+          </a:xfrm>
+          <a:prstGeom prst="rect">
+            <a:avLst/>
+          </a:prstGeom>
+          <a:noFill/>
+        </p:spPr>
+        <p:txBody>
+          <a:bodyPr wrap="square" lIns="0" rIns="0" tIns="0" bIns="0" anchor="t">
+            <a:spAutoFit/>
+          </a:bodyPr>
+          <a:lstStyle/>
+          <a:p>
+            <a:pPr algn="ctr">
+              <a:lnSpc>
+                <a:spcPct val="100000"/>
+              </a:lnSpc>
+            </a:pPr>
+            <a:r>
+              <a:rPr sz="1200" b="0">
+                <a:solidFill>
+                  <a:srgbClr val="AEBACC"/>
+                </a:solidFill>
+                <a:latin typeface="Noto Sans"/>
+              </a:rPr>
+              <a:t>React · TypeScript
+MapLibre · three.js</a:t>
+            </a:r>
+          </a:p>
+        </p:txBody>
+      </p:sp>
+      <p:sp>
+        <p:nvSpPr>
+          <p:cNvPr id="9" name="TextBox 8"/>
+          <p:cNvSpPr txBox="1"/>
+          <p:nvPr/>
+        </p:nvSpPr>
+        <p:spPr>
+          <a:xfrm>
+            <a:off x="3099816" y="2514600"/>
+            <a:ext cx="274320" cy="457200"/>
+          </a:xfrm>
+          <a:prstGeom prst="rect">
+            <a:avLst/>
+          </a:prstGeom>
+          <a:noFill/>
+        </p:spPr>
+        <p:txBody>
+          <a:bodyPr wrap="square" lIns="0" rIns="0" tIns="0" bIns="0" anchor="t">
+            <a:spAutoFit/>
+          </a:bodyPr>
+          <a:lstStyle/>
+          <a:p>
+            <a:pPr algn="ctr">
+              <a:lnSpc>
+                <a:spcPct val="100000"/>
+              </a:lnSpc>
+            </a:pPr>
+            <a:r>
+              <a:rPr sz="2200" b="1">
                 <a:solidFill>
                   <a:srgbClr val="F6BE4C"/>
                 </a:solidFill>
                 <a:latin typeface="Noto Sans"/>
               </a:rPr>
-              <a:t>The live demo</a:t>
-            </a:r>
-          </a:p>
-        </p:txBody>
-      </p:sp>
-      <p:sp>
-        <p:nvSpPr>
-          <p:cNvPr id="6" name="TextBox 5"/>
-          <p:cNvSpPr txBox="1"/>
-          <p:nvPr/>
-        </p:nvSpPr>
-        <p:spPr>
-          <a:xfrm>
-            <a:off x="621792" y="3246120"/>
-            <a:ext cx="4572000" cy="2194560"/>
-          </a:xfrm>
-          <a:prstGeom prst="rect">
-            <a:avLst/>
-          </a:prstGeom>
-          <a:noFill/>
-        </p:spPr>
-        <p:txBody>
-          <a:bodyPr wrap="square" lIns="0" rIns="0" tIns="0" bIns="0">
-            <a:spAutoFit/>
-          </a:bodyPr>
-          <a:lstStyle/>
-          <a:p>
-            <a:pPr>
-              <a:lnSpc>
-                <a:spcPct val="108000"/>
-              </a:lnSpc>
-              <a:spcAft>
-                <a:spcPts val="900"/>
-              </a:spcAft>
-              <a:defRPr sz="1600">
+              <a:t>→</a:t>
+            </a:r>
+          </a:p>
+        </p:txBody>
+      </p:sp>
+      <p:sp>
+        <p:nvSpPr>
+          <p:cNvPr id="10" name="Rounded Rectangle 9"/>
+          <p:cNvSpPr/>
+          <p:nvPr/>
+        </p:nvSpPr>
+        <p:spPr>
+          <a:xfrm>
+            <a:off x="3401568" y="1828800"/>
+            <a:ext cx="2514600" cy="1965960"/>
+          </a:xfrm>
+          <a:prstGeom prst="roundRect">
+            <a:avLst/>
+          </a:prstGeom>
+          <a:solidFill>
+            <a:srgbClr val="121D31"/>
+          </a:solidFill>
+          <a:ln>
+            <a:solidFill>
+              <a:srgbClr val="FF7744"/>
+            </a:solidFill>
+          </a:ln>
+        </p:spPr>
+        <p:style>
+          <a:lnRef idx="1">
+            <a:schemeClr val="accent1"/>
+          </a:lnRef>
+          <a:fillRef idx="3">
+            <a:schemeClr val="accent1"/>
+          </a:fillRef>
+          <a:effectRef idx="2">
+            <a:schemeClr val="accent1"/>
+          </a:effectRef>
+          <a:fontRef idx="minor">
+            <a:schemeClr val="lt1"/>
+          </a:fontRef>
+        </p:style>
+        <p:txBody>
+          <a:bodyPr rtlCol="0" anchor="ctr"/>
+          <a:lstStyle/>
+          <a:p>
+            <a:pPr algn="ctr"/>
+          </a:p>
+        </p:txBody>
+      </p:sp>
+      <p:sp>
+        <p:nvSpPr>
+          <p:cNvPr id="11" name="Rectangle 10"/>
+          <p:cNvSpPr/>
+          <p:nvPr/>
+        </p:nvSpPr>
+        <p:spPr>
+          <a:xfrm>
+            <a:off x="3401568" y="1828800"/>
+            <a:ext cx="2514600" cy="73152"/>
+          </a:xfrm>
+          <a:prstGeom prst="rect">
+            <a:avLst/>
+          </a:prstGeom>
+          <a:solidFill>
+            <a:srgbClr val="FF7744"/>
+          </a:solidFill>
+          <a:ln>
+            <a:solidFill>
+              <a:srgbClr val="FF7744"/>
+            </a:solidFill>
+          </a:ln>
+        </p:spPr>
+        <p:style>
+          <a:lnRef idx="1">
+            <a:schemeClr val="accent1"/>
+          </a:lnRef>
+          <a:fillRef idx="3">
+            <a:schemeClr val="accent1"/>
+          </a:fillRef>
+          <a:effectRef idx="2">
+            <a:schemeClr val="accent1"/>
+          </a:effectRef>
+          <a:fontRef idx="minor">
+            <a:schemeClr val="lt1"/>
+          </a:fontRef>
+        </p:style>
+        <p:txBody>
+          <a:bodyPr rtlCol="0" anchor="ctr"/>
+          <a:lstStyle/>
+          <a:p>
+            <a:pPr algn="ctr"/>
+          </a:p>
+        </p:txBody>
+      </p:sp>
+      <p:sp>
+        <p:nvSpPr>
+          <p:cNvPr id="12" name="TextBox 11"/>
+          <p:cNvSpPr txBox="1"/>
+          <p:nvPr/>
+        </p:nvSpPr>
+        <p:spPr>
+          <a:xfrm>
+            <a:off x="3602736" y="2176272"/>
+            <a:ext cx="2103120" cy="310896"/>
+          </a:xfrm>
+          <a:prstGeom prst="rect">
+            <a:avLst/>
+          </a:prstGeom>
+          <a:noFill/>
+        </p:spPr>
+        <p:txBody>
+          <a:bodyPr wrap="square" lIns="0" rIns="0" tIns="0" bIns="0" anchor="t">
+            <a:spAutoFit/>
+          </a:bodyPr>
+          <a:lstStyle/>
+          <a:p>
+            <a:pPr algn="ctr">
+              <a:lnSpc>
+                <a:spcPct val="100000"/>
+              </a:lnSpc>
+            </a:pPr>
+            <a:r>
+              <a:rPr sz="1700" b="1">
                 <a:solidFill>
                   <a:srgbClr val="F8F3E7"/>
                 </a:solidFill>
                 <a:latin typeface="Noto Sans"/>
-              </a:defRPr>
-            </a:pPr>
-            <a:r>
-              <a:t>  01   Globe intro → Kenya command floor</a:t>
-            </a:r>
-          </a:p>
-          <a:p>
-            <a:pPr>
-              <a:lnSpc>
-                <a:spcPct val="108000"/>
-              </a:lnSpc>
-              <a:spcAft>
-                <a:spcPts val="900"/>
-              </a:spcAft>
-              <a:defRPr sz="1600">
+              </a:rPr>
+              <a:t>Coordination API</a:t>
+            </a:r>
+          </a:p>
+        </p:txBody>
+      </p:sp>
+      <p:sp>
+        <p:nvSpPr>
+          <p:cNvPr id="13" name="TextBox 12"/>
+          <p:cNvSpPr txBox="1"/>
+          <p:nvPr/>
+        </p:nvSpPr>
+        <p:spPr>
+          <a:xfrm>
+            <a:off x="3602736" y="2724912"/>
+            <a:ext cx="2103120" cy="594360"/>
+          </a:xfrm>
+          <a:prstGeom prst="rect">
+            <a:avLst/>
+          </a:prstGeom>
+          <a:noFill/>
+        </p:spPr>
+        <p:txBody>
+          <a:bodyPr wrap="square" lIns="0" rIns="0" tIns="0" bIns="0" anchor="t">
+            <a:spAutoFit/>
+          </a:bodyPr>
+          <a:lstStyle/>
+          <a:p>
+            <a:pPr algn="ctr">
+              <a:lnSpc>
+                <a:spcPct val="100000"/>
+              </a:lnSpc>
+            </a:pPr>
+            <a:r>
+              <a:rPr sz="1200" b="0">
+                <a:solidFill>
+                  <a:srgbClr val="AEBACC"/>
+                </a:solidFill>
+                <a:latin typeface="Noto Sans"/>
+              </a:rPr>
+              <a:t>Node.js · Express
+matching · auth · messages</a:t>
+            </a:r>
+          </a:p>
+        </p:txBody>
+      </p:sp>
+      <p:sp>
+        <p:nvSpPr>
+          <p:cNvPr id="14" name="TextBox 13"/>
+          <p:cNvSpPr txBox="1"/>
+          <p:nvPr/>
+        </p:nvSpPr>
+        <p:spPr>
+          <a:xfrm>
+            <a:off x="5952744" y="2514600"/>
+            <a:ext cx="274320" cy="457200"/>
+          </a:xfrm>
+          <a:prstGeom prst="rect">
+            <a:avLst/>
+          </a:prstGeom>
+          <a:noFill/>
+        </p:spPr>
+        <p:txBody>
+          <a:bodyPr wrap="square" lIns="0" rIns="0" tIns="0" bIns="0" anchor="t">
+            <a:spAutoFit/>
+          </a:bodyPr>
+          <a:lstStyle/>
+          <a:p>
+            <a:pPr algn="ctr">
+              <a:lnSpc>
+                <a:spcPct val="100000"/>
+              </a:lnSpc>
+            </a:pPr>
+            <a:r>
+              <a:rPr sz="2200" b="1">
+                <a:solidFill>
+                  <a:srgbClr val="F6BE4C"/>
+                </a:solidFill>
+                <a:latin typeface="Noto Sans"/>
+              </a:rPr>
+              <a:t>→</a:t>
+            </a:r>
+          </a:p>
+        </p:txBody>
+      </p:sp>
+      <p:sp>
+        <p:nvSpPr>
+          <p:cNvPr id="15" name="Rounded Rectangle 14"/>
+          <p:cNvSpPr/>
+          <p:nvPr/>
+        </p:nvSpPr>
+        <p:spPr>
+          <a:xfrm>
+            <a:off x="6254496" y="1828800"/>
+            <a:ext cx="2514600" cy="1965960"/>
+          </a:xfrm>
+          <a:prstGeom prst="roundRect">
+            <a:avLst/>
+          </a:prstGeom>
+          <a:solidFill>
+            <a:srgbClr val="121D31"/>
+          </a:solidFill>
+          <a:ln>
+            <a:solidFill>
+              <a:srgbClr val="43D5AE"/>
+            </a:solidFill>
+          </a:ln>
+        </p:spPr>
+        <p:style>
+          <a:lnRef idx="1">
+            <a:schemeClr val="accent1"/>
+          </a:lnRef>
+          <a:fillRef idx="3">
+            <a:schemeClr val="accent1"/>
+          </a:fillRef>
+          <a:effectRef idx="2">
+            <a:schemeClr val="accent1"/>
+          </a:effectRef>
+          <a:fontRef idx="minor">
+            <a:schemeClr val="lt1"/>
+          </a:fontRef>
+        </p:style>
+        <p:txBody>
+          <a:bodyPr rtlCol="0" anchor="ctr"/>
+          <a:lstStyle/>
+          <a:p>
+            <a:pPr algn="ctr"/>
+          </a:p>
+        </p:txBody>
+      </p:sp>
+      <p:sp>
+        <p:nvSpPr>
+          <p:cNvPr id="16" name="Rectangle 15"/>
+          <p:cNvSpPr/>
+          <p:nvPr/>
+        </p:nvSpPr>
+        <p:spPr>
+          <a:xfrm>
+            <a:off x="6254496" y="1828800"/>
+            <a:ext cx="2514600" cy="73152"/>
+          </a:xfrm>
+          <a:prstGeom prst="rect">
+            <a:avLst/>
+          </a:prstGeom>
+          <a:solidFill>
+            <a:srgbClr val="43D5AE"/>
+          </a:solidFill>
+          <a:ln>
+            <a:solidFill>
+              <a:srgbClr val="43D5AE"/>
+            </a:solidFill>
+          </a:ln>
+        </p:spPr>
+        <p:style>
+          <a:lnRef idx="1">
+            <a:schemeClr val="accent1"/>
+          </a:lnRef>
+          <a:fillRef idx="3">
+            <a:schemeClr val="accent1"/>
+          </a:fillRef>
+          <a:effectRef idx="2">
+            <a:schemeClr val="accent1"/>
+          </a:effectRef>
+          <a:fontRef idx="minor">
+            <a:schemeClr val="lt1"/>
+          </a:fontRef>
+        </p:style>
+        <p:txBody>
+          <a:bodyPr rtlCol="0" anchor="ctr"/>
+          <a:lstStyle/>
+          <a:p>
+            <a:pPr algn="ctr"/>
+          </a:p>
+        </p:txBody>
+      </p:sp>
+      <p:sp>
+        <p:nvSpPr>
+          <p:cNvPr id="17" name="TextBox 16"/>
+          <p:cNvSpPr txBox="1"/>
+          <p:nvPr/>
+        </p:nvSpPr>
+        <p:spPr>
+          <a:xfrm>
+            <a:off x="6455664" y="2176272"/>
+            <a:ext cx="2103120" cy="310896"/>
+          </a:xfrm>
+          <a:prstGeom prst="rect">
+            <a:avLst/>
+          </a:prstGeom>
+          <a:noFill/>
+        </p:spPr>
+        <p:txBody>
+          <a:bodyPr wrap="square" lIns="0" rIns="0" tIns="0" bIns="0" anchor="t">
+            <a:spAutoFit/>
+          </a:bodyPr>
+          <a:lstStyle/>
+          <a:p>
+            <a:pPr algn="ctr">
+              <a:lnSpc>
+                <a:spcPct val="100000"/>
+              </a:lnSpc>
+            </a:pPr>
+            <a:r>
+              <a:rPr sz="1700" b="1">
                 <a:solidFill>
                   <a:srgbClr val="F8F3E7"/>
                 </a:solidFill>
                 <a:latin typeface="Noto Sans"/>
-              </a:defRPr>
-            </a:pPr>
-            <a:r>
-              <a:t>  02   Toggle the demand heatmap</a:t>
-            </a:r>
-          </a:p>
-          <a:p>
-            <a:pPr>
-              <a:lnSpc>
-                <a:spcPct val="108000"/>
-              </a:lnSpc>
-              <a:spcAft>
-                <a:spcPts val="900"/>
-              </a:spcAft>
-              <a:defRPr sz="1600">
-                <a:solidFill>
-                  <a:srgbClr val="F8F3E7"/>
-                </a:solidFill>
-                <a:latin typeface="Noto Sans"/>
-              </a:defRPr>
-            </a:pPr>
-            <a:r>
-              <a:t>  03   Open the Nairobi research base</a:t>
-            </a:r>
-          </a:p>
-          <a:p>
-            <a:pPr>
-              <a:lnSpc>
-                <a:spcPct val="108000"/>
-              </a:lnSpc>
-              <a:spcAft>
-                <a:spcPts val="900"/>
-              </a:spcAft>
-              <a:defRPr sz="1600">
-                <a:solidFill>
-                  <a:srgbClr val="F8F3E7"/>
-                </a:solidFill>
-                <a:latin typeface="Noto Sans"/>
-              </a:defRPr>
-            </a:pPr>
-            <a:r>
-              <a:t>  04   Project impact over one year</a:t>
-            </a:r>
-          </a:p>
-          <a:p>
-            <a:pPr>
-              <a:lnSpc>
-                <a:spcPct val="108000"/>
-              </a:lnSpc>
-              <a:spcAft>
-                <a:spcPts val="900"/>
-              </a:spcAft>
-              <a:defRPr sz="1600">
-                <a:solidFill>
-                  <a:srgbClr val="F8F3E7"/>
-                </a:solidFill>
-                <a:latin typeface="Noto Sans"/>
-              </a:defRPr>
-            </a:pPr>
-            <a:r>
-              <a:t>  05   Ask Copilot for urgent approvals</a:t>
-            </a:r>
-          </a:p>
-        </p:txBody>
-      </p:sp>
-      <p:sp>
-        <p:nvSpPr>
-          <p:cNvPr id="7" name="Rounded Rectangle 6"/>
+              </a:rPr>
+              <a:t>Spatial + routing</a:t>
+            </a:r>
+          </a:p>
+        </p:txBody>
+      </p:sp>
+      <p:sp>
+        <p:nvSpPr>
+          <p:cNvPr id="18" name="TextBox 17"/>
+          <p:cNvSpPr txBox="1"/>
+          <p:nvPr/>
+        </p:nvSpPr>
+        <p:spPr>
+          <a:xfrm>
+            <a:off x="6455664" y="2724912"/>
+            <a:ext cx="2103120" cy="594360"/>
+          </a:xfrm>
+          <a:prstGeom prst="rect">
+            <a:avLst/>
+          </a:prstGeom>
+          <a:noFill/>
+        </p:spPr>
+        <p:txBody>
+          <a:bodyPr wrap="square" lIns="0" rIns="0" tIns="0" bIns="0" anchor="t">
+            <a:spAutoFit/>
+          </a:bodyPr>
+          <a:lstStyle/>
+          <a:p>
+            <a:pPr algn="ctr">
+              <a:lnSpc>
+                <a:spcPct val="100000"/>
+              </a:lnSpc>
+            </a:pPr>
+            <a:r>
+              <a:rPr sz="1200" b="0">
+                <a:solidFill>
+                  <a:srgbClr val="AEBACC"/>
+                </a:solidFill>
+                <a:latin typeface="Noto Sans"/>
+              </a:rPr>
+              <a:t>PostgreSQL · PostGIS
+OSRM · Nominatim · CARTO</a:t>
+            </a:r>
+          </a:p>
+        </p:txBody>
+      </p:sp>
+      <p:sp>
+        <p:nvSpPr>
+          <p:cNvPr id="19" name="TextBox 18"/>
+          <p:cNvSpPr txBox="1"/>
+          <p:nvPr/>
+        </p:nvSpPr>
+        <p:spPr>
+          <a:xfrm>
+            <a:off x="8805672" y="2514600"/>
+            <a:ext cx="274320" cy="457200"/>
+          </a:xfrm>
+          <a:prstGeom prst="rect">
+            <a:avLst/>
+          </a:prstGeom>
+          <a:noFill/>
+        </p:spPr>
+        <p:txBody>
+          <a:bodyPr wrap="square" lIns="0" rIns="0" tIns="0" bIns="0" anchor="t">
+            <a:spAutoFit/>
+          </a:bodyPr>
+          <a:lstStyle/>
+          <a:p>
+            <a:pPr algn="ctr">
+              <a:lnSpc>
+                <a:spcPct val="100000"/>
+              </a:lnSpc>
+            </a:pPr>
+            <a:r>
+              <a:rPr sz="2200" b="1">
+                <a:solidFill>
+                  <a:srgbClr val="F6BE4C"/>
+                </a:solidFill>
+                <a:latin typeface="Noto Sans"/>
+              </a:rPr>
+              <a:t>→</a:t>
+            </a:r>
+          </a:p>
+        </p:txBody>
+      </p:sp>
+      <p:sp>
+        <p:nvSpPr>
+          <p:cNvPr id="20" name="Rounded Rectangle 19"/>
           <p:cNvSpPr/>
           <p:nvPr/>
         </p:nvSpPr>
         <p:spPr>
           <a:xfrm>
-            <a:off x="6492240" y="2514600"/>
-            <a:ext cx="4983480" cy="2743200"/>
+            <a:off x="9107424" y="1828800"/>
+            <a:ext cx="2514600" cy="1965960"/>
           </a:xfrm>
           <a:prstGeom prst="roundRect">
             <a:avLst/>
@@ -4993,7 +4760,1061 @@
       </p:sp>
       <p:sp>
         <p:nvSpPr>
-          <p:cNvPr id="8" name="TextBox 7"/>
+          <p:cNvPr id="21" name="Rectangle 20"/>
+          <p:cNvSpPr/>
+          <p:nvPr/>
+        </p:nvSpPr>
+        <p:spPr>
+          <a:xfrm>
+            <a:off x="9107424" y="1828800"/>
+            <a:ext cx="2514600" cy="73152"/>
+          </a:xfrm>
+          <a:prstGeom prst="rect">
+            <a:avLst/>
+          </a:prstGeom>
+          <a:solidFill>
+            <a:srgbClr val="F6BE4C"/>
+          </a:solidFill>
+          <a:ln>
+            <a:solidFill>
+              <a:srgbClr val="F6BE4C"/>
+            </a:solidFill>
+          </a:ln>
+        </p:spPr>
+        <p:style>
+          <a:lnRef idx="1">
+            <a:schemeClr val="accent1"/>
+          </a:lnRef>
+          <a:fillRef idx="3">
+            <a:schemeClr val="accent1"/>
+          </a:fillRef>
+          <a:effectRef idx="2">
+            <a:schemeClr val="accent1"/>
+          </a:effectRef>
+          <a:fontRef idx="minor">
+            <a:schemeClr val="lt1"/>
+          </a:fontRef>
+        </p:style>
+        <p:txBody>
+          <a:bodyPr rtlCol="0" anchor="ctr"/>
+          <a:lstStyle/>
+          <a:p>
+            <a:pPr algn="ctr"/>
+          </a:p>
+        </p:txBody>
+      </p:sp>
+      <p:sp>
+        <p:nvSpPr>
+          <p:cNvPr id="22" name="TextBox 21"/>
+          <p:cNvSpPr txBox="1"/>
+          <p:nvPr/>
+        </p:nvSpPr>
+        <p:spPr>
+          <a:xfrm>
+            <a:off x="9308592" y="2176272"/>
+            <a:ext cx="2103120" cy="310896"/>
+          </a:xfrm>
+          <a:prstGeom prst="rect">
+            <a:avLst/>
+          </a:prstGeom>
+          <a:noFill/>
+        </p:spPr>
+        <p:txBody>
+          <a:bodyPr wrap="square" lIns="0" rIns="0" tIns="0" bIns="0" anchor="t">
+            <a:spAutoFit/>
+          </a:bodyPr>
+          <a:lstStyle/>
+          <a:p>
+            <a:pPr algn="ctr">
+              <a:lnSpc>
+                <a:spcPct val="100000"/>
+              </a:lnSpc>
+            </a:pPr>
+            <a:r>
+              <a:rPr sz="1700" b="1">
+                <a:solidFill>
+                  <a:srgbClr val="F8F3E7"/>
+                </a:solidFill>
+                <a:latin typeface="Noto Sans"/>
+              </a:rPr>
+              <a:t>Intelligence</a:t>
+            </a:r>
+          </a:p>
+        </p:txBody>
+      </p:sp>
+      <p:sp>
+        <p:nvSpPr>
+          <p:cNvPr id="23" name="TextBox 22"/>
+          <p:cNvSpPr txBox="1"/>
+          <p:nvPr/>
+        </p:nvSpPr>
+        <p:spPr>
+          <a:xfrm>
+            <a:off x="9308592" y="2724912"/>
+            <a:ext cx="2103120" cy="594360"/>
+          </a:xfrm>
+          <a:prstGeom prst="rect">
+            <a:avLst/>
+          </a:prstGeom>
+          <a:noFill/>
+        </p:spPr>
+        <p:txBody>
+          <a:bodyPr wrap="square" lIns="0" rIns="0" tIns="0" bIns="0" anchor="t">
+            <a:spAutoFit/>
+          </a:bodyPr>
+          <a:lstStyle/>
+          <a:p>
+            <a:pPr algn="ctr">
+              <a:lnSpc>
+                <a:spcPct val="100000"/>
+              </a:lnSpc>
+            </a:pPr>
+            <a:r>
+              <a:rPr sz="1200" b="0">
+                <a:solidFill>
+                  <a:srgbClr val="AEBACC"/>
+                </a:solidFill>
+                <a:latin typeface="Noto Sans"/>
+              </a:rPr>
+              <a:t>Curated fallback
+optional Claude briefs</a:t>
+            </a:r>
+          </a:p>
+        </p:txBody>
+      </p:sp>
+      <p:sp>
+        <p:nvSpPr>
+          <p:cNvPr id="24" name="Rounded Rectangle 23"/>
+          <p:cNvSpPr/>
+          <p:nvPr/>
+        </p:nvSpPr>
+        <p:spPr>
+          <a:xfrm>
+            <a:off x="548640" y="4251960"/>
+            <a:ext cx="11064240" cy="1280160"/>
+          </a:xfrm>
+          <a:prstGeom prst="roundRect">
+            <a:avLst/>
+          </a:prstGeom>
+          <a:solidFill>
+            <a:srgbClr val="121D31"/>
+          </a:solidFill>
+          <a:ln>
+            <a:solidFill>
+              <a:srgbClr val="1A263B"/>
+            </a:solidFill>
+          </a:ln>
+        </p:spPr>
+        <p:style>
+          <a:lnRef idx="1">
+            <a:schemeClr val="accent1"/>
+          </a:lnRef>
+          <a:fillRef idx="3">
+            <a:schemeClr val="accent1"/>
+          </a:fillRef>
+          <a:effectRef idx="2">
+            <a:schemeClr val="accent1"/>
+          </a:effectRef>
+          <a:fontRef idx="minor">
+            <a:schemeClr val="lt1"/>
+          </a:fontRef>
+        </p:style>
+        <p:txBody>
+          <a:bodyPr rtlCol="0" anchor="ctr"/>
+          <a:lstStyle/>
+          <a:p>
+            <a:pPr algn="ctr"/>
+          </a:p>
+        </p:txBody>
+      </p:sp>
+      <p:sp>
+        <p:nvSpPr>
+          <p:cNvPr id="25" name="TextBox 24"/>
+          <p:cNvSpPr txBox="1"/>
+          <p:nvPr/>
+        </p:nvSpPr>
+        <p:spPr>
+          <a:xfrm>
+            <a:off x="822960" y="4480560"/>
+            <a:ext cx="10515600" cy="329184"/>
+          </a:xfrm>
+          <a:prstGeom prst="rect">
+            <a:avLst/>
+          </a:prstGeom>
+          <a:noFill/>
+        </p:spPr>
+        <p:txBody>
+          <a:bodyPr wrap="square" lIns="0" rIns="0" tIns="0" bIns="0" anchor="t">
+            <a:spAutoFit/>
+          </a:bodyPr>
+          <a:lstStyle/>
+          <a:p>
+            <a:pPr algn="ctr">
+              <a:lnSpc>
+                <a:spcPct val="100000"/>
+              </a:lnSpc>
+            </a:pPr>
+            <a:r>
+              <a:rPr sz="2000" b="1">
+                <a:solidFill>
+                  <a:srgbClr val="F8F3E7"/>
+                </a:solidFill>
+                <a:latin typeface="Noto Sans"/>
+              </a:rPr>
+              <a:t>Human verification is the final control</a:t>
+            </a:r>
+          </a:p>
+        </p:txBody>
+      </p:sp>
+      <p:sp>
+        <p:nvSpPr>
+          <p:cNvPr id="26" name="TextBox 25"/>
+          <p:cNvSpPr txBox="1"/>
+          <p:nvPr/>
+        </p:nvSpPr>
+        <p:spPr>
+          <a:xfrm>
+            <a:off x="822960" y="4919472"/>
+            <a:ext cx="10515600" cy="292608"/>
+          </a:xfrm>
+          <a:prstGeom prst="rect">
+            <a:avLst/>
+          </a:prstGeom>
+          <a:noFill/>
+        </p:spPr>
+        <p:txBody>
+          <a:bodyPr wrap="square" lIns="0" rIns="0" tIns="0" bIns="0" anchor="t">
+            <a:spAutoFit/>
+          </a:bodyPr>
+          <a:lstStyle/>
+          <a:p>
+            <a:pPr algn="ctr">
+              <a:lnSpc>
+                <a:spcPct val="100000"/>
+              </a:lnSpc>
+            </a:pPr>
+            <a:r>
+              <a:rPr sz="1200" b="0">
+                <a:solidFill>
+                  <a:srgbClr val="AEBACC"/>
+                </a:solidFill>
+                <a:latin typeface="Noto Sans"/>
+              </a:rPr>
+              <a:t>No diagnosis · no autonomous transfers · synthetic demo inventory · explicit assumptions · coordinator sign-off</a:t>
+            </a:r>
+          </a:p>
+        </p:txBody>
+      </p:sp>
+      <p:sp>
+        <p:nvSpPr>
+          <p:cNvPr id="27" name="Rectangle 26"/>
+          <p:cNvSpPr/>
+          <p:nvPr/>
+        </p:nvSpPr>
+        <p:spPr>
+          <a:xfrm>
+            <a:off x="822960" y="5175504"/>
+            <a:ext cx="10332720" cy="36576"/>
+          </a:xfrm>
+          <a:prstGeom prst="rect">
+            <a:avLst/>
+          </a:prstGeom>
+          <a:solidFill>
+            <a:srgbClr val="F6BE4C"/>
+          </a:solidFill>
+          <a:ln>
+            <a:solidFill>
+              <a:srgbClr val="F6BE4C"/>
+            </a:solidFill>
+          </a:ln>
+        </p:spPr>
+        <p:style>
+          <a:lnRef idx="1">
+            <a:schemeClr val="accent1"/>
+          </a:lnRef>
+          <a:fillRef idx="3">
+            <a:schemeClr val="accent1"/>
+          </a:fillRef>
+          <a:effectRef idx="2">
+            <a:schemeClr val="accent1"/>
+          </a:effectRef>
+          <a:fontRef idx="minor">
+            <a:schemeClr val="lt1"/>
+          </a:fontRef>
+        </p:style>
+        <p:txBody>
+          <a:bodyPr rtlCol="0" anchor="ctr"/>
+          <a:lstStyle/>
+          <a:p>
+            <a:pPr algn="ctr"/>
+          </a:p>
+        </p:txBody>
+      </p:sp>
+      <p:sp>
+        <p:nvSpPr>
+          <p:cNvPr id="28" name="TextBox 27"/>
+          <p:cNvSpPr txBox="1"/>
+          <p:nvPr/>
+        </p:nvSpPr>
+        <p:spPr>
+          <a:xfrm>
+            <a:off x="502920" y="6519672"/>
+            <a:ext cx="1828800" cy="164592"/>
+          </a:xfrm>
+          <a:prstGeom prst="rect">
+            <a:avLst/>
+          </a:prstGeom>
+          <a:noFill/>
+        </p:spPr>
+        <p:txBody>
+          <a:bodyPr wrap="square" lIns="0" rIns="0" tIns="0" bIns="0" anchor="t">
+            <a:spAutoFit/>
+          </a:bodyPr>
+          <a:lstStyle/>
+          <a:p>
+            <a:pPr algn="l">
+              <a:lnSpc>
+                <a:spcPct val="100000"/>
+              </a:lnSpc>
+            </a:pPr>
+            <a:r>
+              <a:rPr sz="800" b="1">
+                <a:solidFill>
+                  <a:srgbClr val="AEBACC"/>
+                </a:solidFill>
+                <a:latin typeface="Noto Sans"/>
+              </a:rPr>
+              <a:t>MEDIMATCH  /  11</a:t>
+            </a:r>
+          </a:p>
+        </p:txBody>
+      </p:sp>
+      <p:sp>
+        <p:nvSpPr>
+          <p:cNvPr id="29" name="TextBox 28"/>
+          <p:cNvSpPr txBox="1"/>
+          <p:nvPr/>
+        </p:nvSpPr>
+        <p:spPr>
+          <a:xfrm>
+            <a:off x="2377440" y="6473952"/>
+            <a:ext cx="9281160" cy="256032"/>
+          </a:xfrm>
+          <a:prstGeom prst="rect">
+            <a:avLst/>
+          </a:prstGeom>
+          <a:noFill/>
+        </p:spPr>
+        <p:txBody>
+          <a:bodyPr wrap="square" lIns="0" rIns="0" tIns="0" bIns="0" anchor="t">
+            <a:spAutoFit/>
+          </a:bodyPr>
+          <a:lstStyle/>
+          <a:p>
+            <a:pPr algn="r">
+              <a:lnSpc>
+                <a:spcPct val="100000"/>
+              </a:lnSpc>
+            </a:pPr>
+            <a:r>
+              <a:rPr sz="750" b="0">
+                <a:solidFill>
+                  <a:srgbClr val="AEBACC"/>
+                </a:solidFill>
+                <a:latin typeface="Noto Sans"/>
+              </a:rPr>
+              <a:t>Production data layer: PostgreSQL 15 + PostGIS 3 · demo mode: in-memory mock DB</a:t>
+            </a:r>
+          </a:p>
+        </p:txBody>
+      </p:sp>
+    </p:spTree>
+  </p:cSld>
+  <p:clrMapOvr>
+    <a:masterClrMapping/>
+  </p:clrMapOvr>
+</p:sld>
+</file>
+
+<file path=ppt/slides/slide12.xml><?xml version="1.0" encoding="utf-8"?>
+<p:sld xmlns:a="http://schemas.openxmlformats.org/drawingml/2006/main" xmlns:p="http://schemas.openxmlformats.org/presentationml/2006/main" xmlns:r="http://schemas.openxmlformats.org/officeDocument/2006/relationships">
+  <p:cSld>
+    <p:spTree>
+      <p:nvGrpSpPr>
+        <p:cNvPr id="1" name=""/>
+        <p:cNvGrpSpPr/>
+        <p:nvPr/>
+      </p:nvGrpSpPr>
+      <p:grpSpPr/>
+      <p:sp>
+        <p:nvSpPr>
+          <p:cNvPr id="2" name="Rectangle 1"/>
+          <p:cNvSpPr/>
+          <p:nvPr/>
+        </p:nvSpPr>
+        <p:spPr>
+          <a:xfrm>
+            <a:off x="0" y="0"/>
+            <a:ext cx="12191695" cy="6858000"/>
+          </a:xfrm>
+          <a:prstGeom prst="rect">
+            <a:avLst/>
+          </a:prstGeom>
+          <a:solidFill>
+            <a:srgbClr val="070C18"/>
+          </a:solidFill>
+          <a:ln>
+            <a:solidFill>
+              <a:srgbClr val="070C18"/>
+            </a:solidFill>
+          </a:ln>
+        </p:spPr>
+        <p:style>
+          <a:lnRef idx="1">
+            <a:schemeClr val="accent1"/>
+          </a:lnRef>
+          <a:fillRef idx="3">
+            <a:schemeClr val="accent1"/>
+          </a:fillRef>
+          <a:effectRef idx="2">
+            <a:schemeClr val="accent1"/>
+          </a:effectRef>
+          <a:fontRef idx="minor">
+            <a:schemeClr val="lt1"/>
+          </a:fontRef>
+        </p:style>
+        <p:txBody>
+          <a:bodyPr rtlCol="0" anchor="ctr"/>
+          <a:lstStyle/>
+          <a:p>
+            <a:pPr algn="ctr"/>
+          </a:p>
+        </p:txBody>
+      </p:sp>
+      <p:sp>
+        <p:nvSpPr>
+          <p:cNvPr id="3" name="TextBox 2"/>
+          <p:cNvSpPr txBox="1"/>
+          <p:nvPr/>
+        </p:nvSpPr>
+        <p:spPr>
+          <a:xfrm>
+            <a:off x="502920" y="320040"/>
+            <a:ext cx="6400800" cy="256032"/>
+          </a:xfrm>
+          <a:prstGeom prst="rect">
+            <a:avLst/>
+          </a:prstGeom>
+          <a:noFill/>
+        </p:spPr>
+        <p:txBody>
+          <a:bodyPr wrap="square" lIns="0" rIns="0" tIns="0" bIns="0" anchor="t">
+            <a:spAutoFit/>
+          </a:bodyPr>
+          <a:lstStyle/>
+          <a:p>
+            <a:pPr algn="l">
+              <a:lnSpc>
+                <a:spcPct val="100000"/>
+              </a:lnSpc>
+            </a:pPr>
+            <a:r>
+              <a:rPr sz="1000" b="1">
+                <a:solidFill>
+                  <a:srgbClr val="F6BE4C"/>
+                </a:solidFill>
+                <a:latin typeface="Noto Sans"/>
+              </a:rPr>
+              <a:t>11  /  CLOSING</a:t>
+            </a:r>
+          </a:p>
+        </p:txBody>
+      </p:sp>
+      <p:sp>
+        <p:nvSpPr>
+          <p:cNvPr id="4" name="TextBox 3"/>
+          <p:cNvSpPr txBox="1"/>
+          <p:nvPr/>
+        </p:nvSpPr>
+        <p:spPr>
+          <a:xfrm>
+            <a:off x="548640" y="960120"/>
+            <a:ext cx="7315200" cy="1417320"/>
+          </a:xfrm>
+          <a:prstGeom prst="rect">
+            <a:avLst/>
+          </a:prstGeom>
+          <a:noFill/>
+        </p:spPr>
+        <p:txBody>
+          <a:bodyPr wrap="square" lIns="0" rIns="0" tIns="0" bIns="0" anchor="t">
+            <a:spAutoFit/>
+          </a:bodyPr>
+          <a:lstStyle/>
+          <a:p>
+            <a:pPr algn="l"/>
+            <a:r>
+              <a:rPr sz="3500" b="1">
+                <a:solidFill>
+                  <a:srgbClr val="F8F3E7"/>
+                </a:solidFill>
+                <a:latin typeface="Noto Sans"/>
+              </a:rPr>
+              <a:t>Location is not just a field.
+</a:t>
+            </a:r>
+            <a:r>
+              <a:rPr sz="3500" b="1">
+                <a:solidFill>
+                  <a:srgbClr val="43D5AE"/>
+                </a:solidFill>
+                <a:latin typeface="Noto Sans"/>
+              </a:rPr>
+              <a:t>It is a coordination advantage.</a:t>
+            </a:r>
+          </a:p>
+        </p:txBody>
+      </p:sp>
+      <p:sp>
+        <p:nvSpPr>
+          <p:cNvPr id="5" name="Rectangle 4"/>
+          <p:cNvSpPr/>
+          <p:nvPr/>
+        </p:nvSpPr>
+        <p:spPr>
+          <a:xfrm>
+            <a:off x="594360" y="2697480"/>
+            <a:ext cx="82296" cy="457200"/>
+          </a:xfrm>
+          <a:prstGeom prst="rect">
+            <a:avLst/>
+          </a:prstGeom>
+          <a:solidFill>
+            <a:srgbClr val="43D5AE"/>
+          </a:solidFill>
+          <a:ln>
+            <a:solidFill>
+              <a:srgbClr val="43D5AE"/>
+            </a:solidFill>
+          </a:ln>
+        </p:spPr>
+        <p:style>
+          <a:lnRef idx="1">
+            <a:schemeClr val="accent1"/>
+          </a:lnRef>
+          <a:fillRef idx="3">
+            <a:schemeClr val="accent1"/>
+          </a:fillRef>
+          <a:effectRef idx="2">
+            <a:schemeClr val="accent1"/>
+          </a:effectRef>
+          <a:fontRef idx="minor">
+            <a:schemeClr val="lt1"/>
+          </a:fontRef>
+        </p:style>
+        <p:txBody>
+          <a:bodyPr rtlCol="0" anchor="ctr"/>
+          <a:lstStyle/>
+          <a:p>
+            <a:pPr algn="ctr"/>
+          </a:p>
+        </p:txBody>
+      </p:sp>
+      <p:sp>
+        <p:nvSpPr>
+          <p:cNvPr id="6" name="TextBox 5"/>
+          <p:cNvSpPr txBox="1"/>
+          <p:nvPr/>
+        </p:nvSpPr>
+        <p:spPr>
+          <a:xfrm>
+            <a:off x="841248" y="2679192"/>
+            <a:ext cx="2103120" cy="274320"/>
+          </a:xfrm>
+          <a:prstGeom prst="rect">
+            <a:avLst/>
+          </a:prstGeom>
+          <a:noFill/>
+        </p:spPr>
+        <p:txBody>
+          <a:bodyPr wrap="square" lIns="0" rIns="0" tIns="0" bIns="0" anchor="t">
+            <a:spAutoFit/>
+          </a:bodyPr>
+          <a:lstStyle/>
+          <a:p>
+            <a:pPr algn="l">
+              <a:lnSpc>
+                <a:spcPct val="100000"/>
+              </a:lnSpc>
+            </a:pPr>
+            <a:r>
+              <a:rPr sz="1500" b="1">
+                <a:solidFill>
+                  <a:srgbClr val="F8F3E7"/>
+                </a:solidFill>
+                <a:latin typeface="Noto Sans"/>
+              </a:rPr>
+              <a:t>Evidence-based</a:t>
+            </a:r>
+          </a:p>
+        </p:txBody>
+      </p:sp>
+      <p:sp>
+        <p:nvSpPr>
+          <p:cNvPr id="7" name="TextBox 6"/>
+          <p:cNvSpPr txBox="1"/>
+          <p:nvPr/>
+        </p:nvSpPr>
+        <p:spPr>
+          <a:xfrm>
+            <a:off x="841248" y="2935224"/>
+            <a:ext cx="4937760" cy="274320"/>
+          </a:xfrm>
+          <a:prstGeom prst="rect">
+            <a:avLst/>
+          </a:prstGeom>
+          <a:noFill/>
+        </p:spPr>
+        <p:txBody>
+          <a:bodyPr wrap="square" lIns="0" rIns="0" tIns="0" bIns="0" anchor="t">
+            <a:spAutoFit/>
+          </a:bodyPr>
+          <a:lstStyle/>
+          <a:p>
+            <a:pPr algn="l">
+              <a:lnSpc>
+                <a:spcPct val="100000"/>
+              </a:lnSpc>
+            </a:pPr>
+            <a:r>
+              <a:rPr sz="1200" b="0">
+                <a:solidFill>
+                  <a:srgbClr val="AEBACC"/>
+                </a:solidFill>
+                <a:latin typeface="Noto Sans"/>
+              </a:rPr>
+              <a:t>64 healthcare professionals quantified the coordination gap.</a:t>
+            </a:r>
+          </a:p>
+        </p:txBody>
+      </p:sp>
+      <p:sp>
+        <p:nvSpPr>
+          <p:cNvPr id="8" name="Rectangle 7"/>
+          <p:cNvSpPr/>
+          <p:nvPr/>
+        </p:nvSpPr>
+        <p:spPr>
+          <a:xfrm>
+            <a:off x="594360" y="3355848"/>
+            <a:ext cx="82296" cy="457200"/>
+          </a:xfrm>
+          <a:prstGeom prst="rect">
+            <a:avLst/>
+          </a:prstGeom>
+          <a:solidFill>
+            <a:srgbClr val="43D5AE"/>
+          </a:solidFill>
+          <a:ln>
+            <a:solidFill>
+              <a:srgbClr val="43D5AE"/>
+            </a:solidFill>
+          </a:ln>
+        </p:spPr>
+        <p:style>
+          <a:lnRef idx="1">
+            <a:schemeClr val="accent1"/>
+          </a:lnRef>
+          <a:fillRef idx="3">
+            <a:schemeClr val="accent1"/>
+          </a:fillRef>
+          <a:effectRef idx="2">
+            <a:schemeClr val="accent1"/>
+          </a:effectRef>
+          <a:fontRef idx="minor">
+            <a:schemeClr val="lt1"/>
+          </a:fontRef>
+        </p:style>
+        <p:txBody>
+          <a:bodyPr rtlCol="0" anchor="ctr"/>
+          <a:lstStyle/>
+          <a:p>
+            <a:pPr algn="ctr"/>
+          </a:p>
+        </p:txBody>
+      </p:sp>
+      <p:sp>
+        <p:nvSpPr>
+          <p:cNvPr id="9" name="TextBox 8"/>
+          <p:cNvSpPr txBox="1"/>
+          <p:nvPr/>
+        </p:nvSpPr>
+        <p:spPr>
+          <a:xfrm>
+            <a:off x="841248" y="3337560"/>
+            <a:ext cx="2103120" cy="274320"/>
+          </a:xfrm>
+          <a:prstGeom prst="rect">
+            <a:avLst/>
+          </a:prstGeom>
+          <a:noFill/>
+        </p:spPr>
+        <p:txBody>
+          <a:bodyPr wrap="square" lIns="0" rIns="0" tIns="0" bIns="0" anchor="t">
+            <a:spAutoFit/>
+          </a:bodyPr>
+          <a:lstStyle/>
+          <a:p>
+            <a:pPr algn="l">
+              <a:lnSpc>
+                <a:spcPct val="100000"/>
+              </a:lnSpc>
+            </a:pPr>
+            <a:r>
+              <a:rPr sz="1500" b="1">
+                <a:solidFill>
+                  <a:srgbClr val="F8F3E7"/>
+                </a:solidFill>
+                <a:latin typeface="Noto Sans"/>
+              </a:rPr>
+              <a:t>Location-aware</a:t>
+            </a:r>
+          </a:p>
+        </p:txBody>
+      </p:sp>
+      <p:sp>
+        <p:nvSpPr>
+          <p:cNvPr id="10" name="TextBox 9"/>
+          <p:cNvSpPr txBox="1"/>
+          <p:nvPr/>
+        </p:nvSpPr>
+        <p:spPr>
+          <a:xfrm>
+            <a:off x="841248" y="3593591"/>
+            <a:ext cx="4937760" cy="274320"/>
+          </a:xfrm>
+          <a:prstGeom prst="rect">
+            <a:avLst/>
+          </a:prstGeom>
+          <a:noFill/>
+        </p:spPr>
+        <p:txBody>
+          <a:bodyPr wrap="square" lIns="0" rIns="0" tIns="0" bIns="0" anchor="t">
+            <a:spAutoFit/>
+          </a:bodyPr>
+          <a:lstStyle/>
+          <a:p>
+            <a:pPr algn="l">
+              <a:lnSpc>
+                <a:spcPct val="100000"/>
+              </a:lnSpc>
+            </a:pPr>
+            <a:r>
+              <a:rPr sz="1200" b="0">
+                <a:solidFill>
+                  <a:srgbClr val="AEBACC"/>
+                </a:solidFill>
+                <a:latin typeface="Noto Sans"/>
+              </a:rPr>
+              <a:t>Real-time, road-routed matching of surplus to urgent need.</a:t>
+            </a:r>
+          </a:p>
+        </p:txBody>
+      </p:sp>
+      <p:sp>
+        <p:nvSpPr>
+          <p:cNvPr id="11" name="Rectangle 10"/>
+          <p:cNvSpPr/>
+          <p:nvPr/>
+        </p:nvSpPr>
+        <p:spPr>
+          <a:xfrm>
+            <a:off x="594360" y="4014216"/>
+            <a:ext cx="82296" cy="457200"/>
+          </a:xfrm>
+          <a:prstGeom prst="rect">
+            <a:avLst/>
+          </a:prstGeom>
+          <a:solidFill>
+            <a:srgbClr val="43D5AE"/>
+          </a:solidFill>
+          <a:ln>
+            <a:solidFill>
+              <a:srgbClr val="43D5AE"/>
+            </a:solidFill>
+          </a:ln>
+        </p:spPr>
+        <p:style>
+          <a:lnRef idx="1">
+            <a:schemeClr val="accent1"/>
+          </a:lnRef>
+          <a:fillRef idx="3">
+            <a:schemeClr val="accent1"/>
+          </a:fillRef>
+          <a:effectRef idx="2">
+            <a:schemeClr val="accent1"/>
+          </a:effectRef>
+          <a:fontRef idx="minor">
+            <a:schemeClr val="lt1"/>
+          </a:fontRef>
+        </p:style>
+        <p:txBody>
+          <a:bodyPr rtlCol="0" anchor="ctr"/>
+          <a:lstStyle/>
+          <a:p>
+            <a:pPr algn="ctr"/>
+          </a:p>
+        </p:txBody>
+      </p:sp>
+      <p:sp>
+        <p:nvSpPr>
+          <p:cNvPr id="12" name="TextBox 11"/>
+          <p:cNvSpPr txBox="1"/>
+          <p:nvPr/>
+        </p:nvSpPr>
+        <p:spPr>
+          <a:xfrm>
+            <a:off x="841248" y="3995928"/>
+            <a:ext cx="2103120" cy="274320"/>
+          </a:xfrm>
+          <a:prstGeom prst="rect">
+            <a:avLst/>
+          </a:prstGeom>
+          <a:noFill/>
+        </p:spPr>
+        <p:txBody>
+          <a:bodyPr wrap="square" lIns="0" rIns="0" tIns="0" bIns="0" anchor="t">
+            <a:spAutoFit/>
+          </a:bodyPr>
+          <a:lstStyle/>
+          <a:p>
+            <a:pPr algn="l">
+              <a:lnSpc>
+                <a:spcPct val="100000"/>
+              </a:lnSpc>
+            </a:pPr>
+            <a:r>
+              <a:rPr sz="1500" b="1">
+                <a:solidFill>
+                  <a:srgbClr val="F8F3E7"/>
+                </a:solidFill>
+                <a:latin typeface="Noto Sans"/>
+              </a:rPr>
+              <a:t>Explainable</a:t>
+            </a:r>
+          </a:p>
+        </p:txBody>
+      </p:sp>
+      <p:sp>
+        <p:nvSpPr>
+          <p:cNvPr id="13" name="TextBox 12"/>
+          <p:cNvSpPr txBox="1"/>
+          <p:nvPr/>
+        </p:nvSpPr>
+        <p:spPr>
+          <a:xfrm>
+            <a:off x="841248" y="4251960"/>
+            <a:ext cx="4937760" cy="274320"/>
+          </a:xfrm>
+          <a:prstGeom prst="rect">
+            <a:avLst/>
+          </a:prstGeom>
+          <a:noFill/>
+        </p:spPr>
+        <p:txBody>
+          <a:bodyPr wrap="square" lIns="0" rIns="0" tIns="0" bIns="0" anchor="t">
+            <a:spAutoFit/>
+          </a:bodyPr>
+          <a:lstStyle/>
+          <a:p>
+            <a:pPr algn="l">
+              <a:lnSpc>
+                <a:spcPct val="100000"/>
+              </a:lnSpc>
+            </a:pPr>
+            <a:r>
+              <a:rPr sz="1200" b="0">
+                <a:solidFill>
+                  <a:srgbClr val="AEBACC"/>
+                </a:solidFill>
+                <a:latin typeface="Noto Sans"/>
+              </a:rPr>
+              <a:t>Transparent, multi-factor scoring — no black box.</a:t>
+            </a:r>
+          </a:p>
+        </p:txBody>
+      </p:sp>
+      <p:sp>
+        <p:nvSpPr>
+          <p:cNvPr id="14" name="Rectangle 13"/>
+          <p:cNvSpPr/>
+          <p:nvPr/>
+        </p:nvSpPr>
+        <p:spPr>
+          <a:xfrm>
+            <a:off x="594360" y="4672584"/>
+            <a:ext cx="82296" cy="457200"/>
+          </a:xfrm>
+          <a:prstGeom prst="rect">
+            <a:avLst/>
+          </a:prstGeom>
+          <a:solidFill>
+            <a:srgbClr val="43D5AE"/>
+          </a:solidFill>
+          <a:ln>
+            <a:solidFill>
+              <a:srgbClr val="43D5AE"/>
+            </a:solidFill>
+          </a:ln>
+        </p:spPr>
+        <p:style>
+          <a:lnRef idx="1">
+            <a:schemeClr val="accent1"/>
+          </a:lnRef>
+          <a:fillRef idx="3">
+            <a:schemeClr val="accent1"/>
+          </a:fillRef>
+          <a:effectRef idx="2">
+            <a:schemeClr val="accent1"/>
+          </a:effectRef>
+          <a:fontRef idx="minor">
+            <a:schemeClr val="lt1"/>
+          </a:fontRef>
+        </p:style>
+        <p:txBody>
+          <a:bodyPr rtlCol="0" anchor="ctr"/>
+          <a:lstStyle/>
+          <a:p>
+            <a:pPr algn="ctr"/>
+          </a:p>
+        </p:txBody>
+      </p:sp>
+      <p:sp>
+        <p:nvSpPr>
+          <p:cNvPr id="15" name="TextBox 14"/>
+          <p:cNvSpPr txBox="1"/>
+          <p:nvPr/>
+        </p:nvSpPr>
+        <p:spPr>
+          <a:xfrm>
+            <a:off x="841248" y="4654296"/>
+            <a:ext cx="2103120" cy="274320"/>
+          </a:xfrm>
+          <a:prstGeom prst="rect">
+            <a:avLst/>
+          </a:prstGeom>
+          <a:noFill/>
+        </p:spPr>
+        <p:txBody>
+          <a:bodyPr wrap="square" lIns="0" rIns="0" tIns="0" bIns="0" anchor="t">
+            <a:spAutoFit/>
+          </a:bodyPr>
+          <a:lstStyle/>
+          <a:p>
+            <a:pPr algn="l">
+              <a:lnSpc>
+                <a:spcPct val="100000"/>
+              </a:lnSpc>
+            </a:pPr>
+            <a:r>
+              <a:rPr sz="1500" b="1">
+                <a:solidFill>
+                  <a:srgbClr val="F8F3E7"/>
+                </a:solidFill>
+                <a:latin typeface="Noto Sans"/>
+              </a:rPr>
+              <a:t>Human-governed</a:t>
+            </a:r>
+          </a:p>
+        </p:txBody>
+      </p:sp>
+      <p:sp>
+        <p:nvSpPr>
+          <p:cNvPr id="16" name="TextBox 15"/>
+          <p:cNvSpPr txBox="1"/>
+          <p:nvPr/>
+        </p:nvSpPr>
+        <p:spPr>
+          <a:xfrm>
+            <a:off x="841248" y="4910328"/>
+            <a:ext cx="4937760" cy="274320"/>
+          </a:xfrm>
+          <a:prstGeom prst="rect">
+            <a:avLst/>
+          </a:prstGeom>
+          <a:noFill/>
+        </p:spPr>
+        <p:txBody>
+          <a:bodyPr wrap="square" lIns="0" rIns="0" tIns="0" bIns="0" anchor="t">
+            <a:spAutoFit/>
+          </a:bodyPr>
+          <a:lstStyle/>
+          <a:p>
+            <a:pPr algn="l">
+              <a:lnSpc>
+                <a:spcPct val="100000"/>
+              </a:lnSpc>
+            </a:pPr>
+            <a:r>
+              <a:rPr sz="1200" b="0">
+                <a:solidFill>
+                  <a:srgbClr val="AEBACC"/>
+                </a:solidFill>
+                <a:latin typeface="Noto Sans"/>
+              </a:rPr>
+              <a:t>Coordinator verification before every transfer.</a:t>
+            </a:r>
+          </a:p>
+        </p:txBody>
+      </p:sp>
+      <p:sp>
+        <p:nvSpPr>
+          <p:cNvPr id="17" name="Rounded Rectangle 16"/>
+          <p:cNvSpPr/>
+          <p:nvPr/>
+        </p:nvSpPr>
+        <p:spPr>
+          <a:xfrm>
+            <a:off x="6492240" y="2514600"/>
+            <a:ext cx="4983480" cy="2743200"/>
+          </a:xfrm>
+          <a:prstGeom prst="roundRect">
+            <a:avLst/>
+          </a:prstGeom>
+          <a:solidFill>
+            <a:srgbClr val="121D31"/>
+          </a:solidFill>
+          <a:ln>
+            <a:solidFill>
+              <a:srgbClr val="F6BE4C"/>
+            </a:solidFill>
+          </a:ln>
+        </p:spPr>
+        <p:style>
+          <a:lnRef idx="1">
+            <a:schemeClr val="accent1"/>
+          </a:lnRef>
+          <a:fillRef idx="3">
+            <a:schemeClr val="accent1"/>
+          </a:fillRef>
+          <a:effectRef idx="2">
+            <a:schemeClr val="accent1"/>
+          </a:effectRef>
+          <a:fontRef idx="minor">
+            <a:schemeClr val="lt1"/>
+          </a:fontRef>
+        </p:style>
+        <p:txBody>
+          <a:bodyPr rtlCol="0" anchor="ctr"/>
+          <a:lstStyle/>
+          <a:p>
+            <a:pPr algn="ctr"/>
+          </a:p>
+        </p:txBody>
+      </p:sp>
+      <p:sp>
+        <p:nvSpPr>
+          <p:cNvPr id="18" name="TextBox 17"/>
           <p:cNvSpPr txBox="1"/>
           <p:nvPr/>
         </p:nvSpPr>
@@ -5032,7 +5853,7 @@
       </p:sp>
       <p:sp>
         <p:nvSpPr>
-          <p:cNvPr id="9" name="TextBox 8"/>
+          <p:cNvPr id="19" name="TextBox 18"/>
           <p:cNvSpPr txBox="1"/>
           <p:nvPr/>
         </p:nvSpPr>
@@ -5072,7 +5893,7 @@
       </p:sp>
       <p:sp>
         <p:nvSpPr>
-          <p:cNvPr id="10" name="TextBox 9"/>
+          <p:cNvPr id="20" name="TextBox 19"/>
           <p:cNvSpPr txBox="1"/>
           <p:nvPr/>
         </p:nvSpPr>
@@ -5104,14 +5925,14 @@
                 </a:solidFill>
                 <a:latin typeface="Noto Sans"/>
               </a:rPr>
-              <a:t>Questions?</a:t>
-            </a:r>
-          </a:p>
-        </p:txBody>
-      </p:sp>
-      <p:sp>
-        <p:nvSpPr>
-          <p:cNvPr id="11" name="TextBox 10"/>
+              <a:t>Thank you</a:t>
+            </a:r>
+          </a:p>
+        </p:txBody>
+      </p:sp>
+      <p:sp>
+        <p:nvSpPr>
+          <p:cNvPr id="21" name="TextBox 20"/>
           <p:cNvSpPr txBox="1"/>
           <p:nvPr/>
         </p:nvSpPr>
@@ -5143,14 +5964,14 @@
                 </a:solidFill>
                 <a:latin typeface="Noto Sans"/>
               </a:rPr>
-              <a:t>MEDIMATCH  /  11</a:t>
-            </a:r>
-          </a:p>
-        </p:txBody>
-      </p:sp>
-      <p:sp>
-        <p:nvSpPr>
-          <p:cNvPr id="12" name="TextBox 11"/>
+              <a:t>MEDIMATCH  /  12</a:t>
+            </a:r>
+          </a:p>
+        </p:txBody>
+      </p:sp>
+      <p:sp>
+        <p:nvSpPr>
+          <p:cNvPr id="22" name="TextBox 21"/>
           <p:cNvSpPr txBox="1"/>
           <p:nvPr/>
         </p:nvSpPr>
@@ -6355,13 +7176,13 @@
               </a:lnSpc>
             </a:pPr>
             <a:r>
-              <a:rPr sz="2800" b="1">
+              <a:rPr sz="2700" b="1">
                 <a:solidFill>
                   <a:srgbClr val="F8F3E7"/>
                 </a:solidFill>
                 <a:latin typeface="Noto Sans"/>
               </a:rPr>
-              <a:t>We asked the people who run the supply rooms</a:t>
+              <a:t>Survey results from 64 healthcare professionals</a:t>
             </a:r>
           </a:p>
         </p:txBody>
@@ -6374,8 +7195,8 @@
         </p:nvSpPr>
         <p:spPr>
           <a:xfrm>
-            <a:off x="530352" y="1207008"/>
-            <a:ext cx="10972800" cy="320040"/>
+            <a:off x="530352" y="1060704"/>
+            <a:ext cx="10972800" cy="274320"/>
           </a:xfrm>
           <a:prstGeom prst="rect">
             <a:avLst/>
@@ -6394,13 +7215,13 @@
               </a:lnSpc>
             </a:pPr>
             <a:r>
-              <a:rPr sz="1400" b="1">
+              <a:rPr sz="1300" b="1">
                 <a:solidFill>
                   <a:srgbClr val="F6BE4C"/>
                 </a:solidFill>
                 <a:latin typeface="Noto Sans"/>
               </a:rPr>
-              <a:t>64 healthcare professionals across Nairobi County   ·   80% response rate   ·   2025 field study</a:t>
+              <a:t>Nairobi County field study  ·  80% response rate  ·  unedited Google Forms output</a:t>
             </a:r>
           </a:p>
         </p:txBody>
@@ -6413,14 +7234,14 @@
         </p:nvSpPr>
         <p:spPr>
           <a:xfrm>
-            <a:off x="530352" y="1783080"/>
-            <a:ext cx="10972800" cy="822960"/>
+            <a:off x="502920" y="1417320"/>
+            <a:ext cx="5440680" cy="1938528"/>
           </a:xfrm>
           <a:prstGeom prst="roundRect">
             <a:avLst/>
           </a:prstGeom>
           <a:solidFill>
-            <a:srgbClr val="121D31"/>
+            <a:srgbClr val="FFFFFF"/>
           </a:solidFill>
           <a:ln>
             <a:solidFill>
@@ -6450,22 +7271,46 @@
           </a:p>
         </p:txBody>
       </p:sp>
-      <p:sp>
-        <p:nvSpPr>
-          <p:cNvPr id="7" name="Rectangle 6"/>
+      <p:pic>
+        <p:nvPicPr>
+          <p:cNvPr id="7" name="Picture 6" descr="q4_stockouts.png"/>
+          <p:cNvPicPr>
+            <a:picLocks noChangeAspect="1"/>
+          </p:cNvPicPr>
+          <p:nvPr/>
+        </p:nvPicPr>
+        <p:blipFill>
+          <a:blip r:embed="rId2"/>
+          <a:stretch>
+            <a:fillRect/>
+          </a:stretch>
+        </p:blipFill>
+        <p:spPr>
+          <a:xfrm>
+            <a:off x="1136055" y="1508760"/>
+            <a:ext cx="4174410" cy="1755648"/>
+          </a:xfrm>
+          <a:prstGeom prst="rect">
+            <a:avLst/>
+          </a:prstGeom>
+        </p:spPr>
+      </p:pic>
+      <p:sp>
+        <p:nvSpPr>
+          <p:cNvPr id="8" name="Rounded Rectangle 7"/>
           <p:cNvSpPr/>
           <p:nvPr/>
         </p:nvSpPr>
         <p:spPr>
           <a:xfrm>
-            <a:off x="530352" y="1783080"/>
-            <a:ext cx="73152" cy="822960"/>
-          </a:xfrm>
-          <a:prstGeom prst="rect">
+            <a:off x="502920" y="3355848"/>
+            <a:ext cx="5440680" cy="310896"/>
+          </a:xfrm>
+          <a:prstGeom prst="roundRect">
             <a:avLst/>
           </a:prstGeom>
           <a:solidFill>
-            <a:srgbClr val="FF7744"/>
+            <a:srgbClr val="121D31"/>
           </a:solidFill>
           <a:ln>
             <a:solidFill>
@@ -6497,14 +7342,14 @@
       </p:sp>
       <p:sp>
         <p:nvSpPr>
-          <p:cNvPr id="8" name="TextBox 7"/>
-          <p:cNvSpPr txBox="1"/>
-          <p:nvPr/>
-        </p:nvSpPr>
-        <p:spPr>
-          <a:xfrm>
-            <a:off x="749808" y="1920240"/>
-            <a:ext cx="1874519" cy="566928"/>
+          <p:cNvPr id="9" name="TextBox 8"/>
+          <p:cNvSpPr txBox="1"/>
+          <p:nvPr/>
+        </p:nvSpPr>
+        <p:spPr>
+          <a:xfrm>
+            <a:off x="612648" y="3392424"/>
+            <a:ext cx="5221224" cy="237744"/>
           </a:xfrm>
           <a:prstGeom prst="rect">
             <a:avLst/>
@@ -6517,58 +7362,19 @@
           </a:bodyPr>
           <a:lstStyle/>
           <a:p>
-            <a:pPr algn="l">
+            <a:pPr algn="ctr">
               <a:lnSpc>
                 <a:spcPct val="100000"/>
               </a:lnSpc>
             </a:pPr>
             <a:r>
-              <a:rPr sz="3000" b="1">
+              <a:rPr sz="1150" b="1">
                 <a:solidFill>
                   <a:srgbClr val="FF7744"/>
                 </a:solidFill>
                 <a:latin typeface="Noto Sans"/>
               </a:rPr>
-              <a:t>56.3%</a:t>
-            </a:r>
-          </a:p>
-        </p:txBody>
-      </p:sp>
-      <p:sp>
-        <p:nvSpPr>
-          <p:cNvPr id="9" name="TextBox 8"/>
-          <p:cNvSpPr txBox="1"/>
-          <p:nvPr/>
-        </p:nvSpPr>
-        <p:spPr>
-          <a:xfrm>
-            <a:off x="2743200" y="1783080"/>
-            <a:ext cx="8595360" cy="822960"/>
-          </a:xfrm>
-          <a:prstGeom prst="rect">
-            <a:avLst/>
-          </a:prstGeom>
-          <a:noFill/>
-        </p:spPr>
-        <p:txBody>
-          <a:bodyPr wrap="square" lIns="0" rIns="0" tIns="0" bIns="0" anchor="ctr">
-            <a:spAutoFit/>
-          </a:bodyPr>
-          <a:lstStyle/>
-          <a:p>
-            <a:pPr algn="l">
-              <a:lnSpc>
-                <a:spcPct val="100000"/>
-              </a:lnSpc>
-            </a:pPr>
-            <a:r>
-              <a:rPr sz="1500" b="0">
-                <a:solidFill>
-                  <a:srgbClr val="F8F3E7"/>
-                </a:solidFill>
-                <a:latin typeface="Noto Sans"/>
-              </a:rPr>
-              <a:t>experience stockouts of essential items on a weekly or monthly basis</a:t>
+              <a:t>56.3% face weekly or monthly stockouts</a:t>
             </a:r>
           </a:p>
         </p:txBody>
@@ -6581,14 +7387,14 @@
         </p:nvSpPr>
         <p:spPr>
           <a:xfrm>
-            <a:off x="530352" y="2715768"/>
-            <a:ext cx="10972800" cy="822960"/>
+            <a:off x="6245352" y="1417320"/>
+            <a:ext cx="5440680" cy="1938528"/>
           </a:xfrm>
           <a:prstGeom prst="roundRect">
             <a:avLst/>
           </a:prstGeom>
           <a:solidFill>
-            <a:srgbClr val="121D31"/>
+            <a:srgbClr val="FFFFFF"/>
           </a:solidFill>
           <a:ln>
             <a:solidFill>
@@ -6618,22 +7424,46 @@
           </a:p>
         </p:txBody>
       </p:sp>
-      <p:sp>
-        <p:nvSpPr>
-          <p:cNvPr id="11" name="Rectangle 10"/>
+      <p:pic>
+        <p:nvPicPr>
+          <p:cNvPr id="11" name="Picture 10" descr="q6_effectiveness.png"/>
+          <p:cNvPicPr>
+            <a:picLocks noChangeAspect="1"/>
+          </p:cNvPicPr>
+          <p:nvPr/>
+        </p:nvPicPr>
+        <p:blipFill>
+          <a:blip r:embed="rId3"/>
+          <a:stretch>
+            <a:fillRect/>
+          </a:stretch>
+        </p:blipFill>
+        <p:spPr>
+          <a:xfrm>
+            <a:off x="7029873" y="1508760"/>
+            <a:ext cx="3871637" cy="1755648"/>
+          </a:xfrm>
+          <a:prstGeom prst="rect">
+            <a:avLst/>
+          </a:prstGeom>
+        </p:spPr>
+      </p:pic>
+      <p:sp>
+        <p:nvSpPr>
+          <p:cNvPr id="12" name="Rounded Rectangle 11"/>
           <p:cNvSpPr/>
           <p:nvPr/>
         </p:nvSpPr>
         <p:spPr>
           <a:xfrm>
-            <a:off x="530352" y="2715768"/>
-            <a:ext cx="73152" cy="822960"/>
-          </a:xfrm>
-          <a:prstGeom prst="rect">
+            <a:off x="6245352" y="3355848"/>
+            <a:ext cx="5440680" cy="310896"/>
+          </a:xfrm>
+          <a:prstGeom prst="roundRect">
             <a:avLst/>
           </a:prstGeom>
           <a:solidFill>
-            <a:srgbClr val="F6BE4C"/>
+            <a:srgbClr val="121D31"/>
           </a:solidFill>
           <a:ln>
             <a:solidFill>
@@ -6665,14 +7495,14 @@
       </p:sp>
       <p:sp>
         <p:nvSpPr>
-          <p:cNvPr id="12" name="TextBox 11"/>
-          <p:cNvSpPr txBox="1"/>
-          <p:nvPr/>
-        </p:nvSpPr>
-        <p:spPr>
-          <a:xfrm>
-            <a:off x="749808" y="2852927"/>
-            <a:ext cx="1874519" cy="566928"/>
+          <p:cNvPr id="13" name="TextBox 12"/>
+          <p:cNvSpPr txBox="1"/>
+          <p:nvPr/>
+        </p:nvSpPr>
+        <p:spPr>
+          <a:xfrm>
+            <a:off x="6355080" y="3392424"/>
+            <a:ext cx="5221224" cy="237744"/>
           </a:xfrm>
           <a:prstGeom prst="rect">
             <a:avLst/>
@@ -6685,58 +7515,19 @@
           </a:bodyPr>
           <a:lstStyle/>
           <a:p>
-            <a:pPr algn="l">
+            <a:pPr algn="ctr">
               <a:lnSpc>
                 <a:spcPct val="100000"/>
               </a:lnSpc>
             </a:pPr>
             <a:r>
-              <a:rPr sz="3000" b="1">
+              <a:rPr sz="1150" b="1">
                 <a:solidFill>
                   <a:srgbClr val="F6BE4C"/>
                 </a:solidFill>
                 <a:latin typeface="Noto Sans"/>
               </a:rPr>
-              <a:t>82.8%</a:t>
-            </a:r>
-          </a:p>
-        </p:txBody>
-      </p:sp>
-      <p:sp>
-        <p:nvSpPr>
-          <p:cNvPr id="13" name="TextBox 12"/>
-          <p:cNvSpPr txBox="1"/>
-          <p:nvPr/>
-        </p:nvSpPr>
-        <p:spPr>
-          <a:xfrm>
-            <a:off x="2743200" y="2715768"/>
-            <a:ext cx="8595360" cy="822960"/>
-          </a:xfrm>
-          <a:prstGeom prst="rect">
-            <a:avLst/>
-          </a:prstGeom>
-          <a:noFill/>
-        </p:spPr>
-        <p:txBody>
-          <a:bodyPr wrap="square" lIns="0" rIns="0" tIns="0" bIns="0" anchor="ctr">
-            <a:spAutoFit/>
-          </a:bodyPr>
-          <a:lstStyle/>
-          <a:p>
-            <a:pPr algn="l">
-              <a:lnSpc>
-                <a:spcPct val="100000"/>
-              </a:lnSpc>
-            </a:pPr>
-            <a:r>
-              <a:rPr sz="1500" b="0">
-                <a:solidFill>
-                  <a:srgbClr val="F8F3E7"/>
-                </a:solidFill>
-                <a:latin typeface="Noto Sans"/>
-              </a:rPr>
-              <a:t>rate current manual, ad-hoc redistribution as “ineffective” or “slow”</a:t>
+              <a:t>82.8% rate current methods ineffective or slow</a:t>
             </a:r>
           </a:p>
         </p:txBody>
@@ -6749,14 +7540,14 @@
         </p:nvSpPr>
         <p:spPr>
           <a:xfrm>
-            <a:off x="530352" y="3648456"/>
-            <a:ext cx="10972800" cy="822960"/>
+            <a:off x="502920" y="3913632"/>
+            <a:ext cx="5440680" cy="1938528"/>
           </a:xfrm>
           <a:prstGeom prst="roundRect">
             <a:avLst/>
           </a:prstGeom>
           <a:solidFill>
-            <a:srgbClr val="121D31"/>
+            <a:srgbClr val="FFFFFF"/>
           </a:solidFill>
           <a:ln>
             <a:solidFill>
@@ -6786,22 +7577,46 @@
           </a:p>
         </p:txBody>
       </p:sp>
-      <p:sp>
-        <p:nvSpPr>
-          <p:cNvPr id="15" name="Rectangle 14"/>
+      <p:pic>
+        <p:nvPicPr>
+          <p:cNvPr id="15" name="Picture 14" descr="q7_challenges.png"/>
+          <p:cNvPicPr>
+            <a:picLocks noChangeAspect="1"/>
+          </p:cNvPicPr>
+          <p:nvPr/>
+        </p:nvPicPr>
+        <p:blipFill>
+          <a:blip r:embed="rId4"/>
+          <a:stretch>
+            <a:fillRect/>
+          </a:stretch>
+        </p:blipFill>
+        <p:spPr>
+          <a:xfrm>
+            <a:off x="1378539" y="4005072"/>
+            <a:ext cx="3689442" cy="1755648"/>
+          </a:xfrm>
+          <a:prstGeom prst="rect">
+            <a:avLst/>
+          </a:prstGeom>
+        </p:spPr>
+      </p:pic>
+      <p:sp>
+        <p:nvSpPr>
+          <p:cNvPr id="16" name="Rounded Rectangle 15"/>
           <p:cNvSpPr/>
           <p:nvPr/>
         </p:nvSpPr>
         <p:spPr>
           <a:xfrm>
-            <a:off x="530352" y="3648456"/>
-            <a:ext cx="73152" cy="822960"/>
-          </a:xfrm>
-          <a:prstGeom prst="rect">
+            <a:off x="502920" y="5852160"/>
+            <a:ext cx="5440680" cy="310896"/>
+          </a:xfrm>
+          <a:prstGeom prst="roundRect">
             <a:avLst/>
           </a:prstGeom>
           <a:solidFill>
-            <a:srgbClr val="FF5B66"/>
+            <a:srgbClr val="121D31"/>
           </a:solidFill>
           <a:ln>
             <a:solidFill>
@@ -6833,14 +7648,14 @@
       </p:sp>
       <p:sp>
         <p:nvSpPr>
-          <p:cNvPr id="16" name="TextBox 15"/>
-          <p:cNvSpPr txBox="1"/>
-          <p:nvPr/>
-        </p:nvSpPr>
-        <p:spPr>
-          <a:xfrm>
-            <a:off x="749808" y="3785616"/>
-            <a:ext cx="1874519" cy="566928"/>
+          <p:cNvPr id="17" name="TextBox 16"/>
+          <p:cNvSpPr txBox="1"/>
+          <p:nvPr/>
+        </p:nvSpPr>
+        <p:spPr>
+          <a:xfrm>
+            <a:off x="612648" y="5888736"/>
+            <a:ext cx="5221224" cy="237744"/>
           </a:xfrm>
           <a:prstGeom prst="rect">
             <a:avLst/>
@@ -6853,58 +7668,19 @@
           </a:bodyPr>
           <a:lstStyle/>
           <a:p>
-            <a:pPr algn="l">
+            <a:pPr algn="ctr">
               <a:lnSpc>
                 <a:spcPct val="100000"/>
               </a:lnSpc>
             </a:pPr>
             <a:r>
-              <a:rPr sz="3000" b="1">
+              <a:rPr sz="1150" b="1">
                 <a:solidFill>
                   <a:srgbClr val="FF5B66"/>
                 </a:solidFill>
                 <a:latin typeface="Noto Sans"/>
               </a:rPr>
-              <a:t>57.8%</a:t>
-            </a:r>
-          </a:p>
-        </p:txBody>
-      </p:sp>
-      <p:sp>
-        <p:nvSpPr>
-          <p:cNvPr id="17" name="TextBox 16"/>
-          <p:cNvSpPr txBox="1"/>
-          <p:nvPr/>
-        </p:nvSpPr>
-        <p:spPr>
-          <a:xfrm>
-            <a:off x="2743200" y="3648456"/>
-            <a:ext cx="8595360" cy="822960"/>
-          </a:xfrm>
-          <a:prstGeom prst="rect">
-            <a:avLst/>
-          </a:prstGeom>
-          <a:noFill/>
-        </p:spPr>
-        <p:txBody>
-          <a:bodyPr wrap="square" lIns="0" rIns="0" tIns="0" bIns="0" anchor="ctr">
-            <a:spAutoFit/>
-          </a:bodyPr>
-          <a:lstStyle/>
-          <a:p>
-            <a:pPr algn="l">
-              <a:lnSpc>
-                <a:spcPct val="100000"/>
-              </a:lnSpc>
-            </a:pPr>
-            <a:r>
-              <a:rPr sz="1500" b="0">
-                <a:solidFill>
-                  <a:srgbClr val="F8F3E7"/>
-                </a:solidFill>
-                <a:latin typeface="Noto Sans"/>
-              </a:rPr>
-              <a:t>identify the wastage of valid medical supplies as a primary operational challenge</a:t>
+              <a:t>57.8% cite wastage of valid supplies</a:t>
             </a:r>
           </a:p>
         </p:txBody>
@@ -6917,14 +7693,14 @@
         </p:nvSpPr>
         <p:spPr>
           <a:xfrm>
-            <a:off x="530352" y="4581144"/>
-            <a:ext cx="10972800" cy="822960"/>
+            <a:off x="6245352" y="3913632"/>
+            <a:ext cx="5440680" cy="1938528"/>
           </a:xfrm>
           <a:prstGeom prst="roundRect">
             <a:avLst/>
           </a:prstGeom>
           <a:solidFill>
-            <a:srgbClr val="121D31"/>
+            <a:srgbClr val="FFFFFF"/>
           </a:solidFill>
           <a:ln>
             <a:solidFill>
@@ -6954,22 +7730,46 @@
           </a:p>
         </p:txBody>
       </p:sp>
-      <p:sp>
-        <p:nvSpPr>
-          <p:cNvPr id="19" name="Rectangle 18"/>
+      <p:pic>
+        <p:nvPicPr>
+          <p:cNvPr id="19" name="Picture 18" descr="q9_pilot.png"/>
+          <p:cNvPicPr>
+            <a:picLocks noChangeAspect="1"/>
+          </p:cNvPicPr>
+          <p:nvPr/>
+        </p:nvPicPr>
+        <p:blipFill>
+          <a:blip r:embed="rId5"/>
+          <a:stretch>
+            <a:fillRect/>
+          </a:stretch>
+        </p:blipFill>
+        <p:spPr>
+          <a:xfrm>
+            <a:off x="6878487" y="4005072"/>
+            <a:ext cx="4174410" cy="1755648"/>
+          </a:xfrm>
+          <a:prstGeom prst="rect">
+            <a:avLst/>
+          </a:prstGeom>
+        </p:spPr>
+      </p:pic>
+      <p:sp>
+        <p:nvSpPr>
+          <p:cNvPr id="20" name="Rounded Rectangle 19"/>
           <p:cNvSpPr/>
           <p:nvPr/>
         </p:nvSpPr>
         <p:spPr>
           <a:xfrm>
-            <a:off x="530352" y="4581144"/>
-            <a:ext cx="73152" cy="822960"/>
-          </a:xfrm>
-          <a:prstGeom prst="rect">
+            <a:off x="6245352" y="5852160"/>
+            <a:ext cx="5440680" cy="310896"/>
+          </a:xfrm>
+          <a:prstGeom prst="roundRect">
             <a:avLst/>
           </a:prstGeom>
           <a:solidFill>
-            <a:srgbClr val="43D5AE"/>
+            <a:srgbClr val="121D31"/>
           </a:solidFill>
           <a:ln>
             <a:solidFill>
@@ -7001,14 +7801,14 @@
       </p:sp>
       <p:sp>
         <p:nvSpPr>
-          <p:cNvPr id="20" name="TextBox 19"/>
-          <p:cNvSpPr txBox="1"/>
-          <p:nvPr/>
-        </p:nvSpPr>
-        <p:spPr>
-          <a:xfrm>
-            <a:off x="749808" y="4718304"/>
-            <a:ext cx="1874519" cy="566928"/>
+          <p:cNvPr id="21" name="TextBox 20"/>
+          <p:cNvSpPr txBox="1"/>
+          <p:nvPr/>
+        </p:nvSpPr>
+        <p:spPr>
+          <a:xfrm>
+            <a:off x="6355080" y="5888736"/>
+            <a:ext cx="5221224" cy="237744"/>
           </a:xfrm>
           <a:prstGeom prst="rect">
             <a:avLst/>
@@ -7021,149 +7821,26 @@
           </a:bodyPr>
           <a:lstStyle/>
           <a:p>
-            <a:pPr algn="l">
+            <a:pPr algn="ctr">
               <a:lnSpc>
                 <a:spcPct val="100000"/>
               </a:lnSpc>
             </a:pPr>
             <a:r>
-              <a:rPr sz="3000" b="1">
+              <a:rPr sz="1150" b="1">
                 <a:solidFill>
                   <a:srgbClr val="43D5AE"/>
                 </a:solidFill>
                 <a:latin typeface="Noto Sans"/>
               </a:rPr>
-              <a:t>89.1%</a:t>
-            </a:r>
-          </a:p>
-        </p:txBody>
-      </p:sp>
-      <p:sp>
-        <p:nvSpPr>
-          <p:cNvPr id="21" name="TextBox 20"/>
-          <p:cNvSpPr txBox="1"/>
-          <p:nvPr/>
-        </p:nvSpPr>
-        <p:spPr>
-          <a:xfrm>
-            <a:off x="2743200" y="4581144"/>
-            <a:ext cx="8595360" cy="822960"/>
-          </a:xfrm>
-          <a:prstGeom prst="rect">
-            <a:avLst/>
-          </a:prstGeom>
-          <a:noFill/>
-        </p:spPr>
-        <p:txBody>
-          <a:bodyPr wrap="square" lIns="0" rIns="0" tIns="0" bIns="0" anchor="ctr">
-            <a:spAutoFit/>
-          </a:bodyPr>
-          <a:lstStyle/>
-          <a:p>
-            <a:pPr algn="l">
-              <a:lnSpc>
-                <a:spcPct val="100000"/>
-              </a:lnSpc>
-            </a:pPr>
-            <a:r>
-              <a:rPr sz="1500" b="0">
-                <a:solidFill>
-                  <a:srgbClr val="F8F3E7"/>
-                </a:solidFill>
-                <a:latin typeface="Noto Sans"/>
-              </a:rPr>
-              <a:t>are willing to pilot the MediMatch platform</a:t>
-            </a:r>
-          </a:p>
-        </p:txBody>
-      </p:sp>
-      <p:sp>
-        <p:nvSpPr>
-          <p:cNvPr id="22" name="Rounded Rectangle 21"/>
-          <p:cNvSpPr/>
-          <p:nvPr/>
-        </p:nvSpPr>
-        <p:spPr>
-          <a:xfrm>
-            <a:off x="530352" y="5550408"/>
-            <a:ext cx="10972800" cy="548640"/>
-          </a:xfrm>
-          <a:prstGeom prst="roundRect">
-            <a:avLst/>
-          </a:prstGeom>
-          <a:solidFill>
-            <a:srgbClr val="1A263B"/>
-          </a:solidFill>
-          <a:ln>
-            <a:solidFill>
-              <a:srgbClr val="1A263B"/>
-            </a:solidFill>
-          </a:ln>
-        </p:spPr>
-        <p:style>
-          <a:lnRef idx="1">
-            <a:schemeClr val="accent1"/>
-          </a:lnRef>
-          <a:fillRef idx="3">
-            <a:schemeClr val="accent1"/>
-          </a:fillRef>
-          <a:effectRef idx="2">
-            <a:schemeClr val="accent1"/>
-          </a:effectRef>
-          <a:fontRef idx="minor">
-            <a:schemeClr val="lt1"/>
-          </a:fontRef>
-        </p:style>
-        <p:txBody>
-          <a:bodyPr rtlCol="0" anchor="ctr"/>
-          <a:lstStyle/>
-          <a:p>
-            <a:pPr algn="ctr"/>
-          </a:p>
-        </p:txBody>
-      </p:sp>
-      <p:sp>
-        <p:nvSpPr>
-          <p:cNvPr id="23" name="TextBox 22"/>
-          <p:cNvSpPr txBox="1"/>
-          <p:nvPr/>
-        </p:nvSpPr>
-        <p:spPr>
-          <a:xfrm>
-            <a:off x="777240" y="5669280"/>
-            <a:ext cx="10515600" cy="365760"/>
-          </a:xfrm>
-          <a:prstGeom prst="rect">
-            <a:avLst/>
-          </a:prstGeom>
-          <a:noFill/>
-        </p:spPr>
-        <p:txBody>
-          <a:bodyPr wrap="square" lIns="0" rIns="0" tIns="0" bIns="0" anchor="t">
-            <a:spAutoFit/>
-          </a:bodyPr>
-          <a:lstStyle/>
-          <a:p>
-            <a:pPr algn="l">
-              <a:lnSpc>
-                <a:spcPct val="100000"/>
-              </a:lnSpc>
-            </a:pPr>
-            <a:r>
-              <a:rPr sz="1150" b="0">
-                <a:solidFill>
-                  <a:srgbClr val="AEBACC"/>
-                </a:solidFill>
-                <a:latin typeface="Noto Sans"/>
-              </a:rPr>
-              <a:t>Respondents span clinical staff (nurses &amp; pharmacists), facility administrators, and pharmacy/inventory &amp; technical personnel — a predominantly young, digitally-literate workforce.</a:t>
-            </a:r>
-          </a:p>
-        </p:txBody>
-      </p:sp>
-      <p:sp>
-        <p:nvSpPr>
-          <p:cNvPr id="24" name="TextBox 23"/>
+              <a:t>89.1% would pilot the system (Yes + Maybe)</a:t>
+            </a:r>
+          </a:p>
+        </p:txBody>
+      </p:sp>
+      <p:sp>
+        <p:nvSpPr>
+          <p:cNvPr id="22" name="TextBox 21"/>
           <p:cNvSpPr txBox="1"/>
           <p:nvPr/>
         </p:nvSpPr>
@@ -7202,7 +7879,7 @@
       </p:sp>
       <p:sp>
         <p:nvSpPr>
-          <p:cNvPr id="25" name="TextBox 24"/>
+          <p:cNvPr id="23" name="TextBox 22"/>
           <p:cNvSpPr txBox="1"/>
           <p:nvPr/>
         </p:nvSpPr>
@@ -7234,7 +7911,7 @@
                 </a:solidFill>
                 <a:latin typeface="Noto Sans"/>
               </a:rPr>
-              <a:t>MediMatch Nairobi County field study · 64 healthcare professionals · 80% response rate (2025) · figures per the published GPH2026 abstract</a:t>
+              <a:t>Source: MediMatch survey, n=64 · the four headline figures published in the GPH2026 abstract, shown from the raw responses</a:t>
             </a:r>
           </a:p>
         </p:txBody>
@@ -7336,7 +8013,7 @@
                 </a:solidFill>
                 <a:latin typeface="Noto Sans"/>
               </a:rPr>
-              <a:t>03  /  NATIONAL COMMAND FLOOR</a:t>
+              <a:t>03  /  RESPONDENT PROFILE</a:t>
             </a:r>
           </a:p>
         </p:txBody>
@@ -7369,42 +8046,56 @@
               </a:lnSpc>
             </a:pPr>
             <a:r>
-              <a:rPr sz="3000" b="1">
+              <a:rPr sz="2700" b="1">
                 <a:solidFill>
                   <a:srgbClr val="F8F3E7"/>
                 </a:solidFill>
                 <a:latin typeface="Noto Sans"/>
               </a:rPr>
-              <a:t>From isolated reports to one national operating picture</a:t>
-            </a:r>
-          </a:p>
-        </p:txBody>
-      </p:sp>
-      <p:pic>
-        <p:nvPicPr>
-          <p:cNvPr id="5" name="Picture 4" descr="demand-signal.png"/>
-          <p:cNvPicPr>
-            <a:picLocks noChangeAspect="1"/>
-          </p:cNvPicPr>
-          <p:nvPr/>
-        </p:nvPicPr>
-        <p:blipFill>
-          <a:blip r:embed="rId2"/>
-          <a:srcRect t="15004" b="15004"/>
-          <a:stretch>
-            <a:fillRect/>
-          </a:stretch>
-        </p:blipFill>
-        <p:spPr>
-          <a:xfrm>
-            <a:off x="502920" y="1325880"/>
-            <a:ext cx="11183112" cy="4892040"/>
-          </a:xfrm>
-          <a:prstGeom prst="rect">
-            <a:avLst/>
-          </a:prstGeom>
-        </p:spPr>
-      </p:pic>
+              <a:t>Who we asked — and how facilities cope today</a:t>
+            </a:r>
+          </a:p>
+        </p:txBody>
+      </p:sp>
+      <p:sp>
+        <p:nvSpPr>
+          <p:cNvPr id="5" name="TextBox 4"/>
+          <p:cNvSpPr txBox="1"/>
+          <p:nvPr/>
+        </p:nvSpPr>
+        <p:spPr>
+          <a:xfrm>
+            <a:off x="530352" y="1060704"/>
+            <a:ext cx="10972800" cy="274320"/>
+          </a:xfrm>
+          <a:prstGeom prst="rect">
+            <a:avLst/>
+          </a:prstGeom>
+          <a:noFill/>
+        </p:spPr>
+        <p:txBody>
+          <a:bodyPr wrap="square" lIns="0" rIns="0" tIns="0" bIns="0" anchor="t">
+            <a:spAutoFit/>
+          </a:bodyPr>
+          <a:lstStyle/>
+          <a:p>
+            <a:pPr algn="l">
+              <a:lnSpc>
+                <a:spcPct val="100000"/>
+              </a:lnSpc>
+            </a:pPr>
+            <a:r>
+              <a:rPr sz="1300" b="1">
+                <a:solidFill>
+                  <a:srgbClr val="F6BE4C"/>
+                </a:solidFill>
+                <a:latin typeface="Noto Sans"/>
+              </a:rPr>
+              <a:t>Nairobi County field study  ·  64 respondents  ·  unedited Google Forms output</a:t>
+            </a:r>
+          </a:p>
+        </p:txBody>
+      </p:sp>
       <p:sp>
         <p:nvSpPr>
           <p:cNvPr id="6" name="Rounded Rectangle 5"/>
@@ -7413,18 +8104,18 @@
         </p:nvSpPr>
         <p:spPr>
           <a:xfrm>
-            <a:off x="621792" y="5276088"/>
-            <a:ext cx="10927080" cy="713232"/>
+            <a:off x="502920" y="1417320"/>
+            <a:ext cx="5440680" cy="1938528"/>
           </a:xfrm>
           <a:prstGeom prst="roundRect">
             <a:avLst/>
           </a:prstGeom>
           <a:solidFill>
-            <a:srgbClr val="070C18"/>
+            <a:srgbClr val="FFFFFF"/>
           </a:solidFill>
           <a:ln>
             <a:solidFill>
-              <a:srgbClr val="070C18"/>
+              <a:srgbClr val="1A263B"/>
             </a:solidFill>
           </a:ln>
         </p:spPr>
@@ -7450,16 +8141,85 @@
           </a:p>
         </p:txBody>
       </p:sp>
-      <p:sp>
-        <p:nvSpPr>
-          <p:cNvPr id="7" name="TextBox 6"/>
-          <p:cNvSpPr txBox="1"/>
-          <p:nvPr/>
-        </p:nvSpPr>
-        <p:spPr>
-          <a:xfrm>
-            <a:off x="868680" y="5477256"/>
-            <a:ext cx="5120640" cy="228600"/>
+      <p:pic>
+        <p:nvPicPr>
+          <p:cNvPr id="7" name="Picture 6" descr="q3_role.png"/>
+          <p:cNvPicPr>
+            <a:picLocks noChangeAspect="1"/>
+          </p:cNvPicPr>
+          <p:nvPr/>
+        </p:nvPicPr>
+        <p:blipFill>
+          <a:blip r:embed="rId2"/>
+          <a:stretch>
+            <a:fillRect/>
+          </a:stretch>
+        </p:blipFill>
+        <p:spPr>
+          <a:xfrm>
+            <a:off x="1136055" y="1508760"/>
+            <a:ext cx="4174410" cy="1755648"/>
+          </a:xfrm>
+          <a:prstGeom prst="rect">
+            <a:avLst/>
+          </a:prstGeom>
+        </p:spPr>
+      </p:pic>
+      <p:sp>
+        <p:nvSpPr>
+          <p:cNvPr id="8" name="Rounded Rectangle 7"/>
+          <p:cNvSpPr/>
+          <p:nvPr/>
+        </p:nvSpPr>
+        <p:spPr>
+          <a:xfrm>
+            <a:off x="502920" y="3355848"/>
+            <a:ext cx="5440680" cy="310896"/>
+          </a:xfrm>
+          <a:prstGeom prst="roundRect">
+            <a:avLst/>
+          </a:prstGeom>
+          <a:solidFill>
+            <a:srgbClr val="121D31"/>
+          </a:solidFill>
+          <a:ln>
+            <a:solidFill>
+              <a:srgbClr val="529BFF"/>
+            </a:solidFill>
+          </a:ln>
+        </p:spPr>
+        <p:style>
+          <a:lnRef idx="1">
+            <a:schemeClr val="accent1"/>
+          </a:lnRef>
+          <a:fillRef idx="3">
+            <a:schemeClr val="accent1"/>
+          </a:fillRef>
+          <a:effectRef idx="2">
+            <a:schemeClr val="accent1"/>
+          </a:effectRef>
+          <a:fontRef idx="minor">
+            <a:schemeClr val="lt1"/>
+          </a:fontRef>
+        </p:style>
+        <p:txBody>
+          <a:bodyPr rtlCol="0" anchor="ctr"/>
+          <a:lstStyle/>
+          <a:p>
+            <a:pPr algn="ctr"/>
+          </a:p>
+        </p:txBody>
+      </p:sp>
+      <p:sp>
+        <p:nvSpPr>
+          <p:cNvPr id="9" name="TextBox 8"/>
+          <p:cNvSpPr txBox="1"/>
+          <p:nvPr/>
+        </p:nvSpPr>
+        <p:spPr>
+          <a:xfrm>
+            <a:off x="612648" y="3392424"/>
+            <a:ext cx="5221224" cy="237744"/>
           </a:xfrm>
           <a:prstGeom prst="rect">
             <a:avLst/>
@@ -7472,115 +8232,485 @@
           </a:bodyPr>
           <a:lstStyle/>
           <a:p>
-            <a:pPr algn="l"/>
-            <a:r>
-              <a:rPr sz="1100" b="1">
+            <a:pPr algn="ctr">
+              <a:lnSpc>
+                <a:spcPct val="100000"/>
+              </a:lnSpc>
+            </a:pPr>
+            <a:r>
+              <a:rPr sz="1150" b="1">
+                <a:solidFill>
+                  <a:srgbClr val="529BFF"/>
+                </a:solidFill>
+                <a:latin typeface="Noto Sans"/>
+              </a:rPr>
+              <a:t>Mostly clinical staff — nurses &amp; pharmacists</a:t>
+            </a:r>
+          </a:p>
+        </p:txBody>
+      </p:sp>
+      <p:sp>
+        <p:nvSpPr>
+          <p:cNvPr id="10" name="Rounded Rectangle 9"/>
+          <p:cNvSpPr/>
+          <p:nvPr/>
+        </p:nvSpPr>
+        <p:spPr>
+          <a:xfrm>
+            <a:off x="6245352" y="1417320"/>
+            <a:ext cx="5440680" cy="1938528"/>
+          </a:xfrm>
+          <a:prstGeom prst="roundRect">
+            <a:avLst/>
+          </a:prstGeom>
+          <a:solidFill>
+            <a:srgbClr val="FFFFFF"/>
+          </a:solidFill>
+          <a:ln>
+            <a:solidFill>
+              <a:srgbClr val="1A263B"/>
+            </a:solidFill>
+          </a:ln>
+        </p:spPr>
+        <p:style>
+          <a:lnRef idx="1">
+            <a:schemeClr val="accent1"/>
+          </a:lnRef>
+          <a:fillRef idx="3">
+            <a:schemeClr val="accent1"/>
+          </a:fillRef>
+          <a:effectRef idx="2">
+            <a:schemeClr val="accent1"/>
+          </a:effectRef>
+          <a:fontRef idx="minor">
+            <a:schemeClr val="lt1"/>
+          </a:fontRef>
+        </p:style>
+        <p:txBody>
+          <a:bodyPr rtlCol="0" anchor="ctr"/>
+          <a:lstStyle/>
+          <a:p>
+            <a:pPr algn="ctr"/>
+          </a:p>
+        </p:txBody>
+      </p:sp>
+      <p:pic>
+        <p:nvPicPr>
+          <p:cNvPr id="11" name="Picture 10" descr="q2_age.png"/>
+          <p:cNvPicPr>
+            <a:picLocks noChangeAspect="1"/>
+          </p:cNvPicPr>
+          <p:nvPr/>
+        </p:nvPicPr>
+        <p:blipFill>
+          <a:blip r:embed="rId3"/>
+          <a:stretch>
+            <a:fillRect/>
+          </a:stretch>
+        </p:blipFill>
+        <p:spPr>
+          <a:xfrm>
+            <a:off x="6878487" y="1508760"/>
+            <a:ext cx="4174410" cy="1755648"/>
+          </a:xfrm>
+          <a:prstGeom prst="rect">
+            <a:avLst/>
+          </a:prstGeom>
+        </p:spPr>
+      </p:pic>
+      <p:sp>
+        <p:nvSpPr>
+          <p:cNvPr id="12" name="Rounded Rectangle 11"/>
+          <p:cNvSpPr/>
+          <p:nvPr/>
+        </p:nvSpPr>
+        <p:spPr>
+          <a:xfrm>
+            <a:off x="6245352" y="3355848"/>
+            <a:ext cx="5440680" cy="310896"/>
+          </a:xfrm>
+          <a:prstGeom prst="roundRect">
+            <a:avLst/>
+          </a:prstGeom>
+          <a:solidFill>
+            <a:srgbClr val="121D31"/>
+          </a:solidFill>
+          <a:ln>
+            <a:solidFill>
+              <a:srgbClr val="43D5AE"/>
+            </a:solidFill>
+          </a:ln>
+        </p:spPr>
+        <p:style>
+          <a:lnRef idx="1">
+            <a:schemeClr val="accent1"/>
+          </a:lnRef>
+          <a:fillRef idx="3">
+            <a:schemeClr val="accent1"/>
+          </a:fillRef>
+          <a:effectRef idx="2">
+            <a:schemeClr val="accent1"/>
+          </a:effectRef>
+          <a:fontRef idx="minor">
+            <a:schemeClr val="lt1"/>
+          </a:fontRef>
+        </p:style>
+        <p:txBody>
+          <a:bodyPr rtlCol="0" anchor="ctr"/>
+          <a:lstStyle/>
+          <a:p>
+            <a:pPr algn="ctr"/>
+          </a:p>
+        </p:txBody>
+      </p:sp>
+      <p:sp>
+        <p:nvSpPr>
+          <p:cNvPr id="13" name="TextBox 12"/>
+          <p:cNvSpPr txBox="1"/>
+          <p:nvPr/>
+        </p:nvSpPr>
+        <p:spPr>
+          <a:xfrm>
+            <a:off x="6355080" y="3392424"/>
+            <a:ext cx="5221224" cy="237744"/>
+          </a:xfrm>
+          <a:prstGeom prst="rect">
+            <a:avLst/>
+          </a:prstGeom>
+          <a:noFill/>
+        </p:spPr>
+        <p:txBody>
+          <a:bodyPr wrap="square" lIns="0" rIns="0" tIns="0" bIns="0" anchor="t">
+            <a:spAutoFit/>
+          </a:bodyPr>
+          <a:lstStyle/>
+          <a:p>
+            <a:pPr algn="ctr">
+              <a:lnSpc>
+                <a:spcPct val="100000"/>
+              </a:lnSpc>
+            </a:pPr>
+            <a:r>
+              <a:rPr sz="1150" b="1">
+                <a:solidFill>
+                  <a:srgbClr val="43D5AE"/>
+                </a:solidFill>
+                <a:latin typeface="Noto Sans"/>
+              </a:rPr>
+              <a:t>A predominantly under-40, digitally-fluent workforce</a:t>
+            </a:r>
+          </a:p>
+        </p:txBody>
+      </p:sp>
+      <p:sp>
+        <p:nvSpPr>
+          <p:cNvPr id="14" name="Rounded Rectangle 13"/>
+          <p:cNvSpPr/>
+          <p:nvPr/>
+        </p:nvSpPr>
+        <p:spPr>
+          <a:xfrm>
+            <a:off x="502920" y="3913632"/>
+            <a:ext cx="5440680" cy="1938528"/>
+          </a:xfrm>
+          <a:prstGeom prst="roundRect">
+            <a:avLst/>
+          </a:prstGeom>
+          <a:solidFill>
+            <a:srgbClr val="FFFFFF"/>
+          </a:solidFill>
+          <a:ln>
+            <a:solidFill>
+              <a:srgbClr val="1A263B"/>
+            </a:solidFill>
+          </a:ln>
+        </p:spPr>
+        <p:style>
+          <a:lnRef idx="1">
+            <a:schemeClr val="accent1"/>
+          </a:lnRef>
+          <a:fillRef idx="3">
+            <a:schemeClr val="accent1"/>
+          </a:fillRef>
+          <a:effectRef idx="2">
+            <a:schemeClr val="accent1"/>
+          </a:effectRef>
+          <a:fontRef idx="minor">
+            <a:schemeClr val="lt1"/>
+          </a:fontRef>
+        </p:style>
+        <p:txBody>
+          <a:bodyPr rtlCol="0" anchor="ctr"/>
+          <a:lstStyle/>
+          <a:p>
+            <a:pPr algn="ctr"/>
+          </a:p>
+        </p:txBody>
+      </p:sp>
+      <p:pic>
+        <p:nvPicPr>
+          <p:cNvPr id="15" name="Picture 14" descr="q1_gender.png"/>
+          <p:cNvPicPr>
+            <a:picLocks noChangeAspect="1"/>
+          </p:cNvPicPr>
+          <p:nvPr/>
+        </p:nvPicPr>
+        <p:blipFill>
+          <a:blip r:embed="rId4"/>
+          <a:stretch>
+            <a:fillRect/>
+          </a:stretch>
+        </p:blipFill>
+        <p:spPr>
+          <a:xfrm>
+            <a:off x="1136055" y="4005072"/>
+            <a:ext cx="4174410" cy="1755648"/>
+          </a:xfrm>
+          <a:prstGeom prst="rect">
+            <a:avLst/>
+          </a:prstGeom>
+        </p:spPr>
+      </p:pic>
+      <p:sp>
+        <p:nvSpPr>
+          <p:cNvPr id="16" name="Rounded Rectangle 15"/>
+          <p:cNvSpPr/>
+          <p:nvPr/>
+        </p:nvSpPr>
+        <p:spPr>
+          <a:xfrm>
+            <a:off x="502920" y="5852160"/>
+            <a:ext cx="5440680" cy="310896"/>
+          </a:xfrm>
+          <a:prstGeom prst="roundRect">
+            <a:avLst/>
+          </a:prstGeom>
+          <a:solidFill>
+            <a:srgbClr val="121D31"/>
+          </a:solidFill>
+          <a:ln>
+            <a:solidFill>
+              <a:srgbClr val="FF7744"/>
+            </a:solidFill>
+          </a:ln>
+        </p:spPr>
+        <p:style>
+          <a:lnRef idx="1">
+            <a:schemeClr val="accent1"/>
+          </a:lnRef>
+          <a:fillRef idx="3">
+            <a:schemeClr val="accent1"/>
+          </a:fillRef>
+          <a:effectRef idx="2">
+            <a:schemeClr val="accent1"/>
+          </a:effectRef>
+          <a:fontRef idx="minor">
+            <a:schemeClr val="lt1"/>
+          </a:fontRef>
+        </p:style>
+        <p:txBody>
+          <a:bodyPr rtlCol="0" anchor="ctr"/>
+          <a:lstStyle/>
+          <a:p>
+            <a:pPr algn="ctr"/>
+          </a:p>
+        </p:txBody>
+      </p:sp>
+      <p:sp>
+        <p:nvSpPr>
+          <p:cNvPr id="17" name="TextBox 16"/>
+          <p:cNvSpPr txBox="1"/>
+          <p:nvPr/>
+        </p:nvSpPr>
+        <p:spPr>
+          <a:xfrm>
+            <a:off x="612648" y="5888736"/>
+            <a:ext cx="5221224" cy="237744"/>
+          </a:xfrm>
+          <a:prstGeom prst="rect">
+            <a:avLst/>
+          </a:prstGeom>
+          <a:noFill/>
+        </p:spPr>
+        <p:txBody>
+          <a:bodyPr wrap="square" lIns="0" rIns="0" tIns="0" bIns="0" anchor="t">
+            <a:spAutoFit/>
+          </a:bodyPr>
+          <a:lstStyle/>
+          <a:p>
+            <a:pPr algn="ctr">
+              <a:lnSpc>
+                <a:spcPct val="100000"/>
+              </a:lnSpc>
+            </a:pPr>
+            <a:r>
+              <a:rPr sz="1150" b="1">
                 <a:solidFill>
                   <a:srgbClr val="FF7744"/>
                 </a:solidFill>
                 <a:latin typeface="Noto Sans"/>
               </a:rPr>
-              <a:t>DETECT</a:t>
-            </a:r>
-            <a:r>
-              <a:rPr sz="1100" b="1">
-                <a:solidFill>
-                  <a:srgbClr val="AEBACC"/>
-                </a:solidFill>
-                <a:latin typeface="Noto Sans"/>
-              </a:rPr>
-              <a:t>  →  </a:t>
-            </a:r>
-            <a:r>
-              <a:rPr sz="1100" b="1">
+              <a:t>Balanced gender, slight female majority</a:t>
+            </a:r>
+          </a:p>
+        </p:txBody>
+      </p:sp>
+      <p:sp>
+        <p:nvSpPr>
+          <p:cNvPr id="18" name="Rounded Rectangle 17"/>
+          <p:cNvSpPr/>
+          <p:nvPr/>
+        </p:nvSpPr>
+        <p:spPr>
+          <a:xfrm>
+            <a:off x="6245352" y="3913632"/>
+            <a:ext cx="5440680" cy="1938528"/>
+          </a:xfrm>
+          <a:prstGeom prst="roundRect">
+            <a:avLst/>
+          </a:prstGeom>
+          <a:solidFill>
+            <a:srgbClr val="FFFFFF"/>
+          </a:solidFill>
+          <a:ln>
+            <a:solidFill>
+              <a:srgbClr val="1A263B"/>
+            </a:solidFill>
+          </a:ln>
+        </p:spPr>
+        <p:style>
+          <a:lnRef idx="1">
+            <a:schemeClr val="accent1"/>
+          </a:lnRef>
+          <a:fillRef idx="3">
+            <a:schemeClr val="accent1"/>
+          </a:fillRef>
+          <a:effectRef idx="2">
+            <a:schemeClr val="accent1"/>
+          </a:effectRef>
+          <a:fontRef idx="minor">
+            <a:schemeClr val="lt1"/>
+          </a:fontRef>
+        </p:style>
+        <p:txBody>
+          <a:bodyPr rtlCol="0" anchor="ctr"/>
+          <a:lstStyle/>
+          <a:p>
+            <a:pPr algn="ctr"/>
+          </a:p>
+        </p:txBody>
+      </p:sp>
+      <p:pic>
+        <p:nvPicPr>
+          <p:cNvPr id="19" name="Picture 18" descr="q5_surplus.png"/>
+          <p:cNvPicPr>
+            <a:picLocks noChangeAspect="1"/>
+          </p:cNvPicPr>
+          <p:nvPr/>
+        </p:nvPicPr>
+        <p:blipFill>
+          <a:blip r:embed="rId5"/>
+          <a:stretch>
+            <a:fillRect/>
+          </a:stretch>
+        </p:blipFill>
+        <p:spPr>
+          <a:xfrm>
+            <a:off x="6878487" y="4005072"/>
+            <a:ext cx="4174410" cy="1755648"/>
+          </a:xfrm>
+          <a:prstGeom prst="rect">
+            <a:avLst/>
+          </a:prstGeom>
+        </p:spPr>
+      </p:pic>
+      <p:sp>
+        <p:nvSpPr>
+          <p:cNvPr id="20" name="Rounded Rectangle 19"/>
+          <p:cNvSpPr/>
+          <p:nvPr/>
+        </p:nvSpPr>
+        <p:spPr>
+          <a:xfrm>
+            <a:off x="6245352" y="5852160"/>
+            <a:ext cx="5440680" cy="310896"/>
+          </a:xfrm>
+          <a:prstGeom prst="roundRect">
+            <a:avLst/>
+          </a:prstGeom>
+          <a:solidFill>
+            <a:srgbClr val="121D31"/>
+          </a:solidFill>
+          <a:ln>
+            <a:solidFill>
+              <a:srgbClr val="F6BE4C"/>
+            </a:solidFill>
+          </a:ln>
+        </p:spPr>
+        <p:style>
+          <a:lnRef idx="1">
+            <a:schemeClr val="accent1"/>
+          </a:lnRef>
+          <a:fillRef idx="3">
+            <a:schemeClr val="accent1"/>
+          </a:fillRef>
+          <a:effectRef idx="2">
+            <a:schemeClr val="accent1"/>
+          </a:effectRef>
+          <a:fontRef idx="minor">
+            <a:schemeClr val="lt1"/>
+          </a:fontRef>
+        </p:style>
+        <p:txBody>
+          <a:bodyPr rtlCol="0" anchor="ctr"/>
+          <a:lstStyle/>
+          <a:p>
+            <a:pPr algn="ctr"/>
+          </a:p>
+        </p:txBody>
+      </p:sp>
+      <p:sp>
+        <p:nvSpPr>
+          <p:cNvPr id="21" name="TextBox 20"/>
+          <p:cNvSpPr txBox="1"/>
+          <p:nvPr/>
+        </p:nvSpPr>
+        <p:spPr>
+          <a:xfrm>
+            <a:off x="6355080" y="5888736"/>
+            <a:ext cx="5221224" cy="237744"/>
+          </a:xfrm>
+          <a:prstGeom prst="rect">
+            <a:avLst/>
+          </a:prstGeom>
+          <a:noFill/>
+        </p:spPr>
+        <p:txBody>
+          <a:bodyPr wrap="square" lIns="0" rIns="0" tIns="0" bIns="0" anchor="t">
+            <a:spAutoFit/>
+          </a:bodyPr>
+          <a:lstStyle/>
+          <a:p>
+            <a:pPr algn="ctr">
+              <a:lnSpc>
+                <a:spcPct val="100000"/>
+              </a:lnSpc>
+            </a:pPr>
+            <a:r>
+              <a:rPr sz="1150" b="1">
                 <a:solidFill>
                   <a:srgbClr val="F6BE4C"/>
                 </a:solidFill>
                 <a:latin typeface="Noto Sans"/>
               </a:rPr>
-              <a:t>RANK</a:t>
-            </a:r>
-            <a:r>
-              <a:rPr sz="1100" b="1">
-                <a:solidFill>
-                  <a:srgbClr val="AEBACC"/>
-                </a:solidFill>
-                <a:latin typeface="Noto Sans"/>
-              </a:rPr>
-              <a:t>  →  </a:t>
-            </a:r>
-            <a:r>
-              <a:rPr sz="1100" b="1">
-                <a:solidFill>
-                  <a:srgbClr val="43D5AE"/>
-                </a:solidFill>
-                <a:latin typeface="Noto Sans"/>
-              </a:rPr>
-              <a:t>ROUTE</a:t>
-            </a:r>
-            <a:r>
-              <a:rPr sz="1100" b="1">
-                <a:solidFill>
-                  <a:srgbClr val="AEBACC"/>
-                </a:solidFill>
-                <a:latin typeface="Noto Sans"/>
-              </a:rPr>
-              <a:t>  →  </a:t>
-            </a:r>
-            <a:r>
-              <a:rPr sz="1100" b="1">
-                <a:solidFill>
-                  <a:srgbClr val="F8F3E7"/>
-                </a:solidFill>
-                <a:latin typeface="Noto Sans"/>
-              </a:rPr>
-              <a:t>VERIFY</a:t>
-            </a:r>
-          </a:p>
-        </p:txBody>
-      </p:sp>
-      <p:sp>
-        <p:nvSpPr>
-          <p:cNvPr id="8" name="TextBox 7"/>
-          <p:cNvSpPr txBox="1"/>
-          <p:nvPr/>
-        </p:nvSpPr>
-        <p:spPr>
-          <a:xfrm>
-            <a:off x="5760720" y="5440680"/>
-            <a:ext cx="5303520" cy="301752"/>
-          </a:xfrm>
-          <a:prstGeom prst="rect">
-            <a:avLst/>
-          </a:prstGeom>
-          <a:noFill/>
-        </p:spPr>
-        <p:txBody>
-          <a:bodyPr wrap="square" lIns="0" rIns="0" tIns="0" bIns="0" anchor="t">
-            <a:spAutoFit/>
-          </a:bodyPr>
-          <a:lstStyle/>
-          <a:p>
-            <a:pPr algn="r">
-              <a:lnSpc>
-                <a:spcPct val="100000"/>
-              </a:lnSpc>
-            </a:pPr>
-            <a:r>
-              <a:rPr sz="1000" b="0">
-                <a:solidFill>
-                  <a:srgbClr val="AEBACC"/>
-                </a:solidFill>
-                <a:latin typeface="Noto Sans"/>
-              </a:rPr>
-              <a:t>Real Kenyan facility geocodes · road-routed flows · live operational brief</a:t>
-            </a:r>
-          </a:p>
-        </p:txBody>
-      </p:sp>
-      <p:sp>
-        <p:nvSpPr>
-          <p:cNvPr id="9" name="TextBox 8"/>
+              <a:t>Today: ad-hoc — informal redistribution, KEMSA returns, WhatsApp</a:t>
+            </a:r>
+          </a:p>
+        </p:txBody>
+      </p:sp>
+      <p:sp>
+        <p:nvSpPr>
+          <p:cNvPr id="22" name="TextBox 21"/>
           <p:cNvSpPr txBox="1"/>
           <p:nvPr/>
         </p:nvSpPr>
@@ -7619,7 +8749,7 @@
       </p:sp>
       <p:sp>
         <p:nvSpPr>
-          <p:cNvPr id="10" name="TextBox 9"/>
+          <p:cNvPr id="23" name="TextBox 22"/>
           <p:cNvSpPr txBox="1"/>
           <p:nvPr/>
         </p:nvSpPr>
@@ -7651,7 +8781,7 @@
                 </a:solidFill>
                 <a:latin typeface="Noto Sans"/>
               </a:rPr>
-              <a:t>Current app: Savannah Command · MapLibre + CARTO + OSRM</a:t>
+              <a:t>Source: MediMatch Nairobi County field study · 64 healthcare professionals · 2025</a:t>
             </a:r>
           </a:p>
         </p:txBody>
@@ -7753,7 +8883,7 @@
                 </a:solidFill>
                 <a:latin typeface="Noto Sans"/>
               </a:rPr>
-              <a:t>04  /  GEOSPATIAL TRIAGE</a:t>
+              <a:t>04  /  NATIONAL COMMAND FLOOR</a:t>
             </a:r>
           </a:p>
         </p:txBody>
@@ -7786,20 +8916,20 @@
               </a:lnSpc>
             </a:pPr>
             <a:r>
-              <a:rPr sz="2900" b="1">
+              <a:rPr sz="3000" b="1">
                 <a:solidFill>
                   <a:srgbClr val="F8F3E7"/>
                 </a:solidFill>
                 <a:latin typeface="Noto Sans"/>
               </a:rPr>
-              <a:t>See demand concentration before routing</a:t>
+              <a:t>From isolated reports to one national operating picture</a:t>
             </a:r>
           </a:p>
         </p:txBody>
       </p:sp>
       <p:pic>
         <p:nvPicPr>
-          <p:cNvPr id="5" name="Picture 4" descr="heatmap.png"/>
+          <p:cNvPr id="5" name="Picture 4" descr="demand-signal.png"/>
           <p:cNvPicPr>
             <a:picLocks noChangeAspect="1"/>
           </p:cNvPicPr>
@@ -7807,15 +8937,15 @@
         </p:nvPicPr>
         <p:blipFill>
           <a:blip r:embed="rId2"/>
-          <a:srcRect l="3378" r="3378"/>
+          <a:srcRect t="15004" b="15004"/>
           <a:stretch>
             <a:fillRect/>
           </a:stretch>
         </p:blipFill>
         <p:spPr>
           <a:xfrm>
-            <a:off x="4114800" y="1325880"/>
-            <a:ext cx="7571231" cy="5074920"/>
+            <a:off x="502920" y="1325880"/>
+            <a:ext cx="11183112" cy="4892040"/>
           </a:xfrm>
           <a:prstGeom prst="rect">
             <a:avLst/>
@@ -7830,18 +8960,18 @@
         </p:nvSpPr>
         <p:spPr>
           <a:xfrm>
-            <a:off x="530352" y="1417320"/>
-            <a:ext cx="3246120" cy="4681728"/>
+            <a:off x="621792" y="5276088"/>
+            <a:ext cx="10927080" cy="713232"/>
           </a:xfrm>
           <a:prstGeom prst="roundRect">
             <a:avLst/>
           </a:prstGeom>
           <a:solidFill>
-            <a:srgbClr val="121D31"/>
+            <a:srgbClr val="070C18"/>
           </a:solidFill>
           <a:ln>
             <a:solidFill>
-              <a:srgbClr val="1A263B"/>
+              <a:srgbClr val="070C18"/>
             </a:solidFill>
           </a:ln>
         </p:spPr>
@@ -7875,8 +9005,8 @@
         </p:nvSpPr>
         <p:spPr>
           <a:xfrm>
-            <a:off x="804672" y="1719072"/>
-            <a:ext cx="2697480" cy="347472"/>
+            <a:off x="868680" y="5477256"/>
+            <a:ext cx="5120640" cy="228600"/>
           </a:xfrm>
           <a:prstGeom prst="rect">
             <a:avLst/>
@@ -7889,118 +9019,108 @@
           </a:bodyPr>
           <a:lstStyle/>
           <a:p>
-            <a:pPr algn="l">
+            <a:pPr algn="l"/>
+            <a:r>
+              <a:rPr sz="1100" b="1">
+                <a:solidFill>
+                  <a:srgbClr val="FF7744"/>
+                </a:solidFill>
+                <a:latin typeface="Noto Sans"/>
+              </a:rPr>
+              <a:t>DETECT</a:t>
+            </a:r>
+            <a:r>
+              <a:rPr sz="1100" b="1">
+                <a:solidFill>
+                  <a:srgbClr val="AEBACC"/>
+                </a:solidFill>
+                <a:latin typeface="Noto Sans"/>
+              </a:rPr>
+              <a:t>  →  </a:t>
+            </a:r>
+            <a:r>
+              <a:rPr sz="1100" b="1">
+                <a:solidFill>
+                  <a:srgbClr val="F6BE4C"/>
+                </a:solidFill>
+                <a:latin typeface="Noto Sans"/>
+              </a:rPr>
+              <a:t>RANK</a:t>
+            </a:r>
+            <a:r>
+              <a:rPr sz="1100" b="1">
+                <a:solidFill>
+                  <a:srgbClr val="AEBACC"/>
+                </a:solidFill>
+                <a:latin typeface="Noto Sans"/>
+              </a:rPr>
+              <a:t>  →  </a:t>
+            </a:r>
+            <a:r>
+              <a:rPr sz="1100" b="1">
+                <a:solidFill>
+                  <a:srgbClr val="43D5AE"/>
+                </a:solidFill>
+                <a:latin typeface="Noto Sans"/>
+              </a:rPr>
+              <a:t>ROUTE</a:t>
+            </a:r>
+            <a:r>
+              <a:rPr sz="1100" b="1">
+                <a:solidFill>
+                  <a:srgbClr val="AEBACC"/>
+                </a:solidFill>
+                <a:latin typeface="Noto Sans"/>
+              </a:rPr>
+              <a:t>  →  </a:t>
+            </a:r>
+            <a:r>
+              <a:rPr sz="1100" b="1">
+                <a:solidFill>
+                  <a:srgbClr val="F8F3E7"/>
+                </a:solidFill>
+                <a:latin typeface="Noto Sans"/>
+              </a:rPr>
+              <a:t>VERIFY</a:t>
+            </a:r>
+          </a:p>
+        </p:txBody>
+      </p:sp>
+      <p:sp>
+        <p:nvSpPr>
+          <p:cNvPr id="8" name="TextBox 7"/>
+          <p:cNvSpPr txBox="1"/>
+          <p:nvPr/>
+        </p:nvSpPr>
+        <p:spPr>
+          <a:xfrm>
+            <a:off x="5760720" y="5440680"/>
+            <a:ext cx="5303520" cy="301752"/>
+          </a:xfrm>
+          <a:prstGeom prst="rect">
+            <a:avLst/>
+          </a:prstGeom>
+          <a:noFill/>
+        </p:spPr>
+        <p:txBody>
+          <a:bodyPr wrap="square" lIns="0" rIns="0" tIns="0" bIns="0" anchor="t">
+            <a:spAutoFit/>
+          </a:bodyPr>
+          <a:lstStyle/>
+          <a:p>
+            <a:pPr algn="r">
               <a:lnSpc>
                 <a:spcPct val="100000"/>
               </a:lnSpc>
             </a:pPr>
             <a:r>
-              <a:rPr sz="2100" b="1">
-                <a:solidFill>
-                  <a:srgbClr val="F8F3E7"/>
-                </a:solidFill>
-                <a:latin typeface="Noto Sans"/>
-              </a:rPr>
-              <a:t>What geography adds</a:t>
-            </a:r>
-          </a:p>
-        </p:txBody>
-      </p:sp>
-      <p:sp>
-        <p:nvSpPr>
-          <p:cNvPr id="8" name="TextBox 7"/>
-          <p:cNvSpPr txBox="1"/>
-          <p:nvPr/>
-        </p:nvSpPr>
-        <p:spPr>
-          <a:xfrm>
-            <a:off x="786384" y="2286000"/>
-            <a:ext cx="2761488" cy="2926080"/>
-          </a:xfrm>
-          <a:prstGeom prst="rect">
-            <a:avLst/>
-          </a:prstGeom>
-          <a:noFill/>
-        </p:spPr>
-        <p:txBody>
-          <a:bodyPr wrap="square" lIns="0" rIns="0" tIns="0" bIns="0">
-            <a:spAutoFit/>
-          </a:bodyPr>
-          <a:lstStyle/>
-          <a:p>
-            <a:pPr>
-              <a:lnSpc>
-                <a:spcPct val="108000"/>
-              </a:lnSpc>
-              <a:spcAft>
-                <a:spcPts val="1000"/>
-              </a:spcAft>
-              <a:defRPr sz="1300">
+              <a:rPr sz="1000" b="0">
                 <a:solidFill>
                   <a:srgbClr val="AEBACC"/>
                 </a:solidFill>
                 <a:latin typeface="Noto Sans"/>
-              </a:defRPr>
-            </a:pPr>
-            <a:r>
-              <a:t>•  Reveal where shortfall clusters—not just where the loudest request originated.</a:t>
-            </a:r>
-          </a:p>
-          <a:p>
-            <a:pPr>
-              <a:lnSpc>
-                <a:spcPct val="108000"/>
-              </a:lnSpc>
-              <a:spcAft>
-                <a:spcPts val="1000"/>
-              </a:spcAft>
-              <a:defRPr sz="1300">
-                <a:solidFill>
-                  <a:srgbClr val="AEBACC"/>
-                </a:solidFill>
-                <a:latin typeface="Noto Sans"/>
-              </a:defRPr>
-            </a:pPr>
-            <a:r>
-              <a:t>•  Compare demand against available hubs and connected road corridors.</a:t>
-            </a:r>
-          </a:p>
-          <a:p>
-            <a:pPr>
-              <a:lnSpc>
-                <a:spcPct val="108000"/>
-              </a:lnSpc>
-              <a:spcAft>
-                <a:spcPts val="1000"/>
-              </a:spcAft>
-              <a:defRPr sz="1300">
-                <a:solidFill>
-                  <a:srgbClr val="AEBACC"/>
-                </a:solidFill>
-                <a:latin typeface="Noto Sans"/>
-              </a:defRPr>
-            </a:pPr>
-            <a:r>
-              <a:t>•  Use distance as one signal alongside urgency, product fit and verification.</a:t>
-            </a:r>
-          </a:p>
-          <a:p>
-            <a:pPr>
-              <a:lnSpc>
-                <a:spcPct val="108000"/>
-              </a:lnSpc>
-              <a:spcAft>
-                <a:spcPts val="1000"/>
-              </a:spcAft>
-              <a:defRPr sz="1300">
-                <a:solidFill>
-                  <a:srgbClr val="AEBACC"/>
-                </a:solidFill>
-                <a:latin typeface="Noto Sans"/>
-              </a:defRPr>
-            </a:pPr>
-            <a:r>
-              <a:t>•  Move from ‘nearest’ to ‘best feasible match’.</a:t>
+              </a:rPr>
+              <a:t>Real Kenyan facility geocodes · road-routed flows · live operational brief</a:t>
             </a:r>
           </a:p>
         </p:txBody>
@@ -8008,45 +9128,6 @@
       <p:sp>
         <p:nvSpPr>
           <p:cNvPr id="9" name="TextBox 8"/>
-          <p:cNvSpPr txBox="1"/>
-          <p:nvPr/>
-        </p:nvSpPr>
-        <p:spPr>
-          <a:xfrm>
-            <a:off x="804672" y="5440680"/>
-            <a:ext cx="2670048" cy="438912"/>
-          </a:xfrm>
-          <a:prstGeom prst="rect">
-            <a:avLst/>
-          </a:prstGeom>
-          <a:noFill/>
-        </p:spPr>
-        <p:txBody>
-          <a:bodyPr wrap="square" lIns="0" rIns="0" tIns="0" bIns="0" anchor="t">
-            <a:spAutoFit/>
-          </a:bodyPr>
-          <a:lstStyle/>
-          <a:p>
-            <a:pPr algn="l">
-              <a:lnSpc>
-                <a:spcPct val="100000"/>
-              </a:lnSpc>
-            </a:pPr>
-            <a:r>
-              <a:rPr sz="1100" b="1">
-                <a:solidFill>
-                  <a:srgbClr val="F6BE4C"/>
-                </a:solidFill>
-                <a:latin typeface="Noto Sans"/>
-              </a:rPr>
-              <a:t>Geography supports triage; it does not authorize a transfer.</a:t>
-            </a:r>
-          </a:p>
-        </p:txBody>
-      </p:sp>
-      <p:sp>
-        <p:nvSpPr>
-          <p:cNvPr id="10" name="TextBox 9"/>
           <p:cNvSpPr txBox="1"/>
           <p:nvPr/>
         </p:nvSpPr>
@@ -8085,7 +9166,7 @@
       </p:sp>
       <p:sp>
         <p:nvSpPr>
-          <p:cNvPr id="11" name="TextBox 10"/>
+          <p:cNvPr id="10" name="TextBox 9"/>
           <p:cNvSpPr txBox="1"/>
           <p:nvPr/>
         </p:nvSpPr>
@@ -8117,7 +9198,7 @@
                 </a:solidFill>
                 <a:latin typeface="Noto Sans"/>
               </a:rPr>
-              <a:t>Demand heatmap shown from the live build</a:t>
+              <a:t>Current app: Savannah Command · MapLibre + CARTO + OSRM</a:t>
             </a:r>
           </a:p>
         </p:txBody>
@@ -8219,7 +9300,7 @@
                 </a:solidFill>
                 <a:latin typeface="Noto Sans"/>
               </a:rPr>
-              <a:t>05  /  RESEARCH BASE</a:t>
+              <a:t>05  /  GEOSPATIAL TRIAGE</a:t>
             </a:r>
           </a:p>
         </p:txBody>
@@ -8252,20 +9333,20 @@
               </a:lnSpc>
             </a:pPr>
             <a:r>
-              <a:rPr sz="3000" b="1">
+              <a:rPr sz="2900" b="1">
                 <a:solidFill>
                   <a:srgbClr val="F8F3E7"/>
                 </a:solidFill>
                 <a:latin typeface="Noto Sans"/>
               </a:rPr>
-              <a:t>Nairobi turns the national concept into a street-scale workflow</a:t>
+              <a:t>See demand concentration before routing</a:t>
             </a:r>
           </a:p>
         </p:txBody>
       </p:sp>
       <p:pic>
         <p:nvPicPr>
-          <p:cNvPr id="5" name="Picture 4" descr="nairobi-research.png"/>
+          <p:cNvPr id="5" name="Picture 4" descr="heatmap.png"/>
           <p:cNvPicPr>
             <a:picLocks noChangeAspect="1"/>
           </p:cNvPicPr>
@@ -8273,15 +9354,15 @@
         </p:nvPicPr>
         <p:blipFill>
           <a:blip r:embed="rId2"/>
-          <a:srcRect t="13238" b="13238"/>
+          <a:srcRect l="3378" r="3378"/>
           <a:stretch>
             <a:fillRect/>
           </a:stretch>
         </p:blipFill>
         <p:spPr>
           <a:xfrm>
-            <a:off x="502920" y="1307592"/>
-            <a:ext cx="11183112" cy="5138928"/>
+            <a:off x="4114800" y="1325880"/>
+            <a:ext cx="7571231" cy="5074920"/>
           </a:xfrm>
           <a:prstGeom prst="rect">
             <a:avLst/>
@@ -8296,18 +9377,18 @@
         </p:nvSpPr>
         <p:spPr>
           <a:xfrm>
-            <a:off x="713232" y="5687568"/>
-            <a:ext cx="10789920" cy="530352"/>
+            <a:off x="530352" y="1417320"/>
+            <a:ext cx="3246120" cy="4681728"/>
           </a:xfrm>
           <a:prstGeom prst="roundRect">
             <a:avLst/>
           </a:prstGeom>
           <a:solidFill>
-            <a:srgbClr val="070C18"/>
+            <a:srgbClr val="121D31"/>
           </a:solidFill>
           <a:ln>
             <a:solidFill>
-              <a:srgbClr val="070C18"/>
+              <a:srgbClr val="1A263B"/>
             </a:solidFill>
           </a:ln>
         </p:spPr>
@@ -8341,8 +9422,8 @@
         </p:nvSpPr>
         <p:spPr>
           <a:xfrm>
-            <a:off x="914400" y="5824728"/>
-            <a:ext cx="10241280" cy="228600"/>
+            <a:off x="804672" y="1719072"/>
+            <a:ext cx="2697480" cy="347472"/>
           </a:xfrm>
           <a:prstGeom prst="rect">
             <a:avLst/>
@@ -8355,19 +9436,19 @@
           </a:bodyPr>
           <a:lstStyle/>
           <a:p>
-            <a:pPr algn="ctr">
+            <a:pPr algn="l">
               <a:lnSpc>
                 <a:spcPct val="100000"/>
               </a:lnSpc>
             </a:pPr>
             <a:r>
-              <a:rPr sz="1200" b="1">
+              <a:rPr sz="2100" b="1">
                 <a:solidFill>
                   <a:srgbClr val="F8F3E7"/>
                 </a:solidFill>
                 <a:latin typeface="Noto Sans"/>
               </a:rPr>
-              <a:t>50 facilities  ·  43 in shortfall  ·  43 transfers  ·  2,236 units moved</a:t>
+              <a:t>What geography adds</a:t>
             </a:r>
           </a:p>
         </p:txBody>
@@ -8375,6 +9456,144 @@
       <p:sp>
         <p:nvSpPr>
           <p:cNvPr id="8" name="TextBox 7"/>
+          <p:cNvSpPr txBox="1"/>
+          <p:nvPr/>
+        </p:nvSpPr>
+        <p:spPr>
+          <a:xfrm>
+            <a:off x="786384" y="2286000"/>
+            <a:ext cx="2761488" cy="2926080"/>
+          </a:xfrm>
+          <a:prstGeom prst="rect">
+            <a:avLst/>
+          </a:prstGeom>
+          <a:noFill/>
+        </p:spPr>
+        <p:txBody>
+          <a:bodyPr wrap="square" lIns="0" rIns="0" tIns="0" bIns="0">
+            <a:spAutoFit/>
+          </a:bodyPr>
+          <a:lstStyle/>
+          <a:p>
+            <a:pPr>
+              <a:lnSpc>
+                <a:spcPct val="108000"/>
+              </a:lnSpc>
+              <a:spcAft>
+                <a:spcPts val="1000"/>
+              </a:spcAft>
+              <a:defRPr sz="1300">
+                <a:solidFill>
+                  <a:srgbClr val="AEBACC"/>
+                </a:solidFill>
+                <a:latin typeface="Noto Sans"/>
+              </a:defRPr>
+            </a:pPr>
+            <a:r>
+              <a:t>•  Reveal where shortfall clusters—not just where the loudest request originated.</a:t>
+            </a:r>
+          </a:p>
+          <a:p>
+            <a:pPr>
+              <a:lnSpc>
+                <a:spcPct val="108000"/>
+              </a:lnSpc>
+              <a:spcAft>
+                <a:spcPts val="1000"/>
+              </a:spcAft>
+              <a:defRPr sz="1300">
+                <a:solidFill>
+                  <a:srgbClr val="AEBACC"/>
+                </a:solidFill>
+                <a:latin typeface="Noto Sans"/>
+              </a:defRPr>
+            </a:pPr>
+            <a:r>
+              <a:t>•  Compare demand against available hubs and connected road corridors.</a:t>
+            </a:r>
+          </a:p>
+          <a:p>
+            <a:pPr>
+              <a:lnSpc>
+                <a:spcPct val="108000"/>
+              </a:lnSpc>
+              <a:spcAft>
+                <a:spcPts val="1000"/>
+              </a:spcAft>
+              <a:defRPr sz="1300">
+                <a:solidFill>
+                  <a:srgbClr val="AEBACC"/>
+                </a:solidFill>
+                <a:latin typeface="Noto Sans"/>
+              </a:defRPr>
+            </a:pPr>
+            <a:r>
+              <a:t>•  Use distance as one signal alongside urgency, product fit and verification.</a:t>
+            </a:r>
+          </a:p>
+          <a:p>
+            <a:pPr>
+              <a:lnSpc>
+                <a:spcPct val="108000"/>
+              </a:lnSpc>
+              <a:spcAft>
+                <a:spcPts val="1000"/>
+              </a:spcAft>
+              <a:defRPr sz="1300">
+                <a:solidFill>
+                  <a:srgbClr val="AEBACC"/>
+                </a:solidFill>
+                <a:latin typeface="Noto Sans"/>
+              </a:defRPr>
+            </a:pPr>
+            <a:r>
+              <a:t>•  Move from ‘nearest’ to ‘best feasible match’.</a:t>
+            </a:r>
+          </a:p>
+        </p:txBody>
+      </p:sp>
+      <p:sp>
+        <p:nvSpPr>
+          <p:cNvPr id="9" name="TextBox 8"/>
+          <p:cNvSpPr txBox="1"/>
+          <p:nvPr/>
+        </p:nvSpPr>
+        <p:spPr>
+          <a:xfrm>
+            <a:off x="804672" y="5440680"/>
+            <a:ext cx="2670048" cy="438912"/>
+          </a:xfrm>
+          <a:prstGeom prst="rect">
+            <a:avLst/>
+          </a:prstGeom>
+          <a:noFill/>
+        </p:spPr>
+        <p:txBody>
+          <a:bodyPr wrap="square" lIns="0" rIns="0" tIns="0" bIns="0" anchor="t">
+            <a:spAutoFit/>
+          </a:bodyPr>
+          <a:lstStyle/>
+          <a:p>
+            <a:pPr algn="l">
+              <a:lnSpc>
+                <a:spcPct val="100000"/>
+              </a:lnSpc>
+            </a:pPr>
+            <a:r>
+              <a:rPr sz="1100" b="1">
+                <a:solidFill>
+                  <a:srgbClr val="F6BE4C"/>
+                </a:solidFill>
+                <a:latin typeface="Noto Sans"/>
+              </a:rPr>
+              <a:t>Geography supports triage; it does not authorize a transfer.</a:t>
+            </a:r>
+          </a:p>
+        </p:txBody>
+      </p:sp>
+      <p:sp>
+        <p:nvSpPr>
+          <p:cNvPr id="10" name="TextBox 9"/>
           <p:cNvSpPr txBox="1"/>
           <p:nvPr/>
         </p:nvSpPr>
@@ -8413,7 +9632,7 @@
       </p:sp>
       <p:sp>
         <p:nvSpPr>
-          <p:cNvPr id="9" name="TextBox 8"/>
+          <p:cNvPr id="11" name="TextBox 10"/>
           <p:cNvSpPr txBox="1"/>
           <p:nvPr/>
         </p:nvSpPr>
@@ -8445,7 +9664,7 @@
                 </a:solidFill>
                 <a:latin typeface="Noto Sans"/>
               </a:rPr>
-              <a:t>Nairobi County research view · demonstration inventory</a:t>
+              <a:t>Demand heatmap shown from the live build</a:t>
             </a:r>
           </a:p>
         </p:txBody>
@@ -8547,7 +9766,7 @@
                 </a:solidFill>
                 <a:latin typeface="Noto Sans"/>
               </a:rPr>
-              <a:t>06  /  EXPLAINABLE MATCHING</a:t>
+              <a:t>06  /  RESEARCH BASE</a:t>
             </a:r>
           </a:p>
         </p:txBody>
@@ -8580,20 +9799,20 @@
               </a:lnSpc>
             </a:pPr>
             <a:r>
-              <a:rPr sz="3000" b="1">
+              <a:rPr sz="2800" b="1">
                 <a:solidFill>
                   <a:srgbClr val="F8F3E7"/>
                 </a:solidFill>
                 <a:latin typeface="Noto Sans"/>
               </a:rPr>
-              <a:t>The system shows why a source was selected</a:t>
+              <a:t>Nairobi: the national model at street scale</a:t>
             </a:r>
           </a:p>
         </p:txBody>
       </p:sp>
       <p:pic>
         <p:nvPicPr>
-          <p:cNvPr id="5" name="Picture 4" descr="selected-route.png"/>
+          <p:cNvPr id="5" name="Picture 4" descr="nairobi-research.png"/>
           <p:cNvPicPr>
             <a:picLocks noChangeAspect="1"/>
           </p:cNvPicPr>
@@ -8601,15 +9820,15 @@
         </p:nvPicPr>
         <p:blipFill>
           <a:blip r:embed="rId2"/>
-          <a:srcRect l="5310" r="5310"/>
+          <a:srcRect t="13696" b="13696"/>
           <a:stretch>
             <a:fillRect/>
           </a:stretch>
         </p:blipFill>
         <p:spPr>
           <a:xfrm>
-            <a:off x="4297680" y="1307592"/>
-            <a:ext cx="7388352" cy="5166360"/>
+            <a:off x="502920" y="1371600"/>
+            <a:ext cx="11183112" cy="5074920"/>
           </a:xfrm>
           <a:prstGeom prst="rect">
             <a:avLst/>
@@ -8624,18 +9843,18 @@
         </p:nvSpPr>
         <p:spPr>
           <a:xfrm>
-            <a:off x="530352" y="1417320"/>
-            <a:ext cx="3401568" cy="4663440"/>
+            <a:off x="713232" y="5687568"/>
+            <a:ext cx="10789920" cy="530352"/>
           </a:xfrm>
           <a:prstGeom prst="roundRect">
             <a:avLst/>
           </a:prstGeom>
           <a:solidFill>
-            <a:srgbClr val="121D31"/>
+            <a:srgbClr val="070C18"/>
           </a:solidFill>
           <a:ln>
             <a:solidFill>
-              <a:srgbClr val="1A263B"/>
+              <a:srgbClr val="070C18"/>
             </a:solidFill>
           </a:ln>
         </p:spPr>
@@ -8669,8 +9888,8 @@
         </p:nvSpPr>
         <p:spPr>
           <a:xfrm>
-            <a:off x="822960" y="1719072"/>
-            <a:ext cx="2834640" cy="347472"/>
+            <a:off x="914400" y="5824728"/>
+            <a:ext cx="10241280" cy="228600"/>
           </a:xfrm>
           <a:prstGeom prst="rect">
             <a:avLst/>
@@ -8683,680 +9902,26 @@
           </a:bodyPr>
           <a:lstStyle/>
           <a:p>
-            <a:pPr algn="l">
+            <a:pPr algn="ctr">
               <a:lnSpc>
                 <a:spcPct val="100000"/>
               </a:lnSpc>
             </a:pPr>
             <a:r>
-              <a:rPr sz="2100" b="1">
+              <a:rPr sz="1200" b="1">
                 <a:solidFill>
                   <a:srgbClr val="F8F3E7"/>
                 </a:solidFill>
                 <a:latin typeface="Noto Sans"/>
               </a:rPr>
-              <a:t>Decision signals</a:t>
-            </a:r>
-          </a:p>
-        </p:txBody>
-      </p:sp>
-      <p:sp>
-        <p:nvSpPr>
-          <p:cNvPr id="8" name="Rectangle 7"/>
-          <p:cNvSpPr/>
-          <p:nvPr/>
-        </p:nvSpPr>
-        <p:spPr>
-          <a:xfrm>
-            <a:off x="822960" y="2267712"/>
-            <a:ext cx="82296" cy="329184"/>
-          </a:xfrm>
-          <a:prstGeom prst="rect">
-            <a:avLst/>
-          </a:prstGeom>
-          <a:solidFill>
-            <a:srgbClr val="43D5AE"/>
-          </a:solidFill>
-          <a:ln>
-            <a:solidFill>
-              <a:srgbClr val="43D5AE"/>
-            </a:solidFill>
-          </a:ln>
-        </p:spPr>
-        <p:style>
-          <a:lnRef idx="1">
-            <a:schemeClr val="accent1"/>
-          </a:lnRef>
-          <a:fillRef idx="3">
-            <a:schemeClr val="accent1"/>
-          </a:fillRef>
-          <a:effectRef idx="2">
-            <a:schemeClr val="accent1"/>
-          </a:effectRef>
-          <a:fontRef idx="minor">
-            <a:schemeClr val="lt1"/>
-          </a:fontRef>
-        </p:style>
-        <p:txBody>
-          <a:bodyPr rtlCol="0" anchor="ctr"/>
-          <a:lstStyle/>
-          <a:p>
-            <a:pPr algn="ctr"/>
-          </a:p>
-        </p:txBody>
-      </p:sp>
-      <p:sp>
-        <p:nvSpPr>
-          <p:cNvPr id="9" name="TextBox 8"/>
-          <p:cNvSpPr txBox="1"/>
-          <p:nvPr/>
-        </p:nvSpPr>
-        <p:spPr>
-          <a:xfrm>
-            <a:off x="1078992" y="2249424"/>
-            <a:ext cx="1005840" cy="228600"/>
-          </a:xfrm>
-          <a:prstGeom prst="rect">
-            <a:avLst/>
-          </a:prstGeom>
-          <a:noFill/>
-        </p:spPr>
-        <p:txBody>
-          <a:bodyPr wrap="square" lIns="0" rIns="0" tIns="0" bIns="0" anchor="t">
-            <a:spAutoFit/>
-          </a:bodyPr>
-          <a:lstStyle/>
-          <a:p>
-            <a:pPr algn="l">
-              <a:lnSpc>
-                <a:spcPct val="100000"/>
-              </a:lnSpc>
-            </a:pPr>
-            <a:r>
-              <a:rPr sz="1200" b="1">
-                <a:solidFill>
-                  <a:srgbClr val="F8F3E7"/>
-                </a:solidFill>
-                <a:latin typeface="Noto Sans"/>
-              </a:rPr>
-              <a:t>Proximity</a:t>
-            </a:r>
-          </a:p>
-        </p:txBody>
-      </p:sp>
-      <p:sp>
-        <p:nvSpPr>
-          <p:cNvPr id="10" name="TextBox 9"/>
-          <p:cNvSpPr txBox="1"/>
-          <p:nvPr/>
-        </p:nvSpPr>
-        <p:spPr>
-          <a:xfrm>
-            <a:off x="2057400" y="2249424"/>
-            <a:ext cx="1481328" cy="274320"/>
-          </a:xfrm>
-          <a:prstGeom prst="rect">
-            <a:avLst/>
-          </a:prstGeom>
-          <a:noFill/>
-        </p:spPr>
-        <p:txBody>
-          <a:bodyPr wrap="square" lIns="0" rIns="0" tIns="0" bIns="0" anchor="t">
-            <a:spAutoFit/>
-          </a:bodyPr>
-          <a:lstStyle/>
-          <a:p>
-            <a:pPr algn="l">
-              <a:lnSpc>
-                <a:spcPct val="100000"/>
-              </a:lnSpc>
-            </a:pPr>
-            <a:r>
-              <a:rPr sz="1000" b="0">
-                <a:solidFill>
-                  <a:srgbClr val="AEBACC"/>
-                </a:solidFill>
-                <a:latin typeface="Noto Sans"/>
-              </a:rPr>
-              <a:t>direct and routed distance</a:t>
-            </a:r>
-          </a:p>
-        </p:txBody>
-      </p:sp>
-      <p:sp>
-        <p:nvSpPr>
-          <p:cNvPr id="11" name="Rectangle 10"/>
-          <p:cNvSpPr/>
-          <p:nvPr/>
-        </p:nvSpPr>
-        <p:spPr>
-          <a:xfrm>
-            <a:off x="822960" y="2852928"/>
-            <a:ext cx="82296" cy="329184"/>
-          </a:xfrm>
-          <a:prstGeom prst="rect">
-            <a:avLst/>
-          </a:prstGeom>
-          <a:solidFill>
-            <a:srgbClr val="FF5B66"/>
-          </a:solidFill>
-          <a:ln>
-            <a:solidFill>
-              <a:srgbClr val="FF5B66"/>
-            </a:solidFill>
-          </a:ln>
-        </p:spPr>
-        <p:style>
-          <a:lnRef idx="1">
-            <a:schemeClr val="accent1"/>
-          </a:lnRef>
-          <a:fillRef idx="3">
-            <a:schemeClr val="accent1"/>
-          </a:fillRef>
-          <a:effectRef idx="2">
-            <a:schemeClr val="accent1"/>
-          </a:effectRef>
-          <a:fontRef idx="minor">
-            <a:schemeClr val="lt1"/>
-          </a:fontRef>
-        </p:style>
-        <p:txBody>
-          <a:bodyPr rtlCol="0" anchor="ctr"/>
-          <a:lstStyle/>
-          <a:p>
-            <a:pPr algn="ctr"/>
-          </a:p>
-        </p:txBody>
-      </p:sp>
-      <p:sp>
-        <p:nvSpPr>
-          <p:cNvPr id="12" name="TextBox 11"/>
-          <p:cNvSpPr txBox="1"/>
-          <p:nvPr/>
-        </p:nvSpPr>
-        <p:spPr>
-          <a:xfrm>
-            <a:off x="1078992" y="2834640"/>
-            <a:ext cx="1005840" cy="228600"/>
-          </a:xfrm>
-          <a:prstGeom prst="rect">
-            <a:avLst/>
-          </a:prstGeom>
-          <a:noFill/>
-        </p:spPr>
-        <p:txBody>
-          <a:bodyPr wrap="square" lIns="0" rIns="0" tIns="0" bIns="0" anchor="t">
-            <a:spAutoFit/>
-          </a:bodyPr>
-          <a:lstStyle/>
-          <a:p>
-            <a:pPr algn="l">
-              <a:lnSpc>
-                <a:spcPct val="100000"/>
-              </a:lnSpc>
-            </a:pPr>
-            <a:r>
-              <a:rPr sz="1200" b="1">
-                <a:solidFill>
-                  <a:srgbClr val="F8F3E7"/>
-                </a:solidFill>
-                <a:latin typeface="Noto Sans"/>
-              </a:rPr>
-              <a:t>Urgency</a:t>
-            </a:r>
-          </a:p>
-        </p:txBody>
-      </p:sp>
-      <p:sp>
-        <p:nvSpPr>
-          <p:cNvPr id="13" name="TextBox 12"/>
-          <p:cNvSpPr txBox="1"/>
-          <p:nvPr/>
-        </p:nvSpPr>
-        <p:spPr>
-          <a:xfrm>
-            <a:off x="2057400" y="2834640"/>
-            <a:ext cx="1481328" cy="274320"/>
-          </a:xfrm>
-          <a:prstGeom prst="rect">
-            <a:avLst/>
-          </a:prstGeom>
-          <a:noFill/>
-        </p:spPr>
-        <p:txBody>
-          <a:bodyPr wrap="square" lIns="0" rIns="0" tIns="0" bIns="0" anchor="t">
-            <a:spAutoFit/>
-          </a:bodyPr>
-          <a:lstStyle/>
-          <a:p>
-            <a:pPr algn="l">
-              <a:lnSpc>
-                <a:spcPct val="100000"/>
-              </a:lnSpc>
-            </a:pPr>
-            <a:r>
-              <a:rPr sz="1000" b="0">
-                <a:solidFill>
-                  <a:srgbClr val="AEBACC"/>
-                </a:solidFill>
-                <a:latin typeface="Noto Sans"/>
-              </a:rPr>
-              <a:t>clinical supply priority</a:t>
-            </a:r>
-          </a:p>
-        </p:txBody>
-      </p:sp>
-      <p:sp>
-        <p:nvSpPr>
-          <p:cNvPr id="14" name="Rectangle 13"/>
-          <p:cNvSpPr/>
-          <p:nvPr/>
-        </p:nvSpPr>
-        <p:spPr>
-          <a:xfrm>
-            <a:off x="822960" y="3438144"/>
-            <a:ext cx="82296" cy="329184"/>
-          </a:xfrm>
-          <a:prstGeom prst="rect">
-            <a:avLst/>
-          </a:prstGeom>
-          <a:solidFill>
-            <a:srgbClr val="F6BE4C"/>
-          </a:solidFill>
-          <a:ln>
-            <a:solidFill>
-              <a:srgbClr val="F6BE4C"/>
-            </a:solidFill>
-          </a:ln>
-        </p:spPr>
-        <p:style>
-          <a:lnRef idx="1">
-            <a:schemeClr val="accent1"/>
-          </a:lnRef>
-          <a:fillRef idx="3">
-            <a:schemeClr val="accent1"/>
-          </a:fillRef>
-          <a:effectRef idx="2">
-            <a:schemeClr val="accent1"/>
-          </a:effectRef>
-          <a:fontRef idx="minor">
-            <a:schemeClr val="lt1"/>
-          </a:fontRef>
-        </p:style>
-        <p:txBody>
-          <a:bodyPr rtlCol="0" anchor="ctr"/>
-          <a:lstStyle/>
-          <a:p>
-            <a:pPr algn="ctr"/>
-          </a:p>
-        </p:txBody>
-      </p:sp>
-      <p:sp>
-        <p:nvSpPr>
-          <p:cNvPr id="15" name="TextBox 14"/>
-          <p:cNvSpPr txBox="1"/>
-          <p:nvPr/>
-        </p:nvSpPr>
-        <p:spPr>
-          <a:xfrm>
-            <a:off x="1078992" y="3419856"/>
-            <a:ext cx="1005840" cy="228600"/>
-          </a:xfrm>
-          <a:prstGeom prst="rect">
-            <a:avLst/>
-          </a:prstGeom>
-          <a:noFill/>
-        </p:spPr>
-        <p:txBody>
-          <a:bodyPr wrap="square" lIns="0" rIns="0" tIns="0" bIns="0" anchor="t">
-            <a:spAutoFit/>
-          </a:bodyPr>
-          <a:lstStyle/>
-          <a:p>
-            <a:pPr algn="l">
-              <a:lnSpc>
-                <a:spcPct val="100000"/>
-              </a:lnSpc>
-            </a:pPr>
-            <a:r>
-              <a:rPr sz="1200" b="1">
-                <a:solidFill>
-                  <a:srgbClr val="F8F3E7"/>
-                </a:solidFill>
-                <a:latin typeface="Noto Sans"/>
-              </a:rPr>
-              <a:t>Product fit</a:t>
-            </a:r>
-          </a:p>
-        </p:txBody>
-      </p:sp>
-      <p:sp>
-        <p:nvSpPr>
-          <p:cNvPr id="16" name="TextBox 15"/>
-          <p:cNvSpPr txBox="1"/>
-          <p:nvPr/>
-        </p:nvSpPr>
-        <p:spPr>
-          <a:xfrm>
-            <a:off x="2057400" y="3419856"/>
-            <a:ext cx="1481328" cy="274320"/>
-          </a:xfrm>
-          <a:prstGeom prst="rect">
-            <a:avLst/>
-          </a:prstGeom>
-          <a:noFill/>
-        </p:spPr>
-        <p:txBody>
-          <a:bodyPr wrap="square" lIns="0" rIns="0" tIns="0" bIns="0" anchor="t">
-            <a:spAutoFit/>
-          </a:bodyPr>
-          <a:lstStyle/>
-          <a:p>
-            <a:pPr algn="l">
-              <a:lnSpc>
-                <a:spcPct val="100000"/>
-              </a:lnSpc>
-            </a:pPr>
-            <a:r>
-              <a:rPr sz="1000" b="0">
-                <a:solidFill>
-                  <a:srgbClr val="AEBACC"/>
-                </a:solidFill>
-                <a:latin typeface="Noto Sans"/>
-              </a:rPr>
-              <a:t>category and cold-chain needs</a:t>
-            </a:r>
-          </a:p>
-        </p:txBody>
-      </p:sp>
-      <p:sp>
-        <p:nvSpPr>
-          <p:cNvPr id="17" name="Rectangle 16"/>
-          <p:cNvSpPr/>
-          <p:nvPr/>
-        </p:nvSpPr>
-        <p:spPr>
-          <a:xfrm>
-            <a:off x="822960" y="4023360"/>
-            <a:ext cx="82296" cy="329184"/>
-          </a:xfrm>
-          <a:prstGeom prst="rect">
-            <a:avLst/>
-          </a:prstGeom>
-          <a:solidFill>
-            <a:srgbClr val="529BFF"/>
-          </a:solidFill>
-          <a:ln>
-            <a:solidFill>
-              <a:srgbClr val="529BFF"/>
-            </a:solidFill>
-          </a:ln>
-        </p:spPr>
-        <p:style>
-          <a:lnRef idx="1">
-            <a:schemeClr val="accent1"/>
-          </a:lnRef>
-          <a:fillRef idx="3">
-            <a:schemeClr val="accent1"/>
-          </a:fillRef>
-          <a:effectRef idx="2">
-            <a:schemeClr val="accent1"/>
-          </a:effectRef>
-          <a:fontRef idx="minor">
-            <a:schemeClr val="lt1"/>
-          </a:fontRef>
-        </p:style>
-        <p:txBody>
-          <a:bodyPr rtlCol="0" anchor="ctr"/>
-          <a:lstStyle/>
-          <a:p>
-            <a:pPr algn="ctr"/>
-          </a:p>
-        </p:txBody>
-      </p:sp>
-      <p:sp>
-        <p:nvSpPr>
-          <p:cNvPr id="18" name="TextBox 17"/>
-          <p:cNvSpPr txBox="1"/>
-          <p:nvPr/>
-        </p:nvSpPr>
-        <p:spPr>
-          <a:xfrm>
-            <a:off x="1078992" y="4005072"/>
-            <a:ext cx="1005840" cy="228600"/>
-          </a:xfrm>
-          <a:prstGeom prst="rect">
-            <a:avLst/>
-          </a:prstGeom>
-          <a:noFill/>
-        </p:spPr>
-        <p:txBody>
-          <a:bodyPr wrap="square" lIns="0" rIns="0" tIns="0" bIns="0" anchor="t">
-            <a:spAutoFit/>
-          </a:bodyPr>
-          <a:lstStyle/>
-          <a:p>
-            <a:pPr algn="l">
-              <a:lnSpc>
-                <a:spcPct val="100000"/>
-              </a:lnSpc>
-            </a:pPr>
-            <a:r>
-              <a:rPr sz="1200" b="1">
-                <a:solidFill>
-                  <a:srgbClr val="F8F3E7"/>
-                </a:solidFill>
-                <a:latin typeface="Noto Sans"/>
-              </a:rPr>
-              <a:t>Quantity</a:t>
-            </a:r>
-          </a:p>
-        </p:txBody>
-      </p:sp>
-      <p:sp>
-        <p:nvSpPr>
-          <p:cNvPr id="19" name="TextBox 18"/>
-          <p:cNvSpPr txBox="1"/>
-          <p:nvPr/>
-        </p:nvSpPr>
-        <p:spPr>
-          <a:xfrm>
-            <a:off x="2057400" y="4005072"/>
-            <a:ext cx="1481328" cy="274320"/>
-          </a:xfrm>
-          <a:prstGeom prst="rect">
-            <a:avLst/>
-          </a:prstGeom>
-          <a:noFill/>
-        </p:spPr>
-        <p:txBody>
-          <a:bodyPr wrap="square" lIns="0" rIns="0" tIns="0" bIns="0" anchor="t">
-            <a:spAutoFit/>
-          </a:bodyPr>
-          <a:lstStyle/>
-          <a:p>
-            <a:pPr algn="l">
-              <a:lnSpc>
-                <a:spcPct val="100000"/>
-              </a:lnSpc>
-            </a:pPr>
-            <a:r>
-              <a:rPr sz="1000" b="0">
-                <a:solidFill>
-                  <a:srgbClr val="AEBACC"/>
-                </a:solidFill>
-                <a:latin typeface="Noto Sans"/>
-              </a:rPr>
-              <a:t>full or partial coverage</a:t>
-            </a:r>
-          </a:p>
-        </p:txBody>
-      </p:sp>
-      <p:sp>
-        <p:nvSpPr>
-          <p:cNvPr id="20" name="Rectangle 19"/>
-          <p:cNvSpPr/>
-          <p:nvPr/>
-        </p:nvSpPr>
-        <p:spPr>
-          <a:xfrm>
-            <a:off x="822960" y="4608576"/>
-            <a:ext cx="82296" cy="329184"/>
-          </a:xfrm>
-          <a:prstGeom prst="rect">
-            <a:avLst/>
-          </a:prstGeom>
-          <a:solidFill>
-            <a:srgbClr val="FF7744"/>
-          </a:solidFill>
-          <a:ln>
-            <a:solidFill>
-              <a:srgbClr val="FF7744"/>
-            </a:solidFill>
-          </a:ln>
-        </p:spPr>
-        <p:style>
-          <a:lnRef idx="1">
-            <a:schemeClr val="accent1"/>
-          </a:lnRef>
-          <a:fillRef idx="3">
-            <a:schemeClr val="accent1"/>
-          </a:fillRef>
-          <a:effectRef idx="2">
-            <a:schemeClr val="accent1"/>
-          </a:effectRef>
-          <a:fontRef idx="minor">
-            <a:schemeClr val="lt1"/>
-          </a:fontRef>
-        </p:style>
-        <p:txBody>
-          <a:bodyPr rtlCol="0" anchor="ctr"/>
-          <a:lstStyle/>
-          <a:p>
-            <a:pPr algn="ctr"/>
-          </a:p>
-        </p:txBody>
-      </p:sp>
-      <p:sp>
-        <p:nvSpPr>
-          <p:cNvPr id="21" name="TextBox 20"/>
-          <p:cNvSpPr txBox="1"/>
-          <p:nvPr/>
-        </p:nvSpPr>
-        <p:spPr>
-          <a:xfrm>
-            <a:off x="1078992" y="4590288"/>
-            <a:ext cx="1005840" cy="228600"/>
-          </a:xfrm>
-          <a:prstGeom prst="rect">
-            <a:avLst/>
-          </a:prstGeom>
-          <a:noFill/>
-        </p:spPr>
-        <p:txBody>
-          <a:bodyPr wrap="square" lIns="0" rIns="0" tIns="0" bIns="0" anchor="t">
-            <a:spAutoFit/>
-          </a:bodyPr>
-          <a:lstStyle/>
-          <a:p>
-            <a:pPr algn="l">
-              <a:lnSpc>
-                <a:spcPct val="100000"/>
-              </a:lnSpc>
-            </a:pPr>
-            <a:r>
-              <a:rPr sz="1200" b="1">
-                <a:solidFill>
-                  <a:srgbClr val="F8F3E7"/>
-                </a:solidFill>
-                <a:latin typeface="Noto Sans"/>
-              </a:rPr>
-              <a:t>Verification</a:t>
-            </a:r>
-          </a:p>
-        </p:txBody>
-      </p:sp>
-      <p:sp>
-        <p:nvSpPr>
-          <p:cNvPr id="22" name="TextBox 21"/>
-          <p:cNvSpPr txBox="1"/>
-          <p:nvPr/>
-        </p:nvSpPr>
-        <p:spPr>
-          <a:xfrm>
-            <a:off x="2057400" y="4590288"/>
-            <a:ext cx="1481328" cy="274320"/>
-          </a:xfrm>
-          <a:prstGeom prst="rect">
-            <a:avLst/>
-          </a:prstGeom>
-          <a:noFill/>
-        </p:spPr>
-        <p:txBody>
-          <a:bodyPr wrap="square" lIns="0" rIns="0" tIns="0" bIns="0" anchor="t">
-            <a:spAutoFit/>
-          </a:bodyPr>
-          <a:lstStyle/>
-          <a:p>
-            <a:pPr algn="l">
-              <a:lnSpc>
-                <a:spcPct val="100000"/>
-              </a:lnSpc>
-            </a:pPr>
-            <a:r>
-              <a:rPr sz="1000" b="0">
-                <a:solidFill>
-                  <a:srgbClr val="AEBACC"/>
-                </a:solidFill>
-                <a:latin typeface="Noto Sans"/>
-              </a:rPr>
-              <a:t>trusted source and ownership</a:t>
-            </a:r>
-          </a:p>
-        </p:txBody>
-      </p:sp>
-      <p:sp>
-        <p:nvSpPr>
-          <p:cNvPr id="23" name="TextBox 22"/>
-          <p:cNvSpPr txBox="1"/>
-          <p:nvPr/>
-        </p:nvSpPr>
-        <p:spPr>
-          <a:xfrm>
-            <a:off x="822960" y="5376672"/>
-            <a:ext cx="2834640" cy="502920"/>
-          </a:xfrm>
-          <a:prstGeom prst="rect">
-            <a:avLst/>
-          </a:prstGeom>
-          <a:noFill/>
-        </p:spPr>
-        <p:txBody>
-          <a:bodyPr wrap="square" lIns="0" rIns="0" tIns="0" bIns="0" anchor="t">
-            <a:spAutoFit/>
-          </a:bodyPr>
-          <a:lstStyle/>
-          <a:p>
-            <a:pPr algn="l">
-              <a:lnSpc>
-                <a:spcPct val="100000"/>
-              </a:lnSpc>
-            </a:pPr>
-            <a:r>
-              <a:rPr sz="1100" b="1">
-                <a:solidFill>
-                  <a:srgbClr val="F6BE4C"/>
-                </a:solidFill>
-                <a:latin typeface="Noto Sans"/>
-              </a:rPr>
-              <a:t>Curated situation briefs explain the route in plain operational language.</a:t>
-            </a:r>
-          </a:p>
-        </p:txBody>
-      </p:sp>
-      <p:sp>
-        <p:nvSpPr>
-          <p:cNvPr id="24" name="TextBox 23"/>
+              <a:t>50 facilities  ·  43 in shortfall  ·  43 transfers  ·  2,236 units moved</a:t>
+            </a:r>
+          </a:p>
+        </p:txBody>
+      </p:sp>
+      <p:sp>
+        <p:nvSpPr>
+          <p:cNvPr id="8" name="TextBox 7"/>
           <p:cNvSpPr txBox="1"/>
           <p:nvPr/>
         </p:nvSpPr>
@@ -9395,7 +9960,7 @@
       </p:sp>
       <p:sp>
         <p:nvSpPr>
-          <p:cNvPr id="25" name="TextBox 24"/>
+          <p:cNvPr id="9" name="TextBox 8"/>
           <p:cNvSpPr txBox="1"/>
           <p:nvPr/>
         </p:nvSpPr>
@@ -9427,7 +9992,7 @@
                 </a:solidFill>
                 <a:latin typeface="Noto Sans"/>
               </a:rPr>
-              <a:t>Briefs use a deterministic fallback for demo reliability; Claude is optional</a:t>
+              <a:t>Nairobi County research view · demonstration inventory</a:t>
             </a:r>
           </a:p>
         </p:txBody>
@@ -9529,7 +10094,7 @@
                 </a:solidFill>
                 <a:latin typeface="Noto Sans"/>
               </a:rPr>
-              <a:t>07  /  IMPACT PROJECTION</a:t>
+              <a:t>07  /  EXPLAINABLE MATCHING</a:t>
             </a:r>
           </a:p>
         </p:txBody>
@@ -9568,14 +10133,14 @@
                 </a:solidFill>
                 <a:latin typeface="Noto Sans"/>
               </a:rPr>
-              <a:t>What the current throughput could unlock over one year</a:t>
+              <a:t>The system shows why a source was selected</a:t>
             </a:r>
           </a:p>
         </p:txBody>
       </p:sp>
       <p:pic>
         <p:nvPicPr>
-          <p:cNvPr id="5" name="Picture 4" descr="impact-projection.png"/>
+          <p:cNvPr id="5" name="Picture 4" descr="selected-route.png"/>
           <p:cNvPicPr>
             <a:picLocks noChangeAspect="1"/>
           </p:cNvPicPr>
@@ -9583,14 +10148,15 @@
         </p:nvPicPr>
         <p:blipFill>
           <a:blip r:embed="rId2"/>
+          <a:srcRect l="5310" r="5310"/>
           <a:stretch>
             <a:fillRect/>
           </a:stretch>
         </p:blipFill>
         <p:spPr>
           <a:xfrm>
-            <a:off x="1910182" y="1261872"/>
-            <a:ext cx="8368588" cy="5230368"/>
+            <a:off x="4297680" y="1307592"/>
+            <a:ext cx="7388352" cy="5166360"/>
           </a:xfrm>
           <a:prstGeom prst="rect">
             <a:avLst/>
@@ -9605,18 +10171,18 @@
         </p:nvSpPr>
         <p:spPr>
           <a:xfrm>
-            <a:off x="640080" y="5989320"/>
-            <a:ext cx="10908792" cy="347472"/>
+            <a:off x="530352" y="1417320"/>
+            <a:ext cx="3401568" cy="4663440"/>
           </a:xfrm>
           <a:prstGeom prst="roundRect">
             <a:avLst/>
           </a:prstGeom>
           <a:solidFill>
-            <a:srgbClr val="070C18"/>
+            <a:srgbClr val="121D31"/>
           </a:solidFill>
           <a:ln>
             <a:solidFill>
-              <a:srgbClr val="070C18"/>
+              <a:srgbClr val="1A263B"/>
             </a:solidFill>
           </a:ln>
         </p:spPr>
@@ -9650,8 +10216,8 @@
         </p:nvSpPr>
         <p:spPr>
           <a:xfrm>
-            <a:off x="822960" y="6080760"/>
-            <a:ext cx="10515600" cy="164592"/>
+            <a:off x="822960" y="1719072"/>
+            <a:ext cx="2834640" cy="347472"/>
           </a:xfrm>
           <a:prstGeom prst="rect">
             <a:avLst/>
@@ -9664,26 +10230,680 @@
           </a:bodyPr>
           <a:lstStyle/>
           <a:p>
-            <a:pPr algn="ctr">
+            <a:pPr algn="l">
               <a:lnSpc>
                 <a:spcPct val="100000"/>
               </a:lnSpc>
             </a:pPr>
             <a:r>
-              <a:rPr sz="850" b="1">
+              <a:rPr sz="2100" b="1">
+                <a:solidFill>
+                  <a:srgbClr val="F8F3E7"/>
+                </a:solidFill>
+                <a:latin typeface="Noto Sans"/>
+              </a:rPr>
+              <a:t>Decision signals</a:t>
+            </a:r>
+          </a:p>
+        </p:txBody>
+      </p:sp>
+      <p:sp>
+        <p:nvSpPr>
+          <p:cNvPr id="8" name="Rectangle 7"/>
+          <p:cNvSpPr/>
+          <p:nvPr/>
+        </p:nvSpPr>
+        <p:spPr>
+          <a:xfrm>
+            <a:off x="822960" y="2267712"/>
+            <a:ext cx="82296" cy="329184"/>
+          </a:xfrm>
+          <a:prstGeom prst="rect">
+            <a:avLst/>
+          </a:prstGeom>
+          <a:solidFill>
+            <a:srgbClr val="43D5AE"/>
+          </a:solidFill>
+          <a:ln>
+            <a:solidFill>
+              <a:srgbClr val="43D5AE"/>
+            </a:solidFill>
+          </a:ln>
+        </p:spPr>
+        <p:style>
+          <a:lnRef idx="1">
+            <a:schemeClr val="accent1"/>
+          </a:lnRef>
+          <a:fillRef idx="3">
+            <a:schemeClr val="accent1"/>
+          </a:fillRef>
+          <a:effectRef idx="2">
+            <a:schemeClr val="accent1"/>
+          </a:effectRef>
+          <a:fontRef idx="minor">
+            <a:schemeClr val="lt1"/>
+          </a:fontRef>
+        </p:style>
+        <p:txBody>
+          <a:bodyPr rtlCol="0" anchor="ctr"/>
+          <a:lstStyle/>
+          <a:p>
+            <a:pPr algn="ctr"/>
+          </a:p>
+        </p:txBody>
+      </p:sp>
+      <p:sp>
+        <p:nvSpPr>
+          <p:cNvPr id="9" name="TextBox 8"/>
+          <p:cNvSpPr txBox="1"/>
+          <p:nvPr/>
+        </p:nvSpPr>
+        <p:spPr>
+          <a:xfrm>
+            <a:off x="1078992" y="2249424"/>
+            <a:ext cx="1005840" cy="228600"/>
+          </a:xfrm>
+          <a:prstGeom prst="rect">
+            <a:avLst/>
+          </a:prstGeom>
+          <a:noFill/>
+        </p:spPr>
+        <p:txBody>
+          <a:bodyPr wrap="square" lIns="0" rIns="0" tIns="0" bIns="0" anchor="t">
+            <a:spAutoFit/>
+          </a:bodyPr>
+          <a:lstStyle/>
+          <a:p>
+            <a:pPr algn="l">
+              <a:lnSpc>
+                <a:spcPct val="100000"/>
+              </a:lnSpc>
+            </a:pPr>
+            <a:r>
+              <a:rPr sz="1200" b="1">
+                <a:solidFill>
+                  <a:srgbClr val="F8F3E7"/>
+                </a:solidFill>
+                <a:latin typeface="Noto Sans"/>
+              </a:rPr>
+              <a:t>Proximity</a:t>
+            </a:r>
+          </a:p>
+        </p:txBody>
+      </p:sp>
+      <p:sp>
+        <p:nvSpPr>
+          <p:cNvPr id="10" name="TextBox 9"/>
+          <p:cNvSpPr txBox="1"/>
+          <p:nvPr/>
+        </p:nvSpPr>
+        <p:spPr>
+          <a:xfrm>
+            <a:off x="2057400" y="2249424"/>
+            <a:ext cx="1481328" cy="274320"/>
+          </a:xfrm>
+          <a:prstGeom prst="rect">
+            <a:avLst/>
+          </a:prstGeom>
+          <a:noFill/>
+        </p:spPr>
+        <p:txBody>
+          <a:bodyPr wrap="square" lIns="0" rIns="0" tIns="0" bIns="0" anchor="t">
+            <a:spAutoFit/>
+          </a:bodyPr>
+          <a:lstStyle/>
+          <a:p>
+            <a:pPr algn="l">
+              <a:lnSpc>
+                <a:spcPct val="100000"/>
+              </a:lnSpc>
+            </a:pPr>
+            <a:r>
+              <a:rPr sz="1000" b="0">
+                <a:solidFill>
+                  <a:srgbClr val="AEBACC"/>
+                </a:solidFill>
+                <a:latin typeface="Noto Sans"/>
+              </a:rPr>
+              <a:t>direct and routed distance</a:t>
+            </a:r>
+          </a:p>
+        </p:txBody>
+      </p:sp>
+      <p:sp>
+        <p:nvSpPr>
+          <p:cNvPr id="11" name="Rectangle 10"/>
+          <p:cNvSpPr/>
+          <p:nvPr/>
+        </p:nvSpPr>
+        <p:spPr>
+          <a:xfrm>
+            <a:off x="822960" y="2852928"/>
+            <a:ext cx="82296" cy="329184"/>
+          </a:xfrm>
+          <a:prstGeom prst="rect">
+            <a:avLst/>
+          </a:prstGeom>
+          <a:solidFill>
+            <a:srgbClr val="FF5B66"/>
+          </a:solidFill>
+          <a:ln>
+            <a:solidFill>
+              <a:srgbClr val="FF5B66"/>
+            </a:solidFill>
+          </a:ln>
+        </p:spPr>
+        <p:style>
+          <a:lnRef idx="1">
+            <a:schemeClr val="accent1"/>
+          </a:lnRef>
+          <a:fillRef idx="3">
+            <a:schemeClr val="accent1"/>
+          </a:fillRef>
+          <a:effectRef idx="2">
+            <a:schemeClr val="accent1"/>
+          </a:effectRef>
+          <a:fontRef idx="minor">
+            <a:schemeClr val="lt1"/>
+          </a:fontRef>
+        </p:style>
+        <p:txBody>
+          <a:bodyPr rtlCol="0" anchor="ctr"/>
+          <a:lstStyle/>
+          <a:p>
+            <a:pPr algn="ctr"/>
+          </a:p>
+        </p:txBody>
+      </p:sp>
+      <p:sp>
+        <p:nvSpPr>
+          <p:cNvPr id="12" name="TextBox 11"/>
+          <p:cNvSpPr txBox="1"/>
+          <p:nvPr/>
+        </p:nvSpPr>
+        <p:spPr>
+          <a:xfrm>
+            <a:off x="1078992" y="2834640"/>
+            <a:ext cx="1005840" cy="228600"/>
+          </a:xfrm>
+          <a:prstGeom prst="rect">
+            <a:avLst/>
+          </a:prstGeom>
+          <a:noFill/>
+        </p:spPr>
+        <p:txBody>
+          <a:bodyPr wrap="square" lIns="0" rIns="0" tIns="0" bIns="0" anchor="t">
+            <a:spAutoFit/>
+          </a:bodyPr>
+          <a:lstStyle/>
+          <a:p>
+            <a:pPr algn="l">
+              <a:lnSpc>
+                <a:spcPct val="100000"/>
+              </a:lnSpc>
+            </a:pPr>
+            <a:r>
+              <a:rPr sz="1200" b="1">
+                <a:solidFill>
+                  <a:srgbClr val="F8F3E7"/>
+                </a:solidFill>
+                <a:latin typeface="Noto Sans"/>
+              </a:rPr>
+              <a:t>Urgency</a:t>
+            </a:r>
+          </a:p>
+        </p:txBody>
+      </p:sp>
+      <p:sp>
+        <p:nvSpPr>
+          <p:cNvPr id="13" name="TextBox 12"/>
+          <p:cNvSpPr txBox="1"/>
+          <p:nvPr/>
+        </p:nvSpPr>
+        <p:spPr>
+          <a:xfrm>
+            <a:off x="2057400" y="2834640"/>
+            <a:ext cx="1481328" cy="274320"/>
+          </a:xfrm>
+          <a:prstGeom prst="rect">
+            <a:avLst/>
+          </a:prstGeom>
+          <a:noFill/>
+        </p:spPr>
+        <p:txBody>
+          <a:bodyPr wrap="square" lIns="0" rIns="0" tIns="0" bIns="0" anchor="t">
+            <a:spAutoFit/>
+          </a:bodyPr>
+          <a:lstStyle/>
+          <a:p>
+            <a:pPr algn="l">
+              <a:lnSpc>
+                <a:spcPct val="100000"/>
+              </a:lnSpc>
+            </a:pPr>
+            <a:r>
+              <a:rPr sz="1000" b="0">
+                <a:solidFill>
+                  <a:srgbClr val="AEBACC"/>
+                </a:solidFill>
+                <a:latin typeface="Noto Sans"/>
+              </a:rPr>
+              <a:t>clinical supply priority</a:t>
+            </a:r>
+          </a:p>
+        </p:txBody>
+      </p:sp>
+      <p:sp>
+        <p:nvSpPr>
+          <p:cNvPr id="14" name="Rectangle 13"/>
+          <p:cNvSpPr/>
+          <p:nvPr/>
+        </p:nvSpPr>
+        <p:spPr>
+          <a:xfrm>
+            <a:off x="822960" y="3438144"/>
+            <a:ext cx="82296" cy="329184"/>
+          </a:xfrm>
+          <a:prstGeom prst="rect">
+            <a:avLst/>
+          </a:prstGeom>
+          <a:solidFill>
+            <a:srgbClr val="F6BE4C"/>
+          </a:solidFill>
+          <a:ln>
+            <a:solidFill>
+              <a:srgbClr val="F6BE4C"/>
+            </a:solidFill>
+          </a:ln>
+        </p:spPr>
+        <p:style>
+          <a:lnRef idx="1">
+            <a:schemeClr val="accent1"/>
+          </a:lnRef>
+          <a:fillRef idx="3">
+            <a:schemeClr val="accent1"/>
+          </a:fillRef>
+          <a:effectRef idx="2">
+            <a:schemeClr val="accent1"/>
+          </a:effectRef>
+          <a:fontRef idx="minor">
+            <a:schemeClr val="lt1"/>
+          </a:fontRef>
+        </p:style>
+        <p:txBody>
+          <a:bodyPr rtlCol="0" anchor="ctr"/>
+          <a:lstStyle/>
+          <a:p>
+            <a:pPr algn="ctr"/>
+          </a:p>
+        </p:txBody>
+      </p:sp>
+      <p:sp>
+        <p:nvSpPr>
+          <p:cNvPr id="15" name="TextBox 14"/>
+          <p:cNvSpPr txBox="1"/>
+          <p:nvPr/>
+        </p:nvSpPr>
+        <p:spPr>
+          <a:xfrm>
+            <a:off x="1078992" y="3419856"/>
+            <a:ext cx="1005840" cy="228600"/>
+          </a:xfrm>
+          <a:prstGeom prst="rect">
+            <a:avLst/>
+          </a:prstGeom>
+          <a:noFill/>
+        </p:spPr>
+        <p:txBody>
+          <a:bodyPr wrap="square" lIns="0" rIns="0" tIns="0" bIns="0" anchor="t">
+            <a:spAutoFit/>
+          </a:bodyPr>
+          <a:lstStyle/>
+          <a:p>
+            <a:pPr algn="l">
+              <a:lnSpc>
+                <a:spcPct val="100000"/>
+              </a:lnSpc>
+            </a:pPr>
+            <a:r>
+              <a:rPr sz="1200" b="1">
+                <a:solidFill>
+                  <a:srgbClr val="F8F3E7"/>
+                </a:solidFill>
+                <a:latin typeface="Noto Sans"/>
+              </a:rPr>
+              <a:t>Product fit</a:t>
+            </a:r>
+          </a:p>
+        </p:txBody>
+      </p:sp>
+      <p:sp>
+        <p:nvSpPr>
+          <p:cNvPr id="16" name="TextBox 15"/>
+          <p:cNvSpPr txBox="1"/>
+          <p:nvPr/>
+        </p:nvSpPr>
+        <p:spPr>
+          <a:xfrm>
+            <a:off x="2057400" y="3419856"/>
+            <a:ext cx="1481328" cy="274320"/>
+          </a:xfrm>
+          <a:prstGeom prst="rect">
+            <a:avLst/>
+          </a:prstGeom>
+          <a:noFill/>
+        </p:spPr>
+        <p:txBody>
+          <a:bodyPr wrap="square" lIns="0" rIns="0" tIns="0" bIns="0" anchor="t">
+            <a:spAutoFit/>
+          </a:bodyPr>
+          <a:lstStyle/>
+          <a:p>
+            <a:pPr algn="l">
+              <a:lnSpc>
+                <a:spcPct val="100000"/>
+              </a:lnSpc>
+            </a:pPr>
+            <a:r>
+              <a:rPr sz="1000" b="0">
+                <a:solidFill>
+                  <a:srgbClr val="AEBACC"/>
+                </a:solidFill>
+                <a:latin typeface="Noto Sans"/>
+              </a:rPr>
+              <a:t>category and cold-chain needs</a:t>
+            </a:r>
+          </a:p>
+        </p:txBody>
+      </p:sp>
+      <p:sp>
+        <p:nvSpPr>
+          <p:cNvPr id="17" name="Rectangle 16"/>
+          <p:cNvSpPr/>
+          <p:nvPr/>
+        </p:nvSpPr>
+        <p:spPr>
+          <a:xfrm>
+            <a:off x="822960" y="4023360"/>
+            <a:ext cx="82296" cy="329184"/>
+          </a:xfrm>
+          <a:prstGeom prst="rect">
+            <a:avLst/>
+          </a:prstGeom>
+          <a:solidFill>
+            <a:srgbClr val="529BFF"/>
+          </a:solidFill>
+          <a:ln>
+            <a:solidFill>
+              <a:srgbClr val="529BFF"/>
+            </a:solidFill>
+          </a:ln>
+        </p:spPr>
+        <p:style>
+          <a:lnRef idx="1">
+            <a:schemeClr val="accent1"/>
+          </a:lnRef>
+          <a:fillRef idx="3">
+            <a:schemeClr val="accent1"/>
+          </a:fillRef>
+          <a:effectRef idx="2">
+            <a:schemeClr val="accent1"/>
+          </a:effectRef>
+          <a:fontRef idx="minor">
+            <a:schemeClr val="lt1"/>
+          </a:fontRef>
+        </p:style>
+        <p:txBody>
+          <a:bodyPr rtlCol="0" anchor="ctr"/>
+          <a:lstStyle/>
+          <a:p>
+            <a:pPr algn="ctr"/>
+          </a:p>
+        </p:txBody>
+      </p:sp>
+      <p:sp>
+        <p:nvSpPr>
+          <p:cNvPr id="18" name="TextBox 17"/>
+          <p:cNvSpPr txBox="1"/>
+          <p:nvPr/>
+        </p:nvSpPr>
+        <p:spPr>
+          <a:xfrm>
+            <a:off x="1078992" y="4005072"/>
+            <a:ext cx="1005840" cy="228600"/>
+          </a:xfrm>
+          <a:prstGeom prst="rect">
+            <a:avLst/>
+          </a:prstGeom>
+          <a:noFill/>
+        </p:spPr>
+        <p:txBody>
+          <a:bodyPr wrap="square" lIns="0" rIns="0" tIns="0" bIns="0" anchor="t">
+            <a:spAutoFit/>
+          </a:bodyPr>
+          <a:lstStyle/>
+          <a:p>
+            <a:pPr algn="l">
+              <a:lnSpc>
+                <a:spcPct val="100000"/>
+              </a:lnSpc>
+            </a:pPr>
+            <a:r>
+              <a:rPr sz="1200" b="1">
+                <a:solidFill>
+                  <a:srgbClr val="F8F3E7"/>
+                </a:solidFill>
+                <a:latin typeface="Noto Sans"/>
+              </a:rPr>
+              <a:t>Quantity</a:t>
+            </a:r>
+          </a:p>
+        </p:txBody>
+      </p:sp>
+      <p:sp>
+        <p:nvSpPr>
+          <p:cNvPr id="19" name="TextBox 18"/>
+          <p:cNvSpPr txBox="1"/>
+          <p:nvPr/>
+        </p:nvSpPr>
+        <p:spPr>
+          <a:xfrm>
+            <a:off x="2057400" y="4005072"/>
+            <a:ext cx="1481328" cy="274320"/>
+          </a:xfrm>
+          <a:prstGeom prst="rect">
+            <a:avLst/>
+          </a:prstGeom>
+          <a:noFill/>
+        </p:spPr>
+        <p:txBody>
+          <a:bodyPr wrap="square" lIns="0" rIns="0" tIns="0" bIns="0" anchor="t">
+            <a:spAutoFit/>
+          </a:bodyPr>
+          <a:lstStyle/>
+          <a:p>
+            <a:pPr algn="l">
+              <a:lnSpc>
+                <a:spcPct val="100000"/>
+              </a:lnSpc>
+            </a:pPr>
+            <a:r>
+              <a:rPr sz="1000" b="0">
+                <a:solidFill>
+                  <a:srgbClr val="AEBACC"/>
+                </a:solidFill>
+                <a:latin typeface="Noto Sans"/>
+              </a:rPr>
+              <a:t>full or partial coverage</a:t>
+            </a:r>
+          </a:p>
+        </p:txBody>
+      </p:sp>
+      <p:sp>
+        <p:nvSpPr>
+          <p:cNvPr id="20" name="Rectangle 19"/>
+          <p:cNvSpPr/>
+          <p:nvPr/>
+        </p:nvSpPr>
+        <p:spPr>
+          <a:xfrm>
+            <a:off x="822960" y="4608576"/>
+            <a:ext cx="82296" cy="329184"/>
+          </a:xfrm>
+          <a:prstGeom prst="rect">
+            <a:avLst/>
+          </a:prstGeom>
+          <a:solidFill>
+            <a:srgbClr val="FF7744"/>
+          </a:solidFill>
+          <a:ln>
+            <a:solidFill>
+              <a:srgbClr val="FF7744"/>
+            </a:solidFill>
+          </a:ln>
+        </p:spPr>
+        <p:style>
+          <a:lnRef idx="1">
+            <a:schemeClr val="accent1"/>
+          </a:lnRef>
+          <a:fillRef idx="3">
+            <a:schemeClr val="accent1"/>
+          </a:fillRef>
+          <a:effectRef idx="2">
+            <a:schemeClr val="accent1"/>
+          </a:effectRef>
+          <a:fontRef idx="minor">
+            <a:schemeClr val="lt1"/>
+          </a:fontRef>
+        </p:style>
+        <p:txBody>
+          <a:bodyPr rtlCol="0" anchor="ctr"/>
+          <a:lstStyle/>
+          <a:p>
+            <a:pPr algn="ctr"/>
+          </a:p>
+        </p:txBody>
+      </p:sp>
+      <p:sp>
+        <p:nvSpPr>
+          <p:cNvPr id="21" name="TextBox 20"/>
+          <p:cNvSpPr txBox="1"/>
+          <p:nvPr/>
+        </p:nvSpPr>
+        <p:spPr>
+          <a:xfrm>
+            <a:off x="1078992" y="4590288"/>
+            <a:ext cx="1005840" cy="228600"/>
+          </a:xfrm>
+          <a:prstGeom prst="rect">
+            <a:avLst/>
+          </a:prstGeom>
+          <a:noFill/>
+        </p:spPr>
+        <p:txBody>
+          <a:bodyPr wrap="square" lIns="0" rIns="0" tIns="0" bIns="0" anchor="t">
+            <a:spAutoFit/>
+          </a:bodyPr>
+          <a:lstStyle/>
+          <a:p>
+            <a:pPr algn="l">
+              <a:lnSpc>
+                <a:spcPct val="100000"/>
+              </a:lnSpc>
+            </a:pPr>
+            <a:r>
+              <a:rPr sz="1200" b="1">
+                <a:solidFill>
+                  <a:srgbClr val="F8F3E7"/>
+                </a:solidFill>
+                <a:latin typeface="Noto Sans"/>
+              </a:rPr>
+              <a:t>Verification</a:t>
+            </a:r>
+          </a:p>
+        </p:txBody>
+      </p:sp>
+      <p:sp>
+        <p:nvSpPr>
+          <p:cNvPr id="22" name="TextBox 21"/>
+          <p:cNvSpPr txBox="1"/>
+          <p:nvPr/>
+        </p:nvSpPr>
+        <p:spPr>
+          <a:xfrm>
+            <a:off x="2057400" y="4590288"/>
+            <a:ext cx="1481328" cy="274320"/>
+          </a:xfrm>
+          <a:prstGeom prst="rect">
+            <a:avLst/>
+          </a:prstGeom>
+          <a:noFill/>
+        </p:spPr>
+        <p:txBody>
+          <a:bodyPr wrap="square" lIns="0" rIns="0" tIns="0" bIns="0" anchor="t">
+            <a:spAutoFit/>
+          </a:bodyPr>
+          <a:lstStyle/>
+          <a:p>
+            <a:pPr algn="l">
+              <a:lnSpc>
+                <a:spcPct val="100000"/>
+              </a:lnSpc>
+            </a:pPr>
+            <a:r>
+              <a:rPr sz="1000" b="0">
+                <a:solidFill>
+                  <a:srgbClr val="AEBACC"/>
+                </a:solidFill>
+                <a:latin typeface="Noto Sans"/>
+              </a:rPr>
+              <a:t>trusted source and ownership</a:t>
+            </a:r>
+          </a:p>
+        </p:txBody>
+      </p:sp>
+      <p:sp>
+        <p:nvSpPr>
+          <p:cNvPr id="23" name="TextBox 22"/>
+          <p:cNvSpPr txBox="1"/>
+          <p:nvPr/>
+        </p:nvSpPr>
+        <p:spPr>
+          <a:xfrm>
+            <a:off x="822960" y="5376672"/>
+            <a:ext cx="2834640" cy="502920"/>
+          </a:xfrm>
+          <a:prstGeom prst="rect">
+            <a:avLst/>
+          </a:prstGeom>
+          <a:noFill/>
+        </p:spPr>
+        <p:txBody>
+          <a:bodyPr wrap="square" lIns="0" rIns="0" tIns="0" bIns="0" anchor="t">
+            <a:spAutoFit/>
+          </a:bodyPr>
+          <a:lstStyle/>
+          <a:p>
+            <a:pPr algn="l">
+              <a:lnSpc>
+                <a:spcPct val="100000"/>
+              </a:lnSpc>
+            </a:pPr>
+            <a:r>
+              <a:rPr sz="1100" b="1">
                 <a:solidFill>
                   <a:srgbClr val="F6BE4C"/>
                 </a:solidFill>
                 <a:latin typeface="Noto Sans"/>
               </a:rPr>
-              <a:t>MODEL — NOT A GUARANTEE. Weekly cycles, 42% near-expiry recovery, coverage saturates as facilities onboard.</a:t>
-            </a:r>
-          </a:p>
-        </p:txBody>
-      </p:sp>
-      <p:sp>
-        <p:nvSpPr>
-          <p:cNvPr id="8" name="TextBox 7"/>
+              <a:t>Curated situation briefs explain the route in plain operational language.</a:t>
+            </a:r>
+          </a:p>
+        </p:txBody>
+      </p:sp>
+      <p:sp>
+        <p:nvSpPr>
+          <p:cNvPr id="24" name="TextBox 23"/>
           <p:cNvSpPr txBox="1"/>
           <p:nvPr/>
         </p:nvSpPr>
@@ -9722,7 +10942,7 @@
       </p:sp>
       <p:sp>
         <p:nvSpPr>
-          <p:cNvPr id="9" name="TextBox 8"/>
+          <p:cNvPr id="25" name="TextBox 24"/>
           <p:cNvSpPr txBox="1"/>
           <p:nvPr/>
         </p:nvSpPr>
@@ -9754,7 +10974,7 @@
                 </a:solidFill>
                 <a:latin typeface="Noto Sans"/>
               </a:rPr>
-              <a:t>Projection baseline: KEMSA 57% order-fill rate (mid-2025) + MediMatch field study (n=64)</a:t>
+              <a:t>Briefs use a deterministic fallback for demo reliability; Claude is optional</a:t>
             </a:r>
           </a:p>
         </p:txBody>
@@ -9856,7 +11076,7 @@
                 </a:solidFill>
                 <a:latin typeface="Noto Sans"/>
               </a:rPr>
-              <a:t>08  /  LIVE COORDINATION INTELLIGENCE</a:t>
+              <a:t>08  /  IMPACT PROJECTION</a:t>
             </a:r>
           </a:p>
         </p:txBody>
@@ -9895,14 +11115,14 @@
                 </a:solidFill>
                 <a:latin typeface="Noto Sans"/>
               </a:rPr>
-              <a:t>Copilot answers from the current operational state</a:t>
+              <a:t>What the current throughput could unlock over one year</a:t>
             </a:r>
           </a:p>
         </p:txBody>
       </p:sp>
       <p:pic>
         <p:nvPicPr>
-          <p:cNvPr id="5" name="Picture 4" descr="copilot.png"/>
+          <p:cNvPr id="5" name="Picture 4" descr="impact-projection.png"/>
           <p:cNvPicPr>
             <a:picLocks noChangeAspect="1"/>
           </p:cNvPicPr>
@@ -9910,15 +11130,14 @@
         </p:nvPicPr>
         <p:blipFill>
           <a:blip r:embed="rId2"/>
-          <a:srcRect l="7295" r="7295"/>
           <a:stretch>
             <a:fillRect/>
           </a:stretch>
         </p:blipFill>
         <p:spPr>
           <a:xfrm>
-            <a:off x="4663440" y="1307592"/>
-            <a:ext cx="7022592" cy="5138928"/>
+            <a:off x="1910182" y="1261872"/>
+            <a:ext cx="8368588" cy="5230368"/>
           </a:xfrm>
           <a:prstGeom prst="rect">
             <a:avLst/>
@@ -9933,18 +11152,18 @@
         </p:nvSpPr>
         <p:spPr>
           <a:xfrm>
-            <a:off x="530352" y="1417320"/>
-            <a:ext cx="3767328" cy="4681728"/>
+            <a:off x="640080" y="5989320"/>
+            <a:ext cx="10908792" cy="347472"/>
           </a:xfrm>
           <a:prstGeom prst="roundRect">
             <a:avLst/>
           </a:prstGeom>
           <a:solidFill>
-            <a:srgbClr val="121D31"/>
+            <a:srgbClr val="070C18"/>
           </a:solidFill>
           <a:ln>
             <a:solidFill>
-              <a:srgbClr val="1A263B"/>
+              <a:srgbClr val="070C18"/>
             </a:solidFill>
           </a:ln>
         </p:spPr>
@@ -9978,8 +11197,8 @@
         </p:nvSpPr>
         <p:spPr>
           <a:xfrm>
-            <a:off x="822960" y="1719072"/>
-            <a:ext cx="3154680" cy="347472"/>
+            <a:off x="822960" y="6080760"/>
+            <a:ext cx="10515600" cy="164592"/>
           </a:xfrm>
           <a:prstGeom prst="rect">
             <a:avLst/>
@@ -9992,19 +11211,19 @@
           </a:bodyPr>
           <a:lstStyle/>
           <a:p>
-            <a:pPr algn="l">
+            <a:pPr algn="ctr">
               <a:lnSpc>
                 <a:spcPct val="100000"/>
               </a:lnSpc>
             </a:pPr>
             <a:r>
-              <a:rPr sz="2100" b="1">
-                <a:solidFill>
-                  <a:srgbClr val="F8F3E7"/>
-                </a:solidFill>
-                <a:latin typeface="Noto Sans"/>
-              </a:rPr>
-              <a:t>Ask operational questions</a:t>
+              <a:rPr sz="850" b="1">
+                <a:solidFill>
+                  <a:srgbClr val="F6BE4C"/>
+                </a:solidFill>
+                <a:latin typeface="Noto Sans"/>
+              </a:rPr>
+              <a:t>MODEL — NOT A GUARANTEE. Weekly cycles, 42% near-expiry recovery, coverage saturates as facilities onboard.</a:t>
             </a:r>
           </a:p>
         </p:txBody>
@@ -10012,163 +11231,6 @@
       <p:sp>
         <p:nvSpPr>
           <p:cNvPr id="8" name="TextBox 7"/>
-          <p:cNvSpPr txBox="1"/>
-          <p:nvPr/>
-        </p:nvSpPr>
-        <p:spPr>
-          <a:xfrm>
-            <a:off x="822960" y="2286000"/>
-            <a:ext cx="3108960" cy="2468880"/>
-          </a:xfrm>
-          <a:prstGeom prst="rect">
-            <a:avLst/>
-          </a:prstGeom>
-          <a:noFill/>
-        </p:spPr>
-        <p:txBody>
-          <a:bodyPr wrap="square" lIns="0" rIns="0" tIns="0" bIns="0">
-            <a:spAutoFit/>
-          </a:bodyPr>
-          <a:lstStyle/>
-          <a:p>
-            <a:pPr>
-              <a:lnSpc>
-                <a:spcPct val="108000"/>
-              </a:lnSpc>
-              <a:spcAft>
-                <a:spcPts val="1000"/>
-              </a:spcAft>
-              <a:defRPr sz="1500">
-                <a:solidFill>
-                  <a:srgbClr val="F8F3E7"/>
-                </a:solidFill>
-                <a:latin typeface="Noto Sans"/>
-              </a:defRPr>
-            </a:pPr>
-            <a:r>
-              <a:t>→  Which facilities need urgent approval?</a:t>
-            </a:r>
-          </a:p>
-          <a:p>
-            <a:pPr>
-              <a:lnSpc>
-                <a:spcPct val="108000"/>
-              </a:lnSpc>
-              <a:spcAft>
-                <a:spcPts val="1000"/>
-              </a:spcAft>
-              <a:defRPr sz="1500">
-                <a:solidFill>
-                  <a:srgbClr val="F8F3E7"/>
-                </a:solidFill>
-                <a:latin typeface="Noto Sans"/>
-              </a:defRPr>
-            </a:pPr>
-            <a:r>
-              <a:t>→  What is in transit right now?</a:t>
-            </a:r>
-          </a:p>
-          <a:p>
-            <a:pPr>
-              <a:lnSpc>
-                <a:spcPct val="108000"/>
-              </a:lnSpc>
-              <a:spcAft>
-                <a:spcPts val="1000"/>
-              </a:spcAft>
-              <a:defRPr sz="1500">
-                <a:solidFill>
-                  <a:srgbClr val="F8F3E7"/>
-                </a:solidFill>
-                <a:latin typeface="Noto Sans"/>
-              </a:defRPr>
-            </a:pPr>
-            <a:r>
-              <a:t>→  Where are the shortfalls in Mandera?</a:t>
-            </a:r>
-          </a:p>
-          <a:p>
-            <a:pPr>
-              <a:lnSpc>
-                <a:spcPct val="108000"/>
-              </a:lnSpc>
-              <a:spcAft>
-                <a:spcPts val="1000"/>
-              </a:spcAft>
-              <a:defRPr sz="1500">
-                <a:solidFill>
-                  <a:srgbClr val="F8F3E7"/>
-                </a:solidFill>
-                <a:latin typeface="Noto Sans"/>
-              </a:defRPr>
-            </a:pPr>
-            <a:r>
-              <a:t>→  Who has surplus oxygen?</a:t>
-            </a:r>
-          </a:p>
-          <a:p>
-            <a:pPr>
-              <a:lnSpc>
-                <a:spcPct val="108000"/>
-              </a:lnSpc>
-              <a:spcAft>
-                <a:spcPts val="1000"/>
-              </a:spcAft>
-              <a:defRPr sz="1500">
-                <a:solidFill>
-                  <a:srgbClr val="F8F3E7"/>
-                </a:solidFill>
-                <a:latin typeface="Noto Sans"/>
-              </a:defRPr>
-            </a:pPr>
-            <a:r>
-              <a:t>→  Summarise the national situation.</a:t>
-            </a:r>
-          </a:p>
-        </p:txBody>
-      </p:sp>
-      <p:sp>
-        <p:nvSpPr>
-          <p:cNvPr id="9" name="TextBox 8"/>
-          <p:cNvSpPr txBox="1"/>
-          <p:nvPr/>
-        </p:nvSpPr>
-        <p:spPr>
-          <a:xfrm>
-            <a:off x="822960" y="5010912"/>
-            <a:ext cx="3063240" cy="685800"/>
-          </a:xfrm>
-          <a:prstGeom prst="rect">
-            <a:avLst/>
-          </a:prstGeom>
-          <a:noFill/>
-        </p:spPr>
-        <p:txBody>
-          <a:bodyPr wrap="square" lIns="0" rIns="0" tIns="0" bIns="0" anchor="t">
-            <a:spAutoFit/>
-          </a:bodyPr>
-          <a:lstStyle/>
-          <a:p>
-            <a:pPr algn="l">
-              <a:lnSpc>
-                <a:spcPct val="100000"/>
-              </a:lnSpc>
-            </a:pPr>
-            <a:r>
-              <a:rPr sz="1100" b="0">
-                <a:solidFill>
-                  <a:srgbClr val="AEBACC"/>
-                </a:solidFill>
-                <a:latin typeface="Noto Sans"/>
-              </a:rPr>
-              <a:t>Presentation-safe mode is grounded in live plan data and works without an API key. An Anthropic key can enable Claude-written briefs.</a:t>
-            </a:r>
-          </a:p>
-        </p:txBody>
-      </p:sp>
-      <p:sp>
-        <p:nvSpPr>
-          <p:cNvPr id="10" name="TextBox 9"/>
           <p:cNvSpPr txBox="1"/>
           <p:nvPr/>
         </p:nvSpPr>
@@ -10207,7 +11269,7 @@
       </p:sp>
       <p:sp>
         <p:nvSpPr>
-          <p:cNvPr id="11" name="TextBox 10"/>
+          <p:cNvPr id="9" name="TextBox 8"/>
           <p:cNvSpPr txBox="1"/>
           <p:nvPr/>
         </p:nvSpPr>
@@ -10239,7 +11301,7 @@
                 </a:solidFill>
                 <a:latin typeface="Noto Sans"/>
               </a:rPr>
-              <a:t>Copilot is advisory; coordinator verification remains mandatory</a:t>
+              <a:t>Projection baseline: KEMSA 57% order-fill rate (mid-2025) + MediMatch field study (n=64)</a:t>
             </a:r>
           </a:p>
         </p:txBody>

--- a/presentation/MediMatch_Conference_Deck.pptx
+++ b/presentation/MediMatch_Conference_Deck.pptx
@@ -14,6 +14,7 @@
     <p:sldId id="262" r:id="rId13"/>
     <p:sldId id="263" r:id="rId14"/>
     <p:sldId id="264" r:id="rId15"/>
+    <p:sldId id="265" r:id="rId16"/>
   </p:sldIdLst>
   <p:sldSz cx="12191695" cy="6858000" type="screen4x3"/>
   <p:notesSz cx="6858000" cy="9144000"/>
@@ -3455,6 +3456,499 @@
                 <a:latin typeface="Noto Sans"/>
               </a:rPr>
               <a:t>Conference demo · synthetic inventory · no patient records</a:t>
+            </a:r>
+          </a:p>
+        </p:txBody>
+      </p:sp>
+    </p:spTree>
+  </p:cSld>
+  <p:clrMapOvr>
+    <a:masterClrMapping/>
+  </p:clrMapOvr>
+</p:sld>
+</file>
+
+<file path=ppt/slides/slide10.xml><?xml version="1.0" encoding="utf-8"?>
+<p:sld xmlns:a="http://schemas.openxmlformats.org/drawingml/2006/main" xmlns:p="http://schemas.openxmlformats.org/presentationml/2006/main" xmlns:r="http://schemas.openxmlformats.org/officeDocument/2006/relationships">
+  <p:cSld>
+    <p:spTree>
+      <p:nvGrpSpPr>
+        <p:cNvPr id="1" name=""/>
+        <p:cNvGrpSpPr/>
+        <p:nvPr/>
+      </p:nvGrpSpPr>
+      <p:grpSpPr/>
+      <p:sp>
+        <p:nvSpPr>
+          <p:cNvPr id="2" name="Rectangle 1"/>
+          <p:cNvSpPr/>
+          <p:nvPr/>
+        </p:nvSpPr>
+        <p:spPr>
+          <a:xfrm>
+            <a:off x="0" y="0"/>
+            <a:ext cx="12191695" cy="6858000"/>
+          </a:xfrm>
+          <a:prstGeom prst="rect">
+            <a:avLst/>
+          </a:prstGeom>
+          <a:solidFill>
+            <a:srgbClr val="070C18"/>
+          </a:solidFill>
+          <a:ln>
+            <a:solidFill>
+              <a:srgbClr val="070C18"/>
+            </a:solidFill>
+          </a:ln>
+        </p:spPr>
+        <p:style>
+          <a:lnRef idx="1">
+            <a:schemeClr val="accent1"/>
+          </a:lnRef>
+          <a:fillRef idx="3">
+            <a:schemeClr val="accent1"/>
+          </a:fillRef>
+          <a:effectRef idx="2">
+            <a:schemeClr val="accent1"/>
+          </a:effectRef>
+          <a:fontRef idx="minor">
+            <a:schemeClr val="lt1"/>
+          </a:fontRef>
+        </p:style>
+        <p:txBody>
+          <a:bodyPr rtlCol="0" anchor="ctr"/>
+          <a:lstStyle/>
+          <a:p>
+            <a:pPr algn="ctr"/>
+          </a:p>
+        </p:txBody>
+      </p:sp>
+      <p:sp>
+        <p:nvSpPr>
+          <p:cNvPr id="3" name="TextBox 2"/>
+          <p:cNvSpPr txBox="1"/>
+          <p:nvPr/>
+        </p:nvSpPr>
+        <p:spPr>
+          <a:xfrm>
+            <a:off x="502920" y="320040"/>
+            <a:ext cx="6400800" cy="256032"/>
+          </a:xfrm>
+          <a:prstGeom prst="rect">
+            <a:avLst/>
+          </a:prstGeom>
+          <a:noFill/>
+        </p:spPr>
+        <p:txBody>
+          <a:bodyPr wrap="square" lIns="0" rIns="0" tIns="0" bIns="0" anchor="t">
+            <a:spAutoFit/>
+          </a:bodyPr>
+          <a:lstStyle/>
+          <a:p>
+            <a:pPr algn="l">
+              <a:lnSpc>
+                <a:spcPct val="100000"/>
+              </a:lnSpc>
+            </a:pPr>
+            <a:r>
+              <a:rPr sz="1000" b="1">
+                <a:solidFill>
+                  <a:srgbClr val="F6BE4C"/>
+                </a:solidFill>
+                <a:latin typeface="Noto Sans"/>
+              </a:rPr>
+              <a:t>09  /  REFERENCES</a:t>
+            </a:r>
+          </a:p>
+        </p:txBody>
+      </p:sp>
+      <p:sp>
+        <p:nvSpPr>
+          <p:cNvPr id="4" name="TextBox 3"/>
+          <p:cNvSpPr txBox="1"/>
+          <p:nvPr/>
+        </p:nvSpPr>
+        <p:spPr>
+          <a:xfrm>
+            <a:off x="502920" y="612648"/>
+            <a:ext cx="11155680" cy="594360"/>
+          </a:xfrm>
+          <a:prstGeom prst="rect">
+            <a:avLst/>
+          </a:prstGeom>
+          <a:noFill/>
+        </p:spPr>
+        <p:txBody>
+          <a:bodyPr wrap="square" lIns="0" rIns="0" tIns="0" bIns="0" anchor="t">
+            <a:spAutoFit/>
+          </a:bodyPr>
+          <a:lstStyle/>
+          <a:p>
+            <a:pPr algn="l">
+              <a:lnSpc>
+                <a:spcPct val="100000"/>
+              </a:lnSpc>
+            </a:pPr>
+            <a:r>
+              <a:rPr sz="2700" b="1">
+                <a:solidFill>
+                  <a:srgbClr val="F8F3E7"/>
+                </a:solidFill>
+                <a:latin typeface="Noto Sans"/>
+              </a:rPr>
+              <a:t>References &amp; sources</a:t>
+            </a:r>
+          </a:p>
+        </p:txBody>
+      </p:sp>
+      <p:sp>
+        <p:nvSpPr>
+          <p:cNvPr id="5" name="TextBox 4"/>
+          <p:cNvSpPr txBox="1"/>
+          <p:nvPr/>
+        </p:nvSpPr>
+        <p:spPr>
+          <a:xfrm>
+            <a:off x="530352" y="1417320"/>
+            <a:ext cx="5440680" cy="4937760"/>
+          </a:xfrm>
+          <a:prstGeom prst="rect">
+            <a:avLst/>
+          </a:prstGeom>
+          <a:noFill/>
+        </p:spPr>
+        <p:txBody>
+          <a:bodyPr wrap="square">
+            <a:spAutoFit/>
+          </a:bodyPr>
+          <a:lstStyle/>
+          <a:p>
+            <a:pPr>
+              <a:lnSpc>
+                <a:spcPct val="104000"/>
+              </a:lnSpc>
+              <a:spcAft>
+                <a:spcPts val="900"/>
+              </a:spcAft>
+              <a:defRPr sz="1050">
+                <a:solidFill>
+                  <a:srgbClr val="AEBACC"/>
+                </a:solidFill>
+                <a:latin typeface="Noto Sans"/>
+              </a:defRPr>
+            </a:pPr>
+            <a:r>
+              <a:t>Davis, F. D. (1989). Perceived usefulness, perceived ease of use, and user acceptance of information technology. MIS Quarterly, 13(3), 319–340.</a:t>
+            </a:r>
+          </a:p>
+          <a:p>
+            <a:pPr>
+              <a:lnSpc>
+                <a:spcPct val="104000"/>
+              </a:lnSpc>
+              <a:spcAft>
+                <a:spcPts val="900"/>
+              </a:spcAft>
+              <a:defRPr sz="1050">
+                <a:solidFill>
+                  <a:srgbClr val="AEBACC"/>
+                </a:solidFill>
+                <a:latin typeface="Noto Sans"/>
+              </a:defRPr>
+            </a:pPr>
+            <a:r>
+              <a:t>HealthcareMEA. (2025). Supply chain challenges and the impact of wastage in East African healthcare.</a:t>
+            </a:r>
+          </a:p>
+          <a:p>
+            <a:pPr>
+              <a:lnSpc>
+                <a:spcPct val="104000"/>
+              </a:lnSpc>
+              <a:spcAft>
+                <a:spcPts val="900"/>
+              </a:spcAft>
+              <a:defRPr sz="1050">
+                <a:solidFill>
+                  <a:srgbClr val="AEBACC"/>
+                </a:solidFill>
+                <a:latin typeface="Noto Sans"/>
+              </a:defRPr>
+            </a:pPr>
+            <a:r>
+              <a:t>Kenya Medical Supplies Authority (KEMSA). (2025). Supply chain performance and order-fill rates: Mid-year report 2025. Nairobi: KEMSA.</a:t>
+            </a:r>
+          </a:p>
+          <a:p>
+            <a:pPr>
+              <a:lnSpc>
+                <a:spcPct val="104000"/>
+              </a:lnSpc>
+              <a:spcAft>
+                <a:spcPts val="900"/>
+              </a:spcAft>
+              <a:defRPr sz="1050">
+                <a:solidFill>
+                  <a:srgbClr val="AEBACC"/>
+                </a:solidFill>
+                <a:latin typeface="Noto Sans"/>
+              </a:defRPr>
+            </a:pPr>
+            <a:r>
+              <a:t>Kenya Ministry of Health. (2023). National health supply chain strategy and universal health coverage. Nairobi: Ministry of Health.</a:t>
+            </a:r>
+          </a:p>
+          <a:p>
+            <a:pPr>
+              <a:lnSpc>
+                <a:spcPct val="104000"/>
+              </a:lnSpc>
+              <a:spcAft>
+                <a:spcPts val="900"/>
+              </a:spcAft>
+              <a:defRPr sz="1050">
+                <a:solidFill>
+                  <a:srgbClr val="AEBACC"/>
+                </a:solidFill>
+                <a:latin typeface="Noto Sans"/>
+              </a:defRPr>
+            </a:pPr>
+            <a:r>
+              <a:t>Kenya News Agency. (2025). Addressing stockouts: Inter-county redistribution measures.</a:t>
+            </a:r>
+          </a:p>
+          <a:p>
+            <a:pPr>
+              <a:lnSpc>
+                <a:spcPct val="104000"/>
+              </a:lnSpc>
+              <a:spcAft>
+                <a:spcPts val="900"/>
+              </a:spcAft>
+              <a:defRPr sz="1050">
+                <a:solidFill>
+                  <a:srgbClr val="AEBACC"/>
+                </a:solidFill>
+                <a:latin typeface="Noto Sans"/>
+              </a:defRPr>
+            </a:pPr>
+            <a:r>
+              <a:t>Lee, H. L., Padmanabhan, V., &amp; Whang, S. (1997). Information distortion in a supply chain: The bullwhip effect. Management Science, 43(4), 546–558.</a:t>
+            </a:r>
+          </a:p>
+        </p:txBody>
+      </p:sp>
+      <p:sp>
+        <p:nvSpPr>
+          <p:cNvPr id="6" name="TextBox 5"/>
+          <p:cNvSpPr txBox="1"/>
+          <p:nvPr/>
+        </p:nvSpPr>
+        <p:spPr>
+          <a:xfrm>
+            <a:off x="6245352" y="1417320"/>
+            <a:ext cx="5440680" cy="4937760"/>
+          </a:xfrm>
+          <a:prstGeom prst="rect">
+            <a:avLst/>
+          </a:prstGeom>
+          <a:noFill/>
+        </p:spPr>
+        <p:txBody>
+          <a:bodyPr wrap="square">
+            <a:spAutoFit/>
+          </a:bodyPr>
+          <a:lstStyle/>
+          <a:p>
+            <a:pPr>
+              <a:lnSpc>
+                <a:spcPct val="104000"/>
+              </a:lnSpc>
+              <a:spcAft>
+                <a:spcPts val="900"/>
+              </a:spcAft>
+              <a:defRPr sz="1050">
+                <a:solidFill>
+                  <a:srgbClr val="AEBACC"/>
+                </a:solidFill>
+                <a:latin typeface="Noto Sans"/>
+              </a:defRPr>
+            </a:pPr>
+            <a:r>
+              <a:t>MedShare. (2024). Recovering surplus medical supplies: Global impact report.</a:t>
+            </a:r>
+          </a:p>
+          <a:p>
+            <a:pPr>
+              <a:lnSpc>
+                <a:spcPct val="104000"/>
+              </a:lnSpc>
+              <a:spcAft>
+                <a:spcPts val="900"/>
+              </a:spcAft>
+              <a:defRPr sz="1050">
+                <a:solidFill>
+                  <a:srgbClr val="AEBACC"/>
+                </a:solidFill>
+                <a:latin typeface="Noto Sans"/>
+              </a:defRPr>
+            </a:pPr>
+            <a:r>
+              <a:t>Ministry of Health Kenya. (2020). Kenya National e-Health Policy 2016–2030. Nairobi: Ministry of Health.</a:t>
+            </a:r>
+          </a:p>
+          <a:p>
+            <a:pPr>
+              <a:lnSpc>
+                <a:spcPct val="104000"/>
+              </a:lnSpc>
+              <a:spcAft>
+                <a:spcPts val="900"/>
+              </a:spcAft>
+              <a:defRPr sz="1050">
+                <a:solidFill>
+                  <a:srgbClr val="AEBACC"/>
+                </a:solidFill>
+                <a:latin typeface="Noto Sans"/>
+              </a:defRPr>
+            </a:pPr>
+            <a:r>
+              <a:t>Mugenda, O. M., &amp; Mugenda, A. G. (2003). Research methods: Quantitative and qualitative approaches. Nairobi: Acts Press.</a:t>
+            </a:r>
+          </a:p>
+          <a:p>
+            <a:pPr>
+              <a:lnSpc>
+                <a:spcPct val="104000"/>
+              </a:lnSpc>
+              <a:spcAft>
+                <a:spcPts val="900"/>
+              </a:spcAft>
+              <a:defRPr sz="1050">
+                <a:solidFill>
+                  <a:srgbClr val="AEBACC"/>
+                </a:solidFill>
+                <a:latin typeface="Noto Sans"/>
+              </a:defRPr>
+            </a:pPr>
+            <a:r>
+              <a:t>Nation Africa. (2024). Global Fund audit reveals inconsistencies in Kenya’s stock management. Daily Nation.</a:t>
+            </a:r>
+          </a:p>
+          <a:p>
+            <a:pPr>
+              <a:lnSpc>
+                <a:spcPct val="104000"/>
+              </a:lnSpc>
+              <a:spcAft>
+                <a:spcPts val="900"/>
+              </a:spcAft>
+              <a:defRPr sz="1050">
+                <a:solidFill>
+                  <a:srgbClr val="AEBACC"/>
+                </a:solidFill>
+                <a:latin typeface="Noto Sans"/>
+              </a:defRPr>
+            </a:pPr>
+            <a:r>
+              <a:t>NHS England. (2022). NHS supply chain redistribution programme: Lessons from the COVID-19 pandemic. London: NHS.</a:t>
+            </a:r>
+          </a:p>
+          <a:p>
+            <a:pPr>
+              <a:lnSpc>
+                <a:spcPct val="104000"/>
+              </a:lnSpc>
+              <a:spcAft>
+                <a:spcPts val="900"/>
+              </a:spcAft>
+              <a:defRPr sz="1050">
+                <a:solidFill>
+                  <a:srgbClr val="AEBACC"/>
+                </a:solidFill>
+                <a:latin typeface="Noto Sans"/>
+              </a:defRPr>
+            </a:pPr>
+            <a:r>
+              <a:t>Republic of Kenya. (2019). The Data Protection Act. Nairobi: Government Printer.</a:t>
+            </a:r>
+          </a:p>
+        </p:txBody>
+      </p:sp>
+      <p:sp>
+        <p:nvSpPr>
+          <p:cNvPr id="7" name="TextBox 6"/>
+          <p:cNvSpPr txBox="1"/>
+          <p:nvPr/>
+        </p:nvSpPr>
+        <p:spPr>
+          <a:xfrm>
+            <a:off x="502920" y="6519672"/>
+            <a:ext cx="1828800" cy="164592"/>
+          </a:xfrm>
+          <a:prstGeom prst="rect">
+            <a:avLst/>
+          </a:prstGeom>
+          <a:noFill/>
+        </p:spPr>
+        <p:txBody>
+          <a:bodyPr wrap="square" lIns="0" rIns="0" tIns="0" bIns="0" anchor="t">
+            <a:spAutoFit/>
+          </a:bodyPr>
+          <a:lstStyle/>
+          <a:p>
+            <a:pPr algn="l">
+              <a:lnSpc>
+                <a:spcPct val="100000"/>
+              </a:lnSpc>
+            </a:pPr>
+            <a:r>
+              <a:rPr sz="800" b="1">
+                <a:solidFill>
+                  <a:srgbClr val="AEBACC"/>
+                </a:solidFill>
+                <a:latin typeface="Noto Sans"/>
+              </a:rPr>
+              <a:t>MEDIMATCH  /  10</a:t>
+            </a:r>
+          </a:p>
+        </p:txBody>
+      </p:sp>
+      <p:sp>
+        <p:nvSpPr>
+          <p:cNvPr id="8" name="TextBox 7"/>
+          <p:cNvSpPr txBox="1"/>
+          <p:nvPr/>
+        </p:nvSpPr>
+        <p:spPr>
+          <a:xfrm>
+            <a:off x="2377440" y="6473952"/>
+            <a:ext cx="9281160" cy="256032"/>
+          </a:xfrm>
+          <a:prstGeom prst="rect">
+            <a:avLst/>
+          </a:prstGeom>
+          <a:noFill/>
+        </p:spPr>
+        <p:txBody>
+          <a:bodyPr wrap="square" lIns="0" rIns="0" tIns="0" bIns="0" anchor="t">
+            <a:spAutoFit/>
+          </a:bodyPr>
+          <a:lstStyle/>
+          <a:p>
+            <a:pPr algn="r">
+              <a:lnSpc>
+                <a:spcPct val="100000"/>
+              </a:lnSpc>
+            </a:pPr>
+            <a:r>
+              <a:rPr sz="750" b="0">
+                <a:solidFill>
+                  <a:srgbClr val="AEBACC"/>
+                </a:solidFill>
+                <a:latin typeface="Noto Sans"/>
+              </a:rPr>
+              <a:t>Primary data: MediMatch Nairobi County field study (n=64 healthcare professionals, 80% response, 2025)</a:t>
             </a:r>
           </a:p>
         </p:txBody>

--- a/presentation/MediMatch_Conference_Deck.pptx
+++ b/presentation/MediMatch_Conference_Deck.pptx
@@ -3240,7 +3240,7 @@
               </a:lnSpc>
             </a:pPr>
             <a:r>
-              <a:rPr sz="1100" b="1">
+              <a:rPr sz="1100" b="1" lang="en-US" noProof="1" dirty="0" err="0">
                 <a:solidFill>
                   <a:srgbClr val="F6BE4C"/>
                 </a:solidFill>
@@ -3275,7 +3275,7 @@
           <a:p>
             <a:pPr algn="l"/>
             <a:r>
-              <a:rPr sz="3800" b="1">
+              <a:rPr sz="3800" b="1" lang="en-US" noProof="1" dirty="0" err="0">
                 <a:solidFill>
                   <a:srgbClr val="F8F3E7"/>
                 </a:solidFill>
@@ -3286,7 +3286,7 @@
 </a:t>
             </a:r>
             <a:r>
-              <a:rPr sz="3800" b="1">
+              <a:rPr sz="3800" b="1" lang="en-US" noProof="1" dirty="0" err="0">
                 <a:solidFill>
                   <a:srgbClr val="43D5AE"/>
                 </a:solidFill>
@@ -3325,7 +3325,7 @@
               </a:lnSpc>
             </a:pPr>
             <a:r>
-              <a:rPr sz="1800" b="0">
+              <a:rPr sz="1800" b="0" lang="en-US" noProof="1" dirty="0" err="0">
                 <a:solidFill>
                   <a:srgbClr val="AEBACC"/>
                 </a:solidFill>
@@ -3410,7 +3410,7 @@
               </a:lnSpc>
             </a:pPr>
             <a:r>
-              <a:rPr sz="1200" b="1">
+              <a:rPr sz="1200" b="1" lang="en-US" noProof="1" dirty="0" err="0">
                 <a:solidFill>
                   <a:srgbClr val="F8F3E7"/>
                 </a:solidFill>
@@ -3449,7 +3449,7 @@
               </a:lnSpc>
             </a:pPr>
             <a:r>
-              <a:rPr sz="1000" b="0">
+              <a:rPr sz="1000" b="0" lang="en-US" noProof="1" dirty="0" err="0">
                 <a:solidFill>
                   <a:srgbClr val="AEBACC"/>
                 </a:solidFill>
@@ -3551,7 +3551,7 @@
               </a:lnSpc>
             </a:pPr>
             <a:r>
-              <a:rPr sz="1000" b="1">
+              <a:rPr sz="1000" b="1" lang="en-US" noProof="1" dirty="0" err="0">
                 <a:solidFill>
                   <a:srgbClr val="F6BE4C"/>
                 </a:solidFill>
@@ -3590,7 +3590,7 @@
               </a:lnSpc>
             </a:pPr>
             <a:r>
-              <a:rPr sz="2700" b="1">
+              <a:rPr sz="2700" b="1" lang="en-US" noProof="1" dirty="0" err="0">
                 <a:solidFill>
                   <a:srgbClr val="F8F3E7"/>
                 </a:solidFill>
@@ -3638,6 +3638,7 @@
               </a:defRPr>
             </a:pPr>
             <a:r>
+              <a:rPr lang="en-US" noProof="1" dirty="0" err="0"/>
               <a:t>Davis, F. D. (1989). Perceived usefulness, perceived ease of use, and user acceptance of information technology. MIS Quarterly, 13(3), 319–340.</a:t>
             </a:r>
           </a:p>
@@ -3657,6 +3658,7 @@
               </a:defRPr>
             </a:pPr>
             <a:r>
+              <a:rPr lang="en-US" noProof="1" dirty="0" err="0"/>
               <a:t>HealthcareMEA. (2025). Supply chain challenges and the impact of wastage in East African healthcare.</a:t>
             </a:r>
           </a:p>
@@ -3676,6 +3678,7 @@
               </a:defRPr>
             </a:pPr>
             <a:r>
+              <a:rPr lang="en-US" noProof="1" dirty="0" err="0"/>
               <a:t>Kenya Medical Supplies Authority (KEMSA). (2025). Supply chain performance and order-fill rates: Mid-year report 2025. Nairobi: KEMSA.</a:t>
             </a:r>
           </a:p>
@@ -3695,6 +3698,7 @@
               </a:defRPr>
             </a:pPr>
             <a:r>
+              <a:rPr lang="en-US" noProof="1" dirty="0" err="0"/>
               <a:t>Kenya Ministry of Health. (2023). National health supply chain strategy and universal health coverage. Nairobi: Ministry of Health.</a:t>
             </a:r>
           </a:p>
@@ -3714,6 +3718,7 @@
               </a:defRPr>
             </a:pPr>
             <a:r>
+              <a:rPr lang="en-US" noProof="1" dirty="0" err="0"/>
               <a:t>Kenya News Agency. (2025). Addressing stockouts: Inter-county redistribution measures.</a:t>
             </a:r>
           </a:p>
@@ -3733,6 +3738,7 @@
               </a:defRPr>
             </a:pPr>
             <a:r>
+              <a:rPr lang="en-US" noProof="1" dirty="0" err="0"/>
               <a:t>Lee, H. L., Padmanabhan, V., &amp; Whang, S. (1997). Information distortion in a supply chain: The bullwhip effect. Management Science, 43(4), 546–558.</a:t>
             </a:r>
           </a:p>
@@ -3775,6 +3781,7 @@
               </a:defRPr>
             </a:pPr>
             <a:r>
+              <a:rPr lang="en-US" noProof="1" dirty="0" err="0"/>
               <a:t>MedShare. (2024). Recovering surplus medical supplies: Global impact report.</a:t>
             </a:r>
           </a:p>
@@ -3794,6 +3801,7 @@
               </a:defRPr>
             </a:pPr>
             <a:r>
+              <a:rPr lang="en-US" noProof="1" dirty="0" err="0"/>
               <a:t>Ministry of Health Kenya. (2020). Kenya National e-Health Policy 2016–2030. Nairobi: Ministry of Health.</a:t>
             </a:r>
           </a:p>
@@ -3813,6 +3821,7 @@
               </a:defRPr>
             </a:pPr>
             <a:r>
+              <a:rPr lang="en-US" noProof="1" dirty="0" err="0"/>
               <a:t>Mugenda, O. M., &amp; Mugenda, A. G. (2003). Research methods: Quantitative and qualitative approaches. Nairobi: Acts Press.</a:t>
             </a:r>
           </a:p>
@@ -3832,6 +3841,7 @@
               </a:defRPr>
             </a:pPr>
             <a:r>
+              <a:rPr lang="en-US" noProof="1" dirty="0" err="0"/>
               <a:t>Nation Africa. (2024). Global Fund audit reveals inconsistencies in Kenya’s stock management. Daily Nation.</a:t>
             </a:r>
           </a:p>
@@ -3851,6 +3861,7 @@
               </a:defRPr>
             </a:pPr>
             <a:r>
+              <a:rPr lang="en-US" noProof="1" dirty="0" err="0"/>
               <a:t>NHS England. (2022). NHS supply chain redistribution programme: Lessons from the COVID-19 pandemic. London: NHS.</a:t>
             </a:r>
           </a:p>
@@ -3870,6 +3881,7 @@
               </a:defRPr>
             </a:pPr>
             <a:r>
+              <a:rPr lang="en-US" noProof="1" dirty="0" err="0"/>
               <a:t>Republic of Kenya. (2019). The Data Protection Act. Nairobi: Government Printer.</a:t>
             </a:r>
           </a:p>
@@ -3903,7 +3915,7 @@
               </a:lnSpc>
             </a:pPr>
             <a:r>
-              <a:rPr sz="800" b="1">
+              <a:rPr sz="800" b="1" lang="en-US" noProof="1" dirty="0" err="0">
                 <a:solidFill>
                   <a:srgbClr val="AEBACC"/>
                 </a:solidFill>
@@ -3942,7 +3954,7 @@
               </a:lnSpc>
             </a:pPr>
             <a:r>
-              <a:rPr sz="750" b="0">
+              <a:rPr sz="750" b="0" lang="en-US" noProof="1" dirty="0" err="0">
                 <a:solidFill>
                   <a:srgbClr val="AEBACC"/>
                 </a:solidFill>
@@ -3950,6 +3962,50 @@
               </a:rPr>
               <a:t>Primary data: MediMatch Nairobi County field study (n=64 healthcare professionals, 80% response, 2025)</a:t>
             </a:r>
+          </a:p>
+        </p:txBody>
+      </p:sp>
+      <p:sp>
+        <p:nvSpPr>
+          <p:cNvPr id="9" name="Rectangle 8"/>
+          <p:cNvSpPr/>
+          <p:nvPr/>
+        </p:nvSpPr>
+        <p:spPr>
+          <a:xfrm>
+            <a:off x="0" y="0"/>
+            <a:ext cx="12191695" cy="54864"/>
+          </a:xfrm>
+          <a:prstGeom prst="rect">
+            <a:avLst/>
+          </a:prstGeom>
+          <a:solidFill>
+            <a:srgbClr val="F6BE4C"/>
+          </a:solidFill>
+          <a:ln>
+            <a:noFill/>
+          </a:ln>
+          <a:effectLst/>
+        </p:spPr>
+        <p:style>
+          <a:lnRef idx="1">
+            <a:schemeClr val="accent1"/>
+          </a:lnRef>
+          <a:fillRef idx="3">
+            <a:schemeClr val="accent1"/>
+          </a:fillRef>
+          <a:effectRef idx="2">
+            <a:schemeClr val="accent1"/>
+          </a:effectRef>
+          <a:fontRef idx="minor">
+            <a:schemeClr val="lt1"/>
+          </a:fontRef>
+        </p:style>
+        <p:txBody>
+          <a:bodyPr rtlCol="0" anchor="ctr"/>
+          <a:lstStyle/>
+          <a:p>
+            <a:pPr algn="ctr"/>
           </a:p>
         </p:txBody>
       </p:sp>
@@ -4044,7 +4100,7 @@
               </a:lnSpc>
             </a:pPr>
             <a:r>
-              <a:rPr sz="1000" b="1">
+              <a:rPr sz="1000" b="1" lang="en-US" noProof="1" dirty="0" err="0">
                 <a:solidFill>
                   <a:srgbClr val="F6BE4C"/>
                 </a:solidFill>
@@ -4083,7 +4139,7 @@
               </a:lnSpc>
             </a:pPr>
             <a:r>
-              <a:rPr sz="2600" b="1">
+              <a:rPr sz="2600" b="1" lang="en-US" noProof="1" dirty="0" err="0">
                 <a:solidFill>
                   <a:srgbClr val="F8F3E7"/>
                 </a:solidFill>
@@ -4123,7 +4179,7 @@
               </a:lnSpc>
             </a:pPr>
             <a:r>
-              <a:rPr sz="1400" b="0">
+              <a:rPr sz="1400" b="0" lang="en-US" noProof="1" dirty="0" err="0">
                 <a:solidFill>
                   <a:srgbClr val="AEBACC"/>
                 </a:solidFill>
@@ -4207,7 +4263,7 @@
               </a:lnSpc>
             </a:pPr>
             <a:r>
-              <a:rPr sz="2500" b="1">
+              <a:rPr sz="2500" b="1" lang="en-US" noProof="1" dirty="0" err="0">
                 <a:solidFill>
                   <a:srgbClr val="FF7744"/>
                 </a:solidFill>
@@ -4246,7 +4302,7 @@
               </a:lnSpc>
             </a:pPr>
             <a:r>
-              <a:rPr sz="1000" b="0">
+              <a:rPr sz="1000" b="0" lang="en-US" noProof="1" dirty="0" err="0">
                 <a:solidFill>
                   <a:srgbClr val="AEBACC"/>
                 </a:solidFill>
@@ -4330,7 +4386,7 @@
               </a:lnSpc>
             </a:pPr>
             <a:r>
-              <a:rPr sz="2500" b="1">
+              <a:rPr sz="2500" b="1" lang="en-US" noProof="1" dirty="0" err="0">
                 <a:solidFill>
                   <a:srgbClr val="F6BE4C"/>
                 </a:solidFill>
@@ -4369,7 +4425,7 @@
               </a:lnSpc>
             </a:pPr>
             <a:r>
-              <a:rPr sz="1000" b="0">
+              <a:rPr sz="1000" b="0" lang="en-US" noProof="1" dirty="0" err="0">
                 <a:solidFill>
                   <a:srgbClr val="AEBACC"/>
                 </a:solidFill>
@@ -4453,7 +4509,7 @@
               </a:lnSpc>
             </a:pPr>
             <a:r>
-              <a:rPr sz="2500" b="1">
+              <a:rPr sz="2500" b="1" lang="en-US" noProof="1" dirty="0" err="0">
                 <a:solidFill>
                   <a:srgbClr val="FF5B66"/>
                 </a:solidFill>
@@ -4492,7 +4548,7 @@
               </a:lnSpc>
             </a:pPr>
             <a:r>
-              <a:rPr sz="1000" b="0">
+              <a:rPr sz="1000" b="0" lang="en-US" noProof="1" dirty="0" err="0">
                 <a:solidFill>
                   <a:srgbClr val="AEBACC"/>
                 </a:solidFill>
@@ -4576,7 +4632,7 @@
               </a:lnSpc>
             </a:pPr>
             <a:r>
-              <a:rPr sz="2500" b="1">
+              <a:rPr sz="2500" b="1" lang="en-US" noProof="1" dirty="0" err="0">
                 <a:solidFill>
                   <a:srgbClr val="43D5AE"/>
                 </a:solidFill>
@@ -4615,7 +4671,7 @@
               </a:lnSpc>
             </a:pPr>
             <a:r>
-              <a:rPr sz="1000" b="0">
+              <a:rPr sz="1000" b="0" lang="en-US" noProof="1" dirty="0" err="0">
                 <a:solidFill>
                   <a:srgbClr val="AEBACC"/>
                 </a:solidFill>
@@ -4699,7 +4755,7 @@
               </a:lnSpc>
             </a:pPr>
             <a:r>
-              <a:rPr sz="1900" b="1">
+              <a:rPr sz="1900" b="1" lang="en-US" noProof="1" dirty="0" err="0">
                 <a:solidFill>
                   <a:srgbClr val="F8F3E7"/>
                 </a:solidFill>
@@ -4739,7 +4795,7 @@
               </a:lnSpc>
             </a:pPr>
             <a:r>
-              <a:rPr sz="1500" b="0">
+              <a:rPr sz="1500" b="0" lang="en-US" noProof="1" dirty="0" err="0">
                 <a:solidFill>
                   <a:srgbClr val="AEBACC"/>
                 </a:solidFill>
@@ -4823,7 +4879,7 @@
               </a:lnSpc>
             </a:pPr>
             <a:r>
-              <a:rPr sz="3400" b="1">
+              <a:rPr sz="3400" b="1" lang="en-US" noProof="1" dirty="0" err="0">
                 <a:solidFill>
                   <a:srgbClr val="F6BE4C"/>
                 </a:solidFill>
@@ -4862,7 +4918,7 @@
               </a:lnSpc>
             </a:pPr>
             <a:r>
-              <a:rPr sz="1300" b="0">
+              <a:rPr sz="1300" b="0" lang="en-US" noProof="1" dirty="0" err="0">
                 <a:solidFill>
                   <a:srgbClr val="AEBACC"/>
                 </a:solidFill>
@@ -4902,7 +4958,7 @@
               </a:lnSpc>
             </a:pPr>
             <a:r>
-              <a:rPr sz="1000" b="0">
+              <a:rPr sz="1000" b="0" lang="en-US" noProof="1" dirty="0" err="0">
                 <a:solidFill>
                   <a:srgbClr val="AEBACC"/>
                 </a:solidFill>
@@ -4941,7 +4997,7 @@
               </a:lnSpc>
             </a:pPr>
             <a:r>
-              <a:rPr sz="800" b="1">
+              <a:rPr sz="800" b="1" lang="en-US" noProof="1" dirty="0" err="0">
                 <a:solidFill>
                   <a:srgbClr val="AEBACC"/>
                 </a:solidFill>
@@ -4980,7 +5036,7 @@
               </a:lnSpc>
             </a:pPr>
             <a:r>
-              <a:rPr sz="750" b="0">
+              <a:rPr sz="750" b="0" lang="en-US" noProof="1" dirty="0" err="0">
                 <a:solidFill>
                   <a:srgbClr val="AEBACC"/>
                 </a:solidFill>
@@ -4988,6 +5044,50 @@
               </a:rPr>
               <a:t>Sources: MediMatch Nairobi County field study (n=64 healthcare professionals, 80% response, 2025); KEMSA order-fill rate 57%, mid-2025</a:t>
             </a:r>
+          </a:p>
+        </p:txBody>
+      </p:sp>
+      <p:sp>
+        <p:nvSpPr>
+          <p:cNvPr id="27" name="Rectangle 26"/>
+          <p:cNvSpPr/>
+          <p:nvPr/>
+        </p:nvSpPr>
+        <p:spPr>
+          <a:xfrm>
+            <a:off x="0" y="0"/>
+            <a:ext cx="12191695" cy="54864"/>
+          </a:xfrm>
+          <a:prstGeom prst="rect">
+            <a:avLst/>
+          </a:prstGeom>
+          <a:solidFill>
+            <a:srgbClr val="F6BE4C"/>
+          </a:solidFill>
+          <a:ln>
+            <a:noFill/>
+          </a:ln>
+          <a:effectLst/>
+        </p:spPr>
+        <p:style>
+          <a:lnRef idx="1">
+            <a:schemeClr val="accent1"/>
+          </a:lnRef>
+          <a:fillRef idx="3">
+            <a:schemeClr val="accent1"/>
+          </a:fillRef>
+          <a:effectRef idx="2">
+            <a:schemeClr val="accent1"/>
+          </a:effectRef>
+          <a:fontRef idx="minor">
+            <a:schemeClr val="lt1"/>
+          </a:fontRef>
+        </p:style>
+        <p:txBody>
+          <a:bodyPr rtlCol="0" anchor="ctr"/>
+          <a:lstStyle/>
+          <a:p>
+            <a:pPr algn="ctr"/>
           </a:p>
         </p:txBody>
       </p:sp>
@@ -5082,7 +5182,7 @@
               </a:lnSpc>
             </a:pPr>
             <a:r>
-              <a:rPr sz="1000" b="1">
+              <a:rPr sz="1000" b="1" lang="en-US" noProof="1" dirty="0" err="0">
                 <a:solidFill>
                   <a:srgbClr val="F6BE4C"/>
                 </a:solidFill>
@@ -5121,7 +5221,7 @@
               </a:lnSpc>
             </a:pPr>
             <a:r>
-              <a:rPr sz="2800" b="1">
+              <a:rPr sz="2800" b="1" lang="en-US" noProof="1" dirty="0" err="0">
                 <a:solidFill>
                   <a:srgbClr val="F8F3E7"/>
                 </a:solidFill>
@@ -5160,7 +5260,7 @@
               </a:lnSpc>
             </a:pPr>
             <a:r>
-              <a:rPr sz="1300" b="1">
+              <a:rPr sz="1300" b="1" lang="en-US" noProof="1" dirty="0" err="0">
                 <a:solidFill>
                   <a:srgbClr val="F6BE4C"/>
                 </a:solidFill>
@@ -5199,7 +5299,7 @@
               </a:lnSpc>
             </a:pPr>
             <a:r>
-              <a:rPr sz="1400" b="0">
+              <a:rPr sz="1400" b="0" lang="en-US" noProof="1" dirty="0" err="0">
                 <a:solidFill>
                   <a:srgbClr val="AEBACC"/>
                 </a:solidFill>
@@ -5352,7 +5452,7 @@
               </a:lnSpc>
             </a:pPr>
             <a:r>
-              <a:rPr sz="1100" b="1">
+              <a:rPr sz="1100" b="1" lang="en-US" noProof="1" dirty="0" err="0">
                 <a:solidFill>
                   <a:srgbClr val="FF7744"/>
                 </a:solidFill>
@@ -5505,7 +5605,7 @@
               </a:lnSpc>
             </a:pPr>
             <a:r>
-              <a:rPr sz="1100" b="1">
+              <a:rPr sz="1100" b="1" lang="en-US" noProof="1" dirty="0" err="0">
                 <a:solidFill>
                   <a:srgbClr val="43D5AE"/>
                 </a:solidFill>
@@ -5658,7 +5758,7 @@
               </a:lnSpc>
             </a:pPr>
             <a:r>
-              <a:rPr sz="1100" b="1">
+              <a:rPr sz="1100" b="1" lang="en-US" noProof="1" dirty="0" err="0">
                 <a:solidFill>
                   <a:srgbClr val="529BFF"/>
                 </a:solidFill>
@@ -5697,7 +5797,7 @@
               </a:lnSpc>
             </a:pPr>
             <a:r>
-              <a:rPr sz="800" b="1">
+              <a:rPr sz="800" b="1" lang="en-US" noProof="1" dirty="0" err="0">
                 <a:solidFill>
                   <a:srgbClr val="AEBACC"/>
                 </a:solidFill>
@@ -5736,7 +5836,7 @@
               </a:lnSpc>
             </a:pPr>
             <a:r>
-              <a:rPr sz="750" b="0">
+              <a:rPr sz="750" b="0" lang="en-US" noProof="1" dirty="0" err="0">
                 <a:solidFill>
                   <a:srgbClr val="AEBACC"/>
                 </a:solidFill>
@@ -5744,6 +5844,50 @@
               </a:rPr>
               <a:t>Source: MediMatch Nairobi County field study · n=64 · 2025</a:t>
             </a:r>
+          </a:p>
+        </p:txBody>
+      </p:sp>
+      <p:sp>
+        <p:nvSpPr>
+          <p:cNvPr id="21" name="Rectangle 20"/>
+          <p:cNvSpPr/>
+          <p:nvPr/>
+        </p:nvSpPr>
+        <p:spPr>
+          <a:xfrm>
+            <a:off x="0" y="0"/>
+            <a:ext cx="12191695" cy="54864"/>
+          </a:xfrm>
+          <a:prstGeom prst="rect">
+            <a:avLst/>
+          </a:prstGeom>
+          <a:solidFill>
+            <a:srgbClr val="F6BE4C"/>
+          </a:solidFill>
+          <a:ln>
+            <a:noFill/>
+          </a:ln>
+          <a:effectLst/>
+        </p:spPr>
+        <p:style>
+          <a:lnRef idx="1">
+            <a:schemeClr val="accent1"/>
+          </a:lnRef>
+          <a:fillRef idx="3">
+            <a:schemeClr val="accent1"/>
+          </a:fillRef>
+          <a:effectRef idx="2">
+            <a:schemeClr val="accent1"/>
+          </a:effectRef>
+          <a:fontRef idx="minor">
+            <a:schemeClr val="lt1"/>
+          </a:fontRef>
+        </p:style>
+        <p:txBody>
+          <a:bodyPr rtlCol="0" anchor="ctr"/>
+          <a:lstStyle/>
+          <a:p>
+            <a:pPr algn="ctr"/>
           </a:p>
         </p:txBody>
       </p:sp>
@@ -5838,7 +5982,7 @@
               </a:lnSpc>
             </a:pPr>
             <a:r>
-              <a:rPr sz="1000" b="1">
+              <a:rPr sz="1000" b="1" lang="en-US" noProof="1" dirty="0" err="0">
                 <a:solidFill>
                   <a:srgbClr val="F6BE4C"/>
                 </a:solidFill>
@@ -5877,7 +6021,7 @@
               </a:lnSpc>
             </a:pPr>
             <a:r>
-              <a:rPr sz="2800" b="1">
+              <a:rPr sz="2800" b="1" lang="en-US" noProof="1" dirty="0" err="0">
                 <a:solidFill>
                   <a:srgbClr val="F8F3E7"/>
                 </a:solidFill>
@@ -5916,7 +6060,7 @@
               </a:lnSpc>
             </a:pPr>
             <a:r>
-              <a:rPr sz="1300" b="1">
+              <a:rPr sz="1300" b="1" lang="en-US" noProof="1" dirty="0" err="0">
                 <a:solidFill>
                   <a:srgbClr val="F6BE4C"/>
                 </a:solidFill>
@@ -5955,7 +6099,7 @@
               </a:lnSpc>
             </a:pPr>
             <a:r>
-              <a:rPr sz="1400" b="0">
+              <a:rPr sz="1400" b="0" lang="en-US" noProof="1" dirty="0" err="0">
                 <a:solidFill>
                   <a:srgbClr val="AEBACC"/>
                 </a:solidFill>
@@ -6108,7 +6252,7 @@
               </a:lnSpc>
             </a:pPr>
             <a:r>
-              <a:rPr sz="1100" b="1">
+              <a:rPr sz="1100" b="1" lang="en-US" noProof="1" dirty="0" err="0">
                 <a:solidFill>
                   <a:srgbClr val="FF7744"/>
                 </a:solidFill>
@@ -6261,7 +6405,7 @@
               </a:lnSpc>
             </a:pPr>
             <a:r>
-              <a:rPr sz="1100" b="1">
+              <a:rPr sz="1100" b="1" lang="en-US" noProof="1" dirty="0" err="0">
                 <a:solidFill>
                   <a:srgbClr val="F6BE4C"/>
                 </a:solidFill>
@@ -6414,7 +6558,7 @@
               </a:lnSpc>
             </a:pPr>
             <a:r>
-              <a:rPr sz="1100" b="1">
+              <a:rPr sz="1100" b="1" lang="en-US" noProof="1" dirty="0" err="0">
                 <a:solidFill>
                   <a:srgbClr val="FF5B66"/>
                 </a:solidFill>
@@ -6453,7 +6597,7 @@
               </a:lnSpc>
             </a:pPr>
             <a:r>
-              <a:rPr sz="800" b="1">
+              <a:rPr sz="800" b="1" lang="en-US" noProof="1" dirty="0" err="0">
                 <a:solidFill>
                   <a:srgbClr val="AEBACC"/>
                 </a:solidFill>
@@ -6492,7 +6636,7 @@
               </a:lnSpc>
             </a:pPr>
             <a:r>
-              <a:rPr sz="750" b="0">
+              <a:rPr sz="750" b="0" lang="en-US" noProof="1" dirty="0" err="0">
                 <a:solidFill>
                   <a:srgbClr val="AEBACC"/>
                 </a:solidFill>
@@ -6500,6 +6644,50 @@
               </a:rPr>
               <a:t>Source: MediMatch survey, n=64 · Q4 and Q6 are the abstract’s 56.3% and 82.8% figures, shown from the raw responses</a:t>
             </a:r>
+          </a:p>
+        </p:txBody>
+      </p:sp>
+      <p:sp>
+        <p:nvSpPr>
+          <p:cNvPr id="21" name="Rectangle 20"/>
+          <p:cNvSpPr/>
+          <p:nvPr/>
+        </p:nvSpPr>
+        <p:spPr>
+          <a:xfrm>
+            <a:off x="0" y="0"/>
+            <a:ext cx="12191695" cy="54864"/>
+          </a:xfrm>
+          <a:prstGeom prst="rect">
+            <a:avLst/>
+          </a:prstGeom>
+          <a:solidFill>
+            <a:srgbClr val="F6BE4C"/>
+          </a:solidFill>
+          <a:ln>
+            <a:noFill/>
+          </a:ln>
+          <a:effectLst/>
+        </p:spPr>
+        <p:style>
+          <a:lnRef idx="1">
+            <a:schemeClr val="accent1"/>
+          </a:lnRef>
+          <a:fillRef idx="3">
+            <a:schemeClr val="accent1"/>
+          </a:fillRef>
+          <a:effectRef idx="2">
+            <a:schemeClr val="accent1"/>
+          </a:effectRef>
+          <a:fontRef idx="minor">
+            <a:schemeClr val="lt1"/>
+          </a:fontRef>
+        </p:style>
+        <p:txBody>
+          <a:bodyPr rtlCol="0" anchor="ctr"/>
+          <a:lstStyle/>
+          <a:p>
+            <a:pPr algn="ctr"/>
           </a:p>
         </p:txBody>
       </p:sp>
@@ -6594,7 +6782,7 @@
               </a:lnSpc>
             </a:pPr>
             <a:r>
-              <a:rPr sz="1000" b="1">
+              <a:rPr sz="1000" b="1" lang="en-US" noProof="1" dirty="0" err="0">
                 <a:solidFill>
                   <a:srgbClr val="F6BE4C"/>
                 </a:solidFill>
@@ -6633,7 +6821,7 @@
               </a:lnSpc>
             </a:pPr>
             <a:r>
-              <a:rPr sz="2800" b="1">
+              <a:rPr sz="2800" b="1" lang="en-US" noProof="1" dirty="0" err="0">
                 <a:solidFill>
                   <a:srgbClr val="F8F3E7"/>
                 </a:solidFill>
@@ -6672,7 +6860,7 @@
               </a:lnSpc>
             </a:pPr>
             <a:r>
-              <a:rPr sz="1300" b="1">
+              <a:rPr sz="1300" b="1" lang="en-US" noProof="1" dirty="0" err="0">
                 <a:solidFill>
                   <a:srgbClr val="F6BE4C"/>
                 </a:solidFill>
@@ -6711,7 +6899,7 @@
               </a:lnSpc>
             </a:pPr>
             <a:r>
-              <a:rPr sz="1400" b="0">
+              <a:rPr sz="1400" b="0" lang="en-US" noProof="1" dirty="0" err="0">
                 <a:solidFill>
                   <a:srgbClr val="AEBACC"/>
                 </a:solidFill>
@@ -6864,7 +7052,7 @@
               </a:lnSpc>
             </a:pPr>
             <a:r>
-              <a:rPr sz="1100" b="1">
+              <a:rPr sz="1100" b="1" lang="en-US" noProof="1" dirty="0" err="0">
                 <a:solidFill>
                   <a:srgbClr val="FF5B66"/>
                 </a:solidFill>
@@ -7017,7 +7205,7 @@
               </a:lnSpc>
             </a:pPr>
             <a:r>
-              <a:rPr sz="1100" b="1">
+              <a:rPr sz="1100" b="1" lang="en-US" noProof="1" dirty="0" err="0">
                 <a:solidFill>
                   <a:srgbClr val="529BFF"/>
                 </a:solidFill>
@@ -7170,7 +7358,7 @@
               </a:lnSpc>
             </a:pPr>
             <a:r>
-              <a:rPr sz="1100" b="1">
+              <a:rPr sz="1100" b="1" lang="en-US" noProof="1" dirty="0" err="0">
                 <a:solidFill>
                   <a:srgbClr val="43D5AE"/>
                 </a:solidFill>
@@ -7209,7 +7397,7 @@
               </a:lnSpc>
             </a:pPr>
             <a:r>
-              <a:rPr sz="800" b="1">
+              <a:rPr sz="800" b="1" lang="en-US" noProof="1" dirty="0" err="0">
                 <a:solidFill>
                   <a:srgbClr val="AEBACC"/>
                 </a:solidFill>
@@ -7248,7 +7436,7 @@
               </a:lnSpc>
             </a:pPr>
             <a:r>
-              <a:rPr sz="750" b="0">
+              <a:rPr sz="750" b="0" lang="en-US" noProof="1" dirty="0" err="0">
                 <a:solidFill>
                   <a:srgbClr val="AEBACC"/>
                 </a:solidFill>
@@ -7256,6 +7444,50 @@
               </a:rPr>
               <a:t>Source: MediMatch survey, n=64 · Q7 and Q9 are the abstract’s 57.8% and 89.1% figures, shown from the raw responses</a:t>
             </a:r>
+          </a:p>
+        </p:txBody>
+      </p:sp>
+      <p:sp>
+        <p:nvSpPr>
+          <p:cNvPr id="21" name="Rectangle 20"/>
+          <p:cNvSpPr/>
+          <p:nvPr/>
+        </p:nvSpPr>
+        <p:spPr>
+          <a:xfrm>
+            <a:off x="0" y="0"/>
+            <a:ext cx="12191695" cy="54864"/>
+          </a:xfrm>
+          <a:prstGeom prst="rect">
+            <a:avLst/>
+          </a:prstGeom>
+          <a:solidFill>
+            <a:srgbClr val="F6BE4C"/>
+          </a:solidFill>
+          <a:ln>
+            <a:noFill/>
+          </a:ln>
+          <a:effectLst/>
+        </p:spPr>
+        <p:style>
+          <a:lnRef idx="1">
+            <a:schemeClr val="accent1"/>
+          </a:lnRef>
+          <a:fillRef idx="3">
+            <a:schemeClr val="accent1"/>
+          </a:fillRef>
+          <a:effectRef idx="2">
+            <a:schemeClr val="accent1"/>
+          </a:effectRef>
+          <a:fontRef idx="minor">
+            <a:schemeClr val="lt1"/>
+          </a:fontRef>
+        </p:style>
+        <p:txBody>
+          <a:bodyPr rtlCol="0" anchor="ctr"/>
+          <a:lstStyle/>
+          <a:p>
+            <a:pPr algn="ctr"/>
           </a:p>
         </p:txBody>
       </p:sp>
@@ -7350,7 +7582,7 @@
               </a:lnSpc>
             </a:pPr>
             <a:r>
-              <a:rPr sz="1000" b="1">
+              <a:rPr sz="1000" b="1" lang="en-US" noProof="1" dirty="0" err="0">
                 <a:solidFill>
                   <a:srgbClr val="F6BE4C"/>
                 </a:solidFill>
@@ -7389,7 +7621,7 @@
               </a:lnSpc>
             </a:pPr>
             <a:r>
-              <a:rPr sz="2700" b="1">
+              <a:rPr sz="2700" b="1" lang="en-US" noProof="1" dirty="0" err="0">
                 <a:solidFill>
                   <a:srgbClr val="F8F3E7"/>
                 </a:solidFill>
@@ -7428,7 +7660,7 @@
               </a:lnSpc>
             </a:pPr>
             <a:r>
-              <a:rPr sz="1400" b="0">
+              <a:rPr sz="1400" b="0" lang="en-US" noProof="1" dirty="0" err="0">
                 <a:solidFill>
                   <a:srgbClr val="AEBACC"/>
                 </a:solidFill>
@@ -7557,7 +7789,7 @@
               </a:lnSpc>
             </a:pPr>
             <a:r>
-              <a:rPr sz="1600" b="1">
+              <a:rPr sz="1600" b="1" lang="en-US" noProof="1" dirty="0" err="0">
                 <a:solidFill>
                   <a:srgbClr val="FF7744"/>
                 </a:solidFill>
@@ -7596,7 +7828,7 @@
               </a:lnSpc>
             </a:pPr>
             <a:r>
-              <a:rPr sz="1200" b="0">
+              <a:rPr sz="1200" b="0" lang="en-US" noProof="1" dirty="0" err="0">
                 <a:solidFill>
                   <a:srgbClr val="AEBACC"/>
                 </a:solidFill>
@@ -7636,7 +7868,7 @@
               </a:lnSpc>
             </a:pPr>
             <a:r>
-              <a:rPr sz="2200" b="1">
+              <a:rPr sz="2200" b="1" lang="en-US" noProof="1" dirty="0" err="0">
                 <a:solidFill>
                   <a:srgbClr val="F6BE4C"/>
                 </a:solidFill>
@@ -7765,7 +7997,7 @@
               </a:lnSpc>
             </a:pPr>
             <a:r>
-              <a:rPr sz="1600" b="1">
+              <a:rPr sz="1600" b="1" lang="en-US" noProof="1" dirty="0" err="0">
                 <a:solidFill>
                   <a:srgbClr val="F6BE4C"/>
                 </a:solidFill>
@@ -7804,7 +8036,7 @@
               </a:lnSpc>
             </a:pPr>
             <a:r>
-              <a:rPr sz="1200" b="0">
+              <a:rPr sz="1200" b="0" lang="en-US" noProof="1" dirty="0" err="0">
                 <a:solidFill>
                   <a:srgbClr val="AEBACC"/>
                 </a:solidFill>
@@ -7844,7 +8076,7 @@
               </a:lnSpc>
             </a:pPr>
             <a:r>
-              <a:rPr sz="2200" b="1">
+              <a:rPr sz="2200" b="1" lang="en-US" noProof="1" dirty="0" err="0">
                 <a:solidFill>
                   <a:srgbClr val="F6BE4C"/>
                 </a:solidFill>
@@ -7973,7 +8205,7 @@
               </a:lnSpc>
             </a:pPr>
             <a:r>
-              <a:rPr sz="1600" b="1">
+              <a:rPr sz="1600" b="1" lang="en-US" noProof="1" dirty="0" err="0">
                 <a:solidFill>
                   <a:srgbClr val="43D5AE"/>
                 </a:solidFill>
@@ -8012,7 +8244,7 @@
               </a:lnSpc>
             </a:pPr>
             <a:r>
-              <a:rPr sz="1200" b="0">
+              <a:rPr sz="1200" b="0" lang="en-US" noProof="1" dirty="0" err="0">
                 <a:solidFill>
                   <a:srgbClr val="AEBACC"/>
                 </a:solidFill>
@@ -8052,7 +8284,7 @@
               </a:lnSpc>
             </a:pPr>
             <a:r>
-              <a:rPr sz="2200" b="1">
+              <a:rPr sz="2200" b="1" lang="en-US" noProof="1" dirty="0" err="0">
                 <a:solidFill>
                   <a:srgbClr val="F6BE4C"/>
                 </a:solidFill>
@@ -8181,7 +8413,7 @@
               </a:lnSpc>
             </a:pPr>
             <a:r>
-              <a:rPr sz="1600" b="1">
+              <a:rPr sz="1600" b="1" lang="en-US" noProof="1" dirty="0" err="0">
                 <a:solidFill>
                   <a:srgbClr val="529BFF"/>
                 </a:solidFill>
@@ -8220,7 +8452,7 @@
               </a:lnSpc>
             </a:pPr>
             <a:r>
-              <a:rPr sz="1200" b="0">
+              <a:rPr sz="1200" b="0" lang="en-US" noProof="1" dirty="0" err="0">
                 <a:solidFill>
                   <a:srgbClr val="AEBACC"/>
                 </a:solidFill>
@@ -8260,7 +8492,7 @@
               </a:lnSpc>
             </a:pPr>
             <a:r>
-              <a:rPr sz="1600" b="1">
+              <a:rPr sz="1600" b="1" lang="en-US" noProof="1" dirty="0" err="0">
                 <a:solidFill>
                   <a:srgbClr val="F8F3E7"/>
                 </a:solidFill>
@@ -8389,7 +8621,7 @@
               </a:lnSpc>
             </a:pPr>
             <a:r>
-              <a:rPr sz="1300" b="1">
+              <a:rPr sz="1300" b="1" lang="en-US" noProof="1" dirty="0" err="0">
                 <a:solidFill>
                   <a:srgbClr val="F8F3E7"/>
                 </a:solidFill>
@@ -8428,7 +8660,7 @@
               </a:lnSpc>
             </a:pPr>
             <a:r>
-              <a:rPr sz="1050" b="0">
+              <a:rPr sz="1050" b="0" lang="en-US" noProof="1" dirty="0" err="0">
                 <a:solidFill>
                   <a:srgbClr val="AEBACC"/>
                 </a:solidFill>
@@ -8557,7 +8789,7 @@
               </a:lnSpc>
             </a:pPr>
             <a:r>
-              <a:rPr sz="1300" b="1">
+              <a:rPr sz="1300" b="1" lang="en-US" noProof="1" dirty="0" err="0">
                 <a:solidFill>
                   <a:srgbClr val="F8F3E7"/>
                 </a:solidFill>
@@ -8596,7 +8828,7 @@
               </a:lnSpc>
             </a:pPr>
             <a:r>
-              <a:rPr sz="1050" b="0">
+              <a:rPr sz="1050" b="0" lang="en-US" noProof="1" dirty="0" err="0">
                 <a:solidFill>
                   <a:srgbClr val="AEBACC"/>
                 </a:solidFill>
@@ -8725,7 +8957,7 @@
               </a:lnSpc>
             </a:pPr>
             <a:r>
-              <a:rPr sz="1300" b="1">
+              <a:rPr sz="1300" b="1" lang="en-US" noProof="1" dirty="0" err="0">
                 <a:solidFill>
                   <a:srgbClr val="F8F3E7"/>
                 </a:solidFill>
@@ -8764,7 +8996,7 @@
               </a:lnSpc>
             </a:pPr>
             <a:r>
-              <a:rPr sz="1050" b="0">
+              <a:rPr sz="1050" b="0" lang="en-US" noProof="1" dirty="0" err="0">
                 <a:solidFill>
                   <a:srgbClr val="AEBACC"/>
                 </a:solidFill>
@@ -8893,7 +9125,7 @@
               </a:lnSpc>
             </a:pPr>
             <a:r>
-              <a:rPr sz="1300" b="1">
+              <a:rPr sz="1300" b="1" lang="en-US" noProof="1" dirty="0" err="0">
                 <a:solidFill>
                   <a:srgbClr val="F8F3E7"/>
                 </a:solidFill>
@@ -8932,7 +9164,7 @@
               </a:lnSpc>
             </a:pPr>
             <a:r>
-              <a:rPr sz="1050" b="0">
+              <a:rPr sz="1050" b="0" lang="en-US" noProof="1" dirty="0" err="0">
                 <a:solidFill>
                   <a:srgbClr val="AEBACC"/>
                 </a:solidFill>
@@ -9061,7 +9293,7 @@
               </a:lnSpc>
             </a:pPr>
             <a:r>
-              <a:rPr sz="1300" b="1">
+              <a:rPr sz="1300" b="1" lang="en-US" noProof="1" dirty="0" err="0">
                 <a:solidFill>
                   <a:srgbClr val="F8F3E7"/>
                 </a:solidFill>
@@ -9100,7 +9332,7 @@
               </a:lnSpc>
             </a:pPr>
             <a:r>
-              <a:rPr sz="1050" b="0">
+              <a:rPr sz="1050" b="0" lang="en-US" noProof="1" dirty="0" err="0">
                 <a:solidFill>
                   <a:srgbClr val="AEBACC"/>
                 </a:solidFill>
@@ -9184,7 +9416,7 @@
               </a:lnSpc>
             </a:pPr>
             <a:r>
-              <a:rPr sz="1250" b="0">
+              <a:rPr sz="1250" b="0" lang="en-US" noProof="1" dirty="0" err="0">
                 <a:solidFill>
                   <a:srgbClr val="AEBACC"/>
                 </a:solidFill>
@@ -9223,7 +9455,7 @@
               </a:lnSpc>
             </a:pPr>
             <a:r>
-              <a:rPr sz="800" b="1">
+              <a:rPr sz="800" b="1" lang="en-US" noProof="1" dirty="0" err="0">
                 <a:solidFill>
                   <a:srgbClr val="AEBACC"/>
                 </a:solidFill>
@@ -9262,7 +9494,7 @@
               </a:lnSpc>
             </a:pPr>
             <a:r>
-              <a:rPr sz="750" b="0">
+              <a:rPr sz="750" b="0" lang="en-US" noProof="1" dirty="0" err="0">
                 <a:solidFill>
                   <a:srgbClr val="AEBACC"/>
                 </a:solidFill>
@@ -9270,6 +9502,50 @@
               </a:rPr>
               <a:t>Explainable matching · plain-language situation briefs · human verification before any transfer</a:t>
             </a:r>
+          </a:p>
+        </p:txBody>
+      </p:sp>
+      <p:sp>
+        <p:nvSpPr>
+          <p:cNvPr id="50" name="Rectangle 49"/>
+          <p:cNvSpPr/>
+          <p:nvPr/>
+        </p:nvSpPr>
+        <p:spPr>
+          <a:xfrm>
+            <a:off x="0" y="0"/>
+            <a:ext cx="12191695" cy="54864"/>
+          </a:xfrm>
+          <a:prstGeom prst="rect">
+            <a:avLst/>
+          </a:prstGeom>
+          <a:solidFill>
+            <a:srgbClr val="F6BE4C"/>
+          </a:solidFill>
+          <a:ln>
+            <a:noFill/>
+          </a:ln>
+          <a:effectLst/>
+        </p:spPr>
+        <p:style>
+          <a:lnRef idx="1">
+            <a:schemeClr val="accent1"/>
+          </a:lnRef>
+          <a:fillRef idx="3">
+            <a:schemeClr val="accent1"/>
+          </a:fillRef>
+          <a:effectRef idx="2">
+            <a:schemeClr val="accent1"/>
+          </a:effectRef>
+          <a:fontRef idx="minor">
+            <a:schemeClr val="lt1"/>
+          </a:fontRef>
+        </p:style>
+        <p:txBody>
+          <a:bodyPr rtlCol="0" anchor="ctr"/>
+          <a:lstStyle/>
+          <a:p>
+            <a:pPr algn="ctr"/>
           </a:p>
         </p:txBody>
       </p:sp>
@@ -9364,7 +9640,7 @@
               </a:lnSpc>
             </a:pPr>
             <a:r>
-              <a:rPr sz="1000" b="1">
+              <a:rPr sz="1000" b="1" lang="en-US" noProof="1" dirty="0" err="0">
                 <a:solidFill>
                   <a:srgbClr val="F6BE4C"/>
                 </a:solidFill>
@@ -9403,7 +9679,7 @@
               </a:lnSpc>
             </a:pPr>
             <a:r>
-              <a:rPr sz="2700" b="1">
+              <a:rPr sz="2700" b="1" lang="en-US" noProof="1" dirty="0" err="0">
                 <a:solidFill>
                   <a:srgbClr val="F8F3E7"/>
                 </a:solidFill>
@@ -9533,7 +9809,7 @@
               </a:lnSpc>
             </a:pPr>
             <a:r>
-              <a:rPr sz="1700" b="1">
+              <a:rPr sz="1700" b="1" lang="en-US" noProof="1" dirty="0" err="0">
                 <a:solidFill>
                   <a:srgbClr val="F8F3E7"/>
                 </a:solidFill>
@@ -9572,7 +9848,7 @@
               </a:lnSpc>
             </a:pPr>
             <a:r>
-              <a:rPr sz="1200" b="0">
+              <a:rPr sz="1200" b="0" lang="en-US" noProof="1" dirty="0" err="0">
                 <a:solidFill>
                   <a:srgbClr val="AEBACC"/>
                 </a:solidFill>
@@ -9612,7 +9888,7 @@
               </a:lnSpc>
             </a:pPr>
             <a:r>
-              <a:rPr sz="2200" b="1">
+              <a:rPr sz="2200" b="1" lang="en-US" noProof="1" dirty="0" err="0">
                 <a:solidFill>
                   <a:srgbClr val="F6BE4C"/>
                 </a:solidFill>
@@ -9741,7 +10017,7 @@
               </a:lnSpc>
             </a:pPr>
             <a:r>
-              <a:rPr sz="1700" b="1">
+              <a:rPr sz="1700" b="1" lang="en-US" noProof="1" dirty="0" err="0">
                 <a:solidFill>
                   <a:srgbClr val="F8F3E7"/>
                 </a:solidFill>
@@ -9780,7 +10056,7 @@
               </a:lnSpc>
             </a:pPr>
             <a:r>
-              <a:rPr sz="1200" b="0">
+              <a:rPr sz="1200" b="0" lang="en-US" noProof="1" dirty="0" err="0">
                 <a:solidFill>
                   <a:srgbClr val="AEBACC"/>
                 </a:solidFill>
@@ -9820,7 +10096,7 @@
               </a:lnSpc>
             </a:pPr>
             <a:r>
-              <a:rPr sz="2200" b="1">
+              <a:rPr sz="2200" b="1" lang="en-US" noProof="1" dirty="0" err="0">
                 <a:solidFill>
                   <a:srgbClr val="F6BE4C"/>
                 </a:solidFill>
@@ -9949,7 +10225,7 @@
               </a:lnSpc>
             </a:pPr>
             <a:r>
-              <a:rPr sz="1700" b="1">
+              <a:rPr sz="1700" b="1" lang="en-US" noProof="1" dirty="0" err="0">
                 <a:solidFill>
                   <a:srgbClr val="F8F3E7"/>
                 </a:solidFill>
@@ -9988,7 +10264,7 @@
               </a:lnSpc>
             </a:pPr>
             <a:r>
-              <a:rPr sz="1200" b="0">
+              <a:rPr sz="1200" b="0" lang="en-US" noProof="1" dirty="0" err="0">
                 <a:solidFill>
                   <a:srgbClr val="AEBACC"/>
                 </a:solidFill>
@@ -10028,7 +10304,7 @@
               </a:lnSpc>
             </a:pPr>
             <a:r>
-              <a:rPr sz="2200" b="1">
+              <a:rPr sz="2200" b="1" lang="en-US" noProof="1" dirty="0" err="0">
                 <a:solidFill>
                   <a:srgbClr val="F6BE4C"/>
                 </a:solidFill>
@@ -10157,7 +10433,7 @@
               </a:lnSpc>
             </a:pPr>
             <a:r>
-              <a:rPr sz="1700" b="1">
+              <a:rPr sz="1700" b="1" lang="en-US" noProof="1" dirty="0" err="0">
                 <a:solidFill>
                   <a:srgbClr val="F8F3E7"/>
                 </a:solidFill>
@@ -10196,7 +10472,7 @@
               </a:lnSpc>
             </a:pPr>
             <a:r>
-              <a:rPr sz="1200" b="0">
+              <a:rPr sz="1200" b="0" lang="en-US" noProof="1" dirty="0" err="0">
                 <a:solidFill>
                   <a:srgbClr val="AEBACC"/>
                 </a:solidFill>
@@ -10281,7 +10557,7 @@
               </a:lnSpc>
             </a:pPr>
             <a:r>
-              <a:rPr sz="2000" b="1">
+              <a:rPr sz="2000" b="1" lang="en-US" noProof="1" dirty="0" err="0">
                 <a:solidFill>
                   <a:srgbClr val="F8F3E7"/>
                 </a:solidFill>
@@ -10320,7 +10596,7 @@
               </a:lnSpc>
             </a:pPr>
             <a:r>
-              <a:rPr sz="1200" b="0">
+              <a:rPr sz="1200" b="0" lang="en-US" noProof="1" dirty="0" err="0">
                 <a:solidFill>
                   <a:srgbClr val="AEBACC"/>
                 </a:solidFill>
@@ -10404,7 +10680,7 @@
               </a:lnSpc>
             </a:pPr>
             <a:r>
-              <a:rPr sz="800" b="1">
+              <a:rPr sz="800" b="1" lang="en-US" noProof="1" dirty="0" err="0">
                 <a:solidFill>
                   <a:srgbClr val="AEBACC"/>
                 </a:solidFill>
@@ -10443,7 +10719,7 @@
               </a:lnSpc>
             </a:pPr>
             <a:r>
-              <a:rPr sz="750" b="0">
+              <a:rPr sz="750" b="0" lang="en-US" noProof="1" dirty="0" err="0">
                 <a:solidFill>
                   <a:srgbClr val="AEBACC"/>
                 </a:solidFill>
@@ -10451,6 +10727,50 @@
               </a:rPr>
               <a:t>Production data layer: PostgreSQL 15 + PostGIS 3</a:t>
             </a:r>
+          </a:p>
+        </p:txBody>
+      </p:sp>
+      <p:sp>
+        <p:nvSpPr>
+          <p:cNvPr id="30" name="Rectangle 29"/>
+          <p:cNvSpPr/>
+          <p:nvPr/>
+        </p:nvSpPr>
+        <p:spPr>
+          <a:xfrm>
+            <a:off x="0" y="0"/>
+            <a:ext cx="12191695" cy="54864"/>
+          </a:xfrm>
+          <a:prstGeom prst="rect">
+            <a:avLst/>
+          </a:prstGeom>
+          <a:solidFill>
+            <a:srgbClr val="F6BE4C"/>
+          </a:solidFill>
+          <a:ln>
+            <a:noFill/>
+          </a:ln>
+          <a:effectLst/>
+        </p:spPr>
+        <p:style>
+          <a:lnRef idx="1">
+            <a:schemeClr val="accent1"/>
+          </a:lnRef>
+          <a:fillRef idx="3">
+            <a:schemeClr val="accent1"/>
+          </a:fillRef>
+          <a:effectRef idx="2">
+            <a:schemeClr val="accent1"/>
+          </a:effectRef>
+          <a:fontRef idx="minor">
+            <a:schemeClr val="lt1"/>
+          </a:fontRef>
+        </p:style>
+        <p:txBody>
+          <a:bodyPr rtlCol="0" anchor="ctr"/>
+          <a:lstStyle/>
+          <a:p>
+            <a:pPr algn="ctr"/>
           </a:p>
         </p:txBody>
       </p:sp>
@@ -10545,7 +10865,7 @@
               </a:lnSpc>
             </a:pPr>
             <a:r>
-              <a:rPr sz="1000" b="1">
+              <a:rPr sz="1000" b="1" lang="en-US" noProof="1" dirty="0" err="0">
                 <a:solidFill>
                   <a:srgbClr val="F6BE4C"/>
                 </a:solidFill>
@@ -10584,7 +10904,7 @@
               </a:lnSpc>
             </a:pPr>
             <a:r>
-              <a:rPr sz="3000" b="1">
+              <a:rPr sz="3000" b="1" lang="en-US" noProof="1" dirty="0" err="0">
                 <a:solidFill>
                   <a:srgbClr val="F8F3E7"/>
                 </a:solidFill>
@@ -10623,7 +10943,7 @@
               </a:lnSpc>
             </a:pPr>
             <a:r>
-              <a:rPr sz="1500" b="0">
+              <a:rPr sz="1500" b="0" lang="en-US" noProof="1" dirty="0" err="0">
                 <a:solidFill>
                   <a:srgbClr val="AEBACC"/>
                 </a:solidFill>
@@ -10707,7 +11027,7 @@
               </a:lnSpc>
             </a:pPr>
             <a:r>
-              <a:rPr sz="2000" b="1">
+              <a:rPr sz="2000" b="1" lang="en-US" noProof="1" dirty="0" err="0">
                 <a:solidFill>
                   <a:srgbClr val="F6BE4C"/>
                 </a:solidFill>
@@ -10746,7 +11066,7 @@
               </a:lnSpc>
             </a:pPr>
             <a:r>
-              <a:rPr sz="1800" b="1">
+              <a:rPr sz="1800" b="1" lang="en-US" noProof="1" dirty="0" err="0">
                 <a:solidFill>
                   <a:srgbClr val="F8F3E7"/>
                 </a:solidFill>
@@ -10785,7 +11105,7 @@
               </a:lnSpc>
             </a:pPr>
             <a:r>
-              <a:rPr sz="1300" b="0">
+              <a:rPr sz="1300" b="0" lang="en-US" noProof="1" dirty="0" err="0">
                 <a:solidFill>
                   <a:srgbClr val="AEBACC"/>
                 </a:solidFill>
@@ -10869,7 +11189,7 @@
               </a:lnSpc>
             </a:pPr>
             <a:r>
-              <a:rPr sz="2000" b="1">
+              <a:rPr sz="2000" b="1" lang="en-US" noProof="1" dirty="0" err="0">
                 <a:solidFill>
                   <a:srgbClr val="F6BE4C"/>
                 </a:solidFill>
@@ -10908,7 +11228,7 @@
               </a:lnSpc>
             </a:pPr>
             <a:r>
-              <a:rPr sz="1800" b="1">
+              <a:rPr sz="1800" b="1" lang="en-US" noProof="1" dirty="0" err="0">
                 <a:solidFill>
                   <a:srgbClr val="F8F3E7"/>
                 </a:solidFill>
@@ -10947,7 +11267,7 @@
               </a:lnSpc>
             </a:pPr>
             <a:r>
-              <a:rPr sz="1300" b="0">
+              <a:rPr sz="1300" b="0" lang="en-US" noProof="1" dirty="0" err="0">
                 <a:solidFill>
                   <a:srgbClr val="AEBACC"/>
                 </a:solidFill>
@@ -11031,7 +11351,7 @@
               </a:lnSpc>
             </a:pPr>
             <a:r>
-              <a:rPr sz="2000" b="1">
+              <a:rPr sz="2000" b="1" lang="en-US" noProof="1" dirty="0" err="0">
                 <a:solidFill>
                   <a:srgbClr val="F6BE4C"/>
                 </a:solidFill>
@@ -11070,7 +11390,7 @@
               </a:lnSpc>
             </a:pPr>
             <a:r>
-              <a:rPr sz="1800" b="1">
+              <a:rPr sz="1800" b="1" lang="en-US" noProof="1" dirty="0" err="0">
                 <a:solidFill>
                   <a:srgbClr val="F8F3E7"/>
                 </a:solidFill>
@@ -11109,7 +11429,7 @@
               </a:lnSpc>
             </a:pPr>
             <a:r>
-              <a:rPr sz="1300" b="0">
+              <a:rPr sz="1300" b="0" lang="en-US" noProof="1" dirty="0" err="0">
                 <a:solidFill>
                   <a:srgbClr val="AEBACC"/>
                 </a:solidFill>
@@ -11193,7 +11513,7 @@
               </a:lnSpc>
             </a:pPr>
             <a:r>
-              <a:rPr sz="2000" b="1">
+              <a:rPr sz="2000" b="1" lang="en-US" noProof="1" dirty="0" err="0">
                 <a:solidFill>
                   <a:srgbClr val="F6BE4C"/>
                 </a:solidFill>
@@ -11232,7 +11552,7 @@
               </a:lnSpc>
             </a:pPr>
             <a:r>
-              <a:rPr sz="1800" b="1">
+              <a:rPr sz="1800" b="1" lang="en-US" noProof="1" dirty="0" err="0">
                 <a:solidFill>
                   <a:srgbClr val="F8F3E7"/>
                 </a:solidFill>
@@ -11271,7 +11591,7 @@
               </a:lnSpc>
             </a:pPr>
             <a:r>
-              <a:rPr sz="1300" b="0">
+              <a:rPr sz="1300" b="0" lang="en-US" noProof="1" dirty="0" err="0">
                 <a:solidFill>
                   <a:srgbClr val="AEBACC"/>
                 </a:solidFill>
@@ -11355,7 +11675,7 @@
               </a:lnSpc>
             </a:pPr>
             <a:r>
-              <a:rPr sz="2000" b="1">
+              <a:rPr sz="2000" b="1" lang="en-US" noProof="1" dirty="0" err="0">
                 <a:solidFill>
                   <a:srgbClr val="F6BE4C"/>
                 </a:solidFill>
@@ -11394,7 +11714,7 @@
               </a:lnSpc>
             </a:pPr>
             <a:r>
-              <a:rPr sz="1800" b="1">
+              <a:rPr sz="1800" b="1" lang="en-US" noProof="1" dirty="0" err="0">
                 <a:solidFill>
                   <a:srgbClr val="F8F3E7"/>
                 </a:solidFill>
@@ -11433,7 +11753,7 @@
               </a:lnSpc>
             </a:pPr>
             <a:r>
-              <a:rPr sz="1300" b="0">
+              <a:rPr sz="1300" b="0" lang="en-US" noProof="1" dirty="0" err="0">
                 <a:solidFill>
                   <a:srgbClr val="AEBACC"/>
                 </a:solidFill>
@@ -11472,7 +11792,7 @@
               </a:lnSpc>
             </a:pPr>
             <a:r>
-              <a:rPr sz="800" b="1">
+              <a:rPr sz="800" b="1" lang="en-US" noProof="1" dirty="0" err="0">
                 <a:solidFill>
                   <a:srgbClr val="AEBACC"/>
                 </a:solidFill>
@@ -11511,7 +11831,7 @@
               </a:lnSpc>
             </a:pPr>
             <a:r>
-              <a:rPr sz="750" b="0">
+              <a:rPr sz="750" b="0" lang="en-US" noProof="1" dirty="0" err="0">
                 <a:solidFill>
                   <a:srgbClr val="AEBACC"/>
                 </a:solidFill>
@@ -11519,6 +11839,50 @@
               </a:rPr>
               <a:t>Recommended demo uses curated local briefs and synthetic inventory</a:t>
             </a:r>
+          </a:p>
+        </p:txBody>
+      </p:sp>
+      <p:sp>
+        <p:nvSpPr>
+          <p:cNvPr id="28" name="Rectangle 27"/>
+          <p:cNvSpPr/>
+          <p:nvPr/>
+        </p:nvSpPr>
+        <p:spPr>
+          <a:xfrm>
+            <a:off x="0" y="0"/>
+            <a:ext cx="12191695" cy="54864"/>
+          </a:xfrm>
+          <a:prstGeom prst="rect">
+            <a:avLst/>
+          </a:prstGeom>
+          <a:solidFill>
+            <a:srgbClr val="F6BE4C"/>
+          </a:solidFill>
+          <a:ln>
+            <a:noFill/>
+          </a:ln>
+          <a:effectLst/>
+        </p:spPr>
+        <p:style>
+          <a:lnRef idx="1">
+            <a:schemeClr val="accent1"/>
+          </a:lnRef>
+          <a:fillRef idx="3">
+            <a:schemeClr val="accent1"/>
+          </a:fillRef>
+          <a:effectRef idx="2">
+            <a:schemeClr val="accent1"/>
+          </a:effectRef>
+          <a:fontRef idx="minor">
+            <a:schemeClr val="lt1"/>
+          </a:fontRef>
+        </p:style>
+        <p:txBody>
+          <a:bodyPr rtlCol="0" anchor="ctr"/>
+          <a:lstStyle/>
+          <a:p>
+            <a:pPr algn="ctr"/>
           </a:p>
         </p:txBody>
       </p:sp>
@@ -11613,7 +11977,7 @@
               </a:lnSpc>
             </a:pPr>
             <a:r>
-              <a:rPr sz="1000" b="1">
+              <a:rPr sz="1000" b="1" lang="en-US" noProof="1" dirty="0" err="0">
                 <a:solidFill>
                   <a:srgbClr val="F6BE4C"/>
                 </a:solidFill>
@@ -11648,7 +12012,7 @@
           <a:p>
             <a:pPr algn="l"/>
             <a:r>
-              <a:rPr sz="3500" b="1">
+              <a:rPr sz="3500" b="1" lang="en-US" noProof="1" dirty="0" err="0">
                 <a:solidFill>
                   <a:srgbClr val="F8F3E7"/>
                 </a:solidFill>
@@ -11658,7 +12022,7 @@
 </a:t>
             </a:r>
             <a:r>
-              <a:rPr sz="3500" b="1">
+              <a:rPr sz="3500" b="1" lang="en-US" noProof="1" dirty="0" err="0">
                 <a:solidFill>
                   <a:srgbClr val="43D5AE"/>
                 </a:solidFill>
@@ -11742,7 +12106,7 @@
               </a:lnSpc>
             </a:pPr>
             <a:r>
-              <a:rPr sz="1500" b="1">
+              <a:rPr sz="1500" b="1" lang="en-US" noProof="1" dirty="0" err="0">
                 <a:solidFill>
                   <a:srgbClr val="F8F3E7"/>
                 </a:solidFill>
@@ -11781,7 +12145,7 @@
               </a:lnSpc>
             </a:pPr>
             <a:r>
-              <a:rPr sz="1200" b="0">
+              <a:rPr sz="1200" b="0" lang="en-US" noProof="1" dirty="0" err="0">
                 <a:solidFill>
                   <a:srgbClr val="AEBACC"/>
                 </a:solidFill>
@@ -11865,7 +12229,7 @@
               </a:lnSpc>
             </a:pPr>
             <a:r>
-              <a:rPr sz="1500" b="1">
+              <a:rPr sz="1500" b="1" lang="en-US" noProof="1" dirty="0" err="0">
                 <a:solidFill>
                   <a:srgbClr val="F8F3E7"/>
                 </a:solidFill>
@@ -11904,7 +12268,7 @@
               </a:lnSpc>
             </a:pPr>
             <a:r>
-              <a:rPr sz="1200" b="0">
+              <a:rPr sz="1200" b="0" lang="en-US" noProof="1" dirty="0" err="0">
                 <a:solidFill>
                   <a:srgbClr val="AEBACC"/>
                 </a:solidFill>
@@ -11988,7 +12352,7 @@
               </a:lnSpc>
             </a:pPr>
             <a:r>
-              <a:rPr sz="1500" b="1">
+              <a:rPr sz="1500" b="1" lang="en-US" noProof="1" dirty="0" err="0">
                 <a:solidFill>
                   <a:srgbClr val="F8F3E7"/>
                 </a:solidFill>
@@ -12027,7 +12391,7 @@
               </a:lnSpc>
             </a:pPr>
             <a:r>
-              <a:rPr sz="1200" b="0">
+              <a:rPr sz="1200" b="0" lang="en-US" noProof="1" dirty="0" err="0">
                 <a:solidFill>
                   <a:srgbClr val="AEBACC"/>
                 </a:solidFill>
@@ -12111,7 +12475,7 @@
               </a:lnSpc>
             </a:pPr>
             <a:r>
-              <a:rPr sz="1500" b="1">
+              <a:rPr sz="1500" b="1" lang="en-US" noProof="1" dirty="0" err="0">
                 <a:solidFill>
                   <a:srgbClr val="F8F3E7"/>
                 </a:solidFill>
@@ -12150,7 +12514,7 @@
               </a:lnSpc>
             </a:pPr>
             <a:r>
-              <a:rPr sz="1200" b="0">
+              <a:rPr sz="1200" b="0" lang="en-US" noProof="1" dirty="0" err="0">
                 <a:solidFill>
                   <a:srgbClr val="AEBACC"/>
                 </a:solidFill>
@@ -12234,7 +12598,7 @@
               </a:lnSpc>
             </a:pPr>
             <a:r>
-              <a:rPr sz="2700" b="1">
+              <a:rPr sz="2700" b="1" lang="en-US" noProof="1" dirty="0" err="0">
                 <a:solidFill>
                   <a:srgbClr val="F8F3E7"/>
                 </a:solidFill>
@@ -12273,7 +12637,7 @@
               </a:lnSpc>
             </a:pPr>
             <a:r>
-              <a:rPr sz="2000" b="1">
+              <a:rPr sz="2000" b="1" lang="en-US" noProof="1" dirty="0" err="0">
                 <a:solidFill>
                   <a:srgbClr val="F6BE4C"/>
                 </a:solidFill>
@@ -12313,7 +12677,7 @@
               </a:lnSpc>
             </a:pPr>
             <a:r>
-              <a:rPr sz="1800" b="0">
+              <a:rPr sz="1800" b="0" lang="en-US" noProof="1" dirty="0" err="0">
                 <a:solidFill>
                   <a:srgbClr val="AEBACC"/>
                 </a:solidFill>
@@ -12352,7 +12716,7 @@
               </a:lnSpc>
             </a:pPr>
             <a:r>
-              <a:rPr sz="800" b="1">
+              <a:rPr sz="800" b="1" lang="en-US" noProof="1" dirty="0" err="0">
                 <a:solidFill>
                   <a:srgbClr val="AEBACC"/>
                 </a:solidFill>
@@ -12391,7 +12755,7 @@
               </a:lnSpc>
             </a:pPr>
             <a:r>
-              <a:rPr sz="750" b="0">
+              <a:rPr sz="750" b="0" lang="en-US" noProof="1" dirty="0" err="0">
                 <a:solidFill>
                   <a:srgbClr val="AEBACC"/>
                 </a:solidFill>
@@ -12399,6 +12763,50 @@
               </a:rPr>
               <a:t>Dr Lesnar Gitonga · USIU-Africa · Global Public Health 2026</a:t>
             </a:r>
+          </a:p>
+        </p:txBody>
+      </p:sp>
+      <p:sp>
+        <p:nvSpPr>
+          <p:cNvPr id="23" name="Rectangle 22"/>
+          <p:cNvSpPr/>
+          <p:nvPr/>
+        </p:nvSpPr>
+        <p:spPr>
+          <a:xfrm>
+            <a:off x="0" y="0"/>
+            <a:ext cx="12191695" cy="54864"/>
+          </a:xfrm>
+          <a:prstGeom prst="rect">
+            <a:avLst/>
+          </a:prstGeom>
+          <a:solidFill>
+            <a:srgbClr val="F6BE4C"/>
+          </a:solidFill>
+          <a:ln>
+            <a:noFill/>
+          </a:ln>
+          <a:effectLst/>
+        </p:spPr>
+        <p:style>
+          <a:lnRef idx="1">
+            <a:schemeClr val="accent1"/>
+          </a:lnRef>
+          <a:fillRef idx="3">
+            <a:schemeClr val="accent1"/>
+          </a:fillRef>
+          <a:effectRef idx="2">
+            <a:schemeClr val="accent1"/>
+          </a:effectRef>
+          <a:fontRef idx="minor">
+            <a:schemeClr val="lt1"/>
+          </a:fontRef>
+        </p:style>
+        <p:txBody>
+          <a:bodyPr rtlCol="0" anchor="ctr"/>
+          <a:lstStyle/>
+          <a:p>
+            <a:pPr algn="ctr"/>
           </a:p>
         </p:txBody>
       </p:sp>

--- a/presentation/MediMatch_Conference_Deck.pptx
+++ b/presentation/MediMatch_Conference_Deck.pptx
@@ -3245,7 +3245,7 @@
             <a:r>
               <a:rPr sz="1100" b="1" lang="en-US" noProof="1" dirty="0" err="0">
                 <a:solidFill>
-                  <a:srgbClr val="F6BE4C"/>
+                  <a:srgbClr val="E8B860"/>
                 </a:solidFill>
                 <a:latin typeface="Noto Sans"/>
               </a:rPr>
@@ -3291,7 +3291,7 @@
             <a:r>
               <a:rPr sz="3800" b="1" lang="en-US" noProof="1" dirty="0" err="0">
                 <a:solidFill>
-                  <a:srgbClr val="43D5AE"/>
+                  <a:srgbClr val="E8B860"/>
                 </a:solidFill>
                 <a:latin typeface="Noto Sans"/>
               </a:rPr>
@@ -3355,11 +3355,11 @@
             <a:avLst/>
           </a:prstGeom>
           <a:solidFill>
-            <a:srgbClr val="F6BE4C"/>
+            <a:srgbClr val="E8B860"/>
           </a:solidFill>
           <a:ln>
             <a:solidFill>
-              <a:srgbClr val="F6BE4C"/>
+              <a:srgbClr val="E8B860"/>
             </a:solidFill>
           </a:ln>
         </p:spPr>
@@ -3472,25 +3472,14 @@
         <p:spPr>
           <a:xfrm>
             <a:off x="0" y="0"/>
-            <a:ext cx="12191695" cy="77724"/>
-          </a:xfrm>
-          <a:prstGeom prst="rect">
-            <a:avLst/>
-          </a:prstGeom>
-          <a:gradFill>
-            <a:gsLst>
-              <a:gs pos="0">
-                <a:srgbClr val="F6BE4C"/>
-              </a:gs>
-              <a:gs pos="50000">
-                <a:srgbClr val="43D5AE"/>
-              </a:gs>
-              <a:gs pos="100000">
-                <a:srgbClr val="7C5CFF"/>
-              </a:gs>
-            </a:gsLst>
-            <a:lin ang="0" scaled="1"/>
-          </a:gradFill>
+            <a:ext cx="12191695" cy="45720"/>
+          </a:xfrm>
+          <a:prstGeom prst="rect">
+            <a:avLst/>
+          </a:prstGeom>
+          <a:solidFill>
+            <a:srgbClr val="E8B860"/>
+          </a:solidFill>
           <a:ln>
             <a:noFill/>
           </a:ln>
@@ -3589,8 +3578,8 @@
         </p:nvSpPr>
         <p:spPr>
           <a:xfrm>
-            <a:off x="-2103120" y="2194560"/>
-            <a:ext cx="6949440" cy="6949440"/>
+            <a:off x="-2286000" y="2377440"/>
+            <a:ext cx="6766560" cy="6766560"/>
           </a:xfrm>
           <a:prstGeom prst="ellipse">
             <a:avLst/>
@@ -3598,8 +3587,8 @@
           <a:gradFill>
             <a:gsLst>
               <a:gs pos="0">
-                <a:srgbClr val="7C5CFF">
-                  <a:alpha val="26000"/>
+                <a:srgbClr val="1A263C">
+                  <a:alpha val="60000"/>
                 </a:srgbClr>
               </a:gs>
               <a:gs pos="100000">
@@ -3667,7 +3656,7 @@
             <a:r>
               <a:rPr sz="1000" b="1" lang="en-US" noProof="1" dirty="0" err="0">
                 <a:solidFill>
-                  <a:srgbClr val="F6BE4C"/>
+                  <a:srgbClr val="E8B860"/>
                 </a:solidFill>
                 <a:latin typeface="Noto Sans"/>
               </a:rPr>
@@ -3735,7 +3724,7 @@
           </a:solidFill>
           <a:ln>
             <a:solidFill>
-              <a:srgbClr val="529BFF"/>
+              <a:srgbClr val="788CAA"/>
             </a:solidFill>
           </a:ln>
         </p:spPr>
@@ -3776,11 +3765,11 @@
             <a:avLst/>
           </a:prstGeom>
           <a:solidFill>
-            <a:srgbClr val="529BFF"/>
+            <a:srgbClr val="788CAA"/>
           </a:solidFill>
           <a:ln>
             <a:solidFill>
-              <a:srgbClr val="529BFF"/>
+              <a:srgbClr val="788CAA"/>
             </a:solidFill>
           </a:ln>
         </p:spPr>
@@ -3915,7 +3904,7 @@
             <a:r>
               <a:rPr sz="2200" b="1" lang="en-US" noProof="1" dirty="0" err="0">
                 <a:solidFill>
-                  <a:srgbClr val="F6BE4C"/>
+                  <a:srgbClr val="E8B860"/>
                 </a:solidFill>
                 <a:latin typeface="Noto Sans"/>
               </a:rPr>
@@ -3943,7 +3932,7 @@
           </a:solidFill>
           <a:ln>
             <a:solidFill>
-              <a:srgbClr val="FF7744"/>
+              <a:srgbClr val="E8B860"/>
             </a:solidFill>
           </a:ln>
         </p:spPr>
@@ -3984,11 +3973,11 @@
             <a:avLst/>
           </a:prstGeom>
           <a:solidFill>
-            <a:srgbClr val="FF7744"/>
+            <a:srgbClr val="E8B860"/>
           </a:solidFill>
           <a:ln>
             <a:solidFill>
-              <a:srgbClr val="FF7744"/>
+              <a:srgbClr val="E8B860"/>
             </a:solidFill>
           </a:ln>
         </p:spPr>
@@ -4123,7 +4112,7 @@
             <a:r>
               <a:rPr sz="2200" b="1" lang="en-US" noProof="1" dirty="0" err="0">
                 <a:solidFill>
-                  <a:srgbClr val="F6BE4C"/>
+                  <a:srgbClr val="E8B860"/>
                 </a:solidFill>
                 <a:latin typeface="Noto Sans"/>
               </a:rPr>
@@ -4151,7 +4140,7 @@
           </a:solidFill>
           <a:ln>
             <a:solidFill>
-              <a:srgbClr val="43D5AE"/>
+              <a:srgbClr val="788CAA"/>
             </a:solidFill>
           </a:ln>
         </p:spPr>
@@ -4192,11 +4181,11 @@
             <a:avLst/>
           </a:prstGeom>
           <a:solidFill>
-            <a:srgbClr val="43D5AE"/>
+            <a:srgbClr val="788CAA"/>
           </a:solidFill>
           <a:ln>
             <a:solidFill>
-              <a:srgbClr val="43D5AE"/>
+              <a:srgbClr val="788CAA"/>
             </a:solidFill>
           </a:ln>
         </p:spPr>
@@ -4331,7 +4320,7 @@
             <a:r>
               <a:rPr sz="2200" b="1" lang="en-US" noProof="1" dirty="0" err="0">
                 <a:solidFill>
-                  <a:srgbClr val="F6BE4C"/>
+                  <a:srgbClr val="E8B860"/>
                 </a:solidFill>
                 <a:latin typeface="Noto Sans"/>
               </a:rPr>
@@ -4359,7 +4348,7 @@
           </a:solidFill>
           <a:ln>
             <a:solidFill>
-              <a:srgbClr val="F6BE4C"/>
+              <a:srgbClr val="E8B860"/>
             </a:solidFill>
           </a:ln>
         </p:spPr>
@@ -4400,11 +4389,11 @@
             <a:avLst/>
           </a:prstGeom>
           <a:solidFill>
-            <a:srgbClr val="F6BE4C"/>
+            <a:srgbClr val="E8B860"/>
           </a:solidFill>
           <a:ln>
             <a:solidFill>
-              <a:srgbClr val="F6BE4C"/>
+              <a:srgbClr val="E8B860"/>
             </a:solidFill>
           </a:ln>
         </p:spPr>
@@ -4647,11 +4636,11 @@
             <a:avLst/>
           </a:prstGeom>
           <a:solidFill>
-            <a:srgbClr val="F6BE4C"/>
+            <a:srgbClr val="E8B860"/>
           </a:solidFill>
           <a:ln>
             <a:solidFill>
-              <a:srgbClr val="F6BE4C"/>
+              <a:srgbClr val="E8B860"/>
             </a:solidFill>
           </a:ln>
         </p:spPr>
@@ -4764,25 +4753,14 @@
         <p:spPr>
           <a:xfrm>
             <a:off x="0" y="0"/>
-            <a:ext cx="12191695" cy="77724"/>
-          </a:xfrm>
-          <a:prstGeom prst="rect">
-            <a:avLst/>
-          </a:prstGeom>
-          <a:gradFill>
-            <a:gsLst>
-              <a:gs pos="0">
-                <a:srgbClr val="F6BE4C"/>
-              </a:gs>
-              <a:gs pos="50000">
-                <a:srgbClr val="43D5AE"/>
-              </a:gs>
-              <a:gs pos="100000">
-                <a:srgbClr val="7C5CFF"/>
-              </a:gs>
-            </a:gsLst>
-            <a:lin ang="0" scaled="1"/>
-          </a:gradFill>
+            <a:ext cx="12191695" cy="45720"/>
+          </a:xfrm>
+          <a:prstGeom prst="rect">
+            <a:avLst/>
+          </a:prstGeom>
+          <a:solidFill>
+            <a:srgbClr val="E8B860"/>
+          </a:solidFill>
           <a:ln>
             <a:noFill/>
           </a:ln>
@@ -4819,7 +4797,7 @@
         <p:spPr>
           <a:xfrm>
             <a:off x="0" y="6812280"/>
-            <a:ext cx="12191695" cy="45720"/>
+            <a:ext cx="12191695" cy="41148"/>
           </a:xfrm>
           <a:prstGeom prst="rect">
             <a:avLst/>
@@ -4863,22 +4841,14 @@
         <p:spPr>
           <a:xfrm>
             <a:off x="0" y="6812280"/>
-            <a:ext cx="9378226" cy="45720"/>
-          </a:xfrm>
-          <a:prstGeom prst="rect">
-            <a:avLst/>
-          </a:prstGeom>
-          <a:gradFill>
-            <a:gsLst>
-              <a:gs pos="0">
-                <a:srgbClr val="F6BE4C"/>
-              </a:gs>
-              <a:gs pos="100000">
-                <a:srgbClr val="43D5AE"/>
-              </a:gs>
-            </a:gsLst>
-            <a:lin ang="0" scaled="1"/>
-          </a:gradFill>
+            <a:ext cx="9378226" cy="41148"/>
+          </a:xfrm>
+          <a:prstGeom prst="rect">
+            <a:avLst/>
+          </a:prstGeom>
+          <a:solidFill>
+            <a:srgbClr val="E8B860"/>
+          </a:solidFill>
           <a:ln>
             <a:noFill/>
           </a:ln>
@@ -4977,8 +4947,8 @@
         </p:nvSpPr>
         <p:spPr>
           <a:xfrm>
-            <a:off x="7955279" y="2194560"/>
-            <a:ext cx="6949440" cy="6949440"/>
+            <a:off x="8138160" y="2377440"/>
+            <a:ext cx="6766560" cy="6766560"/>
           </a:xfrm>
           <a:prstGeom prst="ellipse">
             <a:avLst/>
@@ -4986,8 +4956,8 @@
           <a:gradFill>
             <a:gsLst>
               <a:gs pos="0">
-                <a:srgbClr val="43D5AE">
-                  <a:alpha val="26000"/>
+                <a:srgbClr val="1A263C">
+                  <a:alpha val="60000"/>
                 </a:srgbClr>
               </a:gs>
               <a:gs pos="100000">
@@ -5055,7 +5025,7 @@
             <a:r>
               <a:rPr sz="1000" b="1" lang="en-US" noProof="1" dirty="0" err="0">
                 <a:solidFill>
-                  <a:srgbClr val="F6BE4C"/>
+                  <a:srgbClr val="E8B860"/>
                 </a:solidFill>
                 <a:latin typeface="Noto Sans"/>
               </a:rPr>
@@ -5161,7 +5131,7 @@
           </a:solidFill>
           <a:ln>
             <a:solidFill>
-              <a:srgbClr val="F6BE4C"/>
+              <a:srgbClr val="E8B860"/>
             </a:solidFill>
           </a:ln>
         </p:spPr>
@@ -5217,7 +5187,7 @@
             <a:r>
               <a:rPr sz="2000" b="1" lang="en-US" noProof="1" dirty="0" err="0">
                 <a:solidFill>
-                  <a:srgbClr val="F6BE4C"/>
+                  <a:srgbClr val="E8B860"/>
                 </a:solidFill>
                 <a:latin typeface="Noto Sans"/>
               </a:rPr>
@@ -5323,7 +5293,7 @@
           </a:solidFill>
           <a:ln>
             <a:solidFill>
-              <a:srgbClr val="F6BE4C"/>
+              <a:srgbClr val="E8B860"/>
             </a:solidFill>
           </a:ln>
         </p:spPr>
@@ -5379,7 +5349,7 @@
             <a:r>
               <a:rPr sz="2000" b="1" lang="en-US" noProof="1" dirty="0" err="0">
                 <a:solidFill>
-                  <a:srgbClr val="F6BE4C"/>
+                  <a:srgbClr val="E8B860"/>
                 </a:solidFill>
                 <a:latin typeface="Noto Sans"/>
               </a:rPr>
@@ -5485,7 +5455,7 @@
           </a:solidFill>
           <a:ln>
             <a:solidFill>
-              <a:srgbClr val="F6BE4C"/>
+              <a:srgbClr val="E8B860"/>
             </a:solidFill>
           </a:ln>
         </p:spPr>
@@ -5541,7 +5511,7 @@
             <a:r>
               <a:rPr sz="2000" b="1" lang="en-US" noProof="1" dirty="0" err="0">
                 <a:solidFill>
-                  <a:srgbClr val="F6BE4C"/>
+                  <a:srgbClr val="E8B860"/>
                 </a:solidFill>
                 <a:latin typeface="Noto Sans"/>
               </a:rPr>
@@ -5647,7 +5617,7 @@
           </a:solidFill>
           <a:ln>
             <a:solidFill>
-              <a:srgbClr val="F6BE4C"/>
+              <a:srgbClr val="E8B860"/>
             </a:solidFill>
           </a:ln>
         </p:spPr>
@@ -5703,7 +5673,7 @@
             <a:r>
               <a:rPr sz="2000" b="1" lang="en-US" noProof="1" dirty="0" err="0">
                 <a:solidFill>
-                  <a:srgbClr val="F6BE4C"/>
+                  <a:srgbClr val="E8B860"/>
                 </a:solidFill>
                 <a:latin typeface="Noto Sans"/>
               </a:rPr>
@@ -5809,7 +5779,7 @@
           </a:solidFill>
           <a:ln>
             <a:solidFill>
-              <a:srgbClr val="F6BE4C"/>
+              <a:srgbClr val="E8B860"/>
             </a:solidFill>
           </a:ln>
         </p:spPr>
@@ -5865,7 +5835,7 @@
             <a:r>
               <a:rPr sz="2000" b="1" lang="en-US" noProof="1" dirty="0" err="0">
                 <a:solidFill>
-                  <a:srgbClr val="F6BE4C"/>
+                  <a:srgbClr val="E8B860"/>
                 </a:solidFill>
                 <a:latin typeface="Noto Sans"/>
               </a:rPr>
@@ -6039,25 +6009,14 @@
         <p:spPr>
           <a:xfrm>
             <a:off x="0" y="0"/>
-            <a:ext cx="12191695" cy="77724"/>
-          </a:xfrm>
-          <a:prstGeom prst="rect">
-            <a:avLst/>
-          </a:prstGeom>
-          <a:gradFill>
-            <a:gsLst>
-              <a:gs pos="0">
-                <a:srgbClr val="F6BE4C"/>
-              </a:gs>
-              <a:gs pos="50000">
-                <a:srgbClr val="43D5AE"/>
-              </a:gs>
-              <a:gs pos="100000">
-                <a:srgbClr val="7C5CFF"/>
-              </a:gs>
-            </a:gsLst>
-            <a:lin ang="0" scaled="1"/>
-          </a:gradFill>
+            <a:ext cx="12191695" cy="45720"/>
+          </a:xfrm>
+          <a:prstGeom prst="rect">
+            <a:avLst/>
+          </a:prstGeom>
+          <a:solidFill>
+            <a:srgbClr val="E8B860"/>
+          </a:solidFill>
           <a:ln>
             <a:noFill/>
           </a:ln>
@@ -6094,7 +6053,7 @@
         <p:spPr>
           <a:xfrm>
             <a:off x="0" y="6812280"/>
-            <a:ext cx="12191695" cy="45720"/>
+            <a:ext cx="12191695" cy="41148"/>
           </a:xfrm>
           <a:prstGeom prst="rect">
             <a:avLst/>
@@ -6138,22 +6097,14 @@
         <p:spPr>
           <a:xfrm>
             <a:off x="0" y="6812280"/>
-            <a:ext cx="10316049" cy="45720"/>
-          </a:xfrm>
-          <a:prstGeom prst="rect">
-            <a:avLst/>
-          </a:prstGeom>
-          <a:gradFill>
-            <a:gsLst>
-              <a:gs pos="0">
-                <a:srgbClr val="F6BE4C"/>
-              </a:gs>
-              <a:gs pos="100000">
-                <a:srgbClr val="43D5AE"/>
-              </a:gs>
-            </a:gsLst>
-            <a:lin ang="0" scaled="1"/>
-          </a:gradFill>
+            <a:ext cx="10316049" cy="41148"/>
+          </a:xfrm>
+          <a:prstGeom prst="rect">
+            <a:avLst/>
+          </a:prstGeom>
+          <a:solidFill>
+            <a:srgbClr val="E8B860"/>
+          </a:solidFill>
           <a:ln>
             <a:noFill/>
           </a:ln>
@@ -6252,8 +6203,8 @@
         </p:nvSpPr>
         <p:spPr>
           <a:xfrm>
-            <a:off x="-2103120" y="2194560"/>
-            <a:ext cx="6949440" cy="6949440"/>
+            <a:off x="-2286000" y="2377440"/>
+            <a:ext cx="6766560" cy="6766560"/>
           </a:xfrm>
           <a:prstGeom prst="ellipse">
             <a:avLst/>
@@ -6261,8 +6212,8 @@
           <a:gradFill>
             <a:gsLst>
               <a:gs pos="0">
-                <a:srgbClr val="FF7744">
-                  <a:alpha val="26000"/>
+                <a:srgbClr val="1A263C">
+                  <a:alpha val="60000"/>
                 </a:srgbClr>
               </a:gs>
               <a:gs pos="100000">
@@ -6330,7 +6281,7 @@
             <a:r>
               <a:rPr sz="1000" b="1" lang="en-US" noProof="1" dirty="0" err="0">
                 <a:solidFill>
-                  <a:srgbClr val="F6BE4C"/>
+                  <a:srgbClr val="E8B860"/>
                 </a:solidFill>
                 <a:latin typeface="Noto Sans"/>
               </a:rPr>
@@ -6375,7 +6326,7 @@
             <a:r>
               <a:rPr sz="3500" b="1" lang="en-US" noProof="1" dirty="0" err="0">
                 <a:solidFill>
-                  <a:srgbClr val="43D5AE"/>
+                  <a:srgbClr val="E8B860"/>
                 </a:solidFill>
                 <a:latin typeface="Noto Sans"/>
               </a:rPr>
@@ -6399,11 +6350,11 @@
             <a:avLst/>
           </a:prstGeom>
           <a:solidFill>
-            <a:srgbClr val="43D5AE"/>
+            <a:srgbClr val="788CAA"/>
           </a:solidFill>
           <a:ln>
             <a:solidFill>
-              <a:srgbClr val="43D5AE"/>
+              <a:srgbClr val="788CAA"/>
             </a:solidFill>
           </a:ln>
         </p:spPr>
@@ -6522,11 +6473,11 @@
             <a:avLst/>
           </a:prstGeom>
           <a:solidFill>
-            <a:srgbClr val="43D5AE"/>
+            <a:srgbClr val="788CAA"/>
           </a:solidFill>
           <a:ln>
             <a:solidFill>
-              <a:srgbClr val="43D5AE"/>
+              <a:srgbClr val="788CAA"/>
             </a:solidFill>
           </a:ln>
         </p:spPr>
@@ -6645,11 +6596,11 @@
             <a:avLst/>
           </a:prstGeom>
           <a:solidFill>
-            <a:srgbClr val="43D5AE"/>
+            <a:srgbClr val="788CAA"/>
           </a:solidFill>
           <a:ln>
             <a:solidFill>
-              <a:srgbClr val="43D5AE"/>
+              <a:srgbClr val="788CAA"/>
             </a:solidFill>
           </a:ln>
         </p:spPr>
@@ -6768,11 +6719,11 @@
             <a:avLst/>
           </a:prstGeom>
           <a:solidFill>
-            <a:srgbClr val="43D5AE"/>
+            <a:srgbClr val="788CAA"/>
           </a:solidFill>
           <a:ln>
             <a:solidFill>
-              <a:srgbClr val="43D5AE"/>
+              <a:srgbClr val="788CAA"/>
             </a:solidFill>
           </a:ln>
         </p:spPr>
@@ -6895,7 +6846,7 @@
           </a:solidFill>
           <a:ln>
             <a:solidFill>
-              <a:srgbClr val="F6BE4C"/>
+              <a:srgbClr val="E8B860"/>
             </a:solidFill>
           </a:ln>
         </p:spPr>
@@ -6990,7 +6941,7 @@
             <a:r>
               <a:rPr sz="2000" b="1" lang="en-US" noProof="1" dirty="0" err="0">
                 <a:solidFill>
-                  <a:srgbClr val="F6BE4C"/>
+                  <a:srgbClr val="E8B860"/>
                 </a:solidFill>
                 <a:latin typeface="Noto Sans"/>
               </a:rPr>
@@ -7126,25 +7077,14 @@
         <p:spPr>
           <a:xfrm>
             <a:off x="0" y="0"/>
-            <a:ext cx="12191695" cy="77724"/>
-          </a:xfrm>
-          <a:prstGeom prst="rect">
-            <a:avLst/>
-          </a:prstGeom>
-          <a:gradFill>
-            <a:gsLst>
-              <a:gs pos="0">
-                <a:srgbClr val="F6BE4C"/>
-              </a:gs>
-              <a:gs pos="50000">
-                <a:srgbClr val="43D5AE"/>
-              </a:gs>
-              <a:gs pos="100000">
-                <a:srgbClr val="7C5CFF"/>
-              </a:gs>
-            </a:gsLst>
-            <a:lin ang="0" scaled="1"/>
-          </a:gradFill>
+            <a:ext cx="12191695" cy="45720"/>
+          </a:xfrm>
+          <a:prstGeom prst="rect">
+            <a:avLst/>
+          </a:prstGeom>
+          <a:solidFill>
+            <a:srgbClr val="E8B860"/>
+          </a:solidFill>
           <a:ln>
             <a:noFill/>
           </a:ln>
@@ -7181,7 +7121,7 @@
         <p:spPr>
           <a:xfrm>
             <a:off x="0" y="6812280"/>
-            <a:ext cx="12191695" cy="45720"/>
+            <a:ext cx="12191695" cy="41148"/>
           </a:xfrm>
           <a:prstGeom prst="rect">
             <a:avLst/>
@@ -7225,22 +7165,14 @@
         <p:spPr>
           <a:xfrm>
             <a:off x="0" y="6812280"/>
-            <a:ext cx="11253872" cy="45720"/>
-          </a:xfrm>
-          <a:prstGeom prst="rect">
-            <a:avLst/>
-          </a:prstGeom>
-          <a:gradFill>
-            <a:gsLst>
-              <a:gs pos="0">
-                <a:srgbClr val="F6BE4C"/>
-              </a:gs>
-              <a:gs pos="100000">
-                <a:srgbClr val="43D5AE"/>
-              </a:gs>
-            </a:gsLst>
-            <a:lin ang="0" scaled="1"/>
-          </a:gradFill>
+            <a:ext cx="11253872" cy="41148"/>
+          </a:xfrm>
+          <a:prstGeom prst="rect">
+            <a:avLst/>
+          </a:prstGeom>
+          <a:solidFill>
+            <a:srgbClr val="E8B860"/>
+          </a:solidFill>
           <a:ln>
             <a:noFill/>
           </a:ln>
@@ -7339,8 +7271,8 @@
         </p:nvSpPr>
         <p:spPr>
           <a:xfrm>
-            <a:off x="7955279" y="2194560"/>
-            <a:ext cx="6949440" cy="6949440"/>
+            <a:off x="8138160" y="2377440"/>
+            <a:ext cx="6766560" cy="6766560"/>
           </a:xfrm>
           <a:prstGeom prst="ellipse">
             <a:avLst/>
@@ -7348,8 +7280,8 @@
           <a:gradFill>
             <a:gsLst>
               <a:gs pos="0">
-                <a:srgbClr val="7C5CFF">
-                  <a:alpha val="26000"/>
+                <a:srgbClr val="1A263C">
+                  <a:alpha val="60000"/>
                 </a:srgbClr>
               </a:gs>
               <a:gs pos="100000">
@@ -7417,7 +7349,7 @@
             <a:r>
               <a:rPr sz="1000" b="1" lang="en-US" noProof="1" dirty="0" err="0">
                 <a:solidFill>
-                  <a:srgbClr val="F6BE4C"/>
+                  <a:srgbClr val="E8B860"/>
                 </a:solidFill>
                 <a:latin typeface="Noto Sans"/>
               </a:rPr>
@@ -7838,25 +7770,14 @@
         <p:spPr>
           <a:xfrm>
             <a:off x="0" y="0"/>
-            <a:ext cx="12191695" cy="77724"/>
-          </a:xfrm>
-          <a:prstGeom prst="rect">
-            <a:avLst/>
-          </a:prstGeom>
-          <a:gradFill>
-            <a:gsLst>
-              <a:gs pos="0">
-                <a:srgbClr val="F6BE4C"/>
-              </a:gs>
-              <a:gs pos="50000">
-                <a:srgbClr val="43D5AE"/>
-              </a:gs>
-              <a:gs pos="100000">
-                <a:srgbClr val="7C5CFF"/>
-              </a:gs>
-            </a:gsLst>
-            <a:lin ang="0" scaled="1"/>
-          </a:gradFill>
+            <a:ext cx="12191695" cy="45720"/>
+          </a:xfrm>
+          <a:prstGeom prst="rect">
+            <a:avLst/>
+          </a:prstGeom>
+          <a:solidFill>
+            <a:srgbClr val="E8B860"/>
+          </a:solidFill>
           <a:ln>
             <a:noFill/>
           </a:ln>
@@ -7893,7 +7814,7 @@
         <p:spPr>
           <a:xfrm>
             <a:off x="0" y="6812280"/>
-            <a:ext cx="12191695" cy="45720"/>
+            <a:ext cx="12191695" cy="41148"/>
           </a:xfrm>
           <a:prstGeom prst="rect">
             <a:avLst/>
@@ -7937,22 +7858,14 @@
         <p:spPr>
           <a:xfrm>
             <a:off x="0" y="6812280"/>
-            <a:ext cx="12191695" cy="45720"/>
-          </a:xfrm>
-          <a:prstGeom prst="rect">
-            <a:avLst/>
-          </a:prstGeom>
-          <a:gradFill>
-            <a:gsLst>
-              <a:gs pos="0">
-                <a:srgbClr val="F6BE4C"/>
-              </a:gs>
-              <a:gs pos="100000">
-                <a:srgbClr val="43D5AE"/>
-              </a:gs>
-            </a:gsLst>
-            <a:lin ang="0" scaled="1"/>
-          </a:gradFill>
+            <a:ext cx="12191695" cy="41148"/>
+          </a:xfrm>
+          <a:prstGeom prst="rect">
+            <a:avLst/>
+          </a:prstGeom>
+          <a:solidFill>
+            <a:srgbClr val="E8B860"/>
+          </a:solidFill>
           <a:ln>
             <a:noFill/>
           </a:ln>
@@ -8051,8 +7964,8 @@
         </p:nvSpPr>
         <p:spPr>
           <a:xfrm>
-            <a:off x="-2103120" y="2194560"/>
-            <a:ext cx="6949440" cy="6949440"/>
+            <a:off x="-2286000" y="2377440"/>
+            <a:ext cx="6766560" cy="6766560"/>
           </a:xfrm>
           <a:prstGeom prst="ellipse">
             <a:avLst/>
@@ -8060,8 +7973,8 @@
           <a:gradFill>
             <a:gsLst>
               <a:gs pos="0">
-                <a:srgbClr val="43D5AE">
-                  <a:alpha val="26000"/>
+                <a:srgbClr val="1A263C">
+                  <a:alpha val="60000"/>
                 </a:srgbClr>
               </a:gs>
               <a:gs pos="100000">
@@ -8149,11 +8062,11 @@
             <a:avLst/>
           </a:prstGeom>
           <a:solidFill>
-            <a:srgbClr val="FF7744"/>
+            <a:srgbClr val="E8B860"/>
           </a:solidFill>
           <a:ln>
             <a:solidFill>
-              <a:srgbClr val="FF7744"/>
+              <a:srgbClr val="E8B860"/>
             </a:solidFill>
           </a:ln>
         </p:spPr>
@@ -8209,7 +8122,7 @@
             <a:r>
               <a:rPr sz="1400" b="1" lang="en-US" noProof="1" dirty="0" err="0">
                 <a:solidFill>
-                  <a:srgbClr val="FF7744"/>
+                  <a:srgbClr val="E8B860"/>
                 </a:solidFill>
                 <a:latin typeface="Noto Sans"/>
               </a:rPr>
@@ -8305,25 +8218,14 @@
         <p:spPr>
           <a:xfrm>
             <a:off x="0" y="0"/>
-            <a:ext cx="12191695" cy="77724"/>
-          </a:xfrm>
-          <a:prstGeom prst="rect">
-            <a:avLst/>
-          </a:prstGeom>
-          <a:gradFill>
-            <a:gsLst>
-              <a:gs pos="0">
-                <a:srgbClr val="F6BE4C"/>
-              </a:gs>
-              <a:gs pos="50000">
-                <a:srgbClr val="43D5AE"/>
-              </a:gs>
-              <a:gs pos="100000">
-                <a:srgbClr val="7C5CFF"/>
-              </a:gs>
-            </a:gsLst>
-            <a:lin ang="0" scaled="1"/>
-          </a:gradFill>
+            <a:ext cx="12191695" cy="45720"/>
+          </a:xfrm>
+          <a:prstGeom prst="rect">
+            <a:avLst/>
+          </a:prstGeom>
+          <a:solidFill>
+            <a:srgbClr val="E8B860"/>
+          </a:solidFill>
           <a:ln>
             <a:noFill/>
           </a:ln>
@@ -8360,7 +8262,7 @@
         <p:spPr>
           <a:xfrm>
             <a:off x="0" y="6812280"/>
-            <a:ext cx="12191695" cy="45720"/>
+            <a:ext cx="12191695" cy="41148"/>
           </a:xfrm>
           <a:prstGeom prst="rect">
             <a:avLst/>
@@ -8404,22 +8306,14 @@
         <p:spPr>
           <a:xfrm>
             <a:off x="0" y="6812280"/>
-            <a:ext cx="1875645" cy="45720"/>
-          </a:xfrm>
-          <a:prstGeom prst="rect">
-            <a:avLst/>
-          </a:prstGeom>
-          <a:gradFill>
-            <a:gsLst>
-              <a:gs pos="0">
-                <a:srgbClr val="F6BE4C"/>
-              </a:gs>
-              <a:gs pos="100000">
-                <a:srgbClr val="43D5AE"/>
-              </a:gs>
-            </a:gsLst>
-            <a:lin ang="0" scaled="1"/>
-          </a:gradFill>
+            <a:ext cx="1875645" cy="41148"/>
+          </a:xfrm>
+          <a:prstGeom prst="rect">
+            <a:avLst/>
+          </a:prstGeom>
+          <a:solidFill>
+            <a:srgbClr val="E8B860"/>
+          </a:solidFill>
           <a:ln>
             <a:noFill/>
           </a:ln>
@@ -8518,8 +8412,8 @@
         </p:nvSpPr>
         <p:spPr>
           <a:xfrm>
-            <a:off x="7955279" y="2194560"/>
-            <a:ext cx="6949440" cy="6949440"/>
+            <a:off x="8138160" y="2377440"/>
+            <a:ext cx="6766560" cy="6766560"/>
           </a:xfrm>
           <a:prstGeom prst="ellipse">
             <a:avLst/>
@@ -8527,8 +8421,8 @@
           <a:gradFill>
             <a:gsLst>
               <a:gs pos="0">
-                <a:srgbClr val="FF7744">
-                  <a:alpha val="26000"/>
+                <a:srgbClr val="1A263C">
+                  <a:alpha val="60000"/>
                 </a:srgbClr>
               </a:gs>
               <a:gs pos="100000">
@@ -8596,7 +8490,7 @@
             <a:r>
               <a:rPr sz="1000" b="1" lang="en-US" noProof="1" dirty="0" err="0">
                 <a:solidFill>
-                  <a:srgbClr val="F6BE4C"/>
+                  <a:srgbClr val="E8B860"/>
                 </a:solidFill>
                 <a:latin typeface="Noto Sans"/>
               </a:rPr>
@@ -8759,7 +8653,7 @@
             <a:r>
               <a:rPr sz="2500" b="1" lang="en-US" noProof="1" dirty="0" err="0">
                 <a:solidFill>
-                  <a:srgbClr val="FF7744"/>
+                  <a:srgbClr val="E8B860"/>
                 </a:solidFill>
                 <a:latin typeface="Noto Sans"/>
               </a:rPr>
@@ -8882,7 +8776,7 @@
             <a:r>
               <a:rPr sz="2500" b="1" lang="en-US" noProof="1" dirty="0" err="0">
                 <a:solidFill>
-                  <a:srgbClr val="F6BE4C"/>
+                  <a:srgbClr val="E8B860"/>
                 </a:solidFill>
                 <a:latin typeface="Noto Sans"/>
               </a:rPr>
@@ -9005,7 +8899,7 @@
             <a:r>
               <a:rPr sz="2500" b="1" lang="en-US" noProof="1" dirty="0" err="0">
                 <a:solidFill>
-                  <a:srgbClr val="FF5B66"/>
+                  <a:srgbClr val="E8B860"/>
                 </a:solidFill>
                 <a:latin typeface="Noto Sans"/>
               </a:rPr>
@@ -9128,7 +9022,7 @@
             <a:r>
               <a:rPr sz="2500" b="1" lang="en-US" noProof="1" dirty="0" err="0">
                 <a:solidFill>
-                  <a:srgbClr val="43D5AE"/>
+                  <a:srgbClr val="788CAA"/>
                 </a:solidFill>
                 <a:latin typeface="Noto Sans"/>
               </a:rPr>
@@ -9315,11 +9209,11 @@
             <a:avLst/>
           </a:prstGeom>
           <a:solidFill>
-            <a:srgbClr val="F6BE4C"/>
+            <a:srgbClr val="E8B860"/>
           </a:solidFill>
           <a:ln>
             <a:solidFill>
-              <a:srgbClr val="F6BE4C"/>
+              <a:srgbClr val="E8B860"/>
             </a:solidFill>
           </a:ln>
         </p:spPr>
@@ -9375,7 +9269,7 @@
             <a:r>
               <a:rPr sz="3400" b="1" lang="en-US" noProof="1" dirty="0" err="0">
                 <a:solidFill>
-                  <a:srgbClr val="F6BE4C"/>
+                  <a:srgbClr val="E8B860"/>
                 </a:solidFill>
                 <a:latin typeface="Noto Sans"/>
               </a:rPr>
@@ -9550,25 +9444,14 @@
         <p:spPr>
           <a:xfrm>
             <a:off x="0" y="0"/>
-            <a:ext cx="12191695" cy="77724"/>
-          </a:xfrm>
-          <a:prstGeom prst="rect">
-            <a:avLst/>
-          </a:prstGeom>
-          <a:gradFill>
-            <a:gsLst>
-              <a:gs pos="0">
-                <a:srgbClr val="F6BE4C"/>
-              </a:gs>
-              <a:gs pos="50000">
-                <a:srgbClr val="43D5AE"/>
-              </a:gs>
-              <a:gs pos="100000">
-                <a:srgbClr val="7C5CFF"/>
-              </a:gs>
-            </a:gsLst>
-            <a:lin ang="0" scaled="1"/>
-          </a:gradFill>
+            <a:ext cx="12191695" cy="45720"/>
+          </a:xfrm>
+          <a:prstGeom prst="rect">
+            <a:avLst/>
+          </a:prstGeom>
+          <a:solidFill>
+            <a:srgbClr val="E8B860"/>
+          </a:solidFill>
           <a:ln>
             <a:noFill/>
           </a:ln>
@@ -9605,7 +9488,7 @@
         <p:spPr>
           <a:xfrm>
             <a:off x="0" y="6812280"/>
-            <a:ext cx="12191695" cy="45720"/>
+            <a:ext cx="12191695" cy="41148"/>
           </a:xfrm>
           <a:prstGeom prst="rect">
             <a:avLst/>
@@ -9649,22 +9532,14 @@
         <p:spPr>
           <a:xfrm>
             <a:off x="0" y="6812280"/>
-            <a:ext cx="2813468" cy="45720"/>
-          </a:xfrm>
-          <a:prstGeom prst="rect">
-            <a:avLst/>
-          </a:prstGeom>
-          <a:gradFill>
-            <a:gsLst>
-              <a:gs pos="0">
-                <a:srgbClr val="F6BE4C"/>
-              </a:gs>
-              <a:gs pos="100000">
-                <a:srgbClr val="43D5AE"/>
-              </a:gs>
-            </a:gsLst>
-            <a:lin ang="0" scaled="1"/>
-          </a:gradFill>
+            <a:ext cx="2813468" cy="41148"/>
+          </a:xfrm>
+          <a:prstGeom prst="rect">
+            <a:avLst/>
+          </a:prstGeom>
+          <a:solidFill>
+            <a:srgbClr val="E8B860"/>
+          </a:solidFill>
           <a:ln>
             <a:noFill/>
           </a:ln>
@@ -9763,8 +9638,8 @@
         </p:nvSpPr>
         <p:spPr>
           <a:xfrm>
-            <a:off x="-2103120" y="2194560"/>
-            <a:ext cx="6949440" cy="6949440"/>
+            <a:off x="-2286000" y="2377440"/>
+            <a:ext cx="6766560" cy="6766560"/>
           </a:xfrm>
           <a:prstGeom prst="ellipse">
             <a:avLst/>
@@ -9772,8 +9647,8 @@
           <a:gradFill>
             <a:gsLst>
               <a:gs pos="0">
-                <a:srgbClr val="7C5CFF">
-                  <a:alpha val="26000"/>
+                <a:srgbClr val="1A263C">
+                  <a:alpha val="60000"/>
                 </a:srgbClr>
               </a:gs>
               <a:gs pos="100000">
@@ -9861,11 +9736,11 @@
             <a:avLst/>
           </a:prstGeom>
           <a:solidFill>
-            <a:srgbClr val="43D5AE"/>
+            <a:srgbClr val="E8B860"/>
           </a:solidFill>
           <a:ln>
             <a:solidFill>
-              <a:srgbClr val="43D5AE"/>
+              <a:srgbClr val="E8B860"/>
             </a:solidFill>
           </a:ln>
         </p:spPr>
@@ -9921,7 +9796,7 @@
             <a:r>
               <a:rPr sz="1400" b="1" lang="en-US" noProof="1" dirty="0" err="0">
                 <a:solidFill>
-                  <a:srgbClr val="43D5AE"/>
+                  <a:srgbClr val="E8B860"/>
                 </a:solidFill>
                 <a:latin typeface="Noto Sans"/>
               </a:rPr>
@@ -10017,25 +9892,14 @@
         <p:spPr>
           <a:xfrm>
             <a:off x="0" y="0"/>
-            <a:ext cx="12191695" cy="77724"/>
-          </a:xfrm>
-          <a:prstGeom prst="rect">
-            <a:avLst/>
-          </a:prstGeom>
-          <a:gradFill>
-            <a:gsLst>
-              <a:gs pos="0">
-                <a:srgbClr val="F6BE4C"/>
-              </a:gs>
-              <a:gs pos="50000">
-                <a:srgbClr val="43D5AE"/>
-              </a:gs>
-              <a:gs pos="100000">
-                <a:srgbClr val="7C5CFF"/>
-              </a:gs>
-            </a:gsLst>
-            <a:lin ang="0" scaled="1"/>
-          </a:gradFill>
+            <a:ext cx="12191695" cy="45720"/>
+          </a:xfrm>
+          <a:prstGeom prst="rect">
+            <a:avLst/>
+          </a:prstGeom>
+          <a:solidFill>
+            <a:srgbClr val="E8B860"/>
+          </a:solidFill>
           <a:ln>
             <a:noFill/>
           </a:ln>
@@ -10072,7 +9936,7 @@
         <p:spPr>
           <a:xfrm>
             <a:off x="0" y="6812280"/>
-            <a:ext cx="12191695" cy="45720"/>
+            <a:ext cx="12191695" cy="41148"/>
           </a:xfrm>
           <a:prstGeom prst="rect">
             <a:avLst/>
@@ -10116,22 +9980,14 @@
         <p:spPr>
           <a:xfrm>
             <a:off x="0" y="6812280"/>
-            <a:ext cx="3751290" cy="45720"/>
-          </a:xfrm>
-          <a:prstGeom prst="rect">
-            <a:avLst/>
-          </a:prstGeom>
-          <a:gradFill>
-            <a:gsLst>
-              <a:gs pos="0">
-                <a:srgbClr val="F6BE4C"/>
-              </a:gs>
-              <a:gs pos="100000">
-                <a:srgbClr val="43D5AE"/>
-              </a:gs>
-            </a:gsLst>
-            <a:lin ang="0" scaled="1"/>
-          </a:gradFill>
+            <a:ext cx="3751290" cy="41148"/>
+          </a:xfrm>
+          <a:prstGeom prst="rect">
+            <a:avLst/>
+          </a:prstGeom>
+          <a:solidFill>
+            <a:srgbClr val="E8B860"/>
+          </a:solidFill>
           <a:ln>
             <a:noFill/>
           </a:ln>
@@ -10230,8 +10086,8 @@
         </p:nvSpPr>
         <p:spPr>
           <a:xfrm>
-            <a:off x="7955279" y="2194560"/>
-            <a:ext cx="6949440" cy="6949440"/>
+            <a:off x="8138160" y="2377440"/>
+            <a:ext cx="6766560" cy="6766560"/>
           </a:xfrm>
           <a:prstGeom prst="ellipse">
             <a:avLst/>
@@ -10239,8 +10095,8 @@
           <a:gradFill>
             <a:gsLst>
               <a:gs pos="0">
-                <a:srgbClr val="43D5AE">
-                  <a:alpha val="26000"/>
+                <a:srgbClr val="1A263C">
+                  <a:alpha val="60000"/>
                 </a:srgbClr>
               </a:gs>
               <a:gs pos="100000">
@@ -10308,7 +10164,7 @@
             <a:r>
               <a:rPr sz="1000" b="1" lang="en-US" noProof="1" dirty="0" err="0">
                 <a:solidFill>
-                  <a:srgbClr val="F6BE4C"/>
+                  <a:srgbClr val="E8B860"/>
                 </a:solidFill>
                 <a:latin typeface="Noto Sans"/>
               </a:rPr>
@@ -10386,7 +10242,7 @@
             <a:r>
               <a:rPr sz="1300" b="1" lang="en-US" noProof="1" dirty="0" err="0">
                 <a:solidFill>
-                  <a:srgbClr val="F6BE4C"/>
+                  <a:srgbClr val="E8B860"/>
                 </a:solidFill>
                 <a:latin typeface="Noto Sans"/>
               </a:rPr>
@@ -10522,7 +10378,7 @@
           </a:solidFill>
           <a:ln>
             <a:solidFill>
-              <a:srgbClr val="FF7744"/>
+              <a:srgbClr val="E8B860"/>
             </a:solidFill>
           </a:ln>
         </p:spPr>
@@ -10578,7 +10434,7 @@
             <a:r>
               <a:rPr sz="1100" b="1" lang="en-US" noProof="1" dirty="0" err="0">
                 <a:solidFill>
-                  <a:srgbClr val="FF7744"/>
+                  <a:srgbClr val="E8B860"/>
                 </a:solidFill>
                 <a:latin typeface="Noto Sans"/>
               </a:rPr>
@@ -10675,7 +10531,7 @@
           </a:solidFill>
           <a:ln>
             <a:solidFill>
-              <a:srgbClr val="43D5AE"/>
+              <a:srgbClr val="788CAA"/>
             </a:solidFill>
           </a:ln>
         </p:spPr>
@@ -10731,7 +10587,7 @@
             <a:r>
               <a:rPr sz="1100" b="1" lang="en-US" noProof="1" dirty="0" err="0">
                 <a:solidFill>
-                  <a:srgbClr val="43D5AE"/>
+                  <a:srgbClr val="788CAA"/>
                 </a:solidFill>
                 <a:latin typeface="Noto Sans"/>
               </a:rPr>
@@ -10828,7 +10684,7 @@
           </a:solidFill>
           <a:ln>
             <a:solidFill>
-              <a:srgbClr val="529BFF"/>
+              <a:srgbClr val="788CAA"/>
             </a:solidFill>
           </a:ln>
         </p:spPr>
@@ -10884,7 +10740,7 @@
             <a:r>
               <a:rPr sz="1100" b="1" lang="en-US" noProof="1" dirty="0" err="0">
                 <a:solidFill>
-                  <a:srgbClr val="529BFF"/>
+                  <a:srgbClr val="788CAA"/>
                 </a:solidFill>
                 <a:latin typeface="Noto Sans"/>
               </a:rPr>
@@ -10980,25 +10836,14 @@
         <p:spPr>
           <a:xfrm>
             <a:off x="0" y="0"/>
-            <a:ext cx="12191695" cy="77724"/>
-          </a:xfrm>
-          <a:prstGeom prst="rect">
-            <a:avLst/>
-          </a:prstGeom>
-          <a:gradFill>
-            <a:gsLst>
-              <a:gs pos="0">
-                <a:srgbClr val="F6BE4C"/>
-              </a:gs>
-              <a:gs pos="50000">
-                <a:srgbClr val="43D5AE"/>
-              </a:gs>
-              <a:gs pos="100000">
-                <a:srgbClr val="7C5CFF"/>
-              </a:gs>
-            </a:gsLst>
-            <a:lin ang="0" scaled="1"/>
-          </a:gradFill>
+            <a:ext cx="12191695" cy="45720"/>
+          </a:xfrm>
+          <a:prstGeom prst="rect">
+            <a:avLst/>
+          </a:prstGeom>
+          <a:solidFill>
+            <a:srgbClr val="E8B860"/>
+          </a:solidFill>
           <a:ln>
             <a:noFill/>
           </a:ln>
@@ -11035,7 +10880,7 @@
         <p:spPr>
           <a:xfrm>
             <a:off x="0" y="6812280"/>
-            <a:ext cx="12191695" cy="45720"/>
+            <a:ext cx="12191695" cy="41148"/>
           </a:xfrm>
           <a:prstGeom prst="rect">
             <a:avLst/>
@@ -11079,22 +10924,14 @@
         <p:spPr>
           <a:xfrm>
             <a:off x="0" y="6812280"/>
-            <a:ext cx="4689113" cy="45720"/>
-          </a:xfrm>
-          <a:prstGeom prst="rect">
-            <a:avLst/>
-          </a:prstGeom>
-          <a:gradFill>
-            <a:gsLst>
-              <a:gs pos="0">
-                <a:srgbClr val="F6BE4C"/>
-              </a:gs>
-              <a:gs pos="100000">
-                <a:srgbClr val="43D5AE"/>
-              </a:gs>
-            </a:gsLst>
-            <a:lin ang="0" scaled="1"/>
-          </a:gradFill>
+            <a:ext cx="4689113" cy="41148"/>
+          </a:xfrm>
+          <a:prstGeom prst="rect">
+            <a:avLst/>
+          </a:prstGeom>
+          <a:solidFill>
+            <a:srgbClr val="E8B860"/>
+          </a:solidFill>
           <a:ln>
             <a:noFill/>
           </a:ln>
@@ -11193,8 +11030,8 @@
         </p:nvSpPr>
         <p:spPr>
           <a:xfrm>
-            <a:off x="-2103120" y="2194560"/>
-            <a:ext cx="6949440" cy="6949440"/>
+            <a:off x="-2286000" y="2377440"/>
+            <a:ext cx="6766560" cy="6766560"/>
           </a:xfrm>
           <a:prstGeom prst="ellipse">
             <a:avLst/>
@@ -11202,8 +11039,8 @@
           <a:gradFill>
             <a:gsLst>
               <a:gs pos="0">
-                <a:srgbClr val="FF7744">
-                  <a:alpha val="26000"/>
+                <a:srgbClr val="1A263C">
+                  <a:alpha val="60000"/>
                 </a:srgbClr>
               </a:gs>
               <a:gs pos="100000">
@@ -11271,7 +11108,7 @@
             <a:r>
               <a:rPr sz="1000" b="1" lang="en-US" noProof="1" dirty="0" err="0">
                 <a:solidFill>
-                  <a:srgbClr val="F6BE4C"/>
+                  <a:srgbClr val="E8B860"/>
                 </a:solidFill>
                 <a:latin typeface="Noto Sans"/>
               </a:rPr>
@@ -11349,7 +11186,7 @@
             <a:r>
               <a:rPr sz="1300" b="1" lang="en-US" noProof="1" dirty="0" err="0">
                 <a:solidFill>
-                  <a:srgbClr val="F6BE4C"/>
+                  <a:srgbClr val="E8B860"/>
                 </a:solidFill>
                 <a:latin typeface="Noto Sans"/>
               </a:rPr>
@@ -11485,7 +11322,7 @@
           </a:solidFill>
           <a:ln>
             <a:solidFill>
-              <a:srgbClr val="FF7744"/>
+              <a:srgbClr val="E8B860"/>
             </a:solidFill>
           </a:ln>
         </p:spPr>
@@ -11541,7 +11378,7 @@
             <a:r>
               <a:rPr sz="1100" b="1" lang="en-US" noProof="1" dirty="0" err="0">
                 <a:solidFill>
-                  <a:srgbClr val="FF7744"/>
+                  <a:srgbClr val="E8B860"/>
                 </a:solidFill>
                 <a:latin typeface="Noto Sans"/>
               </a:rPr>
@@ -11638,7 +11475,7 @@
           </a:solidFill>
           <a:ln>
             <a:solidFill>
-              <a:srgbClr val="F6BE4C"/>
+              <a:srgbClr val="E8B860"/>
             </a:solidFill>
           </a:ln>
         </p:spPr>
@@ -11694,7 +11531,7 @@
             <a:r>
               <a:rPr sz="1100" b="1" lang="en-US" noProof="1" dirty="0" err="0">
                 <a:solidFill>
-                  <a:srgbClr val="F6BE4C"/>
+                  <a:srgbClr val="E8B860"/>
                 </a:solidFill>
                 <a:latin typeface="Noto Sans"/>
               </a:rPr>
@@ -11791,7 +11628,7 @@
           </a:solidFill>
           <a:ln>
             <a:solidFill>
-              <a:srgbClr val="FF5B66"/>
+              <a:srgbClr val="E8B860"/>
             </a:solidFill>
           </a:ln>
         </p:spPr>
@@ -11847,7 +11684,7 @@
             <a:r>
               <a:rPr sz="1100" b="1" lang="en-US" noProof="1" dirty="0" err="0">
                 <a:solidFill>
-                  <a:srgbClr val="FF5B66"/>
+                  <a:srgbClr val="E8B860"/>
                 </a:solidFill>
                 <a:latin typeface="Noto Sans"/>
               </a:rPr>
@@ -11943,25 +11780,14 @@
         <p:spPr>
           <a:xfrm>
             <a:off x="0" y="0"/>
-            <a:ext cx="12191695" cy="77724"/>
-          </a:xfrm>
-          <a:prstGeom prst="rect">
-            <a:avLst/>
-          </a:prstGeom>
-          <a:gradFill>
-            <a:gsLst>
-              <a:gs pos="0">
-                <a:srgbClr val="F6BE4C"/>
-              </a:gs>
-              <a:gs pos="50000">
-                <a:srgbClr val="43D5AE"/>
-              </a:gs>
-              <a:gs pos="100000">
-                <a:srgbClr val="7C5CFF"/>
-              </a:gs>
-            </a:gsLst>
-            <a:lin ang="0" scaled="1"/>
-          </a:gradFill>
+            <a:ext cx="12191695" cy="45720"/>
+          </a:xfrm>
+          <a:prstGeom prst="rect">
+            <a:avLst/>
+          </a:prstGeom>
+          <a:solidFill>
+            <a:srgbClr val="E8B860"/>
+          </a:solidFill>
           <a:ln>
             <a:noFill/>
           </a:ln>
@@ -11998,7 +11824,7 @@
         <p:spPr>
           <a:xfrm>
             <a:off x="0" y="6812280"/>
-            <a:ext cx="12191695" cy="45720"/>
+            <a:ext cx="12191695" cy="41148"/>
           </a:xfrm>
           <a:prstGeom prst="rect">
             <a:avLst/>
@@ -12042,22 +11868,14 @@
         <p:spPr>
           <a:xfrm>
             <a:off x="0" y="6812280"/>
-            <a:ext cx="5626936" cy="45720"/>
-          </a:xfrm>
-          <a:prstGeom prst="rect">
-            <a:avLst/>
-          </a:prstGeom>
-          <a:gradFill>
-            <a:gsLst>
-              <a:gs pos="0">
-                <a:srgbClr val="F6BE4C"/>
-              </a:gs>
-              <a:gs pos="100000">
-                <a:srgbClr val="43D5AE"/>
-              </a:gs>
-            </a:gsLst>
-            <a:lin ang="0" scaled="1"/>
-          </a:gradFill>
+            <a:ext cx="5626936" cy="41148"/>
+          </a:xfrm>
+          <a:prstGeom prst="rect">
+            <a:avLst/>
+          </a:prstGeom>
+          <a:solidFill>
+            <a:srgbClr val="E8B860"/>
+          </a:solidFill>
           <a:ln>
             <a:noFill/>
           </a:ln>
@@ -12156,8 +11974,8 @@
         </p:nvSpPr>
         <p:spPr>
           <a:xfrm>
-            <a:off x="7955279" y="2194560"/>
-            <a:ext cx="6949440" cy="6949440"/>
+            <a:off x="8138160" y="2377440"/>
+            <a:ext cx="6766560" cy="6766560"/>
           </a:xfrm>
           <a:prstGeom prst="ellipse">
             <a:avLst/>
@@ -12165,8 +11983,8 @@
           <a:gradFill>
             <a:gsLst>
               <a:gs pos="0">
-                <a:srgbClr val="7C5CFF">
-                  <a:alpha val="26000"/>
+                <a:srgbClr val="1A263C">
+                  <a:alpha val="60000"/>
                 </a:srgbClr>
               </a:gs>
               <a:gs pos="100000">
@@ -12234,7 +12052,7 @@
             <a:r>
               <a:rPr sz="1000" b="1" lang="en-US" noProof="1" dirty="0" err="0">
                 <a:solidFill>
-                  <a:srgbClr val="F6BE4C"/>
+                  <a:srgbClr val="E8B860"/>
                 </a:solidFill>
                 <a:latin typeface="Noto Sans"/>
               </a:rPr>
@@ -12312,7 +12130,7 @@
             <a:r>
               <a:rPr sz="1300" b="1" lang="en-US" noProof="1" dirty="0" err="0">
                 <a:solidFill>
-                  <a:srgbClr val="F6BE4C"/>
+                  <a:srgbClr val="E8B860"/>
                 </a:solidFill>
                 <a:latin typeface="Noto Sans"/>
               </a:rPr>
@@ -12448,7 +12266,7 @@
           </a:solidFill>
           <a:ln>
             <a:solidFill>
-              <a:srgbClr val="FF5B66"/>
+              <a:srgbClr val="E8B860"/>
             </a:solidFill>
           </a:ln>
         </p:spPr>
@@ -12504,7 +12322,7 @@
             <a:r>
               <a:rPr sz="1100" b="1" lang="en-US" noProof="1" dirty="0" err="0">
                 <a:solidFill>
-                  <a:srgbClr val="FF5B66"/>
+                  <a:srgbClr val="E8B860"/>
                 </a:solidFill>
                 <a:latin typeface="Noto Sans"/>
               </a:rPr>
@@ -12601,7 +12419,7 @@
           </a:solidFill>
           <a:ln>
             <a:solidFill>
-              <a:srgbClr val="529BFF"/>
+              <a:srgbClr val="788CAA"/>
             </a:solidFill>
           </a:ln>
         </p:spPr>
@@ -12657,7 +12475,7 @@
             <a:r>
               <a:rPr sz="1100" b="1" lang="en-US" noProof="1" dirty="0" err="0">
                 <a:solidFill>
-                  <a:srgbClr val="529BFF"/>
+                  <a:srgbClr val="788CAA"/>
                 </a:solidFill>
                 <a:latin typeface="Noto Sans"/>
               </a:rPr>
@@ -12754,7 +12572,7 @@
           </a:solidFill>
           <a:ln>
             <a:solidFill>
-              <a:srgbClr val="43D5AE"/>
+              <a:srgbClr val="788CAA"/>
             </a:solidFill>
           </a:ln>
         </p:spPr>
@@ -12810,7 +12628,7 @@
             <a:r>
               <a:rPr sz="1100" b="1" lang="en-US" noProof="1" dirty="0" err="0">
                 <a:solidFill>
-                  <a:srgbClr val="43D5AE"/>
+                  <a:srgbClr val="788CAA"/>
                 </a:solidFill>
                 <a:latin typeface="Noto Sans"/>
               </a:rPr>
@@ -12906,25 +12724,14 @@
         <p:spPr>
           <a:xfrm>
             <a:off x="0" y="0"/>
-            <a:ext cx="12191695" cy="77724"/>
-          </a:xfrm>
-          <a:prstGeom prst="rect">
-            <a:avLst/>
-          </a:prstGeom>
-          <a:gradFill>
-            <a:gsLst>
-              <a:gs pos="0">
-                <a:srgbClr val="F6BE4C"/>
-              </a:gs>
-              <a:gs pos="50000">
-                <a:srgbClr val="43D5AE"/>
-              </a:gs>
-              <a:gs pos="100000">
-                <a:srgbClr val="7C5CFF"/>
-              </a:gs>
-            </a:gsLst>
-            <a:lin ang="0" scaled="1"/>
-          </a:gradFill>
+            <a:ext cx="12191695" cy="45720"/>
+          </a:xfrm>
+          <a:prstGeom prst="rect">
+            <a:avLst/>
+          </a:prstGeom>
+          <a:solidFill>
+            <a:srgbClr val="E8B860"/>
+          </a:solidFill>
           <a:ln>
             <a:noFill/>
           </a:ln>
@@ -12961,7 +12768,7 @@
         <p:spPr>
           <a:xfrm>
             <a:off x="0" y="6812280"/>
-            <a:ext cx="12191695" cy="45720"/>
+            <a:ext cx="12191695" cy="41148"/>
           </a:xfrm>
           <a:prstGeom prst="rect">
             <a:avLst/>
@@ -13005,22 +12812,14 @@
         <p:spPr>
           <a:xfrm>
             <a:off x="0" y="6812280"/>
-            <a:ext cx="6564758" cy="45720"/>
-          </a:xfrm>
-          <a:prstGeom prst="rect">
-            <a:avLst/>
-          </a:prstGeom>
-          <a:gradFill>
-            <a:gsLst>
-              <a:gs pos="0">
-                <a:srgbClr val="F6BE4C"/>
-              </a:gs>
-              <a:gs pos="100000">
-                <a:srgbClr val="43D5AE"/>
-              </a:gs>
-            </a:gsLst>
-            <a:lin ang="0" scaled="1"/>
-          </a:gradFill>
+            <a:ext cx="6564758" cy="41148"/>
+          </a:xfrm>
+          <a:prstGeom prst="rect">
+            <a:avLst/>
+          </a:prstGeom>
+          <a:solidFill>
+            <a:srgbClr val="E8B860"/>
+          </a:solidFill>
           <a:ln>
             <a:noFill/>
           </a:ln>
@@ -13119,8 +12918,8 @@
         </p:nvSpPr>
         <p:spPr>
           <a:xfrm>
-            <a:off x="-2103120" y="2194560"/>
-            <a:ext cx="6949440" cy="6949440"/>
+            <a:off x="-2286000" y="2377440"/>
+            <a:ext cx="6766560" cy="6766560"/>
           </a:xfrm>
           <a:prstGeom prst="ellipse">
             <a:avLst/>
@@ -13128,8 +12927,8 @@
           <a:gradFill>
             <a:gsLst>
               <a:gs pos="0">
-                <a:srgbClr val="43D5AE">
-                  <a:alpha val="26000"/>
+                <a:srgbClr val="1A263C">
+                  <a:alpha val="60000"/>
                 </a:srgbClr>
               </a:gs>
               <a:gs pos="100000">
@@ -13217,11 +13016,11 @@
             <a:avLst/>
           </a:prstGeom>
           <a:solidFill>
-            <a:srgbClr val="7C5CFF"/>
+            <a:srgbClr val="E8B860"/>
           </a:solidFill>
           <a:ln>
             <a:solidFill>
-              <a:srgbClr val="7C5CFF"/>
+              <a:srgbClr val="E8B860"/>
             </a:solidFill>
           </a:ln>
         </p:spPr>
@@ -13277,7 +13076,7 @@
             <a:r>
               <a:rPr sz="1400" b="1" lang="en-US" noProof="1" dirty="0" err="0">
                 <a:solidFill>
-                  <a:srgbClr val="7C5CFF"/>
+                  <a:srgbClr val="E8B860"/>
                 </a:solidFill>
                 <a:latin typeface="Noto Sans"/>
               </a:rPr>
@@ -13373,25 +13172,14 @@
         <p:spPr>
           <a:xfrm>
             <a:off x="0" y="0"/>
-            <a:ext cx="12191695" cy="77724"/>
-          </a:xfrm>
-          <a:prstGeom prst="rect">
-            <a:avLst/>
-          </a:prstGeom>
-          <a:gradFill>
-            <a:gsLst>
-              <a:gs pos="0">
-                <a:srgbClr val="F6BE4C"/>
-              </a:gs>
-              <a:gs pos="50000">
-                <a:srgbClr val="43D5AE"/>
-              </a:gs>
-              <a:gs pos="100000">
-                <a:srgbClr val="7C5CFF"/>
-              </a:gs>
-            </a:gsLst>
-            <a:lin ang="0" scaled="1"/>
-          </a:gradFill>
+            <a:ext cx="12191695" cy="45720"/>
+          </a:xfrm>
+          <a:prstGeom prst="rect">
+            <a:avLst/>
+          </a:prstGeom>
+          <a:solidFill>
+            <a:srgbClr val="E8B860"/>
+          </a:solidFill>
           <a:ln>
             <a:noFill/>
           </a:ln>
@@ -13428,7 +13216,7 @@
         <p:spPr>
           <a:xfrm>
             <a:off x="0" y="6812280"/>
-            <a:ext cx="12191695" cy="45720"/>
+            <a:ext cx="12191695" cy="41148"/>
           </a:xfrm>
           <a:prstGeom prst="rect">
             <a:avLst/>
@@ -13472,22 +13260,14 @@
         <p:spPr>
           <a:xfrm>
             <a:off x="0" y="6812280"/>
-            <a:ext cx="7502581" cy="45720"/>
-          </a:xfrm>
-          <a:prstGeom prst="rect">
-            <a:avLst/>
-          </a:prstGeom>
-          <a:gradFill>
-            <a:gsLst>
-              <a:gs pos="0">
-                <a:srgbClr val="F6BE4C"/>
-              </a:gs>
-              <a:gs pos="100000">
-                <a:srgbClr val="43D5AE"/>
-              </a:gs>
-            </a:gsLst>
-            <a:lin ang="0" scaled="1"/>
-          </a:gradFill>
+            <a:ext cx="7502581" cy="41148"/>
+          </a:xfrm>
+          <a:prstGeom prst="rect">
+            <a:avLst/>
+          </a:prstGeom>
+          <a:solidFill>
+            <a:srgbClr val="E8B860"/>
+          </a:solidFill>
           <a:ln>
             <a:noFill/>
           </a:ln>
@@ -13586,8 +13366,8 @@
         </p:nvSpPr>
         <p:spPr>
           <a:xfrm>
-            <a:off x="7955279" y="2194560"/>
-            <a:ext cx="6949440" cy="6949440"/>
+            <a:off x="8138160" y="2377440"/>
+            <a:ext cx="6766560" cy="6766560"/>
           </a:xfrm>
           <a:prstGeom prst="ellipse">
             <a:avLst/>
@@ -13595,8 +13375,8 @@
           <a:gradFill>
             <a:gsLst>
               <a:gs pos="0">
-                <a:srgbClr val="FF7744">
-                  <a:alpha val="26000"/>
+                <a:srgbClr val="1A263C">
+                  <a:alpha val="60000"/>
                 </a:srgbClr>
               </a:gs>
               <a:gs pos="100000">
@@ -13664,7 +13444,7 @@
             <a:r>
               <a:rPr sz="1000" b="1" lang="en-US" noProof="1" dirty="0" err="0">
                 <a:solidFill>
-                  <a:srgbClr val="F6BE4C"/>
+                  <a:srgbClr val="E8B860"/>
                 </a:solidFill>
                 <a:latin typeface="Noto Sans"/>
               </a:rPr>
@@ -13770,7 +13550,7 @@
           </a:solidFill>
           <a:ln>
             <a:solidFill>
-              <a:srgbClr val="FF7744"/>
+              <a:srgbClr val="E8B860"/>
             </a:solidFill>
           </a:ln>
         </p:spPr>
@@ -13811,11 +13591,11 @@
             <a:avLst/>
           </a:prstGeom>
           <a:solidFill>
-            <a:srgbClr val="FF7744"/>
+            <a:srgbClr val="E8B860"/>
           </a:solidFill>
           <a:ln>
             <a:solidFill>
-              <a:srgbClr val="FF7744"/>
+              <a:srgbClr val="E8B860"/>
             </a:solidFill>
           </a:ln>
         </p:spPr>
@@ -13871,7 +13651,7 @@
             <a:r>
               <a:rPr sz="1600" b="1" lang="en-US" noProof="1" dirty="0" err="0">
                 <a:solidFill>
-                  <a:srgbClr val="FF7744"/>
+                  <a:srgbClr val="E8B860"/>
                 </a:solidFill>
                 <a:latin typeface="Noto Sans"/>
               </a:rPr>
@@ -13950,7 +13730,7 @@
             <a:r>
               <a:rPr sz="2200" b="1" lang="en-US" noProof="1" dirty="0" err="0">
                 <a:solidFill>
-                  <a:srgbClr val="F6BE4C"/>
+                  <a:srgbClr val="E8B860"/>
                 </a:solidFill>
                 <a:latin typeface="Noto Sans"/>
               </a:rPr>
@@ -13978,7 +13758,7 @@
           </a:solidFill>
           <a:ln>
             <a:solidFill>
-              <a:srgbClr val="F6BE4C"/>
+              <a:srgbClr val="E8B860"/>
             </a:solidFill>
           </a:ln>
         </p:spPr>
@@ -14019,11 +13799,11 @@
             <a:avLst/>
           </a:prstGeom>
           <a:solidFill>
-            <a:srgbClr val="F6BE4C"/>
+            <a:srgbClr val="E8B860"/>
           </a:solidFill>
           <a:ln>
             <a:solidFill>
-              <a:srgbClr val="F6BE4C"/>
+              <a:srgbClr val="E8B860"/>
             </a:solidFill>
           </a:ln>
         </p:spPr>
@@ -14079,7 +13859,7 @@
             <a:r>
               <a:rPr sz="1600" b="1" lang="en-US" noProof="1" dirty="0" err="0">
                 <a:solidFill>
-                  <a:srgbClr val="F6BE4C"/>
+                  <a:srgbClr val="E8B860"/>
                 </a:solidFill>
                 <a:latin typeface="Noto Sans"/>
               </a:rPr>
@@ -14158,7 +13938,7 @@
             <a:r>
               <a:rPr sz="2200" b="1" lang="en-US" noProof="1" dirty="0" err="0">
                 <a:solidFill>
-                  <a:srgbClr val="F6BE4C"/>
+                  <a:srgbClr val="E8B860"/>
                 </a:solidFill>
                 <a:latin typeface="Noto Sans"/>
               </a:rPr>
@@ -14186,7 +13966,7 @@
           </a:solidFill>
           <a:ln>
             <a:solidFill>
-              <a:srgbClr val="43D5AE"/>
+              <a:srgbClr val="788CAA"/>
             </a:solidFill>
           </a:ln>
         </p:spPr>
@@ -14227,11 +14007,11 @@
             <a:avLst/>
           </a:prstGeom>
           <a:solidFill>
-            <a:srgbClr val="43D5AE"/>
+            <a:srgbClr val="788CAA"/>
           </a:solidFill>
           <a:ln>
             <a:solidFill>
-              <a:srgbClr val="43D5AE"/>
+              <a:srgbClr val="788CAA"/>
             </a:solidFill>
           </a:ln>
         </p:spPr>
@@ -14287,7 +14067,7 @@
             <a:r>
               <a:rPr sz="1600" b="1" lang="en-US" noProof="1" dirty="0" err="0">
                 <a:solidFill>
-                  <a:srgbClr val="43D5AE"/>
+                  <a:srgbClr val="788CAA"/>
                 </a:solidFill>
                 <a:latin typeface="Noto Sans"/>
               </a:rPr>
@@ -14366,7 +14146,7 @@
             <a:r>
               <a:rPr sz="2200" b="1" lang="en-US" noProof="1" dirty="0" err="0">
                 <a:solidFill>
-                  <a:srgbClr val="F6BE4C"/>
+                  <a:srgbClr val="E8B860"/>
                 </a:solidFill>
                 <a:latin typeface="Noto Sans"/>
               </a:rPr>
@@ -14394,7 +14174,7 @@
           </a:solidFill>
           <a:ln>
             <a:solidFill>
-              <a:srgbClr val="529BFF"/>
+              <a:srgbClr val="788CAA"/>
             </a:solidFill>
           </a:ln>
         </p:spPr>
@@ -14435,11 +14215,11 @@
             <a:avLst/>
           </a:prstGeom>
           <a:solidFill>
-            <a:srgbClr val="529BFF"/>
+            <a:srgbClr val="788CAA"/>
           </a:solidFill>
           <a:ln>
             <a:solidFill>
-              <a:srgbClr val="529BFF"/>
+              <a:srgbClr val="788CAA"/>
             </a:solidFill>
           </a:ln>
         </p:spPr>
@@ -14495,7 +14275,7 @@
             <a:r>
               <a:rPr sz="1600" b="1" lang="en-US" noProof="1" dirty="0" err="0">
                 <a:solidFill>
-                  <a:srgbClr val="529BFF"/>
+                  <a:srgbClr val="788CAA"/>
                 </a:solidFill>
                 <a:latin typeface="Noto Sans"/>
               </a:rPr>
@@ -14602,7 +14382,7 @@
           </a:solidFill>
           <a:ln>
             <a:solidFill>
-              <a:srgbClr val="43D5AE"/>
+              <a:srgbClr val="788CAA"/>
             </a:solidFill>
           </a:ln>
         </p:spPr>
@@ -14643,11 +14423,11 @@
             <a:avLst/>
           </a:prstGeom>
           <a:solidFill>
-            <a:srgbClr val="43D5AE"/>
+            <a:srgbClr val="788CAA"/>
           </a:solidFill>
           <a:ln>
             <a:solidFill>
-              <a:srgbClr val="43D5AE"/>
+              <a:srgbClr val="788CAA"/>
             </a:solidFill>
           </a:ln>
         </p:spPr>
@@ -14770,7 +14550,7 @@
           </a:solidFill>
           <a:ln>
             <a:solidFill>
-              <a:srgbClr val="FF5B66"/>
+              <a:srgbClr val="E8B860"/>
             </a:solidFill>
           </a:ln>
         </p:spPr>
@@ -14811,11 +14591,11 @@
             <a:avLst/>
           </a:prstGeom>
           <a:solidFill>
-            <a:srgbClr val="FF5B66"/>
+            <a:srgbClr val="E8B860"/>
           </a:solidFill>
           <a:ln>
             <a:solidFill>
-              <a:srgbClr val="FF5B66"/>
+              <a:srgbClr val="E8B860"/>
             </a:solidFill>
           </a:ln>
         </p:spPr>
@@ -14938,7 +14718,7 @@
           </a:solidFill>
           <a:ln>
             <a:solidFill>
-              <a:srgbClr val="F6BE4C"/>
+              <a:srgbClr val="E8B860"/>
             </a:solidFill>
           </a:ln>
         </p:spPr>
@@ -14979,11 +14759,11 @@
             <a:avLst/>
           </a:prstGeom>
           <a:solidFill>
-            <a:srgbClr val="F6BE4C"/>
+            <a:srgbClr val="E8B860"/>
           </a:solidFill>
           <a:ln>
             <a:solidFill>
-              <a:srgbClr val="F6BE4C"/>
+              <a:srgbClr val="E8B860"/>
             </a:solidFill>
           </a:ln>
         </p:spPr>
@@ -15106,7 +14886,7 @@
           </a:solidFill>
           <a:ln>
             <a:solidFill>
-              <a:srgbClr val="529BFF"/>
+              <a:srgbClr val="788CAA"/>
             </a:solidFill>
           </a:ln>
         </p:spPr>
@@ -15147,11 +14927,11 @@
             <a:avLst/>
           </a:prstGeom>
           <a:solidFill>
-            <a:srgbClr val="529BFF"/>
+            <a:srgbClr val="788CAA"/>
           </a:solidFill>
           <a:ln>
             <a:solidFill>
-              <a:srgbClr val="529BFF"/>
+              <a:srgbClr val="788CAA"/>
             </a:solidFill>
           </a:ln>
         </p:spPr>
@@ -15274,7 +15054,7 @@
           </a:solidFill>
           <a:ln>
             <a:solidFill>
-              <a:srgbClr val="FF7744"/>
+              <a:srgbClr val="E8B860"/>
             </a:solidFill>
           </a:ln>
         </p:spPr>
@@ -15315,11 +15095,11 @@
             <a:avLst/>
           </a:prstGeom>
           <a:solidFill>
-            <a:srgbClr val="FF7744"/>
+            <a:srgbClr val="E8B860"/>
           </a:solidFill>
           <a:ln>
             <a:solidFill>
-              <a:srgbClr val="FF7744"/>
+              <a:srgbClr val="E8B860"/>
             </a:solidFill>
           </a:ln>
         </p:spPr>
@@ -15594,25 +15374,14 @@
         <p:spPr>
           <a:xfrm>
             <a:off x="0" y="0"/>
-            <a:ext cx="12191695" cy="77724"/>
-          </a:xfrm>
-          <a:prstGeom prst="rect">
-            <a:avLst/>
-          </a:prstGeom>
-          <a:gradFill>
-            <a:gsLst>
-              <a:gs pos="0">
-                <a:srgbClr val="F6BE4C"/>
-              </a:gs>
-              <a:gs pos="50000">
-                <a:srgbClr val="43D5AE"/>
-              </a:gs>
-              <a:gs pos="100000">
-                <a:srgbClr val="7C5CFF"/>
-              </a:gs>
-            </a:gsLst>
-            <a:lin ang="0" scaled="1"/>
-          </a:gradFill>
+            <a:ext cx="12191695" cy="45720"/>
+          </a:xfrm>
+          <a:prstGeom prst="rect">
+            <a:avLst/>
+          </a:prstGeom>
+          <a:solidFill>
+            <a:srgbClr val="E8B860"/>
+          </a:solidFill>
           <a:ln>
             <a:noFill/>
           </a:ln>
@@ -15649,7 +15418,7 @@
         <p:spPr>
           <a:xfrm>
             <a:off x="0" y="6812280"/>
-            <a:ext cx="12191695" cy="45720"/>
+            <a:ext cx="12191695" cy="41148"/>
           </a:xfrm>
           <a:prstGeom prst="rect">
             <a:avLst/>
@@ -15693,22 +15462,14 @@
         <p:spPr>
           <a:xfrm>
             <a:off x="0" y="6812280"/>
-            <a:ext cx="8440404" cy="45720"/>
-          </a:xfrm>
-          <a:prstGeom prst="rect">
-            <a:avLst/>
-          </a:prstGeom>
-          <a:gradFill>
-            <a:gsLst>
-              <a:gs pos="0">
-                <a:srgbClr val="F6BE4C"/>
-              </a:gs>
-              <a:gs pos="100000">
-                <a:srgbClr val="43D5AE"/>
-              </a:gs>
-            </a:gsLst>
-            <a:lin ang="0" scaled="1"/>
-          </a:gradFill>
+            <a:ext cx="8440404" cy="41148"/>
+          </a:xfrm>
+          <a:prstGeom prst="rect">
+            <a:avLst/>
+          </a:prstGeom>
+          <a:solidFill>
+            <a:srgbClr val="E8B860"/>
+          </a:solidFill>
           <a:ln>
             <a:noFill/>
           </a:ln>
